--- a/present/ripwire-showcase.pptx
+++ b/present/ripwire-showcase.pptx
@@ -235,13 +235,13 @@
                     <c:v>ripwire --for</c:v>
                   </c:pt>
                   <c:pt idx="1">
-                    <c:v>codebase-memory-mcp</c:v>
+                    <c:v>repowise 0.37.0</c:v>
                   </c:pt>
                   <c:pt idx="2">
-                    <c:v>graphify</c:v>
+                    <c:v>codeseek 0.1.31 (ident arm)</c:v>
                   </c:pt>
                   <c:pt idx="3">
-                    <c:v>Aider repo-map</c:v>
+                    <c:v>codeseek 0.1.31 (raw fallback)</c:v>
                   </c:pt>
                 </c:lvl>
               </c:multiLvlStrCache>
@@ -254,16 +254,16 @@
                 <c:formatCode>General</c:formatCode>
                 <c:ptCount val="4"/>
                 <c:pt idx="0">
-                  <c:v>36.7</c:v>
+                  <c:v>58.3</c:v>
                 </c:pt>
                 <c:pt idx="1">
-                  <c:v>26.7</c:v>
+                  <c:v>33.3</c:v>
                 </c:pt>
                 <c:pt idx="2">
-                  <c:v>21.7</c:v>
+                  <c:v>15</c:v>
                 </c:pt>
                 <c:pt idx="3">
-                  <c:v>13.3</c:v>
+                  <c:v>0</c:v>
                 </c:pt>
               </c:numCache>
             </c:numRef>
@@ -344,7 +344,7 @@
         <c:axId val="2094734552"/>
         <c:scaling>
           <c:orientation val="minMax"/>
-          <c:max val="40"/>
+          <c:max val="70"/>
           <c:min val="0"/>
         </c:scaling>
         <c:delete val="0"/>
@@ -10862,7 +10862,7 @@
                 <a:ea typeface="Arial" pitchFamily="34" charset="-122"/>
                 <a:cs typeface="Arial" pitchFamily="34" charset="-120"/>
               </a:rPr>
-              <a:t>0.074 s</a:t>
+              <a:t>0.114 s</a:t>
             </a:r>
             <a:endParaRPr lang="en-US" sz="4400" dirty="0"/>
           </a:p>
@@ -10901,7 +10901,7 @@
                 <a:ea typeface="Arial" pitchFamily="34" charset="-122"/>
                 <a:cs typeface="Arial" pitchFamily="34" charset="-120"/>
               </a:rPr>
-              <a:t>median answer, warm index — head-to-head, N = 60</a:t>
+              <a:t>median answer, warm index — latest head-to-head round, N = 60</a:t>
             </a:r>
             <a:endParaRPr lang="en-US" sz="1250" dirty="0"/>
           </a:p>
@@ -11084,7 +11084,7 @@
                 <a:ea typeface="Courier New" pitchFamily="34" charset="-122"/>
                 <a:cs typeface="Courier New" pitchFamily="34" charset="-120"/>
               </a:rPr>
-              <a:t>bench/headtohead/REPORT.md · bench/locbench/ — every figure on this deck names its instrument</a:t>
+              <a:t>bench/headtohead/r2-2026-08-03/ · bench/locbench/ — every figure on this deck names its instrument</a:t>
             </a:r>
             <a:endParaRPr lang="en-US" sz="1050" dirty="0"/>
           </a:p>
@@ -14824,7 +14824,7 @@
                 <a:ea typeface="Arial" pitchFamily="34" charset="-122"/>
                 <a:cs typeface="Arial" pitchFamily="34" charset="-120"/>
               </a:rPr>
-              <a:t>Head-to-head: strict localization, four tools</a:t>
+              <a:t>Head-to-head: strict localization, latest round</a:t>
             </a:r>
             <a:endParaRPr lang="en-US" sz="3400" dirty="0"/>
           </a:p>
@@ -14838,7 +14838,7 @@
         </p:nvGraphicFramePr>
         <p:xfrm>
           <a:off x="566928" y="1783080"/>
-          <a:ext cx="6675120" cy="3931920"/>
+          <a:ext cx="6675120" cy="3566160"/>
         </p:xfrm>
         <a:graphic xmlns:a="http://schemas.openxmlformats.org/drawingml/2006/main">
           <a:graphicData uri="http://schemas.openxmlformats.org/drawingml/2006/chart">
@@ -14848,18 +14848,57 @@
       </p:graphicFrame>
       <p:sp>
         <p:nvSpPr>
-          <p:cNvPr id="5" name="Shape 2"/>
+          <p:cNvPr id="5" name="Text 2"/>
+          <p:cNvSpPr/>
+          <p:nvPr/>
+        </p:nvSpPr>
+        <p:spPr>
+          <a:xfrm>
+            <a:off x="566928" y="5440680"/>
+            <a:ext cx="6675120" cy="777240"/>
+          </a:xfrm>
+          <a:prstGeom prst="rect">
+            <a:avLst/>
+          </a:prstGeom>
+          <a:noFill/>
+          <a:ln/>
+        </p:spPr>
+        <p:txBody>
+          <a:bodyPr wrap="square" lIns="0" tIns="0" rIns="0" bIns="0" rtlCol="0" anchor="ctr"/>
+          <a:lstStyle/>
+          <a:p>
+            <a:pPr indent="0" marL="0">
+              <a:buNone/>
+            </a:pPr>
+            <a:r>
+              <a:rPr lang="en-US" sz="1050" dirty="0">
+                <a:solidFill>
+                  <a:srgbClr val="8B95A5"/>
+                </a:solidFill>
+                <a:latin typeface="Arial" pitchFamily="34" charset="0"/>
+                <a:ea typeface="Arial" pitchFamily="34" charset="-122"/>
+                <a:cs typeface="Arial" pitchFamily="34" charset="-120"/>
+              </a:rPr>
+              <a:t>codeseek's keyless raw-text arm scored 0.0% (0 results on 60/60) — a query-protocol boundary, not its embedder mode. Vexp and CodeIndexer were excluded by free-tier caps, not beaten; the report records the exact limits.</a:t>
+            </a:r>
+            <a:endParaRPr lang="en-US" sz="1050" dirty="0"/>
+          </a:p>
+        </p:txBody>
+      </p:sp>
+      <p:sp>
+        <p:nvSpPr>
+          <p:cNvPr id="6" name="Shape 3"/>
           <p:cNvSpPr/>
           <p:nvPr/>
         </p:nvSpPr>
         <p:spPr>
           <a:xfrm>
             <a:off x="7498080" y="1783080"/>
-            <a:ext cx="4023360" cy="1783080"/>
+            <a:ext cx="4023360" cy="1554480"/>
           </a:xfrm>
           <a:prstGeom prst="roundRect">
             <a:avLst>
-              <a:gd name="adj" fmla="val 4615"/>
+              <a:gd name="adj" fmla="val 5294"/>
             </a:avLst>
           </a:prstGeom>
           <a:solidFill>
@@ -14875,13 +14914,13 @@
       </p:sp>
       <p:sp>
         <p:nvSpPr>
-          <p:cNvPr id="6" name="Text 3"/>
-          <p:cNvSpPr/>
-          <p:nvPr/>
-        </p:nvSpPr>
-        <p:spPr>
-          <a:xfrm>
-            <a:off x="7589520" y="1965960"/>
+          <p:cNvPr id="7" name="Text 4"/>
+          <p:cNvSpPr/>
+          <p:nvPr/>
+        </p:nvSpPr>
+        <p:spPr>
+          <a:xfrm>
+            <a:off x="7589520" y="1920240"/>
             <a:ext cx="3840480" cy="868680"/>
           </a:xfrm>
           <a:prstGeom prst="rect">
@@ -14906,7 +14945,7 @@
                 <a:ea typeface="Arial" pitchFamily="34" charset="-122"/>
                 <a:cs typeface="Arial" pitchFamily="34" charset="-120"/>
               </a:rPr>
-              <a:t>36.7%</a:t>
+              <a:t>58.3%</a:t>
             </a:r>
             <a:endParaRPr lang="en-US" sz="4400" dirty="0"/>
           </a:p>
@@ -14914,13 +14953,13 @@
       </p:sp>
       <p:sp>
         <p:nvSpPr>
-          <p:cNvPr id="7" name="Text 4"/>
-          <p:cNvSpPr/>
-          <p:nvPr/>
-        </p:nvSpPr>
-        <p:spPr>
-          <a:xfrm>
-            <a:off x="7589520" y="2779776"/>
+          <p:cNvPr id="8" name="Text 5"/>
+          <p:cNvSpPr/>
+          <p:nvPr/>
+        </p:nvSpPr>
+        <p:spPr>
+          <a:xfrm>
+            <a:off x="7589520" y="2734056"/>
             <a:ext cx="3840480" cy="685800"/>
           </a:xfrm>
           <a:prstGeom prst="rect">
@@ -14937,7 +14976,7 @@
               <a:buNone/>
             </a:pPr>
             <a:r>
-              <a:rPr lang="en-US" sz="1150" dirty="0">
+              <a:rPr lang="en-US" sz="1100" dirty="0">
                 <a:solidFill>
                   <a:srgbClr val="8B95A5"/>
                 </a:solidFill>
@@ -14947,14 +14986,14 @@
               </a:rPr>
               <a:t>strict file@10 — every gold file in the top ten</a:t>
             </a:r>
-            <a:endParaRPr lang="en-US" sz="1150" dirty="0"/>
+            <a:endParaRPr lang="en-US" sz="1100" dirty="0"/>
           </a:p>
           <a:p>
             <a:pPr algn="ctr" indent="0" marL="0">
               <a:buNone/>
             </a:pPr>
             <a:r>
-              <a:rPr lang="en-US" sz="1150" dirty="0">
+              <a:rPr lang="en-US" sz="1100" dirty="0">
                 <a:solidFill>
                   <a:srgbClr val="8B95A5"/>
                 </a:solidFill>
@@ -14962,26 +15001,26 @@
                 <a:ea typeface="Arial" pitchFamily="34" charset="-122"/>
                 <a:cs typeface="Arial" pitchFamily="34" charset="-120"/>
               </a:rPr>
-              <a:t>N = 60 paired, zero exclusions</a:t>
-            </a:r>
-            <a:endParaRPr lang="en-US" sz="1150" dirty="0"/>
-          </a:p>
-        </p:txBody>
-      </p:sp>
-      <p:sp>
-        <p:nvSpPr>
-          <p:cNvPr id="8" name="Shape 5"/>
-          <p:cNvSpPr/>
-          <p:nvPr/>
-        </p:nvSpPr>
-        <p:spPr>
-          <a:xfrm>
-            <a:off x="7498080" y="3749040"/>
-            <a:ext cx="4023360" cy="1965960"/>
+              <a:t>N = 60 paired, zero exclusions · 17–2 paired vs repowise</a:t>
+            </a:r>
+            <a:endParaRPr lang="en-US" sz="1100" dirty="0"/>
+          </a:p>
+        </p:txBody>
+      </p:sp>
+      <p:sp>
+        <p:nvSpPr>
+          <p:cNvPr id="9" name="Shape 6"/>
+          <p:cNvSpPr/>
+          <p:nvPr/>
+        </p:nvSpPr>
+        <p:spPr>
+          <a:xfrm>
+            <a:off x="7498080" y="3474720"/>
+            <a:ext cx="4023360" cy="1371600"/>
           </a:xfrm>
           <a:prstGeom prst="roundRect">
             <a:avLst>
-              <a:gd name="adj" fmla="val 4186"/>
+              <a:gd name="adj" fmla="val 6000"/>
             </a:avLst>
           </a:prstGeom>
           <a:solidFill>
@@ -14997,30 +15036,30 @@
       </p:sp>
       <p:sp>
         <p:nvSpPr>
-          <p:cNvPr id="9" name="Text 6"/>
-          <p:cNvSpPr/>
-          <p:nvPr/>
-        </p:nvSpPr>
-        <p:spPr>
-          <a:xfrm>
-            <a:off x="7680960" y="3886200"/>
-            <a:ext cx="3657600" cy="292608"/>
-          </a:xfrm>
-          <a:prstGeom prst="rect">
-            <a:avLst/>
-          </a:prstGeom>
-          <a:noFill/>
-          <a:ln/>
-        </p:spPr>
-        <p:txBody>
-          <a:bodyPr wrap="square" lIns="0" tIns="0" rIns="0" bIns="0" rtlCol="0" anchor="ctr"/>
-          <a:lstStyle/>
-          <a:p>
-            <a:pPr indent="0" marL="0">
-              <a:buNone/>
-            </a:pPr>
-            <a:r>
-              <a:rPr lang="en-US" sz="1250" b="1" dirty="0">
+          <p:cNvPr id="10" name="Text 7"/>
+          <p:cNvSpPr/>
+          <p:nvPr/>
+        </p:nvSpPr>
+        <p:spPr>
+          <a:xfrm>
+            <a:off x="7680960" y="3593592"/>
+            <a:ext cx="3703320" cy="1188720"/>
+          </a:xfrm>
+          <a:prstGeom prst="rect">
+            <a:avLst/>
+          </a:prstGeom>
+          <a:noFill/>
+          <a:ln/>
+        </p:spPr>
+        <p:txBody>
+          <a:bodyPr wrap="square" lIns="0" tIns="0" rIns="0" bIns="0" rtlCol="0" anchor="ctr"/>
+          <a:lstStyle/>
+          <a:p>
+            <a:pPr indent="0" marL="0">
+              <a:buNone/>
+            </a:pPr>
+            <a:r>
+              <a:rPr lang="en-US" sz="1050" b="1" dirty="0">
                 <a:solidFill>
                   <a:srgbClr val="E6EDF3"/>
                 </a:solidFill>
@@ -15028,38 +15067,13 @@
                 <a:ea typeface="Arial" pitchFamily="34" charset="-122"/>
                 <a:cs typeface="Arial" pitchFamily="34" charset="-120"/>
               </a:rPr>
-              <a:t>Median wall clock</a:t>
-            </a:r>
-            <a:endParaRPr lang="en-US" sz="1250" dirty="0"/>
-          </a:p>
-        </p:txBody>
-      </p:sp>
-      <p:sp>
-        <p:nvSpPr>
-          <p:cNvPr id="10" name="Text 7"/>
-          <p:cNvSpPr/>
-          <p:nvPr/>
-        </p:nvSpPr>
-        <p:spPr>
-          <a:xfrm>
-            <a:off x="7680960" y="4206240"/>
-            <a:ext cx="3703320" cy="1417320"/>
-          </a:xfrm>
-          <a:prstGeom prst="rect">
-            <a:avLst/>
-          </a:prstGeom>
-          <a:noFill/>
-          <a:ln/>
-        </p:spPr>
-        <p:txBody>
-          <a:bodyPr wrap="square" lIns="0" tIns="0" rIns="0" bIns="0" rtlCol="0" anchor="ctr"/>
-          <a:lstStyle/>
-          <a:p>
-            <a:pPr indent="0" marL="0">
-              <a:buNone/>
-            </a:pPr>
-            <a:r>
-              <a:rPr lang="en-US" sz="1150" dirty="0">
+              <a:t>Median wall (query, warm): </a:t>
+            </a:r>
+            <a:pPr indent="0" marL="0">
+              <a:buNone/>
+            </a:pPr>
+            <a:r>
+              <a:rPr lang="en-US" sz="1050" dirty="0">
                 <a:solidFill>
                   <a:srgbClr val="8B95A5"/>
                 </a:solidFill>
@@ -15067,22 +15081,14 @@
                 <a:ea typeface="Arial" pitchFamily="34" charset="-122"/>
                 <a:cs typeface="Arial" pitchFamily="34" charset="-120"/>
               </a:rPr>
-              <a:t>ripwire 0.074 s · cmm 1.14 s · Aider 2.5 s · graphify 5.8 s</a:t>
-            </a:r>
-            <a:endParaRPr lang="en-US" sz="1150" dirty="0"/>
-          </a:p>
-          <a:p>
-            <a:pPr indent="0" marL="0">
-              <a:buNone/>
-            </a:pPr>
-            <a:endParaRPr lang="en-US" sz="1150" dirty="0"/>
-          </a:p>
-          <a:p>
-            <a:pPr indent="0" marL="0">
-              <a:buNone/>
-            </a:pPr>
-            <a:r>
-              <a:rPr lang="en-US" sz="1150" dirty="0">
+              <a:t>ripwire 0.114 s · repowise 1.14 s (incl. a fresh MCP-server spawn per query).
+</a:t>
+            </a:r>
+            <a:pPr indent="0" marL="0">
+              <a:buNone/>
+            </a:pPr>
+            <a:r>
+              <a:rPr lang="en-US" sz="1050" dirty="0">
                 <a:solidFill>
                   <a:srgbClr val="8B95A5"/>
                 </a:solidFill>
@@ -15090,15 +15096,95 @@
                 <a:ea typeface="Arial" pitchFamily="34" charset="-122"/>
                 <a:cs typeface="Arial" pitchFamily="34" charset="-120"/>
               </a:rPr>
-              <a:t>≈34× vs Aider is derived from those medians — and the caveat ships with it: ripwire is warm on a pre-built index.</a:t>
-            </a:r>
-            <a:endParaRPr lang="en-US" sz="1150" dirty="0"/>
-          </a:p>
-        </p:txBody>
-      </p:sp>
-      <p:sp>
-        <p:nvSpPr>
-          <p:cNvPr id="11" name="Text 8"/>
+              <a:t>Round 1, four tools: 36.7% vs cmm 26.7 · graphify 21.7 · Aider 13.3 — each round is internally paired; rounds are not number-comparable.</a:t>
+            </a:r>
+            <a:endParaRPr lang="en-US" sz="1050" dirty="0"/>
+          </a:p>
+        </p:txBody>
+      </p:sp>
+      <p:sp>
+        <p:nvSpPr>
+          <p:cNvPr id="11" name="Shape 8"/>
+          <p:cNvSpPr/>
+          <p:nvPr/>
+        </p:nvSpPr>
+        <p:spPr>
+          <a:xfrm>
+            <a:off x="7498080" y="4983480"/>
+            <a:ext cx="4023360" cy="1051560"/>
+          </a:xfrm>
+          <a:prstGeom prst="roundRect">
+            <a:avLst>
+              <a:gd name="adj" fmla="val 7826"/>
+            </a:avLst>
+          </a:prstGeom>
+          <a:solidFill>
+            <a:srgbClr val="161D28"/>
+          </a:solidFill>
+          <a:ln w="9525">
+            <a:solidFill>
+              <a:srgbClr val="232D3D"/>
+            </a:solidFill>
+            <a:prstDash val="solid"/>
+          </a:ln>
+        </p:spPr>
+      </p:sp>
+      <p:sp>
+        <p:nvSpPr>
+          <p:cNvPr id="12" name="Text 9"/>
+          <p:cNvSpPr/>
+          <p:nvPr/>
+        </p:nvSpPr>
+        <p:spPr>
+          <a:xfrm>
+            <a:off x="7680960" y="5084064"/>
+            <a:ext cx="3703320" cy="896112"/>
+          </a:xfrm>
+          <a:prstGeom prst="rect">
+            <a:avLst/>
+          </a:prstGeom>
+          <a:noFill/>
+          <a:ln/>
+        </p:spPr>
+        <p:txBody>
+          <a:bodyPr wrap="square" lIns="0" tIns="0" rIns="0" bIns="0" rtlCol="0" anchor="ctr"/>
+          <a:lstStyle/>
+          <a:p>
+            <a:pPr indent="0" marL="0">
+              <a:buNone/>
+            </a:pPr>
+            <a:r>
+              <a:rPr lang="en-US" sz="1050" b="1" dirty="0">
+                <a:solidFill>
+                  <a:srgbClr val="E6EDF3"/>
+                </a:solidFill>
+                <a:latin typeface="Arial" pitchFamily="34" charset="0"/>
+                <a:ea typeface="Arial" pitchFamily="34" charset="-122"/>
+                <a:cs typeface="Arial" pitchFamily="34" charset="-120"/>
+              </a:rPr>
+              <a:t>Round 3, different instrument: </a:t>
+            </a:r>
+            <a:pPr indent="0" marL="0">
+              <a:buNone/>
+            </a:pPr>
+            <a:r>
+              <a:rPr lang="en-US" sz="1050" dirty="0">
+                <a:solidFill>
+                  <a:srgbClr val="8B95A5"/>
+                </a:solidFill>
+                <a:latin typeface="Arial" pitchFamily="34" charset="0"/>
+                <a:ea typeface="Arial" pitchFamily="34" charset="-122"/>
+                <a:cs typeface="Arial" pitchFamily="34" charset="-120"/>
+              </a:rPr>
+              <a:t>headroom (the compression layer) passed code through byte-identical; ripwire answered at 7.3% of the naive baseline's tokens. Its own losses ship first in that report.</a:t>
+            </a:r>
+            <a:endParaRPr lang="en-US" sz="1050" dirty="0"/>
+          </a:p>
+        </p:txBody>
+      </p:sp>
+      <p:sp>
+        <p:nvSpPr>
+          <p:cNvPr id="13" name="Text 10"/>
           <p:cNvSpPr/>
           <p:nvPr/>
         </p:nvSpPr>
@@ -15129,7 +15215,7 @@
                 <a:ea typeface="Courier New" pitchFamily="34" charset="-122"/>
                 <a:cs typeface="Courier New" pitchFamily="34" charset="-120"/>
               </a:rPr>
-              <a:t>bench/headtohead/REPORT.md — versions pinned, binary sha256 recorded, frozen LocBench slice (dataset.lock)</a:t>
+              <a:t>bench/headtohead/r2-2026-08-03/ · r3-headroom-2026-08-03/ · docs/EVALS.md §2 — versions pinned, an adversarial VERIFIER.md ships with each round</a:t>
             </a:r>
             <a:endParaRPr lang="en-US" sz="1050" dirty="0"/>
           </a:p>

--- a/present/ripwire-showcase.pptx
+++ b/present/ripwire-showcase.pptx
@@ -164,7 +164,7 @@
               <a:lstStyle/>
               <a:p>
                 <a:pPr>
-                  <a:defRPr b="0" i="0" strike="noStrike" sz="1300" u="none">
+                  <a:defRPr b="0" i="0" strike="noStrike" sz="1100" u="none">
                     <a:solidFill>
                       <a:srgbClr val="E6EDF3"/>
                     </a:solidFill>
@@ -276,7 +276,7 @@
             <a:lstStyle/>
             <a:p>
               <a:pPr>
-                <a:defRPr b="0" i="0" strike="noStrike" sz="1300" u="none">
+                <a:defRPr b="0" i="0" strike="noStrike" sz="1100" u="none">
                   <a:solidFill>
                     <a:srgbClr val="E6EDF3"/>
                   </a:solidFill>
@@ -293,7 +293,7 @@
           <c:showBubbleSize val="0"/>
           <c:showLeaderLines val="0"/>
         </c:dLbls>
-        <c:gapWidth val="60"/>
+        <c:gapWidth val="50"/>
         <c:overlap val="0"/>
         <c:axId val="2094734554"/>
         <c:axId val="2094734552"/>
@@ -324,7 +324,7 @@
           <a:lstStyle/>
           <a:p>
             <a:pPr>
-              <a:defRPr sz="1250" b="0" i="0" u="none" strike="noStrike">
+              <a:defRPr sz="1050" b="0" i="0" u="none" strike="noStrike">
                 <a:solidFill>
                   <a:srgbClr val="E6EDF3"/>
                 </a:solidFill>
@@ -378,7 +378,7 @@
           <a:lstStyle/>
           <a:p>
             <a:pPr>
-              <a:defRPr sz="1000" b="0" i="0" u="none" strike="noStrike">
+              <a:defRPr sz="900" b="0" i="0" u="none" strike="noStrike">
                 <a:solidFill>
                   <a:srgbClr val="8B95A5"/>
                 </a:solidFill>
@@ -423,6 +423,304 @@
 </file>
 
 <file path=ppt/charts/chart2.xml><?xml version="1.0" encoding="utf-8"?>
+<c:chartSpace xmlns:c="http://schemas.openxmlformats.org/drawingml/2006/chart" xmlns:a="http://schemas.openxmlformats.org/drawingml/2006/main" xmlns:r="http://schemas.openxmlformats.org/officeDocument/2006/relationships">
+  <c:date1904 val="0"/>
+  <c:roundedCorners val="1"/>
+  <c:chart>
+    <c:autoTitleDeleted val="1"/>
+    <c:plotArea>
+      <c:layout/>
+      <c:barChart>
+        <c:barDir val="bar"/>
+        <c:grouping val="clustered"/>
+        <c:varyColors val="0"/>
+        <c:ser>
+          <c:idx val="0"/>
+          <c:order val="0"/>
+          <c:tx>
+            <c:strRef>
+              <c:f>Sheet1!$B$1</c:f>
+              <c:strCache>
+                <c:ptCount val="1"/>
+                <c:pt idx="0">
+                  <c:v>strict file@10</c:v>
+                </c:pt>
+              </c:strCache>
+            </c:strRef>
+          </c:tx>
+          <c:spPr>
+            <a:solidFill>
+              <a:srgbClr val="56D6E8"/>
+            </a:solidFill>
+            <a:effectLst/>
+          </c:spPr>
+          <c:invertIfNegative val="0"/>
+          <c:dLbls>
+            <c:numFmt formatCode="0.0" sourceLinked="0"/>
+            <c:txPr>
+              <a:bodyPr/>
+              <a:lstStyle/>
+              <a:p>
+                <a:pPr>
+                  <a:defRPr b="0" i="0" strike="noStrike" sz="1100" u="none">
+                    <a:solidFill>
+                      <a:srgbClr val="E6EDF3"/>
+                    </a:solidFill>
+                    <a:latin typeface="Arial"/>
+                  </a:defRPr>
+                </a:pPr>
+              </a:p>
+            </c:txPr>
+            <c:showLegendKey val="0"/>
+            <c:showVal val="1"/>
+            <c:showCatName val="0"/>
+            <c:showSerName val="0"/>
+            <c:showPercent val="0"/>
+            <c:showBubbleSize val="0"/>
+            <c:showLeaderLines val="0"/>
+          </c:dLbls>
+          <c:dPt>
+            <c:idx val="0"/>
+            <c:invertIfNegative val="0"/>
+            <c:bubble3D val="0"/>
+            <c:spPr>
+              <a:solidFill>
+                <a:srgbClr val="56D6E8"/>
+              </a:solidFill>
+              <a:effectLst/>
+            </c:spPr>
+          </c:dPt>
+          <c:dPt>
+            <c:idx val="1"/>
+            <c:invertIfNegative val="0"/>
+            <c:bubble3D val="0"/>
+            <c:spPr>
+              <a:solidFill>
+                <a:srgbClr val="3A4353"/>
+              </a:solidFill>
+              <a:effectLst/>
+            </c:spPr>
+          </c:dPt>
+          <c:dPt>
+            <c:idx val="2"/>
+            <c:invertIfNegative val="0"/>
+            <c:bubble3D val="0"/>
+            <c:spPr>
+              <a:solidFill>
+                <a:srgbClr val="3A4353"/>
+              </a:solidFill>
+              <a:effectLst/>
+            </c:spPr>
+          </c:dPt>
+          <c:dPt>
+            <c:idx val="3"/>
+            <c:invertIfNegative val="0"/>
+            <c:bubble3D val="0"/>
+            <c:spPr>
+              <a:solidFill>
+                <a:srgbClr val="3A4353"/>
+              </a:solidFill>
+              <a:effectLst/>
+            </c:spPr>
+          </c:dPt>
+          <c:cat>
+            <c:multiLvlStrRef>
+              <c:f>Sheet1!$A$2:$A$5</c:f>
+              <c:multiLvlStrCache>
+                <c:ptCount val="4"/>
+                <c:lvl>
+                  <c:pt idx="0">
+                    <c:v>ripwire --for</c:v>
+                  </c:pt>
+                  <c:pt idx="1">
+                    <c:v>codebase-memory-mcp</c:v>
+                  </c:pt>
+                  <c:pt idx="2">
+                    <c:v>graphify</c:v>
+                  </c:pt>
+                  <c:pt idx="3">
+                    <c:v>Aider repo-map</c:v>
+                  </c:pt>
+                </c:lvl>
+              </c:multiLvlStrCache>
+            </c:multiLvlStrRef>
+          </c:cat>
+          <c:val>
+            <c:numRef>
+              <c:f>Sheet1!$B$2:$B$5</c:f>
+              <c:numCache>
+                <c:formatCode>General</c:formatCode>
+                <c:ptCount val="4"/>
+                <c:pt idx="0">
+                  <c:v>36.7</c:v>
+                </c:pt>
+                <c:pt idx="1">
+                  <c:v>26.7</c:v>
+                </c:pt>
+                <c:pt idx="2">
+                  <c:v>21.7</c:v>
+                </c:pt>
+                <c:pt idx="3">
+                  <c:v>13.3</c:v>
+                </c:pt>
+              </c:numCache>
+            </c:numRef>
+          </c:val>
+        </c:ser>
+        <c:dLbls>
+          <c:numFmt formatCode="0.0" sourceLinked="0"/>
+          <c:txPr>
+            <a:bodyPr/>
+            <a:lstStyle/>
+            <a:p>
+              <a:pPr>
+                <a:defRPr b="0" i="0" strike="noStrike" sz="1100" u="none">
+                  <a:solidFill>
+                    <a:srgbClr val="E6EDF3"/>
+                  </a:solidFill>
+                  <a:latin typeface="Arial"/>
+                </a:defRPr>
+              </a:pPr>
+            </a:p>
+          </c:txPr>
+          <c:showLegendKey val="0"/>
+          <c:showVal val="1"/>
+          <c:showCatName val="0"/>
+          <c:showSerName val="0"/>
+          <c:showPercent val="0"/>
+          <c:showBubbleSize val="0"/>
+          <c:showLeaderLines val="0"/>
+        </c:dLbls>
+        <c:gapWidth val="50"/>
+        <c:overlap val="0"/>
+        <c:axId val="2094734554"/>
+        <c:axId val="2094734552"/>
+        <c:axId val="2094734556"/>
+      </c:barChart>
+      <c:catAx>
+        <c:axId val="2094734554"/>
+        <c:scaling>
+          <c:orientation val="minMax"/>
+        </c:scaling>
+        <c:delete val="0"/>
+        <c:axPos val="l"/>
+        <c:numFmt formatCode="General" sourceLinked="1"/>
+        <c:majorTickMark val="out"/>
+        <c:minorTickMark val="none"/>
+        <c:tickLblPos val="nextTo"/>
+        <c:spPr>
+          <a:ln w="12700" cap="flat">
+            <a:solidFill>
+              <a:srgbClr val="888888"/>
+            </a:solidFill>
+            <a:prstDash val="solid"/>
+            <a:round/>
+          </a:ln>
+        </c:spPr>
+        <c:txPr>
+          <a:bodyPr/>
+          <a:lstStyle/>
+          <a:p>
+            <a:pPr>
+              <a:defRPr sz="1050" b="0" i="0" u="none" strike="noStrike">
+                <a:solidFill>
+                  <a:srgbClr val="E6EDF3"/>
+                </a:solidFill>
+                <a:latin typeface="Arial"/>
+              </a:defRPr>
+            </a:pPr>
+            <a:endParaRPr lang="en-US"/>
+          </a:p>
+        </c:txPr>
+        <c:crossAx val="2094734552"/>
+        <c:crosses val="autoZero"/>
+        <c:auto val="1"/>
+        <c:lblAlgn val="ctr"/>
+        <c:noMultiLvlLbl val="1"/>
+      </c:catAx>
+      <c:valAx>
+        <c:axId val="2094734552"/>
+        <c:scaling>
+          <c:orientation val="minMax"/>
+          <c:max val="45"/>
+          <c:min val="0"/>
+        </c:scaling>
+        <c:delete val="0"/>
+        <c:axPos val="b"/>
+        <c:majorGridlines>
+          <c:spPr>
+            <a:ln w="6350" cap="flat">
+              <a:solidFill>
+                <a:srgbClr val="232D3D"/>
+              </a:solidFill>
+              <a:prstDash val="solid"/>
+              <a:round/>
+            </a:ln>
+          </c:spPr>
+        </c:majorGridlines>
+        <c:numFmt formatCode="General" sourceLinked="0"/>
+        <c:majorTickMark val="out"/>
+        <c:minorTickMark val="none"/>
+        <c:tickLblPos val="low"/>
+        <c:spPr>
+          <a:ln w="12700" cap="flat">
+            <a:solidFill>
+              <a:srgbClr val="888888"/>
+            </a:solidFill>
+            <a:prstDash val="solid"/>
+            <a:round/>
+          </a:ln>
+        </c:spPr>
+        <c:txPr>
+          <a:bodyPr/>
+          <a:lstStyle/>
+          <a:p>
+            <a:pPr>
+              <a:defRPr sz="900" b="0" i="0" u="none" strike="noStrike">
+                <a:solidFill>
+                  <a:srgbClr val="8B95A5"/>
+                </a:solidFill>
+                <a:latin typeface="Arial"/>
+              </a:defRPr>
+            </a:pPr>
+            <a:endParaRPr lang="en-US"/>
+          </a:p>
+        </c:txPr>
+        <c:crossAx val="2094734554"/>
+        <c:crosses val="autoZero"/>
+        <c:crossBetween val="between"/>
+      </c:valAx>
+      <c:spPr>
+        <a:solidFill>
+          <a:srgbClr val="0D1117"/>
+        </a:solidFill>
+        <a:ln>
+          <a:noFill/>
+        </a:ln>
+        <a:effectLst/>
+      </c:spPr>
+    </c:plotArea>
+    <c:plotVisOnly val="1"/>
+    <c:dispBlanksAs val="span"/>
+  </c:chart>
+  <c:spPr>
+    <a:solidFill>
+      <a:srgbClr val="0D1117"/>
+    </a:solidFill>
+    <a:ln w="12700" cap="flat">
+      <a:solidFill>
+        <a:srgbClr val="0D1117"/>
+      </a:solidFill>
+    </a:ln>
+    <a:effectLst/>
+  </c:spPr>
+  <c:externalData r:id="rId1">
+    <c:autoUpdate val="0"/>
+  </c:externalData>
+</c:chartSpace>
+</file>
+
+<file path=ppt/charts/chart3.xml><?xml version="1.0" encoding="utf-8"?>
 <c:chartSpace xmlns:c="http://schemas.openxmlformats.org/drawingml/2006/chart" xmlns:a="http://schemas.openxmlformats.org/drawingml/2006/main" xmlns:r="http://schemas.openxmlformats.org/officeDocument/2006/relationships">
   <c:date1904 val="0"/>
   <c:roundedCorners val="1"/>
@@ -686,7 +984,7 @@
 </c:chartSpace>
 </file>
 
-<file path=ppt/charts/chart3.xml><?xml version="1.0" encoding="utf-8"?>
+<file path=ppt/charts/chart4.xml><?xml version="1.0" encoding="utf-8"?>
 <c:chartSpace xmlns:c="http://schemas.openxmlformats.org/drawingml/2006/chart" xmlns:a="http://schemas.openxmlformats.org/drawingml/2006/main" xmlns:r="http://schemas.openxmlformats.org/officeDocument/2006/relationships">
   <c:date1904 val="0"/>
   <c:roundedCorners val="1"/>
@@ -1001,7 +1299,7 @@
 </c:chartSpace>
 </file>
 
-<file path=ppt/charts/chart4.xml><?xml version="1.0" encoding="utf-8"?>
+<file path=ppt/charts/chart5.xml><?xml version="1.0" encoding="utf-8"?>
 <c:chartSpace xmlns:c="http://schemas.openxmlformats.org/drawingml/2006/chart" xmlns:a="http://schemas.openxmlformats.org/drawingml/2006/main" xmlns:r="http://schemas.openxmlformats.org/officeDocument/2006/relationships">
   <c:date1904 val="0"/>
   <c:roundedCorners val="1"/>
@@ -14824,21 +15122,60 @@
                 <a:ea typeface="Arial" pitchFamily="34" charset="-122"/>
                 <a:cs typeface="Arial" pitchFamily="34" charset="-120"/>
               </a:rPr>
-              <a:t>Head-to-head: strict localization, latest round</a:t>
+              <a:t>Head-to-head: every round, every tool</a:t>
             </a:r>
             <a:endParaRPr lang="en-US" sz="3400" dirty="0"/>
+          </a:p>
+        </p:txBody>
+      </p:sp>
+      <p:sp>
+        <p:nvSpPr>
+          <p:cNvPr id="4" name="Text 2"/>
+          <p:cNvSpPr/>
+          <p:nvPr/>
+        </p:nvSpPr>
+        <p:spPr>
+          <a:xfrm>
+            <a:off x="566928" y="1664208"/>
+            <a:ext cx="6675120" cy="256032"/>
+          </a:xfrm>
+          <a:prstGeom prst="rect">
+            <a:avLst/>
+          </a:prstGeom>
+          <a:noFill/>
+          <a:ln/>
+        </p:spPr>
+        <p:txBody>
+          <a:bodyPr wrap="square" lIns="0" tIns="0" rIns="0" bIns="0" rtlCol="0" anchor="ctr"/>
+          <a:lstStyle/>
+          <a:p>
+            <a:pPr indent="0" marL="0">
+              <a:buNone/>
+            </a:pPr>
+            <a:r>
+              <a:rPr lang="en-US" sz="1150" b="1" dirty="0">
+                <a:solidFill>
+                  <a:srgbClr val="E6EDF3"/>
+                </a:solidFill>
+                <a:latin typeface="Arial" pitchFamily="34" charset="0"/>
+                <a:ea typeface="Arial" pitchFamily="34" charset="-122"/>
+                <a:cs typeface="Arial" pitchFamily="34" charset="-120"/>
+              </a:rPr>
+              <a:t>Round 2 (2026-08-03) — strict file@10, N = 60</a:t>
+            </a:r>
+            <a:endParaRPr lang="en-US" sz="1150" dirty="0"/>
           </a:p>
         </p:txBody>
       </p:sp>
       <p:graphicFrame>
         <p:nvGraphicFramePr>
-          <p:cNvPr id="4" name="Chart 0" descr=""/>
+          <p:cNvPr id="5" name="Chart 0" descr=""/>
           <p:cNvGraphicFramePr/>
           <p:nvPr/>
         </p:nvGraphicFramePr>
         <p:xfrm>
-          <a:off x="566928" y="1783080"/>
-          <a:ext cx="6675120" cy="3566160"/>
+          <a:off x="566928" y="1938528"/>
+          <a:ext cx="6675120" cy="2057400"/>
         </p:xfrm>
         <a:graphic xmlns:a="http://schemas.openxmlformats.org/drawingml/2006/main">
           <a:graphicData uri="http://schemas.openxmlformats.org/drawingml/2006/chart">
@@ -14848,46 +15185,62 @@
       </p:graphicFrame>
       <p:sp>
         <p:nvSpPr>
-          <p:cNvPr id="5" name="Text 2"/>
-          <p:cNvSpPr/>
-          <p:nvPr/>
-        </p:nvSpPr>
-        <p:spPr>
-          <a:xfrm>
-            <a:off x="566928" y="5440680"/>
-            <a:ext cx="6675120" cy="777240"/>
-          </a:xfrm>
-          <a:prstGeom prst="rect">
-            <a:avLst/>
-          </a:prstGeom>
-          <a:noFill/>
-          <a:ln/>
-        </p:spPr>
-        <p:txBody>
-          <a:bodyPr wrap="square" lIns="0" tIns="0" rIns="0" bIns="0" rtlCol="0" anchor="ctr"/>
-          <a:lstStyle/>
-          <a:p>
-            <a:pPr indent="0" marL="0">
-              <a:buNone/>
-            </a:pPr>
-            <a:r>
-              <a:rPr lang="en-US" sz="1050" dirty="0">
-                <a:solidFill>
-                  <a:srgbClr val="8B95A5"/>
-                </a:solidFill>
-                <a:latin typeface="Arial" pitchFamily="34" charset="0"/>
-                <a:ea typeface="Arial" pitchFamily="34" charset="-122"/>
-                <a:cs typeface="Arial" pitchFamily="34" charset="-120"/>
-              </a:rPr>
-              <a:t>codeseek's keyless raw-text arm scored 0.0% (0 results on 60/60) — a query-protocol boundary, not its embedder mode. Vexp and CodeIndexer were excluded by free-tier caps, not beaten; the report records the exact limits.</a:t>
-            </a:r>
-            <a:endParaRPr lang="en-US" sz="1050" dirty="0"/>
-          </a:p>
-        </p:txBody>
-      </p:sp>
-      <p:sp>
-        <p:nvSpPr>
-          <p:cNvPr id="6" name="Shape 3"/>
+          <p:cNvPr id="6" name="Text 3"/>
+          <p:cNvSpPr/>
+          <p:nvPr/>
+        </p:nvSpPr>
+        <p:spPr>
+          <a:xfrm>
+            <a:off x="566928" y="4114800"/>
+            <a:ext cx="6675120" cy="256032"/>
+          </a:xfrm>
+          <a:prstGeom prst="rect">
+            <a:avLst/>
+          </a:prstGeom>
+          <a:noFill/>
+          <a:ln/>
+        </p:spPr>
+        <p:txBody>
+          <a:bodyPr wrap="square" lIns="0" tIns="0" rIns="0" bIns="0" rtlCol="0" anchor="ctr"/>
+          <a:lstStyle/>
+          <a:p>
+            <a:pPr indent="0" marL="0">
+              <a:buNone/>
+            </a:pPr>
+            <a:r>
+              <a:rPr lang="en-US" sz="1150" b="1" dirty="0">
+                <a:solidFill>
+                  <a:srgbClr val="E6EDF3"/>
+                </a:solidFill>
+                <a:latin typeface="Arial" pitchFamily="34" charset="0"/>
+                <a:ea typeface="Arial" pitchFamily="34" charset="-122"/>
+                <a:cs typeface="Arial" pitchFamily="34" charset="-120"/>
+              </a:rPr>
+              <a:t>Round 1 — strict file@10, N = 60 (own binary + evaluator; rounds are not number-comparable)</a:t>
+            </a:r>
+            <a:endParaRPr lang="en-US" sz="1150" dirty="0"/>
+          </a:p>
+        </p:txBody>
+      </p:sp>
+      <p:graphicFrame>
+        <p:nvGraphicFramePr>
+          <p:cNvPr id="7" name="Chart 1" descr=""/>
+          <p:cNvGraphicFramePr/>
+          <p:nvPr/>
+        </p:nvGraphicFramePr>
+        <p:xfrm>
+          <a:off x="566928" y="4389120"/>
+          <a:ext cx="6675120" cy="2057400"/>
+        </p:xfrm>
+        <a:graphic xmlns:a="http://schemas.openxmlformats.org/drawingml/2006/main">
+          <a:graphicData uri="http://schemas.openxmlformats.org/drawingml/2006/chart">
+            <c:chart xmlns:c="http://schemas.openxmlformats.org/drawingml/2006/chart" r:id="rId2"/>
+          </a:graphicData>
+        </a:graphic>
+      </p:graphicFrame>
+      <p:sp>
+        <p:nvSpPr>
+          <p:cNvPr id="8" name="Shape 4"/>
           <p:cNvSpPr/>
           <p:nvPr/>
         </p:nvSpPr>
@@ -14914,7 +15267,7 @@
       </p:sp>
       <p:sp>
         <p:nvSpPr>
-          <p:cNvPr id="7" name="Text 4"/>
+          <p:cNvPr id="9" name="Text 5"/>
           <p:cNvSpPr/>
           <p:nvPr/>
         </p:nvSpPr>
@@ -14953,7 +15306,7 @@
       </p:sp>
       <p:sp>
         <p:nvSpPr>
-          <p:cNvPr id="8" name="Text 5"/>
+          <p:cNvPr id="10" name="Text 6"/>
           <p:cNvSpPr/>
           <p:nvPr/>
         </p:nvSpPr>
@@ -15009,18 +15362,18 @@
       </p:sp>
       <p:sp>
         <p:nvSpPr>
-          <p:cNvPr id="9" name="Shape 6"/>
-          <p:cNvSpPr/>
-          <p:nvPr/>
-        </p:nvSpPr>
-        <p:spPr>
-          <a:xfrm>
-            <a:off x="7498080" y="3474720"/>
-            <a:ext cx="4023360" cy="1371600"/>
+          <p:cNvPr id="11" name="Shape 7"/>
+          <p:cNvSpPr/>
+          <p:nvPr/>
+        </p:nvSpPr>
+        <p:spPr>
+          <a:xfrm>
+            <a:off x="7498080" y="3429000"/>
+            <a:ext cx="4023360" cy="1554480"/>
           </a:xfrm>
           <a:prstGeom prst="roundRect">
             <a:avLst>
-              <a:gd name="adj" fmla="val 6000"/>
+              <a:gd name="adj" fmla="val 5294"/>
             </a:avLst>
           </a:prstGeom>
           <a:solidFill>
@@ -15036,30 +15389,30 @@
       </p:sp>
       <p:sp>
         <p:nvSpPr>
-          <p:cNvPr id="10" name="Text 7"/>
-          <p:cNvSpPr/>
-          <p:nvPr/>
-        </p:nvSpPr>
-        <p:spPr>
-          <a:xfrm>
-            <a:off x="7680960" y="3593592"/>
-            <a:ext cx="3703320" cy="1188720"/>
-          </a:xfrm>
-          <a:prstGeom prst="rect">
-            <a:avLst/>
-          </a:prstGeom>
-          <a:noFill/>
-          <a:ln/>
-        </p:spPr>
-        <p:txBody>
-          <a:bodyPr wrap="square" lIns="0" tIns="0" rIns="0" bIns="0" rtlCol="0" anchor="ctr"/>
-          <a:lstStyle/>
-          <a:p>
-            <a:pPr indent="0" marL="0">
-              <a:buNone/>
-            </a:pPr>
-            <a:r>
-              <a:rPr lang="en-US" sz="1050" b="1" dirty="0">
+          <p:cNvPr id="12" name="Text 8"/>
+          <p:cNvSpPr/>
+          <p:nvPr/>
+        </p:nvSpPr>
+        <p:spPr>
+          <a:xfrm>
+            <a:off x="7680960" y="3547872"/>
+            <a:ext cx="3703320" cy="1371600"/>
+          </a:xfrm>
+          <a:prstGeom prst="rect">
+            <a:avLst/>
+          </a:prstGeom>
+          <a:noFill/>
+          <a:ln/>
+        </p:spPr>
+        <p:txBody>
+          <a:bodyPr wrap="square" lIns="0" tIns="0" rIns="0" bIns="0" rtlCol="0" anchor="ctr"/>
+          <a:lstStyle/>
+          <a:p>
+            <a:pPr indent="0" marL="0">
+              <a:buNone/>
+            </a:pPr>
+            <a:r>
+              <a:rPr lang="en-US" sz="1000" b="1" dirty="0">
                 <a:solidFill>
                   <a:srgbClr val="E6EDF3"/>
                 </a:solidFill>
@@ -15073,7 +15426,7 @@
               <a:buNone/>
             </a:pPr>
             <a:r>
-              <a:rPr lang="en-US" sz="1050" dirty="0">
+              <a:rPr lang="en-US" sz="1000" dirty="0">
                 <a:solidFill>
                   <a:srgbClr val="8B95A5"/>
                 </a:solidFill>
@@ -15081,14 +15434,14 @@
                 <a:ea typeface="Arial" pitchFamily="34" charset="-122"/>
                 <a:cs typeface="Arial" pitchFamily="34" charset="-120"/>
               </a:rPr>
-              <a:t>ripwire 0.114 s · repowise 1.14 s (incl. a fresh MCP-server spawn per query).
+              <a:t>ripwire 0.114 s · repowise 1.14 s (incl. a per-query server spawn) — round 1: Aider 2.5 s · graphify 5.8 s, cold per run.
 </a:t>
             </a:r>
             <a:pPr indent="0" marL="0">
               <a:buNone/>
             </a:pPr>
             <a:r>
-              <a:rPr lang="en-US" sz="1050" dirty="0">
+              <a:rPr lang="en-US" sz="1000" dirty="0">
                 <a:solidFill>
                   <a:srgbClr val="8B95A5"/>
                 </a:solidFill>
@@ -15096,26 +15449,26 @@
                 <a:ea typeface="Arial" pitchFamily="34" charset="-122"/>
                 <a:cs typeface="Arial" pitchFamily="34" charset="-120"/>
               </a:rPr>
-              <a:t>Round 1, four tools: 36.7% vs cmm 26.7 · graphify 21.7 · Aider 13.3 — each round is internally paired; rounds are not number-comparable.</a:t>
-            </a:r>
-            <a:endParaRPr lang="en-US" sz="1050" dirty="0"/>
-          </a:p>
-        </p:txBody>
-      </p:sp>
-      <p:sp>
-        <p:nvSpPr>
-          <p:cNvPr id="11" name="Shape 8"/>
-          <p:cNvSpPr/>
-          <p:nvPr/>
-        </p:nvSpPr>
-        <p:spPr>
-          <a:xfrm>
-            <a:off x="7498080" y="4983480"/>
-            <a:ext cx="4023360" cy="1051560"/>
+              <a:t>codeseek's raw arm: 0 results on 60/60 — a query-protocol boundary, not its embedder mode. Vexp and CodeIndexer were excluded by free-tier caps, not beaten.</a:t>
+            </a:r>
+            <a:endParaRPr lang="en-US" sz="1000" dirty="0"/>
+          </a:p>
+        </p:txBody>
+      </p:sp>
+      <p:sp>
+        <p:nvSpPr>
+          <p:cNvPr id="13" name="Shape 9"/>
+          <p:cNvSpPr/>
+          <p:nvPr/>
+        </p:nvSpPr>
+        <p:spPr>
+          <a:xfrm>
+            <a:off x="7498080" y="5120640"/>
+            <a:ext cx="4023360" cy="1005840"/>
           </a:xfrm>
           <a:prstGeom prst="roundRect">
             <a:avLst>
-              <a:gd name="adj" fmla="val 7826"/>
+              <a:gd name="adj" fmla="val 8182"/>
             </a:avLst>
           </a:prstGeom>
           <a:solidFill>
@@ -15131,30 +15484,30 @@
       </p:sp>
       <p:sp>
         <p:nvSpPr>
-          <p:cNvPr id="12" name="Text 9"/>
-          <p:cNvSpPr/>
-          <p:nvPr/>
-        </p:nvSpPr>
-        <p:spPr>
-          <a:xfrm>
-            <a:off x="7680960" y="5084064"/>
-            <a:ext cx="3703320" cy="896112"/>
-          </a:xfrm>
-          <a:prstGeom prst="rect">
-            <a:avLst/>
-          </a:prstGeom>
-          <a:noFill/>
-          <a:ln/>
-        </p:spPr>
-        <p:txBody>
-          <a:bodyPr wrap="square" lIns="0" tIns="0" rIns="0" bIns="0" rtlCol="0" anchor="ctr"/>
-          <a:lstStyle/>
-          <a:p>
-            <a:pPr indent="0" marL="0">
-              <a:buNone/>
-            </a:pPr>
-            <a:r>
-              <a:rPr lang="en-US" sz="1050" b="1" dirty="0">
+          <p:cNvPr id="14" name="Text 10"/>
+          <p:cNvSpPr/>
+          <p:nvPr/>
+        </p:nvSpPr>
+        <p:spPr>
+          <a:xfrm>
+            <a:off x="7680960" y="5221224"/>
+            <a:ext cx="3703320" cy="841248"/>
+          </a:xfrm>
+          <a:prstGeom prst="rect">
+            <a:avLst/>
+          </a:prstGeom>
+          <a:noFill/>
+          <a:ln/>
+        </p:spPr>
+        <p:txBody>
+          <a:bodyPr wrap="square" lIns="0" tIns="0" rIns="0" bIns="0" rtlCol="0" anchor="ctr"/>
+          <a:lstStyle/>
+          <a:p>
+            <a:pPr indent="0" marL="0">
+              <a:buNone/>
+            </a:pPr>
+            <a:r>
+              <a:rPr lang="en-US" sz="1000" b="1" dirty="0">
                 <a:solidFill>
                   <a:srgbClr val="E6EDF3"/>
                 </a:solidFill>
@@ -15168,7 +15521,7 @@
               <a:buNone/>
             </a:pPr>
             <a:r>
-              <a:rPr lang="en-US" sz="1050" dirty="0">
+              <a:rPr lang="en-US" sz="1000" dirty="0">
                 <a:solidFill>
                   <a:srgbClr val="8B95A5"/>
                 </a:solidFill>
@@ -15176,15 +15529,15 @@
                 <a:ea typeface="Arial" pitchFamily="34" charset="-122"/>
                 <a:cs typeface="Arial" pitchFamily="34" charset="-120"/>
               </a:rPr>
-              <a:t>headroom (the compression layer) passed code through byte-identical; ripwire answered at 7.3% of the naive baseline's tokens. Its own losses ship first in that report.</a:t>
-            </a:r>
-            <a:endParaRPr lang="en-US" sz="1050" dirty="0"/>
-          </a:p>
-        </p:txBody>
-      </p:sp>
-      <p:sp>
-        <p:nvSpPr>
-          <p:cNvPr id="13" name="Text 10"/>
+              <a:t>headroom (the compression layer) passed code through byte-identical; ripwire answered at 7.3% of the naive baseline's tokens.</a:t>
+            </a:r>
+            <a:endParaRPr lang="en-US" sz="1000" dirty="0"/>
+          </a:p>
+        </p:txBody>
+      </p:sp>
+      <p:sp>
+        <p:nvSpPr>
+          <p:cNvPr id="15" name="Text 11"/>
           <p:cNvSpPr/>
           <p:nvPr/>
         </p:nvSpPr>
@@ -15215,7 +15568,7 @@
                 <a:ea typeface="Courier New" pitchFamily="34" charset="-122"/>
                 <a:cs typeface="Courier New" pitchFamily="34" charset="-120"/>
               </a:rPr>
-              <a:t>bench/headtohead/r2-2026-08-03/ · r3-headroom-2026-08-03/ · docs/EVALS.md §2 — versions pinned, an adversarial VERIFIER.md ships with each round</a:t>
+              <a:t>bench/headtohead/REPORT.md (r1) · r2-2026-08-03/ · r3-headroom-2026-08-03/ · docs/EVALS.md §2 — an adversarial VERIFIER.md ships with each round</a:t>
             </a:r>
             <a:endParaRPr lang="en-US" sz="1050" dirty="0"/>
           </a:p>

--- a/present/ripwire-showcase.pptx
+++ b/present/ripwire-showcase.pptx
@@ -7070,7 +7070,7 @@
                 <a:ea typeface="Arial" pitchFamily="34" charset="-122"/>
                 <a:cs typeface="Arial" pitchFamily="34" charset="-120"/>
               </a:rPr>
-              <a:t>315 gate scripts</a:t>
+              <a:t>334 gate scripts</a:t>
             </a:r>
             <a:endParaRPr lang="en-US" sz="1450" dirty="0"/>
           </a:p>
@@ -8305,7 +8305,7 @@
               <a:buNone/>
             </a:pPr>
             <a:r>
-              <a:rPr lang="en-US" sz="3400" b="1" dirty="0">
+              <a:rPr lang="en-US" sz="3000" b="1" dirty="0">
                 <a:solidFill>
                   <a:srgbClr val="E6EDF3"/>
                 </a:solidFill>
@@ -8313,9 +8313,9 @@
                 <a:ea typeface="Arial" pitchFamily="34" charset="-122"/>
                 <a:cs typeface="Arial" pitchFamily="34" charset="-120"/>
               </a:rPr>
-              <a:t>Wire it into your agent in one command</a:t>
-            </a:r>
-            <a:endParaRPr lang="en-US" sz="3400" dirty="0"/>
+              <a:t>Wire it into Codex in one command</a:t>
+            </a:r>
+            <a:endParaRPr lang="en-US" sz="3000" dirty="0"/>
           </a:p>
         </p:txBody>
       </p:sp>
@@ -8328,7 +8328,7 @@
         <p:spPr>
           <a:xfrm>
             <a:off x="566928" y="1828800"/>
-            <a:ext cx="4206240" cy="502920"/>
+            <a:ext cx="6217920" cy="502920"/>
           </a:xfrm>
           <a:prstGeom prst="roundRect">
             <a:avLst>
@@ -8355,7 +8355,7 @@
         <p:spPr>
           <a:xfrm>
             <a:off x="621792" y="1828800"/>
-            <a:ext cx="4096512" cy="502920"/>
+            <a:ext cx="6108192" cy="502920"/>
           </a:xfrm>
           <a:prstGeom prst="rect">
             <a:avLst/>
@@ -8371,7 +8371,7 @@
               <a:buNone/>
             </a:pPr>
             <a:r>
-              <a:rPr lang="en-US" sz="1500" dirty="0">
+              <a:rPr lang="en-US" sz="1350" dirty="0">
                 <a:solidFill>
                   <a:srgbClr val="4AC26B"/>
                 </a:solidFill>
@@ -8379,9 +8379,9 @@
                 <a:ea typeface="Courier New" pitchFamily="34" charset="-122"/>
                 <a:cs typeface="Courier New" pitchFamily="34" charset="-120"/>
               </a:rPr>
-              <a:t>$ ripwire wrap claude</a:t>
-            </a:r>
-            <a:endParaRPr lang="en-US" sz="1500" dirty="0"/>
+              <a:t>$ codex mcp add ripwire -- ripwire --mcp</a:t>
+            </a:r>
+            <a:endParaRPr lang="en-US" sz="1350" dirty="0"/>
           </a:p>
         </p:txBody>
       </p:sp>
@@ -8393,8 +8393,8 @@
         </p:nvSpPr>
         <p:spPr>
           <a:xfrm>
-            <a:off x="4937760" y="1828800"/>
-            <a:ext cx="5943600" cy="502920"/>
+            <a:off x="7040880" y="1828800"/>
+            <a:ext cx="4480560" cy="502920"/>
           </a:xfrm>
           <a:prstGeom prst="rect">
             <a:avLst/>
@@ -8418,7 +8418,7 @@
                 <a:ea typeface="Arial" pitchFamily="34" charset="-122"/>
                 <a:cs typeface="Arial" pitchFamily="34" charset="-120"/>
               </a:rPr>
-              <a:t>(also: cursor, codex, windsurf, gemini, aider)</a:t>
+              <a:t>plugin bundle also ships all 17 skills</a:t>
             </a:r>
             <a:endParaRPr lang="en-US" sz="1200" dirty="0"/>
           </a:p>
@@ -8733,7 +8733,7 @@
                 <a:ea typeface="Arial" pitchFamily="34" charset="-122"/>
                 <a:cs typeface="Arial" pitchFamily="34" charset="-120"/>
               </a:rPr>
-              <a:t>moment-matched skill files (orient, navigate, change-check, quality-bar …) installed by skills/install.sh</a:t>
+              <a:t>moment-matched workflows (orient, navigate, change-check, quality-bar …), bundled in the Codex plugin or installed by skills/install.sh</a:t>
             </a:r>
             <a:endParaRPr lang="en-US" sz="1150" dirty="0"/>
           </a:p>
@@ -12593,7 +12593,7 @@
                 <a:ea typeface="Arial" pitchFamily="34" charset="-122"/>
                 <a:cs typeface="Arial" pitchFamily="34" charset="-120"/>
               </a:rPr>
-              <a:t>an MCP server and 123 long flags behind one `--help` that is always the authority</a:t>
+              <a:t>an MCP server and 124 long flags behind one `--help` that is always the authority</a:t>
             </a:r>
             <a:endParaRPr lang="en-US" sz="1250" dirty="0"/>
           </a:p>
@@ -13750,7 +13750,7 @@
                 <a:ea typeface="Courier New" pitchFamily="34" charset="-122"/>
                 <a:cs typeface="Courier New" pitchFamily="34" charset="-120"/>
               </a:rPr>
-              <a:t>ripwire --help is generated from the binary's own flag table — 123 long flags; docs/COMMANDS.md documents 101 of them with real recorded output</a:t>
+              <a:t>ripwire --help is generated from the binary's own flag table — 124 long flags; docs/COMMANDS.md documents 101 of them with real recorded output</a:t>
             </a:r>
             <a:endParaRPr lang="en-US" sz="1050" dirty="0"/>
           </a:p>

--- a/present/ripwire-showcase.pptx
+++ b/present/ripwire-showcase.pptx
@@ -10824,7 +10824,7 @@
                 <a:ea typeface="Arial" pitchFamily="34" charset="-122"/>
                 <a:cs typeface="Arial" pitchFamily="34" charset="-120"/>
               </a:rPr>
-              <a:t>373 gate scripts</a:t>
+              <a:t>397 gate scripts</a:t>
             </a:r>
             <a:endParaRPr lang="en-US" sz="1450" dirty="0"/>
           </a:p>
@@ -16731,7 +16731,7 @@
                 <a:ea typeface="Arial" pitchFamily="34" charset="-122"/>
                 <a:cs typeface="Arial" pitchFamily="34" charset="-120"/>
               </a:rPr>
-              <a:t>139 long flags · 23 slides</a:t>
+              <a:t>156 long flags · 23 slides</a:t>
             </a:r>
             <a:endParaRPr lang="en-US" sz="1200" dirty="0"/>
           </a:p>
@@ -17046,7 +17046,7 @@
                 <a:ea typeface="Arial" pitchFamily="34" charset="-122"/>
                 <a:cs typeface="Arial" pitchFamily="34" charset="-120"/>
               </a:rPr>
-              <a:t>373 gate scripts</a:t>
+              <a:t>397 gate scripts</a:t>
             </a:r>
             <a:endParaRPr lang="en-US" sz="1200" dirty="0"/>
           </a:p>
@@ -19756,7 +19756,7 @@
                 <a:ea typeface="Arial" pitchFamily="34" charset="-122"/>
                 <a:cs typeface="Arial" pitchFamily="34" charset="-120"/>
               </a:rPr>
-              <a:t>an MCP server and 139 long flags behind one `--help` that is always the authority</a:t>
+              <a:t>an MCP server and 156 long flags behind one `--help` that is always the authority</a:t>
             </a:r>
             <a:endParaRPr lang="en-US" sz="1200" dirty="0"/>
           </a:p>
@@ -20913,7 +20913,7 @@
                 <a:ea typeface="Courier New" pitchFamily="34" charset="-122"/>
                 <a:cs typeface="Courier New" pitchFamily="34" charset="-120"/>
               </a:rPr>
-              <a:t>--help is generated from the binary's own flag table — 139 long flags; docs/COMMANDS.md documents 117 with recorded output</a:t>
+              <a:t>--help is generated from the binary's own flag table — 156 long flags; docs/COMMANDS.md documents 95 with recorded output</a:t>
             </a:r>
             <a:endParaRPr lang="en-US" sz="1050" dirty="0"/>
           </a:p>
@@ -23993,7 +23993,7 @@
         </p:nvSpPr>
         <p:spPr>
           <a:xfrm>
-            <a:off x="566928" y="1554480"/>
+            <a:off x="566928" y="1536192"/>
             <a:ext cx="11055096" cy="457200"/>
           </a:xfrm>
           <a:prstGeom prst="roundRect">
@@ -24020,7 +24020,7 @@
         </p:nvSpPr>
         <p:spPr>
           <a:xfrm>
-            <a:off x="731520" y="1581912"/>
+            <a:off x="731520" y="1563624"/>
             <a:ext cx="457200" cy="402336"/>
           </a:xfrm>
           <a:prstGeom prst="rect">
@@ -24059,7 +24059,7 @@
         </p:nvSpPr>
         <p:spPr>
           <a:xfrm>
-            <a:off x="1298448" y="1581912"/>
+            <a:off x="1298448" y="1563624"/>
             <a:ext cx="1234440" cy="402336"/>
           </a:xfrm>
           <a:prstGeom prst="rect">
@@ -24098,7 +24098,7 @@
         </p:nvSpPr>
         <p:spPr>
           <a:xfrm>
-            <a:off x="2642616" y="1581912"/>
+            <a:off x="2642616" y="1563624"/>
             <a:ext cx="4846320" cy="402336"/>
           </a:xfrm>
           <a:prstGeom prst="rect">
@@ -24137,7 +24137,7 @@
         </p:nvSpPr>
         <p:spPr>
           <a:xfrm>
-            <a:off x="7598664" y="1581912"/>
+            <a:off x="7598664" y="1563624"/>
             <a:ext cx="3931920" cy="402336"/>
           </a:xfrm>
           <a:prstGeom prst="rect">
@@ -24176,7 +24176,7 @@
         </p:nvSpPr>
         <p:spPr>
           <a:xfrm>
-            <a:off x="566928" y="2080260"/>
+            <a:off x="566928" y="1984248"/>
             <a:ext cx="11055096" cy="457200"/>
           </a:xfrm>
           <a:prstGeom prst="roundRect">
@@ -24203,7 +24203,7 @@
         </p:nvSpPr>
         <p:spPr>
           <a:xfrm>
-            <a:off x="731520" y="2107692"/>
+            <a:off x="731520" y="2011680"/>
             <a:ext cx="457200" cy="402336"/>
           </a:xfrm>
           <a:prstGeom prst="rect">
@@ -24242,7 +24242,7 @@
         </p:nvSpPr>
         <p:spPr>
           <a:xfrm>
-            <a:off x="1298448" y="2107692"/>
+            <a:off x="1298448" y="2011680"/>
             <a:ext cx="1234440" cy="402336"/>
           </a:xfrm>
           <a:prstGeom prst="rect">
@@ -24281,7 +24281,7 @@
         </p:nvSpPr>
         <p:spPr>
           <a:xfrm>
-            <a:off x="2642616" y="2107692"/>
+            <a:off x="2642616" y="2011680"/>
             <a:ext cx="4846320" cy="402336"/>
           </a:xfrm>
           <a:prstGeom prst="rect">
@@ -24320,7 +24320,7 @@
         </p:nvSpPr>
         <p:spPr>
           <a:xfrm>
-            <a:off x="7598664" y="2107692"/>
+            <a:off x="7598664" y="2011680"/>
             <a:ext cx="3931920" cy="402336"/>
           </a:xfrm>
           <a:prstGeom prst="rect">
@@ -24359,7 +24359,7 @@
         </p:nvSpPr>
         <p:spPr>
           <a:xfrm>
-            <a:off x="566928" y="2606040"/>
+            <a:off x="566928" y="2432304"/>
             <a:ext cx="11055096" cy="457200"/>
           </a:xfrm>
           <a:prstGeom prst="roundRect">
@@ -24386,7 +24386,7 @@
         </p:nvSpPr>
         <p:spPr>
           <a:xfrm>
-            <a:off x="731520" y="2633472"/>
+            <a:off x="731520" y="2459736"/>
             <a:ext cx="457200" cy="402336"/>
           </a:xfrm>
           <a:prstGeom prst="rect">
@@ -24425,7 +24425,7 @@
         </p:nvSpPr>
         <p:spPr>
           <a:xfrm>
-            <a:off x="1298448" y="2633472"/>
+            <a:off x="1298448" y="2459736"/>
             <a:ext cx="1234440" cy="402336"/>
           </a:xfrm>
           <a:prstGeom prst="rect">
@@ -24464,7 +24464,7 @@
         </p:nvSpPr>
         <p:spPr>
           <a:xfrm>
-            <a:off x="2642616" y="2633472"/>
+            <a:off x="2642616" y="2459736"/>
             <a:ext cx="4846320" cy="402336"/>
           </a:xfrm>
           <a:prstGeom prst="rect">
@@ -24503,7 +24503,7 @@
         </p:nvSpPr>
         <p:spPr>
           <a:xfrm>
-            <a:off x="7598664" y="2633472"/>
+            <a:off x="7598664" y="2459736"/>
             <a:ext cx="3931920" cy="402336"/>
           </a:xfrm>
           <a:prstGeom prst="rect">
@@ -24542,7 +24542,7 @@
         </p:nvSpPr>
         <p:spPr>
           <a:xfrm>
-            <a:off x="566928" y="3131820"/>
+            <a:off x="566928" y="2880360"/>
             <a:ext cx="11055096" cy="457200"/>
           </a:xfrm>
           <a:prstGeom prst="roundRect">
@@ -24569,7 +24569,7 @@
         </p:nvSpPr>
         <p:spPr>
           <a:xfrm>
-            <a:off x="731520" y="3159252"/>
+            <a:off x="731520" y="2907792"/>
             <a:ext cx="457200" cy="402336"/>
           </a:xfrm>
           <a:prstGeom prst="rect">
@@ -24608,7 +24608,7 @@
         </p:nvSpPr>
         <p:spPr>
           <a:xfrm>
-            <a:off x="1298448" y="3159252"/>
+            <a:off x="1298448" y="2907792"/>
             <a:ext cx="1234440" cy="402336"/>
           </a:xfrm>
           <a:prstGeom prst="rect">
@@ -24647,7 +24647,7 @@
         </p:nvSpPr>
         <p:spPr>
           <a:xfrm>
-            <a:off x="2642616" y="3159252"/>
+            <a:off x="2642616" y="2907792"/>
             <a:ext cx="4846320" cy="402336"/>
           </a:xfrm>
           <a:prstGeom prst="rect">
@@ -24686,7 +24686,7 @@
         </p:nvSpPr>
         <p:spPr>
           <a:xfrm>
-            <a:off x="7598664" y="3159252"/>
+            <a:off x="7598664" y="2907792"/>
             <a:ext cx="3931920" cy="402336"/>
           </a:xfrm>
           <a:prstGeom prst="rect">
@@ -24725,7 +24725,7 @@
         </p:nvSpPr>
         <p:spPr>
           <a:xfrm>
-            <a:off x="566928" y="3657600"/>
+            <a:off x="566928" y="3328416"/>
             <a:ext cx="11055096" cy="457200"/>
           </a:xfrm>
           <a:prstGeom prst="roundRect">
@@ -24752,7 +24752,7 @@
         </p:nvSpPr>
         <p:spPr>
           <a:xfrm>
-            <a:off x="731520" y="3685032"/>
+            <a:off x="731520" y="3355848"/>
             <a:ext cx="457200" cy="402336"/>
           </a:xfrm>
           <a:prstGeom prst="rect">
@@ -24791,7 +24791,7 @@
         </p:nvSpPr>
         <p:spPr>
           <a:xfrm>
-            <a:off x="1298448" y="3685032"/>
+            <a:off x="1298448" y="3355848"/>
             <a:ext cx="1234440" cy="402336"/>
           </a:xfrm>
           <a:prstGeom prst="rect">
@@ -24830,7 +24830,7 @@
         </p:nvSpPr>
         <p:spPr>
           <a:xfrm>
-            <a:off x="2642616" y="3685032"/>
+            <a:off x="2642616" y="3355848"/>
             <a:ext cx="4846320" cy="402336"/>
           </a:xfrm>
           <a:prstGeom prst="rect">
@@ -24869,7 +24869,7 @@
         </p:nvSpPr>
         <p:spPr>
           <a:xfrm>
-            <a:off x="7598664" y="3685032"/>
+            <a:off x="7598664" y="3355848"/>
             <a:ext cx="3931920" cy="402336"/>
           </a:xfrm>
           <a:prstGeom prst="rect">
@@ -24908,7 +24908,7 @@
         </p:nvSpPr>
         <p:spPr>
           <a:xfrm>
-            <a:off x="566928" y="4183380"/>
+            <a:off x="566928" y="3776472"/>
             <a:ext cx="11055096" cy="457200"/>
           </a:xfrm>
           <a:prstGeom prst="roundRect">
@@ -24935,7 +24935,7 @@
         </p:nvSpPr>
         <p:spPr>
           <a:xfrm>
-            <a:off x="731520" y="4210812"/>
+            <a:off x="731520" y="3803904"/>
             <a:ext cx="457200" cy="402336"/>
           </a:xfrm>
           <a:prstGeom prst="rect">
@@ -24974,7 +24974,7 @@
         </p:nvSpPr>
         <p:spPr>
           <a:xfrm>
-            <a:off x="1298448" y="4210812"/>
+            <a:off x="1298448" y="3803904"/>
             <a:ext cx="1234440" cy="402336"/>
           </a:xfrm>
           <a:prstGeom prst="rect">
@@ -25013,7 +25013,7 @@
         </p:nvSpPr>
         <p:spPr>
           <a:xfrm>
-            <a:off x="2642616" y="4210812"/>
+            <a:off x="2642616" y="3803904"/>
             <a:ext cx="4846320" cy="402336"/>
           </a:xfrm>
           <a:prstGeom prst="rect">
@@ -25052,7 +25052,7 @@
         </p:nvSpPr>
         <p:spPr>
           <a:xfrm>
-            <a:off x="7598664" y="4210812"/>
+            <a:off x="7598664" y="3803904"/>
             <a:ext cx="3931920" cy="402336"/>
           </a:xfrm>
           <a:prstGeom prst="rect">
@@ -25091,7 +25091,7 @@
         </p:nvSpPr>
         <p:spPr>
           <a:xfrm>
-            <a:off x="566928" y="4709160"/>
+            <a:off x="566928" y="4224528"/>
             <a:ext cx="11055096" cy="457200"/>
           </a:xfrm>
           <a:prstGeom prst="roundRect">
@@ -25118,7 +25118,7 @@
         </p:nvSpPr>
         <p:spPr>
           <a:xfrm>
-            <a:off x="731520" y="4736592"/>
+            <a:off x="731520" y="4251960"/>
             <a:ext cx="457200" cy="402336"/>
           </a:xfrm>
           <a:prstGeom prst="rect">
@@ -25157,7 +25157,7 @@
         </p:nvSpPr>
         <p:spPr>
           <a:xfrm>
-            <a:off x="1298448" y="4736592"/>
+            <a:off x="1298448" y="4251960"/>
             <a:ext cx="1234440" cy="402336"/>
           </a:xfrm>
           <a:prstGeom prst="rect">
@@ -25196,7 +25196,7 @@
         </p:nvSpPr>
         <p:spPr>
           <a:xfrm>
-            <a:off x="2642616" y="4736592"/>
+            <a:off x="2642616" y="4251960"/>
             <a:ext cx="4846320" cy="402336"/>
           </a:xfrm>
           <a:prstGeom prst="rect">
@@ -25235,7 +25235,7 @@
         </p:nvSpPr>
         <p:spPr>
           <a:xfrm>
-            <a:off x="7598664" y="4736592"/>
+            <a:off x="7598664" y="4251960"/>
             <a:ext cx="3931920" cy="402336"/>
           </a:xfrm>
           <a:prstGeom prst="rect">
@@ -25274,7 +25274,7 @@
         </p:nvSpPr>
         <p:spPr>
           <a:xfrm>
-            <a:off x="566928" y="5234940"/>
+            <a:off x="566928" y="4672584"/>
             <a:ext cx="11055096" cy="457200"/>
           </a:xfrm>
           <a:prstGeom prst="roundRect">
@@ -25301,7 +25301,7 @@
         </p:nvSpPr>
         <p:spPr>
           <a:xfrm>
-            <a:off x="731520" y="5262372"/>
+            <a:off x="731520" y="4700016"/>
             <a:ext cx="457200" cy="402336"/>
           </a:xfrm>
           <a:prstGeom prst="rect">
@@ -25340,7 +25340,7 @@
         </p:nvSpPr>
         <p:spPr>
           <a:xfrm>
-            <a:off x="1298448" y="5262372"/>
+            <a:off x="1298448" y="4700016"/>
             <a:ext cx="1234440" cy="402336"/>
           </a:xfrm>
           <a:prstGeom prst="rect">
@@ -25379,7 +25379,7 @@
         </p:nvSpPr>
         <p:spPr>
           <a:xfrm>
-            <a:off x="2642616" y="5262372"/>
+            <a:off x="2642616" y="4700016"/>
             <a:ext cx="4846320" cy="402336"/>
           </a:xfrm>
           <a:prstGeom prst="rect">
@@ -25418,7 +25418,7 @@
         </p:nvSpPr>
         <p:spPr>
           <a:xfrm>
-            <a:off x="7598664" y="5262372"/>
+            <a:off x="7598664" y="4700016"/>
             <a:ext cx="3931920" cy="402336"/>
           </a:xfrm>
           <a:prstGeom prst="rect">
@@ -25452,6 +25452,189 @@
       <p:sp>
         <p:nvSpPr>
           <p:cNvPr id="44" name="Shape 42"/>
+          <p:cNvSpPr/>
+          <p:nvPr/>
+        </p:nvSpPr>
+        <p:spPr>
+          <a:xfrm>
+            <a:off x="566928" y="5120640"/>
+            <a:ext cx="11055096" cy="457200"/>
+          </a:xfrm>
+          <a:prstGeom prst="roundRect">
+            <a:avLst>
+              <a:gd name="adj" fmla="val 18000"/>
+            </a:avLst>
+          </a:prstGeom>
+          <a:solidFill>
+            <a:srgbClr val="161D28"/>
+          </a:solidFill>
+          <a:ln w="9525">
+            <a:solidFill>
+              <a:srgbClr val="232D3D"/>
+            </a:solidFill>
+            <a:prstDash val="solid"/>
+          </a:ln>
+        </p:spPr>
+      </p:sp>
+      <p:sp>
+        <p:nvSpPr>
+          <p:cNvPr id="45" name="Text 43"/>
+          <p:cNvSpPr/>
+          <p:nvPr/>
+        </p:nvSpPr>
+        <p:spPr>
+          <a:xfrm>
+            <a:off x="731520" y="5148072"/>
+            <a:ext cx="457200" cy="402336"/>
+          </a:xfrm>
+          <a:prstGeom prst="rect">
+            <a:avLst/>
+          </a:prstGeom>
+          <a:noFill/>
+          <a:ln/>
+        </p:spPr>
+        <p:txBody>
+          <a:bodyPr wrap="square" lIns="0" tIns="0" rIns="0" bIns="0" rtlCol="0" anchor="ctr"/>
+          <a:lstStyle/>
+          <a:p>
+            <a:pPr algn="l" indent="0" marL="0">
+              <a:buNone/>
+            </a:pPr>
+            <a:r>
+              <a:rPr lang="en-US" sz="1250" b="1" dirty="0">
+                <a:solidFill>
+                  <a:srgbClr val="56D6E8"/>
+                </a:solidFill>
+                <a:latin typeface="Courier New" pitchFamily="34" charset="0"/>
+                <a:ea typeface="Courier New" pitchFamily="34" charset="-122"/>
+                <a:cs typeface="Courier New" pitchFamily="34" charset="-120"/>
+              </a:rPr>
+              <a:t>r10</a:t>
+            </a:r>
+            <a:endParaRPr lang="en-US" sz="1250" dirty="0"/>
+          </a:p>
+        </p:txBody>
+      </p:sp>
+      <p:sp>
+        <p:nvSpPr>
+          <p:cNvPr id="46" name="Text 44"/>
+          <p:cNvSpPr/>
+          <p:nvPr/>
+        </p:nvSpPr>
+        <p:spPr>
+          <a:xfrm>
+            <a:off x="1298448" y="5148072"/>
+            <a:ext cx="1234440" cy="402336"/>
+          </a:xfrm>
+          <a:prstGeom prst="rect">
+            <a:avLst/>
+          </a:prstGeom>
+          <a:noFill/>
+          <a:ln/>
+        </p:spPr>
+        <p:txBody>
+          <a:bodyPr wrap="square" lIns="0" tIns="0" rIns="0" bIns="0" rtlCol="0" anchor="ctr"/>
+          <a:lstStyle/>
+          <a:p>
+            <a:pPr algn="l" indent="0" marL="0">
+              <a:buNone/>
+            </a:pPr>
+            <a:r>
+              <a:rPr lang="en-US" sz="1050" dirty="0">
+                <a:solidFill>
+                  <a:srgbClr val="8B95A5"/>
+                </a:solidFill>
+                <a:latin typeface="Courier New" pitchFamily="34" charset="0"/>
+                <a:ea typeface="Courier New" pitchFamily="34" charset="-122"/>
+                <a:cs typeface="Courier New" pitchFamily="34" charset="-120"/>
+              </a:rPr>
+              <a:t>2026-08-22</a:t>
+            </a:r>
+            <a:endParaRPr lang="en-US" sz="1050" dirty="0"/>
+          </a:p>
+        </p:txBody>
+      </p:sp>
+      <p:sp>
+        <p:nvSpPr>
+          <p:cNvPr id="47" name="Text 45"/>
+          <p:cNvSpPr/>
+          <p:nvPr/>
+        </p:nvSpPr>
+        <p:spPr>
+          <a:xfrm>
+            <a:off x="2642616" y="5148072"/>
+            <a:ext cx="4846320" cy="402336"/>
+          </a:xfrm>
+          <a:prstGeom prst="rect">
+            <a:avLst/>
+          </a:prstGeom>
+          <a:noFill/>
+          <a:ln/>
+        </p:spPr>
+        <p:txBody>
+          <a:bodyPr wrap="square" lIns="0" tIns="0" rIns="0" bIns="0" rtlCol="0" anchor="ctr"/>
+          <a:lstStyle/>
+          <a:p>
+            <a:pPr algn="l" indent="0" marL="0">
+              <a:buNone/>
+            </a:pPr>
+            <a:r>
+              <a:rPr lang="en-US" sz="1150" dirty="0">
+                <a:solidFill>
+                  <a:srgbClr val="E6EDF3"/>
+                </a:solidFill>
+                <a:latin typeface="Arial" pitchFamily="34" charset="0"/>
+                <a:ea typeface="Arial" pitchFamily="34" charset="-122"/>
+                <a:cs typeface="Arial" pitchFamily="34" charset="-120"/>
+              </a:rPr>
+              <a:t>GitNexus 1.6.9 — a graph-database context server</a:t>
+            </a:r>
+            <a:endParaRPr lang="en-US" sz="1150" dirty="0"/>
+          </a:p>
+        </p:txBody>
+      </p:sp>
+      <p:sp>
+        <p:nvSpPr>
+          <p:cNvPr id="48" name="Text 46"/>
+          <p:cNvSpPr/>
+          <p:nvPr/>
+        </p:nvSpPr>
+        <p:spPr>
+          <a:xfrm>
+            <a:off x="7598664" y="5148072"/>
+            <a:ext cx="3931920" cy="402336"/>
+          </a:xfrm>
+          <a:prstGeom prst="rect">
+            <a:avLst/>
+          </a:prstGeom>
+          <a:noFill/>
+          <a:ln/>
+        </p:spPr>
+        <p:txBody>
+          <a:bodyPr wrap="square" lIns="0" tIns="0" rIns="0" bIns="0" rtlCol="0" anchor="ctr"/>
+          <a:lstStyle/>
+          <a:p>
+            <a:pPr algn="l" indent="0" marL="0">
+              <a:buNone/>
+            </a:pPr>
+            <a:r>
+              <a:rPr lang="en-US" sz="1100" dirty="0">
+                <a:solidFill>
+                  <a:srgbClr val="56D6E8"/>
+                </a:solidFill>
+                <a:latin typeface="Arial" pitchFamily="34" charset="0"/>
+                <a:ea typeface="Arial" pitchFamily="34" charset="-122"/>
+                <a:cs typeface="Arial" pitchFamily="34" charset="-120"/>
+              </a:rPr>
+              <a:t>27-7-14 AFTER the fix list; first pass unpublished</a:t>
+            </a:r>
+            <a:endParaRPr lang="en-US" sz="1100" dirty="0"/>
+          </a:p>
+        </p:txBody>
+      </p:sp>
+      <p:sp>
+        <p:nvSpPr>
+          <p:cNvPr id="49" name="Shape 47"/>
           <p:cNvSpPr/>
           <p:nvPr/>
         </p:nvSpPr>
@@ -25478,7 +25661,7 @@
       </p:sp>
       <p:sp>
         <p:nvSpPr>
-          <p:cNvPr id="45" name="Text 43"/>
+          <p:cNvPr id="50" name="Text 48"/>
           <p:cNvSpPr/>
           <p:nvPr/>
         </p:nvSpPr>
@@ -25531,7 +25714,7 @@
       </p:sp>
       <p:sp>
         <p:nvSpPr>
-          <p:cNvPr id="46" name="Text 44"/>
+          <p:cNvPr id="51" name="Text 49"/>
           <p:cNvSpPr/>
           <p:nvPr/>
         </p:nvSpPr>
@@ -25562,7 +25745,7 @@
                 <a:ea typeface="Courier New" pitchFamily="34" charset="-122"/>
                 <a:cs typeface="Courier New" pitchFamily="34" charset="-120"/>
               </a:rPr>
-              <a:t>bench/headtohead/ (r1–r4, r9) · bench/r7/ · bench/r8/ — harnesses committed even for rounds that rejected their own fix · r5 left no head-to-head record in this tree, so it is not listed</a:t>
+              <a:t>bench/headtohead/ (r1–r4, r9) · bench/r7/ · bench/r8/ — harnesses committed even for rounds that rejected their own fix · r5 left no head-to-head record in this tree, so it is not listed · r10's method and pins are published in docs/EVALS.md §2, its pre-fix numbers nowhere</a:t>
             </a:r>
             <a:endParaRPr lang="en-US" sz="1050" dirty="0"/>
           </a:p>

--- a/present/ripwire-showcase.pptx
+++ b/present/ripwire-showcase.pptx
@@ -28581,7 +28581,7 @@
         </p:nvSpPr>
         <p:spPr>
           <a:xfrm>
-            <a:off x="713232" y="1545336"/>
+            <a:off x="731520" y="1545336"/>
             <a:ext cx="2240280" cy="256032"/>
           </a:xfrm>
           <a:prstGeom prst="rect">
@@ -28620,7 +28620,7 @@
         </p:nvSpPr>
         <p:spPr>
           <a:xfrm>
-            <a:off x="3044952" y="1545336"/>
+            <a:off x="3081528" y="1545336"/>
             <a:ext cx="411480" cy="256032"/>
           </a:xfrm>
           <a:prstGeom prst="rect">
@@ -28659,7 +28659,7 @@
         </p:nvSpPr>
         <p:spPr>
           <a:xfrm>
-            <a:off x="3547872" y="1545336"/>
+            <a:off x="3602736" y="1545336"/>
             <a:ext cx="777240" cy="256032"/>
           </a:xfrm>
           <a:prstGeom prst="rect">
@@ -28698,7 +28698,7 @@
         </p:nvSpPr>
         <p:spPr>
           <a:xfrm>
-            <a:off x="4416552" y="1545336"/>
+            <a:off x="4489704" y="1545336"/>
             <a:ext cx="822960" cy="256032"/>
           </a:xfrm>
           <a:prstGeom prst="rect">
@@ -28737,7 +28737,7 @@
         </p:nvSpPr>
         <p:spPr>
           <a:xfrm>
-            <a:off x="5330952" y="1545336"/>
+            <a:off x="5422392" y="1545336"/>
             <a:ext cx="502920" cy="256032"/>
           </a:xfrm>
           <a:prstGeom prst="rect">
@@ -28776,7 +28776,7 @@
         </p:nvSpPr>
         <p:spPr>
           <a:xfrm>
-            <a:off x="5925312" y="1545336"/>
+            <a:off x="6035040" y="1545336"/>
             <a:ext cx="1325880" cy="256032"/>
           </a:xfrm>
           <a:prstGeom prst="rect">
@@ -28842,7 +28842,7 @@
         </p:nvSpPr>
         <p:spPr>
           <a:xfrm>
-            <a:off x="713232" y="1892808"/>
+            <a:off x="731520" y="1892808"/>
             <a:ext cx="2240280" cy="329184"/>
           </a:xfrm>
           <a:prstGeom prst="rect">
@@ -28881,7 +28881,7 @@
         </p:nvSpPr>
         <p:spPr>
           <a:xfrm>
-            <a:off x="3044952" y="1892808"/>
+            <a:off x="3081528" y="1892808"/>
             <a:ext cx="411480" cy="329184"/>
           </a:xfrm>
           <a:prstGeom prst="rect">
@@ -28920,7 +28920,7 @@
         </p:nvSpPr>
         <p:spPr>
           <a:xfrm>
-            <a:off x="3547872" y="1892808"/>
+            <a:off x="3602736" y="1892808"/>
             <a:ext cx="777240" cy="329184"/>
           </a:xfrm>
           <a:prstGeom prst="rect">
@@ -28959,7 +28959,7 @@
         </p:nvSpPr>
         <p:spPr>
           <a:xfrm>
-            <a:off x="4416552" y="1892808"/>
+            <a:off x="4489704" y="1892808"/>
             <a:ext cx="822960" cy="329184"/>
           </a:xfrm>
           <a:prstGeom prst="rect">
@@ -28998,7 +28998,7 @@
         </p:nvSpPr>
         <p:spPr>
           <a:xfrm>
-            <a:off x="5330952" y="1892808"/>
+            <a:off x="5422392" y="1892808"/>
             <a:ext cx="502920" cy="329184"/>
           </a:xfrm>
           <a:prstGeom prst="rect">
@@ -29037,7 +29037,7 @@
         </p:nvSpPr>
         <p:spPr>
           <a:xfrm>
-            <a:off x="5925312" y="1892808"/>
+            <a:off x="6035040" y="1892808"/>
             <a:ext cx="1325880" cy="329184"/>
           </a:xfrm>
           <a:prstGeom prst="rect">
@@ -29103,7 +29103,7 @@
         </p:nvSpPr>
         <p:spPr>
           <a:xfrm>
-            <a:off x="713232" y="2322576"/>
+            <a:off x="731520" y="2322576"/>
             <a:ext cx="2240280" cy="329184"/>
           </a:xfrm>
           <a:prstGeom prst="rect">
@@ -29142,7 +29142,7 @@
         </p:nvSpPr>
         <p:spPr>
           <a:xfrm>
-            <a:off x="3044952" y="2322576"/>
+            <a:off x="3081528" y="2322576"/>
             <a:ext cx="411480" cy="329184"/>
           </a:xfrm>
           <a:prstGeom prst="rect">
@@ -29181,7 +29181,7 @@
         </p:nvSpPr>
         <p:spPr>
           <a:xfrm>
-            <a:off x="3547872" y="2322576"/>
+            <a:off x="3602736" y="2322576"/>
             <a:ext cx="777240" cy="329184"/>
           </a:xfrm>
           <a:prstGeom prst="rect">
@@ -29220,7 +29220,7 @@
         </p:nvSpPr>
         <p:spPr>
           <a:xfrm>
-            <a:off x="4416552" y="2322576"/>
+            <a:off x="4489704" y="2322576"/>
             <a:ext cx="822960" cy="329184"/>
           </a:xfrm>
           <a:prstGeom prst="rect">
@@ -29259,7 +29259,7 @@
         </p:nvSpPr>
         <p:spPr>
           <a:xfrm>
-            <a:off x="5330952" y="2322576"/>
+            <a:off x="5422392" y="2322576"/>
             <a:ext cx="502920" cy="329184"/>
           </a:xfrm>
           <a:prstGeom prst="rect">
@@ -29298,7 +29298,7 @@
         </p:nvSpPr>
         <p:spPr>
           <a:xfrm>
-            <a:off x="5925312" y="2322576"/>
+            <a:off x="6035040" y="2322576"/>
             <a:ext cx="1325880" cy="329184"/>
           </a:xfrm>
           <a:prstGeom prst="rect">
@@ -29364,7 +29364,7 @@
         </p:nvSpPr>
         <p:spPr>
           <a:xfrm>
-            <a:off x="713232" y="2752344"/>
+            <a:off x="731520" y="2752344"/>
             <a:ext cx="2240280" cy="329184"/>
           </a:xfrm>
           <a:prstGeom prst="rect">
@@ -29403,7 +29403,7 @@
         </p:nvSpPr>
         <p:spPr>
           <a:xfrm>
-            <a:off x="3044952" y="2752344"/>
+            <a:off x="3081528" y="2752344"/>
             <a:ext cx="411480" cy="329184"/>
           </a:xfrm>
           <a:prstGeom prst="rect">
@@ -29442,7 +29442,7 @@
         </p:nvSpPr>
         <p:spPr>
           <a:xfrm>
-            <a:off x="3547872" y="2752344"/>
+            <a:off x="3602736" y="2752344"/>
             <a:ext cx="777240" cy="329184"/>
           </a:xfrm>
           <a:prstGeom prst="rect">
@@ -29481,7 +29481,7 @@
         </p:nvSpPr>
         <p:spPr>
           <a:xfrm>
-            <a:off x="4416552" y="2752344"/>
+            <a:off x="4489704" y="2752344"/>
             <a:ext cx="822960" cy="329184"/>
           </a:xfrm>
           <a:prstGeom prst="rect">
@@ -29520,7 +29520,7 @@
         </p:nvSpPr>
         <p:spPr>
           <a:xfrm>
-            <a:off x="5330952" y="2752344"/>
+            <a:off x="5422392" y="2752344"/>
             <a:ext cx="502920" cy="329184"/>
           </a:xfrm>
           <a:prstGeom prst="rect">
@@ -29559,7 +29559,7 @@
         </p:nvSpPr>
         <p:spPr>
           <a:xfrm>
-            <a:off x="5925312" y="2752344"/>
+            <a:off x="6035040" y="2752344"/>
             <a:ext cx="1325880" cy="329184"/>
           </a:xfrm>
           <a:prstGeom prst="rect">
@@ -29625,7 +29625,7 @@
         </p:nvSpPr>
         <p:spPr>
           <a:xfrm>
-            <a:off x="713232" y="3182112"/>
+            <a:off x="731520" y="3182112"/>
             <a:ext cx="2240280" cy="329184"/>
           </a:xfrm>
           <a:prstGeom prst="rect">
@@ -29664,7 +29664,7 @@
         </p:nvSpPr>
         <p:spPr>
           <a:xfrm>
-            <a:off x="3044952" y="3182112"/>
+            <a:off x="3081528" y="3182112"/>
             <a:ext cx="411480" cy="329184"/>
           </a:xfrm>
           <a:prstGeom prst="rect">
@@ -29703,7 +29703,7 @@
         </p:nvSpPr>
         <p:spPr>
           <a:xfrm>
-            <a:off x="3547872" y="3182112"/>
+            <a:off x="3602736" y="3182112"/>
             <a:ext cx="777240" cy="329184"/>
           </a:xfrm>
           <a:prstGeom prst="rect">
@@ -29742,7 +29742,7 @@
         </p:nvSpPr>
         <p:spPr>
           <a:xfrm>
-            <a:off x="4416552" y="3182112"/>
+            <a:off x="4489704" y="3182112"/>
             <a:ext cx="822960" cy="329184"/>
           </a:xfrm>
           <a:prstGeom prst="rect">
@@ -29781,7 +29781,7 @@
         </p:nvSpPr>
         <p:spPr>
           <a:xfrm>
-            <a:off x="5330952" y="3182112"/>
+            <a:off x="5422392" y="3182112"/>
             <a:ext cx="502920" cy="329184"/>
           </a:xfrm>
           <a:prstGeom prst="rect">
@@ -29820,7 +29820,7 @@
         </p:nvSpPr>
         <p:spPr>
           <a:xfrm>
-            <a:off x="5925312" y="3182112"/>
+            <a:off x="6035040" y="3182112"/>
             <a:ext cx="1325880" cy="329184"/>
           </a:xfrm>
           <a:prstGeom prst="rect">
@@ -29886,7 +29886,7 @@
         </p:nvSpPr>
         <p:spPr>
           <a:xfrm>
-            <a:off x="713232" y="3611880"/>
+            <a:off x="731520" y="3611880"/>
             <a:ext cx="2240280" cy="347472"/>
           </a:xfrm>
           <a:prstGeom prst="rect">
@@ -29925,7 +29925,7 @@
         </p:nvSpPr>
         <p:spPr>
           <a:xfrm>
-            <a:off x="3044952" y="3611880"/>
+            <a:off x="3081528" y="3611880"/>
             <a:ext cx="411480" cy="347472"/>
           </a:xfrm>
           <a:prstGeom prst="rect">
@@ -29964,7 +29964,7 @@
         </p:nvSpPr>
         <p:spPr>
           <a:xfrm>
-            <a:off x="3547872" y="3611880"/>
+            <a:off x="3602736" y="3611880"/>
             <a:ext cx="777240" cy="347472"/>
           </a:xfrm>
           <a:prstGeom prst="rect">
@@ -30003,7 +30003,7 @@
         </p:nvSpPr>
         <p:spPr>
           <a:xfrm>
-            <a:off x="4416552" y="3611880"/>
+            <a:off x="4489704" y="3611880"/>
             <a:ext cx="822960" cy="347472"/>
           </a:xfrm>
           <a:prstGeom prst="rect">
@@ -30042,7 +30042,7 @@
         </p:nvSpPr>
         <p:spPr>
           <a:xfrm>
-            <a:off x="5330952" y="3611880"/>
+            <a:off x="5422392" y="3611880"/>
             <a:ext cx="502920" cy="347472"/>
           </a:xfrm>
           <a:prstGeom prst="rect">
@@ -30081,7 +30081,7 @@
         </p:nvSpPr>
         <p:spPr>
           <a:xfrm>
-            <a:off x="5925312" y="3611880"/>
+            <a:off x="6035040" y="3611880"/>
             <a:ext cx="1325880" cy="347472"/>
           </a:xfrm>
           <a:prstGeom prst="rect">

--- a/present/ripwire-showcase.pptx
+++ b/present/ripwire-showcase.pptx
@@ -17959,7 +17959,7 @@
                 <a:ea typeface="Arial" pitchFamily="34" charset="-122"/>
                 <a:cs typeface="Arial" pitchFamily="34" charset="-120"/>
               </a:rPr>
-              <a:t>542 gate scripts</a:t>
+              <a:t>547 gate scripts</a:t>
             </a:r>
             <a:endParaRPr lang="en-US" sz="1450" dirty="0"/>
           </a:p>
@@ -18699,7 +18699,7 @@
                 <a:ea typeface="Arial" pitchFamily="34" charset="-122"/>
                 <a:cs typeface="Arial" pitchFamily="34" charset="-120"/>
               </a:rPr>
-              <a:t>542</a:t>
+              <a:t>547</a:t>
             </a:r>
             <a:endParaRPr lang="en-US" sz="4200" dirty="0"/>
           </a:p>
@@ -25213,7 +25213,7 @@
                 <a:ea typeface="Arial" pitchFamily="34" charset="-122"/>
                 <a:cs typeface="Arial" pitchFamily="34" charset="-120"/>
               </a:rPr>
-              <a:t>542 gate scripts</a:t>
+              <a:t>547 gate scripts</a:t>
             </a:r>
             <a:endParaRPr lang="en-US" sz="1200" dirty="0"/>
           </a:p>

--- a/present/ripwire-showcase.pptx
+++ b/present/ripwire-showcase.pptx
@@ -38,10 +38,9 @@
     <p:sldId id="286" r:id="rId32"/>
     <p:sldId id="287" r:id="rId33"/>
     <p:sldId id="288" r:id="rId34"/>
-    <p:sldId id="289" r:id="rId35"/>
   </p:sldIdLst>
   <p:notesMasterIdLst>
-    <p:notesMasterId r:id="rId36"/>
+    <p:notesMasterId r:id="rId35"/>
   </p:notesMasterIdLst>
   <p:sldSz cx="12192000" cy="6858000"/>
   <p:notesSz cx="6858000" cy="12192000"/>
@@ -3089,29 +3088,10 @@
           <a:p>
             <a:r>
               <a:rPr lang="en-US" dirty="0"/>
-              <a:t>SOURCES: docs/QUALITY_DELTA_CATALOG.md — one entry per card, left to right, then top to bottom.
-The snippets are the catalog's excerpts, trimmed to fit a card: … marks elided code, long lines wrap, and a comment line stands for code the catalog says was elided or deleted.
-1. new-clone-of-reused-helper: registeredMacroNames | vendoredPathPrefixes
-   Catalog §1, "new-clone-of-reused-helper: a helper written out longhand beside the one it copies" (catalog commit 553dbadb). Commits: base 05f4b892 → before c7e93089 → after cca0bf8d, in the per-kind dials round (PR #127).
-   Row, verbatim (05f4b892..c7e93089): &lt;r kind="new-clone-of-reused-helper" sym="src/quality.h::quality::registeredMacroNames | src/quality.h::quality::vendoredPathPrefixes" was="0" now="3" p="src/quality.h:433" gating="1" next="--expand=src/quality.h:vendoredPathPrefixes"/&gt;. The same report gates two duplication rows (tokens="114") and a verbosity row on readRegisterMacrosConfig (was="58" now="69" bar="60").
-   Why it is more than a duplication row: now="3" is the fan-in of the helper the copy duplicated, so three call sites already relied on that shape. Both readers now call mergeBuiltinsWithConfig, and the third member (editplan::callersUnionSize) lost its duplication row with it. The commit ran this on the round that built the dials.
-   Reproduce: base=05f4b892 before=c7e93089 after=cca0bf8d; git worktree add --detach ../qd-before $before; ./build/ripwire ../qd-before --quality-delta=$base..$before --scope=src/quality.h --legend=compact → the four rows, gating="4", exit 2; with $base..$after → gating="0", exit 0. Re-run 2026-09-11 with a built_from=766913d02 build: both match the catalog.
-2. nesting: runChangeViews was="6" now="8" · complexity was="141" now="178"
-   Catalog §6, "nesting: an inline scan inside a per-root loop" (catalog commit 553dbadb). Commits: base e3b52d39 → before 4c526577 → after a8e994d1.
-   Rows, verbatim (e3b52d39..4c526577): &lt;r kind="nesting" sym="runChangeViews" was="6" now="8" bar="4" p="src/verbs_change.h:245" gating="1" next="--expand=src/verbs_change.h:runChangeViews"/&gt; and &lt;r kind="complexity" sym="runChangeViews" was="141" now="178" bar="15" p="src/verbs_change.h:245" gating="1" next="--expand=src/verbs_change.h:runChangeViews"/&gt;. A third row gates resolveSinceScope's second git-pipe reader (was="6" now="23" bar="15").
-   The inner for/if/break asked whether this root has any change, so it is std::any_of, and the scan is a named function that takes two more levels out of the dispatcher. resolveSinceScope now reads both git answers through popenTrimmed, the pipe reader the tree already had; the commit records a first attempt, a private copy of that reader, which the report flagged as a new-clone-of-reused-helper. The dispatcher keeps a minor row (was="141" now="146"): chronic debt this change neither created nor gated on.
-   Reproduce: base=e3b52d39 before=4c526577 after=a8e994d1; git worktree add --detach ../qd-before $before; ./build/ripwire ../qd-before --quality-delta=$base..$before --scope=src/verbs_change.h,src/gitmine.h --legend=compact → the three rows, gating="3", exit 2; with $base..$after → minor rows only, gating="0", exit 0. Re-run 2026-09-11 with a built_from=766913d02 build: both match the catalog.
-3. dead-code: mentionFilesCut · namesUnkeptPackageIndex
-   Catalog §7, "dead-code: helpers a rewrite left with no caller" (catalog commit 553dbadb). Commits: base edbb978d → before 1ec420f1 → after 06414b52.
-   Rows, verbatim (edbb978d..1ec420f1): &lt;r kind="dead-code" sym="src/mention.h::mention_detail::mentionFilesCut" p="src/mention.h:467" gating="1" next="--expand=src/mention.h:mentionFilesCut"/&gt; and &lt;r kind="dead-code" sym="src/mention.h::mention_detail::namesUnkeptPackageIndex" p="src/mention.h:397" gating="1" next="--expand=src/mention.h:namesUnkeptPackageIndex"/&gt;.
-   The mention cap's verdict changed to total &gt; kept.size(), computed from mentionFilesNamedTotal, and the predicates that used to answer it lost their callers. The commit's own words are "Deleted, not acked." Dead predicates beside a live verdict leave the next reader unsure which answer is authoritative. The kind could see them only because PR #127 replaced its blanket "headers are exported" exclusion with the rule that names what a language invokes (09d4f5fc).
-   The limit, disclosed: namesFileNotKept was deleted too, but no row named it, because its only caller was itself dead. Catalog improvement path IP-8, "Dead code is one hop deep".
-   Reproduce: base=edbb978d before=1ec420f1 after=06414b52; git worktree add --detach ../qd-before $before; ./build/ripwire ../qd-before --quality-delta=$base..$before --scope=src/mention.h --legend=compact → both rows, gating="2", exit 2; with $base..$after → new-symbol rows only, gating="0", exit 0. Re-run 2026-09-11 with a built_from=766913d02 build: both match the catalog.
-4. duplication: withHeaderAttrAfter | withHeaderField  tokens="122"
-   Catalog §3, "duplication, Type-3: two header writers that each located the same digit run" (catalog commit 553dbadb). Commits: base e3b52d39 → before cf24501d → after 6ef4cb0f.
-   Row, verbatim (e3b52d39..cf24501d): &lt;r kind="duplication" members="src/recall.h::rw::withHeaderAttrAfter | src/recall.h::rw::withHeaderField" tokens="122" p="src/recall.h:1058" gating="1"/&gt;. withHeaderField spelled the same locator, then replace() instead of insert().
-   The locator is now headerFieldDigits, defined once beside the two writers, and each writer states only its own difference: insert or replace. The detector does not agree this is finished. Against the same base the after-tree still gates on the pair: &lt;r kind="duplication" members="src/recall.h::rw::withHeaderAttrAfter | src/recall.h::rw::withHeaderField" tokens="63" p="src/recall.h:1069" gating="1"/&gt;. The catalog classes that residue as a false positive, improvement path IP-4, "An extraction's residue still gates": what the two writers still share is the call to their common helper.
-   Reproduce: base=e3b52d39 before=cf24501d after=6ef4cb0f; git worktree add --detach ../qd-before $before; ./build/ripwire ../qd-before --quality-delta=$base..$before --scope=src/recall.h --legend=compact → tokens="122", gating="1", exit 2; with $base..$after → tokens="63", gating="1", exit 2. Re-run 2026-09-11 with a built_from=766913d02 build: both match the catalog.</a:t>
+              <a:t>SOURCES (agent wiring)
+- “31 MCP verbs … 16 read verbs … 12 flagship reflexes … 3 span-addressed edit verbs” — README.md on main 40a1895b: “One stdio server, 31 verbs — 16 read, 12 flagship-reflex, 3 span-addressed edit”.
+- “18 agent skills” — README.md: “skills/ ships eighteen task-shaped skills”; skills/ holds 18 directories.
+- “12 orchestrator loops” — README.md: “prompts/ holds twelve self-contained orchestrator prompts”, and prompts/ holds 12 .md files besides its own README.md. This card said 11 until 2026-09-11; test/readmedriftcheck.sh arm (I1) gates the README against the directory, and the deck now states the same number.</a:t>
             </a:r>
             <a:endParaRPr lang="en-US" dirty="0"/>
           </a:p>
@@ -3288,10 +3268,7 @@
           <a:p>
             <a:r>
               <a:rPr lang="en-US" dirty="0"/>
-              <a:t>SOURCES (agent wiring)
-- “31 MCP verbs … 16 read verbs … 12 flagship reflexes … 3 span-addressed edit verbs” — README.md on main 40a1895b: “One stdio server, 31 verbs — 16 read, 12 flagship-reflex, 3 span-addressed edit”.
-- “18 agent skills” — README.md: “skills/ ships eighteen task-shaped skills”; skills/ holds 18 directories.
-- “12 orchestrator loops” — README.md: “prompts/ holds twelve self-contained orchestrator prompts”, and prompts/ holds 12 .md files besides its own README.md. This card said 11 until 2026-09-11; test/readmedriftcheck.sh arm (I1) gates the README against the directory, and the deck now states the same number.</a:t>
+              <a:t/>
             </a:r>
             <a:endParaRPr lang="en-US" dirty="0"/>
           </a:p>
@@ -3379,7 +3356,8 @@
           <a:p>
             <a:r>
               <a:rPr lang="en-US" dirty="0"/>
-              <a:t/>
+              <a:t>SOURCES (grammar count only)
+- "24 grammars vendored" — merged: #126, merge commit 1ad9184a (PR body: "vendored fwcd/tree-sitter-kotlin grammar"). Before #126 the count was 23 (commit 680a0a3d); README.md on main 40a1895b says "24 vendored grammars".</a:t>
             </a:r>
             <a:endParaRPr lang="en-US" dirty="0"/>
           </a:p>
@@ -3467,8 +3445,7 @@
           <a:p>
             <a:r>
               <a:rPr lang="en-US" dirty="0"/>
-              <a:t>SOURCES (grammar count only)
-- "24 grammars vendored" — merged: #126, merge commit 1ad9184a (PR body: "vendored fwcd/tree-sitter-kotlin grammar"). Before #126 the count was 23 (commit 680a0a3d); README.md on main 40a1895b says "24 vendored grammars".</a:t>
+              <a:t/>
             </a:r>
             <a:endParaRPr lang="en-US" dirty="0"/>
           </a:p>
@@ -3580,94 +3557,6 @@
             <a:fld id="{F7021451-1387-4CA6-816F-3879F97B5CBC}" type="slidenum">
               <a:rPr lang="en-US"/>
               <a:t>33</a:t>
-            </a:fld>
-            <a:endParaRPr lang="en-US"/>
-          </a:p>
-        </p:txBody>
-      </p:sp>
-    </p:spTree>
-    <p:extLst>
-      <p:ext uri="{BB962C8B-B14F-4D97-AF65-F5344CB8AC3E}">
-        <p14:creationId xmlns:p14="http://schemas.microsoft.com/office/powerpoint/2010/main" val="1024086991"/>
-      </p:ext>
-    </p:extLst>
-  </p:cSld>
-  <p:clrMapOvr>
-    <a:masterClrMapping/>
-  </p:clrMapOvr>
-</p:notes>
-</file>
-
-<file path=ppt/notesSlides/notesSlide34.xml><?xml version="1.0" encoding="utf-8"?>
-<p:notes xmlns:a="http://schemas.openxmlformats.org/drawingml/2006/main" xmlns:r="http://schemas.openxmlformats.org/officeDocument/2006/relationships" xmlns:p="http://schemas.openxmlformats.org/presentationml/2006/main">
-  <p:cSld>
-    <p:spTree>
-      <p:nvGrpSpPr>
-        <p:cNvPr id="1" name=""/>
-        <p:cNvGrpSpPr/>
-        <p:nvPr/>
-      </p:nvGrpSpPr>
-      <p:grpSpPr>
-        <a:xfrm>
-          <a:off x="0" y="0"/>
-          <a:ext cx="0" cy="0"/>
-          <a:chOff x="0" y="0"/>
-          <a:chExt cx="0" cy="0"/>
-        </a:xfrm>
-      </p:grpSpPr>
-      <p:sp>
-        <p:nvSpPr>
-          <p:cNvPr id="2" name="Slide Image Placeholder 1"/>
-          <p:cNvSpPr>
-            <a:spLocks noGrp="1" noRot="1" noChangeAspect="1"/>
-          </p:cNvSpPr>
-          <p:nvPr>
-            <p:ph type="sldImg"/>
-          </p:nvPr>
-        </p:nvSpPr>
-        <p:spPr/>
-      </p:sp>
-      <p:sp>
-        <p:nvSpPr>
-          <p:cNvPr id="3" name="Notes Placeholder 2"/>
-          <p:cNvSpPr>
-            <a:spLocks noGrp="1"/>
-          </p:cNvSpPr>
-          <p:nvPr>
-            <p:ph type="body" idx="1"/>
-          </p:nvPr>
-        </p:nvSpPr>
-        <p:spPr/>
-        <p:txBody>
-          <a:bodyPr/>
-          <a:lstStyle/>
-          <a:p>
-            <a:r>
-              <a:rPr lang="en-US" dirty="0"/>
-              <a:t/>
-            </a:r>
-            <a:endParaRPr lang="en-US" dirty="0"/>
-          </a:p>
-        </p:txBody>
-      </p:sp>
-      <p:sp>
-        <p:nvSpPr>
-          <p:cNvPr id="4" name="Slide Number Placeholder 3"/>
-          <p:cNvSpPr>
-            <a:spLocks noGrp="1"/>
-          </p:cNvSpPr>
-          <p:nvPr>
-            <p:ph type="sldNum" sz="quarter" idx="10"/>
-          </p:nvPr>
-        </p:nvSpPr>
-        <p:spPr/>
-        <p:txBody>
-          <a:bodyPr/>
-          <a:lstStyle/>
-          <a:p>
-            <a:fld id="{F7021451-1387-4CA6-816F-3879F97B5CBC}" type="slidenum">
-              <a:rPr lang="en-US"/>
-              <a:t>34</a:t>
             </a:fld>
             <a:endParaRPr lang="en-US"/>
           </a:p>
@@ -23216,7 +23105,7 @@
                 <a:ea typeface="Arial" pitchFamily="34" charset="-122"/>
                 <a:cs typeface="Arial" pitchFamily="34" charset="-120"/>
               </a:rPr>
-              <a:t>602 gate scripts</a:t>
+              <a:t>606 gate scripts</a:t>
             </a:r>
             <a:endParaRPr lang="en-US" sz="1450" dirty="0"/>
           </a:p>
@@ -23956,7 +23845,7 @@
                 <a:ea typeface="Arial" pitchFamily="34" charset="-122"/>
                 <a:cs typeface="Arial" pitchFamily="34" charset="-120"/>
               </a:rPr>
-              <a:t>602</a:t>
+              <a:t>606</a:t>
             </a:r>
             <a:endParaRPr lang="en-US" sz="4200" dirty="0"/>
           </a:p>
@@ -27024,7 +26913,7 @@
                 <a:ea typeface="Courier New" pitchFamily="34" charset="-122"/>
                 <a:cs typeface="Courier New" pitchFamily="34" charset="-120"/>
               </a:rPr>
-              <a:t>// real findings from ripwire's own history — each one re-derived by a command</a:t>
+              <a:t>// built for the agent's seat</a:t>
             </a:r>
             <a:endParaRPr lang="en-US" sz="1300" dirty="0"/>
           </a:p>
@@ -27063,7 +26952,7 @@
                 <a:ea typeface="Arial" pitchFamily="34" charset="-122"/>
                 <a:cs typeface="Arial" pitchFamily="34" charset="-120"/>
               </a:rPr>
-              <a:t>What --quality-delta catches</a:t>
+              <a:t>One command wires it into your agent</a:t>
             </a:r>
             <a:endParaRPr lang="en-US" sz="3200" dirty="0"/>
           </a:p>
@@ -27077,12 +26966,117 @@
         </p:nvSpPr>
         <p:spPr>
           <a:xfrm>
-            <a:off x="566928" y="1591056"/>
-            <a:ext cx="5463540" cy="2258568"/>
+            <a:off x="566928" y="1783080"/>
+            <a:ext cx="3977640" cy="502920"/>
           </a:xfrm>
           <a:prstGeom prst="roundRect">
             <a:avLst>
-              <a:gd name="adj" fmla="val 3644"/>
+              <a:gd name="adj" fmla="val 10909"/>
+            </a:avLst>
+          </a:prstGeom>
+          <a:solidFill>
+            <a:srgbClr val="1B2432"/>
+          </a:solidFill>
+          <a:ln w="9525">
+            <a:solidFill>
+              <a:srgbClr val="2A3547"/>
+            </a:solidFill>
+            <a:prstDash val="solid"/>
+          </a:ln>
+        </p:spPr>
+      </p:sp>
+      <p:sp>
+        <p:nvSpPr>
+          <p:cNvPr id="5" name="Text 3"/>
+          <p:cNvSpPr/>
+          <p:nvPr/>
+        </p:nvSpPr>
+        <p:spPr>
+          <a:xfrm>
+            <a:off x="621792" y="1783080"/>
+            <a:ext cx="3867912" cy="502920"/>
+          </a:xfrm>
+          <a:prstGeom prst="rect">
+            <a:avLst/>
+          </a:prstGeom>
+          <a:noFill/>
+          <a:ln/>
+        </p:spPr>
+        <p:txBody>
+          <a:bodyPr wrap="square" lIns="508" tIns="508" rIns="508" bIns="508" rtlCol="0" anchor="ctr"/>
+          <a:lstStyle/>
+          <a:p>
+            <a:pPr indent="0" marL="0">
+              <a:buNone/>
+            </a:pPr>
+            <a:r>
+              <a:rPr lang="en-US" sz="1400" dirty="0">
+                <a:solidFill>
+                  <a:srgbClr val="4AC26B"/>
+                </a:solidFill>
+                <a:latin typeface="Courier New" pitchFamily="34" charset="0"/>
+                <a:ea typeface="Courier New" pitchFamily="34" charset="-122"/>
+                <a:cs typeface="Courier New" pitchFamily="34" charset="-120"/>
+              </a:rPr>
+              <a:t>$ ripwire wrap claude</a:t>
+            </a:r>
+            <a:endParaRPr lang="en-US" sz="1400" dirty="0"/>
+          </a:p>
+        </p:txBody>
+      </p:sp>
+      <p:sp>
+        <p:nvSpPr>
+          <p:cNvPr id="6" name="Text 4"/>
+          <p:cNvSpPr/>
+          <p:nvPr/>
+        </p:nvSpPr>
+        <p:spPr>
+          <a:xfrm>
+            <a:off x="4754880" y="1783080"/>
+            <a:ext cx="6766560" cy="502920"/>
+          </a:xfrm>
+          <a:prstGeom prst="rect">
+            <a:avLst/>
+          </a:prstGeom>
+          <a:noFill/>
+          <a:ln/>
+        </p:spPr>
+        <p:txBody>
+          <a:bodyPr wrap="square" lIns="0" tIns="0" rIns="0" bIns="0" rtlCol="0" anchor="ctr"/>
+          <a:lstStyle/>
+          <a:p>
+            <a:pPr indent="0" marL="0">
+              <a:buNone/>
+            </a:pPr>
+            <a:r>
+              <a:rPr lang="en-US" sz="1200" dirty="0">
+                <a:solidFill>
+                  <a:srgbClr val="8B95A5"/>
+                </a:solidFill>
+                <a:latin typeface="Arial" pitchFamily="34" charset="0"/>
+                <a:ea typeface="Arial" pitchFamily="34" charset="-122"/>
+                <a:cs typeface="Arial" pitchFamily="34" charset="-120"/>
+              </a:rPr>
+              <a:t>claude · cursor · codex · windsurf · gemini · aider — or --all to detect every one you have installed</a:t>
+            </a:r>
+            <a:endParaRPr lang="en-US" sz="1200" dirty="0"/>
+          </a:p>
+        </p:txBody>
+      </p:sp>
+      <p:sp>
+        <p:nvSpPr>
+          <p:cNvPr id="7" name="Shape 5"/>
+          <p:cNvSpPr/>
+          <p:nvPr/>
+        </p:nvSpPr>
+        <p:spPr>
+          <a:xfrm>
+            <a:off x="566928" y="2542032"/>
+            <a:ext cx="5440680" cy="1481328"/>
+          </a:xfrm>
+          <a:prstGeom prst="roundRect">
+            <a:avLst>
+              <a:gd name="adj" fmla="val 5556"/>
             </a:avLst>
           </a:prstGeom>
           <a:solidFill>
@@ -27098,335 +27092,79 @@
       </p:sp>
       <p:sp>
         <p:nvSpPr>
-          <p:cNvPr id="5" name="Text 3"/>
-          <p:cNvSpPr/>
-          <p:nvPr/>
-        </p:nvSpPr>
-        <p:spPr>
-          <a:xfrm>
-            <a:off x="694944" y="1645920"/>
-            <a:ext cx="2289048" cy="274320"/>
-          </a:xfrm>
-          <a:prstGeom prst="rect">
-            <a:avLst/>
-          </a:prstGeom>
-          <a:noFill/>
-          <a:ln/>
-        </p:spPr>
-        <p:txBody>
-          <a:bodyPr wrap="square" lIns="0" tIns="0" rIns="0" bIns="0" rtlCol="0" anchor="ctr"/>
-          <a:lstStyle/>
-          <a:p>
-            <a:pPr indent="0" marL="0">
-              <a:buNone/>
-            </a:pPr>
-            <a:r>
-              <a:rPr lang="en-US" sz="1100" b="1" dirty="0">
-                <a:solidFill>
-                  <a:srgbClr val="F2B84B"/>
+          <p:cNvPr id="8" name="Text 6"/>
+          <p:cNvSpPr/>
+          <p:nvPr/>
+        </p:nvSpPr>
+        <p:spPr>
+          <a:xfrm>
+            <a:off x="749808" y="2651760"/>
+            <a:ext cx="5074920" cy="365760"/>
+          </a:xfrm>
+          <a:prstGeom prst="rect">
+            <a:avLst/>
+          </a:prstGeom>
+          <a:noFill/>
+          <a:ln/>
+        </p:spPr>
+        <p:txBody>
+          <a:bodyPr wrap="square" lIns="0" tIns="0" rIns="0" bIns="0" rtlCol="0" anchor="ctr"/>
+          <a:lstStyle/>
+          <a:p>
+            <a:pPr indent="0" marL="0">
+              <a:buNone/>
+            </a:pPr>
+            <a:r>
+              <a:rPr lang="en-US" sz="1400" b="1" dirty="0">
+                <a:solidFill>
+                  <a:srgbClr val="56D6E8"/>
                 </a:solidFill>
                 <a:latin typeface="Courier New" pitchFamily="34" charset="0"/>
                 <a:ea typeface="Courier New" pitchFamily="34" charset="-122"/>
                 <a:cs typeface="Courier New" pitchFamily="34" charset="-120"/>
               </a:rPr>
-              <a:t>new-clone-of-reused-helper</a:t>
-            </a:r>
-            <a:endParaRPr lang="en-US" sz="1100" dirty="0"/>
-          </a:p>
-        </p:txBody>
-      </p:sp>
-      <p:sp>
-        <p:nvSpPr>
-          <p:cNvPr id="6" name="Text 4"/>
-          <p:cNvSpPr/>
-          <p:nvPr/>
-        </p:nvSpPr>
-        <p:spPr>
-          <a:xfrm>
-            <a:off x="3075432" y="1645920"/>
-            <a:ext cx="2827020" cy="274320"/>
-          </a:xfrm>
-          <a:prstGeom prst="rect">
-            <a:avLst/>
-          </a:prstGeom>
-          <a:noFill/>
-          <a:ln/>
-        </p:spPr>
-        <p:txBody>
-          <a:bodyPr wrap="square" lIns="0" tIns="0" rIns="0" bIns="0" rtlCol="0" anchor="ctr"/>
-          <a:lstStyle/>
-          <a:p>
-            <a:pPr indent="0" marL="0">
-              <a:buNone/>
-            </a:pPr>
-            <a:r>
-              <a:rPr lang="en-US" sz="1000" dirty="0">
-                <a:solidFill>
-                  <a:srgbClr val="E6EDF3"/>
-                </a:solidFill>
-                <a:latin typeface="Arial" pitchFamily="34" charset="0"/>
-                <a:ea typeface="Arial" pitchFamily="34" charset="-122"/>
-                <a:cs typeface="Arial" pitchFamily="34" charset="-120"/>
-              </a:rPr>
-              <a:t>registeredMacroNames | vendoredPathPrefixes</a:t>
-            </a:r>
-            <a:endParaRPr lang="en-US" sz="1000" dirty="0"/>
-          </a:p>
-        </p:txBody>
-      </p:sp>
-      <p:sp>
-        <p:nvSpPr>
-          <p:cNvPr id="7" name="Shape 5"/>
-          <p:cNvSpPr/>
-          <p:nvPr/>
-        </p:nvSpPr>
-        <p:spPr>
-          <a:xfrm>
-            <a:off x="694944" y="1975104"/>
-            <a:ext cx="2558034" cy="1527048"/>
-          </a:xfrm>
-          <a:prstGeom prst="rect">
-            <a:avLst/>
-          </a:prstGeom>
-          <a:solidFill>
-            <a:srgbClr val="0D1117"/>
-          </a:solidFill>
-          <a:ln w="6350">
-            <a:solidFill>
-              <a:srgbClr val="232D3D"/>
-            </a:solidFill>
-            <a:prstDash val="solid"/>
-          </a:ln>
-        </p:spPr>
-      </p:sp>
-      <p:sp>
-        <p:nvSpPr>
-          <p:cNvPr id="8" name="Text 6"/>
-          <p:cNvSpPr/>
-          <p:nvPr/>
-        </p:nvSpPr>
-        <p:spPr>
-          <a:xfrm>
-            <a:off x="749808" y="2002536"/>
-            <a:ext cx="2448306" cy="155448"/>
-          </a:xfrm>
-          <a:prstGeom prst="rect">
-            <a:avLst/>
-          </a:prstGeom>
-          <a:noFill/>
-          <a:ln/>
-        </p:spPr>
-        <p:txBody>
-          <a:bodyPr wrap="square" lIns="0" tIns="0" rIns="0" bIns="0" rtlCol="0" anchor="ctr"/>
-          <a:lstStyle/>
-          <a:p>
-            <a:pPr indent="0" marL="0">
-              <a:buNone/>
-            </a:pPr>
-            <a:r>
-              <a:rPr lang="en-US" sz="750" dirty="0">
+              <a:t>31 MCP verbs</a:t>
+            </a:r>
+            <a:endParaRPr lang="en-US" sz="1400" dirty="0"/>
+          </a:p>
+        </p:txBody>
+      </p:sp>
+      <p:sp>
+        <p:nvSpPr>
+          <p:cNvPr id="9" name="Text 7"/>
+          <p:cNvSpPr/>
+          <p:nvPr/>
+        </p:nvSpPr>
+        <p:spPr>
+          <a:xfrm>
+            <a:off x="749808" y="3044952"/>
+            <a:ext cx="5074920" cy="1005840"/>
+          </a:xfrm>
+          <a:prstGeom prst="rect">
+            <a:avLst/>
+          </a:prstGeom>
+          <a:noFill/>
+          <a:ln/>
+        </p:spPr>
+        <p:txBody>
+          <a:bodyPr wrap="square" lIns="0" tIns="0" rIns="0" bIns="0" rtlCol="0" anchor="ctr"/>
+          <a:lstStyle/>
+          <a:p>
+            <a:pPr indent="0" marL="0">
+              <a:buNone/>
+            </a:pPr>
+            <a:r>
+              <a:rPr lang="en-US" sz="1150" dirty="0">
                 <a:solidFill>
                   <a:srgbClr val="8B95A5"/>
                 </a:solidFill>
-                <a:latin typeface="Courier New" pitchFamily="34" charset="0"/>
-                <a:ea typeface="Courier New" pitchFamily="34" charset="-122"/>
-                <a:cs typeface="Courier New" pitchFamily="34" charset="-120"/>
-              </a:rPr>
-              <a:t>before</a:t>
-            </a:r>
-            <a:endParaRPr lang="en-US" sz="750" dirty="0"/>
-          </a:p>
-        </p:txBody>
-      </p:sp>
-      <p:sp>
-        <p:nvSpPr>
-          <p:cNvPr id="9" name="Text 7"/>
-          <p:cNvSpPr/>
-          <p:nvPr/>
-        </p:nvSpPr>
-        <p:spPr>
-          <a:xfrm>
-            <a:off x="749808" y="2167128"/>
-            <a:ext cx="2448306" cy="1307592"/>
-          </a:xfrm>
-          <a:prstGeom prst="rect">
-            <a:avLst/>
-          </a:prstGeom>
-          <a:noFill/>
-          <a:ln/>
-        </p:spPr>
-        <p:txBody>
-          <a:bodyPr wrap="square" lIns="0" tIns="0" rIns="0" bIns="0" rtlCol="0" anchor="t"/>
-          <a:lstStyle/>
-          <a:p>
-            <a:pPr indent="0" marL="0">
-              <a:buNone/>
-            </a:pPr>
-            <a:r>
-              <a:rPr lang="en-US" sz="800" dirty="0">
-                <a:solidFill>
-                  <a:srgbClr val="E6EDF3"/>
-                </a:solidFill>
-                <a:latin typeface="Courier New" pitchFamily="34" charset="0"/>
-                <a:ea typeface="Courier New" pitchFamily="34" charset="-122"/>
-                <a:cs typeface="Courier New" pitchFamily="34" charset="-120"/>
-              </a:rPr>
-              <a:t>std::vector&lt;std::string&gt; out;</a:t>
-            </a:r>
-            <a:endParaRPr lang="en-US" sz="800" dirty="0"/>
-          </a:p>
-          <a:p>
-            <a:pPr indent="0" marL="0">
-              <a:buNone/>
-            </a:pPr>
-            <a:r>
-              <a:rPr lang="en-US" sz="800" dirty="0">
-                <a:solidFill>
-                  <a:srgbClr val="E6EDF3"/>
-                </a:solidFill>
-                <a:latin typeface="Courier New" pitchFamily="34" charset="0"/>
-                <a:ea typeface="Courier New" pitchFamily="34" charset="-122"/>
-                <a:cs typeface="Courier New" pitchFamily="34" charset="-120"/>
-              </a:rPr>
-              <a:t>for( std::string_view p :</a:t>
-            </a:r>
-            <a:endParaRPr lang="en-US" sz="800" dirty="0"/>
-          </a:p>
-          <a:p>
-            <a:pPr indent="0" marL="0">
-              <a:buNone/>
-            </a:pPr>
-            <a:r>
-              <a:rPr lang="en-US" sz="800" dirty="0">
-                <a:solidFill>
-                  <a:srgbClr val="E6EDF3"/>
-                </a:solidFill>
-                <a:latin typeface="Courier New" pitchFamily="34" charset="0"/>
-                <a:ea typeface="Courier New" pitchFamily="34" charset="-122"/>
-                <a:cs typeface="Courier New" pitchFamily="34" charset="-120"/>
-              </a:rPr>
-              <a:t>     kBuiltinVendoredPrefixes )</a:t>
-            </a:r>
-            <a:endParaRPr lang="en-US" sz="800" dirty="0"/>
-          </a:p>
-          <a:p>
-            <a:pPr indent="0" marL="0">
-              <a:buNone/>
-            </a:pPr>
-            <a:r>
-              <a:rPr lang="en-US" sz="800" dirty="0">
-                <a:solidFill>
-                  <a:srgbClr val="E6EDF3"/>
-                </a:solidFill>
-                <a:latin typeface="Courier New" pitchFamily="34" charset="0"/>
-                <a:ea typeface="Courier New" pitchFamily="34" charset="-122"/>
-                <a:cs typeface="Courier New" pitchFamily="34" charset="-120"/>
-              </a:rPr>
-              <a:t>{ … }</a:t>
-            </a:r>
-            <a:endParaRPr lang="en-US" sz="800" dirty="0"/>
-          </a:p>
-          <a:p>
-            <a:pPr indent="0" marL="0">
-              <a:buNone/>
-            </a:pPr>
-            <a:r>
-              <a:rPr lang="en-US" sz="800" dirty="0">
-                <a:solidFill>
-                  <a:srgbClr val="E6EDF3"/>
-                </a:solidFill>
-                <a:latin typeface="Courier New" pitchFamily="34" charset="0"/>
-                <a:ea typeface="Courier New" pitchFamily="34" charset="-122"/>
-                <a:cs typeface="Courier New" pitchFamily="34" charset="-120"/>
-              </a:rPr>
-              <a:t>for( std::string&amp; extra :</a:t>
-            </a:r>
-            <a:endParaRPr lang="en-US" sz="800" dirty="0"/>
-          </a:p>
-          <a:p>
-            <a:pPr indent="0" marL="0">
-              <a:buNone/>
-            </a:pPr>
-            <a:r>
-              <a:rPr lang="en-US" sz="800" dirty="0">
-                <a:solidFill>
-                  <a:srgbClr val="E6EDF3"/>
-                </a:solidFill>
-                <a:latin typeface="Courier New" pitchFamily="34" charset="0"/>
-                <a:ea typeface="Courier New" pitchFamily="34" charset="-122"/>
-                <a:cs typeface="Courier New" pitchFamily="34" charset="-120"/>
-              </a:rPr>
-              <a:t>     readRegisterMacrosConfig( root )</a:t>
-            </a:r>
-            <a:endParaRPr lang="en-US" sz="800" dirty="0"/>
-          </a:p>
-          <a:p>
-            <a:pPr indent="0" marL="0">
-              <a:buNone/>
-            </a:pPr>
-            <a:r>
-              <a:rPr lang="en-US" sz="800" dirty="0">
-                <a:solidFill>
-                  <a:srgbClr val="E6EDF3"/>
-                </a:solidFill>
-                <a:latin typeface="Courier New" pitchFamily="34" charset="0"/>
-                <a:ea typeface="Courier New" pitchFamily="34" charset="-122"/>
-                <a:cs typeface="Courier New" pitchFamily="34" charset="-120"/>
-              </a:rPr>
-              <a:t>         .vendoredPaths )</a:t>
-            </a:r>
-            <a:endParaRPr lang="en-US" sz="800" dirty="0"/>
-          </a:p>
-          <a:p>
-            <a:pPr indent="0" marL="0">
-              <a:buNone/>
-            </a:pPr>
-            <a:r>
-              <a:rPr lang="en-US" sz="800" dirty="0">
-                <a:solidFill>
-                  <a:srgbClr val="E6EDF3"/>
-                </a:solidFill>
-                <a:latin typeface="Courier New" pitchFamily="34" charset="0"/>
-                <a:ea typeface="Courier New" pitchFamily="34" charset="-122"/>
-                <a:cs typeface="Courier New" pitchFamily="34" charset="-120"/>
-              </a:rPr>
-              <a:t>{ … }</a:t>
-            </a:r>
-            <a:endParaRPr lang="en-US" sz="800" dirty="0"/>
-          </a:p>
-          <a:p>
-            <a:pPr indent="0" marL="0">
-              <a:buNone/>
-            </a:pPr>
-            <a:r>
-              <a:rPr lang="en-US" sz="800" dirty="0">
-                <a:solidFill>
-                  <a:srgbClr val="E6EDF3"/>
-                </a:solidFill>
-                <a:latin typeface="Courier New" pitchFamily="34" charset="0"/>
-                <a:ea typeface="Courier New" pitchFamily="34" charset="-122"/>
-                <a:cs typeface="Courier New" pitchFamily="34" charset="-120"/>
-              </a:rPr>
-              <a:t>std::sort( out.begin(), out.end() );</a:t>
-            </a:r>
-            <a:endParaRPr lang="en-US" sz="800" dirty="0"/>
-          </a:p>
-          <a:p>
-            <a:pPr indent="0" marL="0">
-              <a:buNone/>
-            </a:pPr>
-            <a:r>
-              <a:rPr lang="en-US" sz="800" dirty="0">
-                <a:solidFill>
-                  <a:srgbClr val="E6EDF3"/>
-                </a:solidFill>
-                <a:latin typeface="Courier New" pitchFamily="34" charset="0"/>
-                <a:ea typeface="Courier New" pitchFamily="34" charset="-122"/>
-                <a:cs typeface="Courier New" pitchFamily="34" charset="-120"/>
-              </a:rPr>
-              <a:t>out.erase( std::unique( … ), … );</a:t>
-            </a:r>
-            <a:endParaRPr lang="en-US" sz="800" dirty="0"/>
+                <a:latin typeface="Arial" pitchFamily="34" charset="0"/>
+                <a:ea typeface="Arial" pitchFamily="34" charset="-122"/>
+                <a:cs typeface="Arial" pitchFamily="34" charset="-120"/>
+              </a:rPr>
+              <a:t>16 read verbs mirroring the CLI, 12 flagship reflexes (impact, uses, edit_check, from_trace, connect …), 3 span-addressed edit verbs with a safety contract</a:t>
+            </a:r>
+            <a:endParaRPr lang="en-US" sz="1150" dirty="0"/>
           </a:p>
         </p:txBody>
       </p:sp>
@@ -27438,307 +27176,12 @@
         </p:nvSpPr>
         <p:spPr>
           <a:xfrm>
-            <a:off x="3344418" y="1975104"/>
-            <a:ext cx="2558034" cy="1527048"/>
-          </a:xfrm>
-          <a:prstGeom prst="rect">
-            <a:avLst/>
-          </a:prstGeom>
-          <a:solidFill>
-            <a:srgbClr val="0D1117"/>
-          </a:solidFill>
-          <a:ln w="6350">
-            <a:solidFill>
-              <a:srgbClr val="232D3D"/>
-            </a:solidFill>
-            <a:prstDash val="solid"/>
-          </a:ln>
-        </p:spPr>
-      </p:sp>
-      <p:sp>
-        <p:nvSpPr>
-          <p:cNvPr id="11" name="Text 9"/>
-          <p:cNvSpPr/>
-          <p:nvPr/>
-        </p:nvSpPr>
-        <p:spPr>
-          <a:xfrm>
-            <a:off x="3399282" y="2002536"/>
-            <a:ext cx="2448306" cy="155448"/>
-          </a:xfrm>
-          <a:prstGeom prst="rect">
-            <a:avLst/>
-          </a:prstGeom>
-          <a:noFill/>
-          <a:ln/>
-        </p:spPr>
-        <p:txBody>
-          <a:bodyPr wrap="square" lIns="0" tIns="0" rIns="0" bIns="0" rtlCol="0" anchor="ctr"/>
-          <a:lstStyle/>
-          <a:p>
-            <a:pPr indent="0" marL="0">
-              <a:buNone/>
-            </a:pPr>
-            <a:r>
-              <a:rPr lang="en-US" sz="750" dirty="0">
-                <a:solidFill>
-                  <a:srgbClr val="8B95A5"/>
-                </a:solidFill>
-                <a:latin typeface="Courier New" pitchFamily="34" charset="0"/>
-                <a:ea typeface="Courier New" pitchFamily="34" charset="-122"/>
-                <a:cs typeface="Courier New" pitchFamily="34" charset="-120"/>
-              </a:rPr>
-              <a:t>after</a:t>
-            </a:r>
-            <a:endParaRPr lang="en-US" sz="750" dirty="0"/>
-          </a:p>
-        </p:txBody>
-      </p:sp>
-      <p:sp>
-        <p:nvSpPr>
-          <p:cNvPr id="12" name="Text 10"/>
-          <p:cNvSpPr/>
-          <p:nvPr/>
-        </p:nvSpPr>
-        <p:spPr>
-          <a:xfrm>
-            <a:off x="3399282" y="2167128"/>
-            <a:ext cx="2448306" cy="1307592"/>
-          </a:xfrm>
-          <a:prstGeom prst="rect">
-            <a:avLst/>
-          </a:prstGeom>
-          <a:noFill/>
-          <a:ln/>
-        </p:spPr>
-        <p:txBody>
-          <a:bodyPr wrap="square" lIns="0" tIns="0" rIns="0" bIns="0" rtlCol="0" anchor="t"/>
-          <a:lstStyle/>
-          <a:p>
-            <a:pPr indent="0" marL="0">
-              <a:buNone/>
-            </a:pPr>
-            <a:r>
-              <a:rPr lang="en-US" sz="800" dirty="0">
-                <a:solidFill>
-                  <a:srgbClr val="E6EDF3"/>
-                </a:solidFill>
-                <a:latin typeface="Courier New" pitchFamily="34" charset="0"/>
-                <a:ea typeface="Courier New" pitchFamily="34" charset="-122"/>
-                <a:cs typeface="Courier New" pitchFamily="34" charset="-120"/>
-              </a:rPr>
-              <a:t>inline std::vector&lt;std::string&gt;</a:t>
-            </a:r>
-            <a:endParaRPr lang="en-US" sz="800" dirty="0"/>
-          </a:p>
-          <a:p>
-            <a:pPr indent="0" marL="0">
-              <a:buNone/>
-            </a:pPr>
-            <a:r>
-              <a:rPr lang="en-US" sz="800" dirty="0">
-                <a:solidFill>
-                  <a:srgbClr val="E6EDF3"/>
-                </a:solidFill>
-                <a:latin typeface="Courier New" pitchFamily="34" charset="0"/>
-                <a:ea typeface="Courier New" pitchFamily="34" charset="-122"/>
-                <a:cs typeface="Courier New" pitchFamily="34" charset="-120"/>
-              </a:rPr>
-              <a:t>mergeBuiltinsWithConfig( … builtins,</a:t>
-            </a:r>
-            <a:endParaRPr lang="en-US" sz="800" dirty="0"/>
-          </a:p>
-          <a:p>
-            <a:pPr indent="0" marL="0">
-              <a:buNone/>
-            </a:pPr>
-            <a:r>
-              <a:rPr lang="en-US" sz="800" dirty="0">
-                <a:solidFill>
-                  <a:srgbClr val="E6EDF3"/>
-                </a:solidFill>
-                <a:latin typeface="Courier New" pitchFamily="34" charset="0"/>
-                <a:ea typeface="Courier New" pitchFamily="34" charset="-122"/>
-                <a:cs typeface="Courier New" pitchFamily="34" charset="-120"/>
-              </a:rPr>
-              <a:t>    … fromConfig )</a:t>
-            </a:r>
-            <a:endParaRPr lang="en-US" sz="800" dirty="0"/>
-          </a:p>
-          <a:p>
-            <a:pPr indent="0" marL="0">
-              <a:buNone/>
-            </a:pPr>
-            <a:r>
-              <a:rPr lang="en-US" sz="800" dirty="0">
-                <a:solidFill>
-                  <a:srgbClr val="E6EDF3"/>
-                </a:solidFill>
-                <a:latin typeface="Courier New" pitchFamily="34" charset="0"/>
-                <a:ea typeface="Courier New" pitchFamily="34" charset="-122"/>
-                <a:cs typeface="Courier New" pitchFamily="34" charset="-120"/>
-              </a:rPr>
-              <a:t>// … reserve, append both lists,</a:t>
-            </a:r>
-            <a:endParaRPr lang="en-US" sz="800" dirty="0"/>
-          </a:p>
-          <a:p>
-            <a:pPr indent="0" marL="0">
-              <a:buNone/>
-            </a:pPr>
-            <a:r>
-              <a:rPr lang="en-US" sz="800" dirty="0">
-                <a:solidFill>
-                  <a:srgbClr val="E6EDF3"/>
-                </a:solidFill>
-                <a:latin typeface="Courier New" pitchFamily="34" charset="0"/>
-                <a:ea typeface="Courier New" pitchFamily="34" charset="-122"/>
-                <a:cs typeface="Courier New" pitchFamily="34" charset="-120"/>
-              </a:rPr>
-              <a:t>//   sort, unique</a:t>
-            </a:r>
-            <a:endParaRPr lang="en-US" sz="800" dirty="0"/>
-          </a:p>
-          <a:p>
-            <a:pPr indent="0" marL="0">
-              <a:buNone/>
-            </a:pPr>
-            <a:r>
-              <a:rPr lang="en-US" sz="800" dirty="0">
-                <a:solidFill>
-                  <a:srgbClr val="E6EDF3"/>
-                </a:solidFill>
-                <a:latin typeface="Courier New" pitchFamily="34" charset="0"/>
-                <a:ea typeface="Courier New" pitchFamily="34" charset="-122"/>
-                <a:cs typeface="Courier New" pitchFamily="34" charset="-120"/>
-              </a:rPr>
-              <a:t>// vendoredPathPrefixes( root ):</a:t>
-            </a:r>
-            <a:endParaRPr lang="en-US" sz="800" dirty="0"/>
-          </a:p>
-          <a:p>
-            <a:pPr indent="0" marL="0">
-              <a:buNone/>
-            </a:pPr>
-            <a:r>
-              <a:rPr lang="en-US" sz="800" dirty="0">
-                <a:solidFill>
-                  <a:srgbClr val="E6EDF3"/>
-                </a:solidFill>
-                <a:latin typeface="Courier New" pitchFamily="34" charset="0"/>
-                <a:ea typeface="Courier New" pitchFamily="34" charset="-122"/>
-                <a:cs typeface="Courier New" pitchFamily="34" charset="-120"/>
-              </a:rPr>
-              <a:t>return mergeBuiltinsWithConfig(</a:t>
-            </a:r>
-            <a:endParaRPr lang="en-US" sz="800" dirty="0"/>
-          </a:p>
-          <a:p>
-            <a:pPr indent="0" marL="0">
-              <a:buNone/>
-            </a:pPr>
-            <a:r>
-              <a:rPr lang="en-US" sz="800" dirty="0">
-                <a:solidFill>
-                  <a:srgbClr val="E6EDF3"/>
-                </a:solidFill>
-                <a:latin typeface="Courier New" pitchFamily="34" charset="0"/>
-                <a:ea typeface="Courier New" pitchFamily="34" charset="-122"/>
-                <a:cs typeface="Courier New" pitchFamily="34" charset="-120"/>
-              </a:rPr>
-              <a:t>    kBuiltinVendoredPrefixes,</a:t>
-            </a:r>
-            <a:endParaRPr lang="en-US" sz="800" dirty="0"/>
-          </a:p>
-          <a:p>
-            <a:pPr indent="0" marL="0">
-              <a:buNone/>
-            </a:pPr>
-            <a:r>
-              <a:rPr lang="en-US" sz="800" dirty="0">
-                <a:solidFill>
-                  <a:srgbClr val="E6EDF3"/>
-                </a:solidFill>
-                <a:latin typeface="Courier New" pitchFamily="34" charset="0"/>
-                <a:ea typeface="Courier New" pitchFamily="34" charset="-122"/>
-                <a:cs typeface="Courier New" pitchFamily="34" charset="-120"/>
-              </a:rPr>
-              <a:t>    readRegisterMacrosConfig( root )</a:t>
-            </a:r>
-            <a:endParaRPr lang="en-US" sz="800" dirty="0"/>
-          </a:p>
-          <a:p>
-            <a:pPr indent="0" marL="0">
-              <a:buNone/>
-            </a:pPr>
-            <a:r>
-              <a:rPr lang="en-US" sz="800" dirty="0">
-                <a:solidFill>
-                  <a:srgbClr val="E6EDF3"/>
-                </a:solidFill>
-                <a:latin typeface="Courier New" pitchFamily="34" charset="0"/>
-                <a:ea typeface="Courier New" pitchFamily="34" charset="-122"/>
-                <a:cs typeface="Courier New" pitchFamily="34" charset="-120"/>
-              </a:rPr>
-              <a:t>        .vendoredPaths );</a:t>
-            </a:r>
-            <a:endParaRPr lang="en-US" sz="800" dirty="0"/>
-          </a:p>
-        </p:txBody>
-      </p:sp>
-      <p:sp>
-        <p:nvSpPr>
-          <p:cNvPr id="13" name="Text 11"/>
-          <p:cNvSpPr/>
-          <p:nvPr/>
-        </p:nvSpPr>
-        <p:spPr>
-          <a:xfrm>
-            <a:off x="694944" y="3529584"/>
-            <a:ext cx="5207508" cy="274320"/>
-          </a:xfrm>
-          <a:prstGeom prst="rect">
-            <a:avLst/>
-          </a:prstGeom>
-          <a:noFill/>
-          <a:ln/>
-        </p:spPr>
-        <p:txBody>
-          <a:bodyPr wrap="square" lIns="0" tIns="0" rIns="0" bIns="0" rtlCol="0" anchor="ctr"/>
-          <a:lstStyle/>
-          <a:p>
-            <a:pPr indent="0" marL="0">
-              <a:buNone/>
-            </a:pPr>
-            <a:r>
-              <a:rPr lang="en-US" sz="950" i="1" dirty="0">
-                <a:solidFill>
-                  <a:srgbClr val="8B95A5"/>
-                </a:solidFill>
-                <a:latin typeface="Arial" pitchFamily="34" charset="0"/>
-                <a:ea typeface="Arial" pitchFamily="34" charset="-122"/>
-                <a:cs typeface="Arial" pitchFamily="34" charset="-120"/>
-              </a:rPr>
-              <a:t>A helper with three callers, copied while building the feature that measures copies.</a:t>
-            </a:r>
-            <a:endParaRPr lang="en-US" sz="950" dirty="0"/>
-          </a:p>
-        </p:txBody>
-      </p:sp>
-      <p:sp>
-        <p:nvSpPr>
-          <p:cNvPr id="14" name="Shape 12"/>
-          <p:cNvSpPr/>
-          <p:nvPr/>
-        </p:nvSpPr>
-        <p:spPr>
-          <a:xfrm>
-            <a:off x="6158484" y="1591056"/>
-            <a:ext cx="5463540" cy="2258568"/>
+            <a:off x="6181344" y="2542032"/>
+            <a:ext cx="5440680" cy="1481328"/>
           </a:xfrm>
           <a:prstGeom prst="roundRect">
             <a:avLst>
-              <a:gd name="adj" fmla="val 3644"/>
+              <a:gd name="adj" fmla="val 5556"/>
             </a:avLst>
           </a:prstGeom>
           <a:solidFill>
@@ -27754,647 +27197,96 @@
       </p:sp>
       <p:sp>
         <p:nvSpPr>
-          <p:cNvPr id="15" name="Text 13"/>
-          <p:cNvSpPr/>
-          <p:nvPr/>
-        </p:nvSpPr>
-        <p:spPr>
-          <a:xfrm>
-            <a:off x="6286500" y="1645920"/>
-            <a:ext cx="822960" cy="274320"/>
-          </a:xfrm>
-          <a:prstGeom prst="rect">
-            <a:avLst/>
-          </a:prstGeom>
-          <a:noFill/>
-          <a:ln/>
-        </p:spPr>
-        <p:txBody>
-          <a:bodyPr wrap="square" lIns="0" tIns="0" rIns="0" bIns="0" rtlCol="0" anchor="ctr"/>
-          <a:lstStyle/>
-          <a:p>
-            <a:pPr indent="0" marL="0">
-              <a:buNone/>
-            </a:pPr>
-            <a:r>
-              <a:rPr lang="en-US" sz="1100" b="1" dirty="0">
-                <a:solidFill>
-                  <a:srgbClr val="F2B84B"/>
+          <p:cNvPr id="11" name="Text 9"/>
+          <p:cNvSpPr/>
+          <p:nvPr/>
+        </p:nvSpPr>
+        <p:spPr>
+          <a:xfrm>
+            <a:off x="6364224" y="2651760"/>
+            <a:ext cx="5074920" cy="365760"/>
+          </a:xfrm>
+          <a:prstGeom prst="rect">
+            <a:avLst/>
+          </a:prstGeom>
+          <a:noFill/>
+          <a:ln/>
+        </p:spPr>
+        <p:txBody>
+          <a:bodyPr wrap="square" lIns="0" tIns="0" rIns="0" bIns="0" rtlCol="0" anchor="ctr"/>
+          <a:lstStyle/>
+          <a:p>
+            <a:pPr indent="0" marL="0">
+              <a:buNone/>
+            </a:pPr>
+            <a:r>
+              <a:rPr lang="en-US" sz="1400" b="1" dirty="0">
+                <a:solidFill>
+                  <a:srgbClr val="56D6E8"/>
                 </a:solidFill>
                 <a:latin typeface="Courier New" pitchFamily="34" charset="0"/>
                 <a:ea typeface="Courier New" pitchFamily="34" charset="-122"/>
                 <a:cs typeface="Courier New" pitchFamily="34" charset="-120"/>
               </a:rPr>
-              <a:t>nesting</a:t>
-            </a:r>
-            <a:endParaRPr lang="en-US" sz="1100" dirty="0"/>
-          </a:p>
-        </p:txBody>
-      </p:sp>
-      <p:sp>
-        <p:nvSpPr>
-          <p:cNvPr id="16" name="Text 14"/>
-          <p:cNvSpPr/>
-          <p:nvPr/>
-        </p:nvSpPr>
-        <p:spPr>
-          <a:xfrm>
-            <a:off x="7200900" y="1645920"/>
-            <a:ext cx="4293108" cy="274320"/>
-          </a:xfrm>
-          <a:prstGeom prst="rect">
-            <a:avLst/>
-          </a:prstGeom>
-          <a:noFill/>
-          <a:ln/>
-        </p:spPr>
-        <p:txBody>
-          <a:bodyPr wrap="square" lIns="0" tIns="0" rIns="0" bIns="0" rtlCol="0" anchor="ctr"/>
-          <a:lstStyle/>
-          <a:p>
-            <a:pPr indent="0" marL="0">
-              <a:buNone/>
-            </a:pPr>
-            <a:r>
-              <a:rPr lang="en-US" sz="1000" dirty="0">
-                <a:solidFill>
-                  <a:srgbClr val="E6EDF3"/>
-                </a:solidFill>
-                <a:latin typeface="Arial" pitchFamily="34" charset="0"/>
-                <a:ea typeface="Arial" pitchFamily="34" charset="-122"/>
-                <a:cs typeface="Arial" pitchFamily="34" charset="-120"/>
-              </a:rPr>
-              <a:t>runChangeViews was="6" now="8" · complexity was="141" now="178"</a:t>
-            </a:r>
-            <a:endParaRPr lang="en-US" sz="1000" dirty="0"/>
-          </a:p>
-        </p:txBody>
-      </p:sp>
-      <p:sp>
-        <p:nvSpPr>
-          <p:cNvPr id="17" name="Shape 15"/>
-          <p:cNvSpPr/>
-          <p:nvPr/>
-        </p:nvSpPr>
-        <p:spPr>
-          <a:xfrm>
-            <a:off x="6286500" y="1975104"/>
-            <a:ext cx="2558034" cy="1527048"/>
-          </a:xfrm>
-          <a:prstGeom prst="rect">
-            <a:avLst/>
-          </a:prstGeom>
-          <a:solidFill>
-            <a:srgbClr val="0D1117"/>
-          </a:solidFill>
-          <a:ln w="6350">
-            <a:solidFill>
-              <a:srgbClr val="232D3D"/>
-            </a:solidFill>
-            <a:prstDash val="solid"/>
-          </a:ln>
-        </p:spPr>
-      </p:sp>
-      <p:sp>
-        <p:nvSpPr>
-          <p:cNvPr id="18" name="Text 16"/>
-          <p:cNvSpPr/>
-          <p:nvPr/>
-        </p:nvSpPr>
-        <p:spPr>
-          <a:xfrm>
-            <a:off x="6341364" y="2002536"/>
-            <a:ext cx="2448306" cy="155448"/>
-          </a:xfrm>
-          <a:prstGeom prst="rect">
-            <a:avLst/>
-          </a:prstGeom>
-          <a:noFill/>
-          <a:ln/>
-        </p:spPr>
-        <p:txBody>
-          <a:bodyPr wrap="square" lIns="0" tIns="0" rIns="0" bIns="0" rtlCol="0" anchor="ctr"/>
-          <a:lstStyle/>
-          <a:p>
-            <a:pPr indent="0" marL="0">
-              <a:buNone/>
-            </a:pPr>
-            <a:r>
-              <a:rPr lang="en-US" sz="750" dirty="0">
+              <a:t>lazy-body handles</a:t>
+            </a:r>
+            <a:endParaRPr lang="en-US" sz="1400" dirty="0"/>
+          </a:p>
+        </p:txBody>
+      </p:sp>
+      <p:sp>
+        <p:nvSpPr>
+          <p:cNvPr id="12" name="Text 10"/>
+          <p:cNvSpPr/>
+          <p:nvPr/>
+        </p:nvSpPr>
+        <p:spPr>
+          <a:xfrm>
+            <a:off x="6364224" y="3044952"/>
+            <a:ext cx="5074920" cy="1005840"/>
+          </a:xfrm>
+          <a:prstGeom prst="rect">
+            <a:avLst/>
+          </a:prstGeom>
+          <a:noFill/>
+          <a:ln/>
+        </p:spPr>
+        <p:txBody>
+          <a:bodyPr wrap="square" lIns="0" tIns="0" rIns="0" bIns="0" rtlCol="0" anchor="ctr"/>
+          <a:lstStyle/>
+          <a:p>
+            <a:pPr indent="0" marL="0">
+              <a:buNone/>
+            </a:pPr>
+            <a:r>
+              <a:rPr lang="en-US" sz="1150" dirty="0">
                 <a:solidFill>
                   <a:srgbClr val="8B95A5"/>
                 </a:solidFill>
-                <a:latin typeface="Courier New" pitchFamily="34" charset="0"/>
-                <a:ea typeface="Courier New" pitchFamily="34" charset="-122"/>
-                <a:cs typeface="Courier New" pitchFamily="34" charset="-120"/>
-              </a:rPr>
-              <a:t>before</a:t>
-            </a:r>
-            <a:endParaRPr lang="en-US" sz="750" dirty="0"/>
-          </a:p>
-        </p:txBody>
-      </p:sp>
-      <p:sp>
-        <p:nvSpPr>
-          <p:cNvPr id="19" name="Text 17"/>
-          <p:cNvSpPr/>
-          <p:nvPr/>
-        </p:nvSpPr>
-        <p:spPr>
-          <a:xfrm>
-            <a:off x="6341364" y="2167128"/>
-            <a:ext cx="2448306" cy="1307592"/>
-          </a:xfrm>
-          <a:prstGeom prst="rect">
-            <a:avLst/>
-          </a:prstGeom>
-          <a:noFill/>
-          <a:ln/>
-        </p:spPr>
-        <p:txBody>
-          <a:bodyPr wrap="square" lIns="0" tIns="0" rIns="0" bIns="0" rtlCol="0" anchor="t"/>
-          <a:lstStyle/>
-          <a:p>
-            <a:pPr indent="0" marL="0">
-              <a:buNone/>
-            </a:pPr>
-            <a:r>
-              <a:rPr lang="en-US" sz="800" dirty="0">
-                <a:solidFill>
-                  <a:srgbClr val="E6EDF3"/>
-                </a:solidFill>
-                <a:latin typeface="Courier New" pitchFamily="34" charset="0"/>
-                <a:ea typeface="Courier New" pitchFamily="34" charset="-122"/>
-                <a:cs typeface="Courier New" pitchFamily="34" charset="-120"/>
-              </a:rPr>
-              <a:t>for( … o &lt; ws.size(); ++o )</a:t>
-            </a:r>
-            <a:endParaRPr lang="en-US" sz="800" dirty="0"/>
-          </a:p>
-          <a:p>
-            <a:pPr indent="0" marL="0">
-              <a:buNone/>
-            </a:pPr>
-            <a:r>
-              <a:rPr lang="en-US" sz="800" dirty="0">
-                <a:solidFill>
-                  <a:srgbClr val="E6EDF3"/>
-                </a:solidFill>
-                <a:latin typeface="Courier New" pitchFamily="34" charset="0"/>
-                <a:ea typeface="Courier New" pitchFamily="34" charset="-122"/>
-                <a:cs typeface="Courier New" pitchFamily="34" charset="-120"/>
-              </a:rPr>
-              <a:t>{</a:t>
-            </a:r>
-            <a:endParaRPr lang="en-US" sz="800" dirty="0"/>
-          </a:p>
-          <a:p>
-            <a:pPr indent="0" marL="0">
-              <a:buNone/>
-            </a:pPr>
-            <a:r>
-              <a:rPr lang="en-US" sz="800" dirty="0">
-                <a:solidFill>
-                  <a:srgbClr val="E6EDF3"/>
-                </a:solidFill>
-                <a:latin typeface="Courier New" pitchFamily="34" charset="0"/>
-                <a:ea typeface="Courier New" pitchFamily="34" charset="-122"/>
-                <a:cs typeface="Courier New" pitchFamily="34" charset="-120"/>
-              </a:rPr>
-              <a:t>    if( o == r ) { continue; }</a:t>
-            </a:r>
-            <a:endParaRPr lang="en-US" sz="800" dirty="0"/>
-          </a:p>
-          <a:p>
-            <a:pPr indent="0" marL="0">
-              <a:buNone/>
-            </a:pPr>
-            <a:r>
-              <a:rPr lang="en-US" sz="800" dirty="0">
-                <a:solidFill>
-                  <a:srgbClr val="E6EDF3"/>
-                </a:solidFill>
-                <a:latin typeface="Courier New" pitchFamily="34" charset="0"/>
-                <a:ea typeface="Courier New" pitchFamily="34" charset="-122"/>
-                <a:cs typeface="Courier New" pitchFamily="34" charset="-120"/>
-              </a:rPr>
-              <a:t>    for( char c : perRootChanged[o] )</a:t>
-            </a:r>
-            <a:endParaRPr lang="en-US" sz="800" dirty="0"/>
-          </a:p>
-          <a:p>
-            <a:pPr indent="0" marL="0">
-              <a:buNone/>
-            </a:pPr>
-            <a:r>
-              <a:rPr lang="en-US" sz="800" dirty="0">
-                <a:solidFill>
-                  <a:srgbClr val="E6EDF3"/>
-                </a:solidFill>
-                <a:latin typeface="Courier New" pitchFamily="34" charset="0"/>
-                <a:ea typeface="Courier New" pitchFamily="34" charset="-122"/>
-                <a:cs typeface="Courier New" pitchFamily="34" charset="-120"/>
-              </a:rPr>
-              <a:t>    {</a:t>
-            </a:r>
-            <a:endParaRPr lang="en-US" sz="800" dirty="0"/>
-          </a:p>
-          <a:p>
-            <a:pPr indent="0" marL="0">
-              <a:buNone/>
-            </a:pPr>
-            <a:r>
-              <a:rPr lang="en-US" sz="800" dirty="0">
-                <a:solidFill>
-                  <a:srgbClr val="E6EDF3"/>
-                </a:solidFill>
-                <a:latin typeface="Courier New" pitchFamily="34" charset="0"/>
-                <a:ea typeface="Courier New" pitchFamily="34" charset="-122"/>
-                <a:cs typeface="Courier New" pitchFamily="34" charset="-120"/>
-              </a:rPr>
-              <a:t>        if( c )</a:t>
-            </a:r>
-            <a:endParaRPr lang="en-US" sz="800" dirty="0"/>
-          </a:p>
-          <a:p>
-            <a:pPr indent="0" marL="0">
-              <a:buNone/>
-            </a:pPr>
-            <a:r>
-              <a:rPr lang="en-US" sz="800" dirty="0">
-                <a:solidFill>
-                  <a:srgbClr val="E6EDF3"/>
-                </a:solidFill>
-                <a:latin typeface="Courier New" pitchFamily="34" charset="0"/>
-                <a:ea typeface="Courier New" pitchFamily="34" charset="-122"/>
-                <a:cs typeface="Courier New" pitchFamily="34" charset="-120"/>
-              </a:rPr>
-              <a:t>        {</a:t>
-            </a:r>
-            <a:endParaRPr lang="en-US" sz="800" dirty="0"/>
-          </a:p>
-          <a:p>
-            <a:pPr indent="0" marL="0">
-              <a:buNone/>
-            </a:pPr>
-            <a:r>
-              <a:rPr lang="en-US" sz="800" dirty="0">
-                <a:solidFill>
-                  <a:srgbClr val="E6EDF3"/>
-                </a:solidFill>
-                <a:latin typeface="Courier New" pitchFamily="34" charset="0"/>
-                <a:ea typeface="Courier New" pitchFamily="34" charset="-122"/>
-                <a:cs typeface="Courier New" pitchFamily="34" charset="-120"/>
-              </a:rPr>
-              <a:t>            if( !elsewhere.empty() ) …</a:t>
-            </a:r>
-            <a:endParaRPr lang="en-US" sz="800" dirty="0"/>
-          </a:p>
-          <a:p>
-            <a:pPr indent="0" marL="0">
-              <a:buNone/>
-            </a:pPr>
-            <a:r>
-              <a:rPr lang="en-US" sz="800" dirty="0">
-                <a:solidFill>
-                  <a:srgbClr val="E6EDF3"/>
-                </a:solidFill>
-                <a:latin typeface="Courier New" pitchFamily="34" charset="0"/>
-                <a:ea typeface="Courier New" pitchFamily="34" charset="-122"/>
-                <a:cs typeface="Courier New" pitchFamily="34" charset="-120"/>
-              </a:rPr>
-              <a:t>            elsewhere += ws[o].label;</a:t>
-            </a:r>
-            <a:endParaRPr lang="en-US" sz="800" dirty="0"/>
-          </a:p>
-          <a:p>
-            <a:pPr indent="0" marL="0">
-              <a:buNone/>
-            </a:pPr>
-            <a:r>
-              <a:rPr lang="en-US" sz="800" dirty="0">
-                <a:solidFill>
-                  <a:srgbClr val="E6EDF3"/>
-                </a:solidFill>
-                <a:latin typeface="Courier New" pitchFamily="34" charset="0"/>
-                <a:ea typeface="Courier New" pitchFamily="34" charset="-122"/>
-                <a:cs typeface="Courier New" pitchFamily="34" charset="-120"/>
-              </a:rPr>
-              <a:t>            break;</a:t>
-            </a:r>
-            <a:endParaRPr lang="en-US" sz="800" dirty="0"/>
-          </a:p>
-        </p:txBody>
-      </p:sp>
-      <p:sp>
-        <p:nvSpPr>
-          <p:cNvPr id="20" name="Shape 18"/>
-          <p:cNvSpPr/>
-          <p:nvPr/>
-        </p:nvSpPr>
-        <p:spPr>
-          <a:xfrm>
-            <a:off x="8935974" y="1975104"/>
-            <a:ext cx="2558034" cy="1527048"/>
-          </a:xfrm>
-          <a:prstGeom prst="rect">
-            <a:avLst/>
-          </a:prstGeom>
-          <a:solidFill>
-            <a:srgbClr val="0D1117"/>
-          </a:solidFill>
-          <a:ln w="6350">
-            <a:solidFill>
-              <a:srgbClr val="232D3D"/>
-            </a:solidFill>
-            <a:prstDash val="solid"/>
-          </a:ln>
-        </p:spPr>
-      </p:sp>
-      <p:sp>
-        <p:nvSpPr>
-          <p:cNvPr id="21" name="Text 19"/>
-          <p:cNvSpPr/>
-          <p:nvPr/>
-        </p:nvSpPr>
-        <p:spPr>
-          <a:xfrm>
-            <a:off x="8990838" y="2002536"/>
-            <a:ext cx="2448306" cy="155448"/>
-          </a:xfrm>
-          <a:prstGeom prst="rect">
-            <a:avLst/>
-          </a:prstGeom>
-          <a:noFill/>
-          <a:ln/>
-        </p:spPr>
-        <p:txBody>
-          <a:bodyPr wrap="square" lIns="0" tIns="0" rIns="0" bIns="0" rtlCol="0" anchor="ctr"/>
-          <a:lstStyle/>
-          <a:p>
-            <a:pPr indent="0" marL="0">
-              <a:buNone/>
-            </a:pPr>
-            <a:r>
-              <a:rPr lang="en-US" sz="750" dirty="0">
-                <a:solidFill>
-                  <a:srgbClr val="8B95A5"/>
-                </a:solidFill>
-                <a:latin typeface="Courier New" pitchFamily="34" charset="0"/>
-                <a:ea typeface="Courier New" pitchFamily="34" charset="-122"/>
-                <a:cs typeface="Courier New" pitchFamily="34" charset="-120"/>
-              </a:rPr>
-              <a:t>after</a:t>
-            </a:r>
-            <a:endParaRPr lang="en-US" sz="750" dirty="0"/>
-          </a:p>
-        </p:txBody>
-      </p:sp>
-      <p:sp>
-        <p:nvSpPr>
-          <p:cNvPr id="22" name="Text 20"/>
-          <p:cNvSpPr/>
-          <p:nvPr/>
-        </p:nvSpPr>
-        <p:spPr>
-          <a:xfrm>
-            <a:off x="8990838" y="2167128"/>
-            <a:ext cx="2448306" cy="1307592"/>
-          </a:xfrm>
-          <a:prstGeom prst="rect">
-            <a:avLst/>
-          </a:prstGeom>
-          <a:noFill/>
-          <a:ln/>
-        </p:spPr>
-        <p:txBody>
-          <a:bodyPr wrap="square" lIns="0" tIns="0" rIns="0" bIns="0" rtlCol="0" anchor="t"/>
-          <a:lstStyle/>
-          <a:p>
-            <a:pPr indent="0" marL="0">
-              <a:buNone/>
-            </a:pPr>
-            <a:r>
-              <a:rPr lang="en-US" sz="800" dirty="0">
-                <a:solidFill>
-                  <a:srgbClr val="E6EDF3"/>
-                </a:solidFill>
-                <a:latin typeface="Courier New" pitchFamily="34" charset="0"/>
-                <a:ea typeface="Courier New" pitchFamily="34" charset="-122"/>
-                <a:cs typeface="Courier New" pitchFamily="34" charset="-120"/>
-              </a:rPr>
-              <a:t>const std::string elsewhere =</a:t>
-            </a:r>
-            <a:endParaRPr lang="en-US" sz="800" dirty="0"/>
-          </a:p>
-          <a:p>
-            <a:pPr indent="0" marL="0">
-              <a:buNone/>
-            </a:pPr>
-            <a:r>
-              <a:rPr lang="en-US" sz="800" dirty="0">
-                <a:solidFill>
-                  <a:srgbClr val="E6EDF3"/>
-                </a:solidFill>
-                <a:latin typeface="Courier New" pitchFamily="34" charset="0"/>
-                <a:ea typeface="Courier New" pitchFamily="34" charset="-122"/>
-                <a:cs typeface="Courier New" pitchFamily="34" charset="-120"/>
-              </a:rPr>
-              <a:t>    situRootsHoldingMatches(</a:t>
-            </a:r>
-            <a:endParaRPr lang="en-US" sz="800" dirty="0"/>
-          </a:p>
-          <a:p>
-            <a:pPr indent="0" marL="0">
-              <a:buNone/>
-            </a:pPr>
-            <a:r>
-              <a:rPr lang="en-US" sz="800" dirty="0">
-                <a:solidFill>
-                  <a:srgbClr val="E6EDF3"/>
-                </a:solidFill>
-                <a:latin typeface="Courier New" pitchFamily="34" charset="0"/>
-                <a:ea typeface="Courier New" pitchFamily="34" charset="-122"/>
-                <a:cs typeface="Courier New" pitchFamily="34" charset="-120"/>
-              </a:rPr>
-              <a:t>        ws, perRootChanged, r );</a:t>
-            </a:r>
-            <a:endParaRPr lang="en-US" sz="800" dirty="0"/>
-          </a:p>
-          <a:p>
-            <a:pPr indent="0" marL="0">
-              <a:buNone/>
-            </a:pPr>
-            <a:r>
-              <a:rPr lang="en-US" sz="800" dirty="0">
-                <a:solidFill>
-                  <a:srgbClr val="E6EDF3"/>
-                </a:solidFill>
-                <a:latin typeface="Courier New" pitchFamily="34" charset="0"/>
-                <a:ea typeface="Courier New" pitchFamily="34" charset="-122"/>
-                <a:cs typeface="Courier New" pitchFamily="34" charset="-120"/>
-              </a:rPr>
-              <a:t>// … in situRootsHoldingMatches:</a:t>
-            </a:r>
-            <a:endParaRPr lang="en-US" sz="800" dirty="0"/>
-          </a:p>
-          <a:p>
-            <a:pPr indent="0" marL="0">
-              <a:buNone/>
-            </a:pPr>
-            <a:r>
-              <a:rPr lang="en-US" sz="800" dirty="0">
-                <a:solidFill>
-                  <a:srgbClr val="E6EDF3"/>
-                </a:solidFill>
-                <a:latin typeface="Courier New" pitchFamily="34" charset="0"/>
-                <a:ea typeface="Courier New" pitchFamily="34" charset="-122"/>
-                <a:cs typeface="Courier New" pitchFamily="34" charset="-120"/>
-              </a:rPr>
-              <a:t>if( o != self &amp;&amp; std::any_of(</a:t>
-            </a:r>
-            <a:endParaRPr lang="en-US" sz="800" dirty="0"/>
-          </a:p>
-          <a:p>
-            <a:pPr indent="0" marL="0">
-              <a:buNone/>
-            </a:pPr>
-            <a:r>
-              <a:rPr lang="en-US" sz="800" dirty="0">
-                <a:solidFill>
-                  <a:srgbClr val="E6EDF3"/>
-                </a:solidFill>
-                <a:latin typeface="Courier New" pitchFamily="34" charset="0"/>
-                <a:ea typeface="Courier New" pitchFamily="34" charset="-122"/>
-                <a:cs typeface="Courier New" pitchFamily="34" charset="-120"/>
-              </a:rPr>
-              <a:t>    perRootChanged[o].begin(),</a:t>
-            </a:r>
-            <a:endParaRPr lang="en-US" sz="800" dirty="0"/>
-          </a:p>
-          <a:p>
-            <a:pPr indent="0" marL="0">
-              <a:buNone/>
-            </a:pPr>
-            <a:r>
-              <a:rPr lang="en-US" sz="800" dirty="0">
-                <a:solidFill>
-                  <a:srgbClr val="E6EDF3"/>
-                </a:solidFill>
-                <a:latin typeface="Courier New" pitchFamily="34" charset="0"/>
-                <a:ea typeface="Courier New" pitchFamily="34" charset="-122"/>
-                <a:cs typeface="Courier New" pitchFamily="34" charset="-120"/>
-              </a:rPr>
-              <a:t>    perRootChanged[o].end(),</a:t>
-            </a:r>
-            <a:endParaRPr lang="en-US" sz="800" dirty="0"/>
-          </a:p>
-          <a:p>
-            <a:pPr indent="0" marL="0">
-              <a:buNone/>
-            </a:pPr>
-            <a:r>
-              <a:rPr lang="en-US" sz="800" dirty="0">
-                <a:solidFill>
-                  <a:srgbClr val="E6EDF3"/>
-                </a:solidFill>
-                <a:latin typeface="Courier New" pitchFamily="34" charset="0"/>
-                <a:ea typeface="Courier New" pitchFamily="34" charset="-122"/>
-                <a:cs typeface="Courier New" pitchFamily="34" charset="-120"/>
-              </a:rPr>
-              <a:t>    []( char c ) { return c != 0; } ) )</a:t>
-            </a:r>
-            <a:endParaRPr lang="en-US" sz="800" dirty="0"/>
-          </a:p>
-          <a:p>
-            <a:pPr indent="0" marL="0">
-              <a:buNone/>
-            </a:pPr>
-            <a:r>
-              <a:rPr lang="en-US" sz="800" dirty="0">
-                <a:solidFill>
-                  <a:srgbClr val="E6EDF3"/>
-                </a:solidFill>
-                <a:latin typeface="Courier New" pitchFamily="34" charset="0"/>
-                <a:ea typeface="Courier New" pitchFamily="34" charset="-122"/>
-                <a:cs typeface="Courier New" pitchFamily="34" charset="-120"/>
-              </a:rPr>
-              <a:t>{</a:t>
-            </a:r>
-            <a:endParaRPr lang="en-US" sz="800" dirty="0"/>
-          </a:p>
-          <a:p>
-            <a:pPr indent="0" marL="0">
-              <a:buNone/>
-            </a:pPr>
-            <a:r>
-              <a:rPr lang="en-US" sz="800" dirty="0">
-                <a:solidFill>
-                  <a:srgbClr val="E6EDF3"/>
-                </a:solidFill>
-                <a:latin typeface="Courier New" pitchFamily="34" charset="0"/>
-                <a:ea typeface="Courier New" pitchFamily="34" charset="-122"/>
-                <a:cs typeface="Courier New" pitchFamily="34" charset="-120"/>
-              </a:rPr>
-              <a:t>    // … labels += ws[o].label;</a:t>
-            </a:r>
-            <a:endParaRPr lang="en-US" sz="800" dirty="0"/>
-          </a:p>
-        </p:txBody>
-      </p:sp>
-      <p:sp>
-        <p:nvSpPr>
-          <p:cNvPr id="23" name="Text 21"/>
-          <p:cNvSpPr/>
-          <p:nvPr/>
-        </p:nvSpPr>
-        <p:spPr>
-          <a:xfrm>
-            <a:off x="6286500" y="3529584"/>
-            <a:ext cx="5207508" cy="274320"/>
-          </a:xfrm>
-          <a:prstGeom prst="rect">
-            <a:avLst/>
-          </a:prstGeom>
-          <a:noFill/>
-          <a:ln/>
-        </p:spPr>
-        <p:txBody>
-          <a:bodyPr wrap="square" lIns="0" tIns="0" rIns="0" bIns="0" rtlCol="0" anchor="ctr"/>
-          <a:lstStyle/>
-          <a:p>
-            <a:pPr indent="0" marL="0">
-              <a:buNone/>
-            </a:pPr>
-            <a:r>
-              <a:rPr lang="en-US" sz="950" i="1" dirty="0">
-                <a:solidFill>
-                  <a:srgbClr val="8B95A5"/>
-                </a:solidFill>
-                <a:latin typeface="Arial" pitchFamily="34" charset="0"/>
-                <a:ea typeface="Arial" pitchFamily="34" charset="-122"/>
-                <a:cs typeface="Arial" pitchFamily="34" charset="-120"/>
-              </a:rPr>
-              <a:t>The inner loop asked one question; it is now std::any_of, in a named function.</a:t>
-            </a:r>
-            <a:endParaRPr lang="en-US" sz="950" dirty="0"/>
-          </a:p>
-        </p:txBody>
-      </p:sp>
-      <p:sp>
-        <p:nvSpPr>
-          <p:cNvPr id="24" name="Shape 22"/>
-          <p:cNvSpPr/>
-          <p:nvPr/>
-        </p:nvSpPr>
-        <p:spPr>
-          <a:xfrm>
-            <a:off x="566928" y="3977640"/>
-            <a:ext cx="5463540" cy="2258568"/>
+                <a:latin typeface="Arial" pitchFamily="34" charset="0"/>
+                <a:ea typeface="Arial" pitchFamily="34" charset="-122"/>
+                <a:cs typeface="Arial" pitchFamily="34" charset="-120"/>
+              </a:rPr>
+              <a:t>read verbs return signatures and a stable handle; the agent fetches a body only when it decides it needs one — names by default, bytes on request</a:t>
+            </a:r>
+            <a:endParaRPr lang="en-US" sz="1150" dirty="0"/>
+          </a:p>
+        </p:txBody>
+      </p:sp>
+      <p:sp>
+        <p:nvSpPr>
+          <p:cNvPr id="13" name="Shape 11"/>
+          <p:cNvSpPr/>
+          <p:nvPr/>
+        </p:nvSpPr>
+        <p:spPr>
+          <a:xfrm>
+            <a:off x="566928" y="4187952"/>
+            <a:ext cx="5440680" cy="1481328"/>
           </a:xfrm>
           <a:prstGeom prst="roundRect">
             <a:avLst>
-              <a:gd name="adj" fmla="val 3644"/>
+              <a:gd name="adj" fmla="val 5556"/>
             </a:avLst>
           </a:prstGeom>
           <a:solidFill>
@@ -28410,585 +27302,96 @@
       </p:sp>
       <p:sp>
         <p:nvSpPr>
-          <p:cNvPr id="25" name="Text 23"/>
-          <p:cNvSpPr/>
-          <p:nvPr/>
-        </p:nvSpPr>
-        <p:spPr>
-          <a:xfrm>
-            <a:off x="694944" y="4032504"/>
-            <a:ext cx="864108" cy="274320"/>
-          </a:xfrm>
-          <a:prstGeom prst="rect">
-            <a:avLst/>
-          </a:prstGeom>
-          <a:noFill/>
-          <a:ln/>
-        </p:spPr>
-        <p:txBody>
-          <a:bodyPr wrap="square" lIns="0" tIns="0" rIns="0" bIns="0" rtlCol="0" anchor="ctr"/>
-          <a:lstStyle/>
-          <a:p>
-            <a:pPr indent="0" marL="0">
-              <a:buNone/>
-            </a:pPr>
-            <a:r>
-              <a:rPr lang="en-US" sz="1100" b="1" dirty="0">
-                <a:solidFill>
-                  <a:srgbClr val="F2B84B"/>
+          <p:cNvPr id="14" name="Text 12"/>
+          <p:cNvSpPr/>
+          <p:nvPr/>
+        </p:nvSpPr>
+        <p:spPr>
+          <a:xfrm>
+            <a:off x="749808" y="4297680"/>
+            <a:ext cx="5074920" cy="365760"/>
+          </a:xfrm>
+          <a:prstGeom prst="rect">
+            <a:avLst/>
+          </a:prstGeom>
+          <a:noFill/>
+          <a:ln/>
+        </p:spPr>
+        <p:txBody>
+          <a:bodyPr wrap="square" lIns="0" tIns="0" rIns="0" bIns="0" rtlCol="0" anchor="ctr"/>
+          <a:lstStyle/>
+          <a:p>
+            <a:pPr indent="0" marL="0">
+              <a:buNone/>
+            </a:pPr>
+            <a:r>
+              <a:rPr lang="en-US" sz="1400" b="1" dirty="0">
+                <a:solidFill>
+                  <a:srgbClr val="56D6E8"/>
                 </a:solidFill>
                 <a:latin typeface="Courier New" pitchFamily="34" charset="0"/>
                 <a:ea typeface="Courier New" pitchFamily="34" charset="-122"/>
                 <a:cs typeface="Courier New" pitchFamily="34" charset="-120"/>
               </a:rPr>
-              <a:t>dead-code</a:t>
-            </a:r>
-            <a:endParaRPr lang="en-US" sz="1100" dirty="0"/>
-          </a:p>
-        </p:txBody>
-      </p:sp>
-      <p:sp>
-        <p:nvSpPr>
-          <p:cNvPr id="26" name="Text 24"/>
-          <p:cNvSpPr/>
-          <p:nvPr/>
-        </p:nvSpPr>
-        <p:spPr>
-          <a:xfrm>
-            <a:off x="1650492" y="4032504"/>
-            <a:ext cx="4251960" cy="274320"/>
-          </a:xfrm>
-          <a:prstGeom prst="rect">
-            <a:avLst/>
-          </a:prstGeom>
-          <a:noFill/>
-          <a:ln/>
-        </p:spPr>
-        <p:txBody>
-          <a:bodyPr wrap="square" lIns="0" tIns="0" rIns="0" bIns="0" rtlCol="0" anchor="ctr"/>
-          <a:lstStyle/>
-          <a:p>
-            <a:pPr indent="0" marL="0">
-              <a:buNone/>
-            </a:pPr>
-            <a:r>
-              <a:rPr lang="en-US" sz="1000" dirty="0">
-                <a:solidFill>
-                  <a:srgbClr val="E6EDF3"/>
-                </a:solidFill>
-                <a:latin typeface="Arial" pitchFamily="34" charset="0"/>
-                <a:ea typeface="Arial" pitchFamily="34" charset="-122"/>
-                <a:cs typeface="Arial" pitchFamily="34" charset="-120"/>
-              </a:rPr>
-              <a:t>mentionFilesCut · namesUnkeptPackageIndex</a:t>
-            </a:r>
-            <a:endParaRPr lang="en-US" sz="1000" dirty="0"/>
-          </a:p>
-        </p:txBody>
-      </p:sp>
-      <p:sp>
-        <p:nvSpPr>
-          <p:cNvPr id="27" name="Shape 25"/>
-          <p:cNvSpPr/>
-          <p:nvPr/>
-        </p:nvSpPr>
-        <p:spPr>
-          <a:xfrm>
-            <a:off x="694944" y="4361688"/>
-            <a:ext cx="2558034" cy="1527048"/>
-          </a:xfrm>
-          <a:prstGeom prst="rect">
-            <a:avLst/>
-          </a:prstGeom>
-          <a:solidFill>
-            <a:srgbClr val="0D1117"/>
-          </a:solidFill>
-          <a:ln w="6350">
-            <a:solidFill>
-              <a:srgbClr val="232D3D"/>
-            </a:solidFill>
-            <a:prstDash val="solid"/>
-          </a:ln>
-        </p:spPr>
-      </p:sp>
-      <p:sp>
-        <p:nvSpPr>
-          <p:cNvPr id="28" name="Text 26"/>
-          <p:cNvSpPr/>
-          <p:nvPr/>
-        </p:nvSpPr>
-        <p:spPr>
-          <a:xfrm>
-            <a:off x="749808" y="4389120"/>
-            <a:ext cx="2448306" cy="155448"/>
-          </a:xfrm>
-          <a:prstGeom prst="rect">
-            <a:avLst/>
-          </a:prstGeom>
-          <a:noFill/>
-          <a:ln/>
-        </p:spPr>
-        <p:txBody>
-          <a:bodyPr wrap="square" lIns="0" tIns="0" rIns="0" bIns="0" rtlCol="0" anchor="ctr"/>
-          <a:lstStyle/>
-          <a:p>
-            <a:pPr indent="0" marL="0">
-              <a:buNone/>
-            </a:pPr>
-            <a:r>
-              <a:rPr lang="en-US" sz="750" dirty="0">
+              <a:t>18 agent skills</a:t>
+            </a:r>
+            <a:endParaRPr lang="en-US" sz="1400" dirty="0"/>
+          </a:p>
+        </p:txBody>
+      </p:sp>
+      <p:sp>
+        <p:nvSpPr>
+          <p:cNvPr id="15" name="Text 13"/>
+          <p:cNvSpPr/>
+          <p:nvPr/>
+        </p:nvSpPr>
+        <p:spPr>
+          <a:xfrm>
+            <a:off x="749808" y="4690872"/>
+            <a:ext cx="5074920" cy="1005840"/>
+          </a:xfrm>
+          <a:prstGeom prst="rect">
+            <a:avLst/>
+          </a:prstGeom>
+          <a:noFill/>
+          <a:ln/>
+        </p:spPr>
+        <p:txBody>
+          <a:bodyPr wrap="square" lIns="0" tIns="0" rIns="0" bIns="0" rtlCol="0" anchor="ctr"/>
+          <a:lstStyle/>
+          <a:p>
+            <a:pPr indent="0" marL="0">
+              <a:buNone/>
+            </a:pPr>
+            <a:r>
+              <a:rPr lang="en-US" sz="1150" dirty="0">
                 <a:solidFill>
                   <a:srgbClr val="8B95A5"/>
                 </a:solidFill>
-                <a:latin typeface="Courier New" pitchFamily="34" charset="0"/>
-                <a:ea typeface="Courier New" pitchFamily="34" charset="-122"/>
-                <a:cs typeface="Courier New" pitchFamily="34" charset="-120"/>
-              </a:rPr>
-              <a:t>before</a:t>
-            </a:r>
-            <a:endParaRPr lang="en-US" sz="750" dirty="0"/>
-          </a:p>
-        </p:txBody>
-      </p:sp>
-      <p:sp>
-        <p:nvSpPr>
-          <p:cNvPr id="29" name="Text 27"/>
-          <p:cNvSpPr/>
-          <p:nvPr/>
-        </p:nvSpPr>
-        <p:spPr>
-          <a:xfrm>
-            <a:off x="749808" y="4553712"/>
-            <a:ext cx="2448306" cy="1307592"/>
-          </a:xfrm>
-          <a:prstGeom prst="rect">
-            <a:avLst/>
-          </a:prstGeom>
-          <a:noFill/>
-          <a:ln/>
-        </p:spPr>
-        <p:txBody>
-          <a:bodyPr wrap="square" lIns="0" tIns="0" rIns="0" bIns="0" rtlCol="0" anchor="t"/>
-          <a:lstStyle/>
-          <a:p>
-            <a:pPr indent="0" marL="0">
-              <a:buNone/>
-            </a:pPr>
-            <a:r>
-              <a:rPr lang="en-US" sz="800" dirty="0">
-                <a:solidFill>
-                  <a:srgbClr val="E6EDF3"/>
-                </a:solidFill>
-                <a:latin typeface="Courier New" pitchFamily="34" charset="0"/>
-                <a:ea typeface="Courier New" pitchFamily="34" charset="-122"/>
-                <a:cs typeface="Courier New" pitchFamily="34" charset="-120"/>
-              </a:rPr>
-              <a:t>inline bool namesFileNotKept( … )</a:t>
-            </a:r>
-            <a:endParaRPr lang="en-US" sz="800" dirty="0"/>
-          </a:p>
-          <a:p>
-            <a:pPr indent="0" marL="0">
-              <a:buNone/>
-            </a:pPr>
-            <a:r>
-              <a:rPr lang="en-US" sz="800" dirty="0">
-                <a:solidFill>
-                  <a:srgbClr val="E6EDF3"/>
-                </a:solidFill>
-                <a:latin typeface="Courier New" pitchFamily="34" charset="0"/>
-                <a:ea typeface="Courier New" pitchFamily="34" charset="-122"/>
-                <a:cs typeface="Courier New" pitchFamily="34" charset="-120"/>
-              </a:rPr>
-              <a:t>{ … return !unkept.empty(); }</a:t>
-            </a:r>
-            <a:endParaRPr lang="en-US" sz="800" dirty="0"/>
-          </a:p>
-          <a:p>
-            <a:pPr indent="0" marL="0">
-              <a:buNone/>
-            </a:pPr>
-            <a:r>
-              <a:rPr lang="en-US" sz="800" dirty="0">
-                <a:solidFill>
-                  <a:srgbClr val="E6EDF3"/>
-                </a:solidFill>
-                <a:latin typeface="Courier New" pitchFamily="34" charset="0"/>
-                <a:ea typeface="Courier New" pitchFamily="34" charset="-122"/>
-                <a:cs typeface="Courier New" pitchFamily="34" charset="-120"/>
-              </a:rPr>
-              <a:t>inline bool mentionFilesCut( … )</a:t>
-            </a:r>
-            <a:endParaRPr lang="en-US" sz="800" dirty="0"/>
-          </a:p>
-          <a:p>
-            <a:pPr indent="0" marL="0">
-              <a:buNone/>
-            </a:pPr>
-            <a:r>
-              <a:rPr lang="en-US" sz="800" dirty="0">
-                <a:solidFill>
-                  <a:srgbClr val="E6EDF3"/>
-                </a:solidFill>
-                <a:latin typeface="Courier New" pitchFamily="34" charset="0"/>
-                <a:ea typeface="Courier New" pitchFamily="34" charset="-122"/>
-                <a:cs typeface="Courier New" pitchFamily="34" charset="-120"/>
-              </a:rPr>
-              <a:t>{</a:t>
-            </a:r>
-            <a:endParaRPr lang="en-US" sz="800" dirty="0"/>
-          </a:p>
-          <a:p>
-            <a:pPr indent="0" marL="0">
-              <a:buNone/>
-            </a:pPr>
-            <a:r>
-              <a:rPr lang="en-US" sz="800" dirty="0">
-                <a:solidFill>
-                  <a:srgbClr val="E6EDF3"/>
-                </a:solidFill>
-                <a:latin typeface="Courier New" pitchFamily="34" charset="0"/>
-                <a:ea typeface="Courier New" pitchFamily="34" charset="-122"/>
-                <a:cs typeface="Courier New" pitchFamily="34" charset="-120"/>
-              </a:rPr>
-              <a:t>    // …</a:t>
-            </a:r>
-            <a:endParaRPr lang="en-US" sz="800" dirty="0"/>
-          </a:p>
-          <a:p>
-            <a:pPr indent="0" marL="0">
-              <a:buNone/>
-            </a:pPr>
-            <a:r>
-              <a:rPr lang="en-US" sz="800" dirty="0">
-                <a:solidFill>
-                  <a:srgbClr val="E6EDF3"/>
-                </a:solidFill>
-                <a:latin typeface="Courier New" pitchFamily="34" charset="0"/>
-                <a:ea typeface="Courier New" pitchFamily="34" charset="-122"/>
-                <a:cs typeface="Courier New" pitchFamily="34" charset="-120"/>
-              </a:rPr>
-              <a:t>    return std::any_of( …, [ &amp; ]( … )</a:t>
-            </a:r>
-            <a:endParaRPr lang="en-US" sz="800" dirty="0"/>
-          </a:p>
-          <a:p>
-            <a:pPr indent="0" marL="0">
-              <a:buNone/>
-            </a:pPr>
-            <a:r>
-              <a:rPr lang="en-US" sz="800" dirty="0">
-                <a:solidFill>
-                  <a:srgbClr val="E6EDF3"/>
-                </a:solidFill>
-                <a:latin typeface="Courier New" pitchFamily="34" charset="0"/>
-                <a:ea typeface="Courier New" pitchFamily="34" charset="-122"/>
-                <a:cs typeface="Courier New" pitchFamily="34" charset="-120"/>
-              </a:rPr>
-              <a:t>    {</a:t>
-            </a:r>
-            <a:endParaRPr lang="en-US" sz="800" dirty="0"/>
-          </a:p>
-          <a:p>
-            <a:pPr indent="0" marL="0">
-              <a:buNone/>
-            </a:pPr>
-            <a:r>
-              <a:rPr lang="en-US" sz="800" dirty="0">
-                <a:solidFill>
-                  <a:srgbClr val="E6EDF3"/>
-                </a:solidFill>
-                <a:latin typeface="Courier New" pitchFamily="34" charset="0"/>
-                <a:ea typeface="Courier New" pitchFamily="34" charset="-122"/>
-                <a:cs typeface="Courier New" pitchFamily="34" charset="-120"/>
-              </a:rPr>
-              <a:t>        return namesFileNotKept( … );</a:t>
-            </a:r>
-            <a:endParaRPr lang="en-US" sz="800" dirty="0"/>
-          </a:p>
-          <a:p>
-            <a:pPr indent="0" marL="0">
-              <a:buNone/>
-            </a:pPr>
-            <a:r>
-              <a:rPr lang="en-US" sz="800" dirty="0">
-                <a:solidFill>
-                  <a:srgbClr val="E6EDF3"/>
-                </a:solidFill>
-                <a:latin typeface="Courier New" pitchFamily="34" charset="0"/>
-                <a:ea typeface="Courier New" pitchFamily="34" charset="-122"/>
-                <a:cs typeface="Courier New" pitchFamily="34" charset="-120"/>
-              </a:rPr>
-              <a:t>    } );</a:t>
-            </a:r>
-            <a:endParaRPr lang="en-US" sz="800" dirty="0"/>
-          </a:p>
-          <a:p>
-            <a:pPr indent="0" marL="0">
-              <a:buNone/>
-            </a:pPr>
-            <a:r>
-              <a:rPr lang="en-US" sz="800" dirty="0">
-                <a:solidFill>
-                  <a:srgbClr val="E6EDF3"/>
-                </a:solidFill>
-                <a:latin typeface="Courier New" pitchFamily="34" charset="0"/>
-                <a:ea typeface="Courier New" pitchFamily="34" charset="-122"/>
-                <a:cs typeface="Courier New" pitchFamily="34" charset="-120"/>
-              </a:rPr>
-              <a:t>}</a:t>
-            </a:r>
-            <a:endParaRPr lang="en-US" sz="800" dirty="0"/>
-          </a:p>
-        </p:txBody>
-      </p:sp>
-      <p:sp>
-        <p:nvSpPr>
-          <p:cNvPr id="30" name="Shape 28"/>
-          <p:cNvSpPr/>
-          <p:nvPr/>
-        </p:nvSpPr>
-        <p:spPr>
-          <a:xfrm>
-            <a:off x="3344418" y="4361688"/>
-            <a:ext cx="2558034" cy="1527048"/>
-          </a:xfrm>
-          <a:prstGeom prst="rect">
-            <a:avLst/>
-          </a:prstGeom>
-          <a:solidFill>
-            <a:srgbClr val="0D1117"/>
-          </a:solidFill>
-          <a:ln w="6350">
-            <a:solidFill>
-              <a:srgbClr val="232D3D"/>
-            </a:solidFill>
-            <a:prstDash val="solid"/>
-          </a:ln>
-        </p:spPr>
-      </p:sp>
-      <p:sp>
-        <p:nvSpPr>
-          <p:cNvPr id="31" name="Text 29"/>
-          <p:cNvSpPr/>
-          <p:nvPr/>
-        </p:nvSpPr>
-        <p:spPr>
-          <a:xfrm>
-            <a:off x="3399282" y="4389120"/>
-            <a:ext cx="2448306" cy="155448"/>
-          </a:xfrm>
-          <a:prstGeom prst="rect">
-            <a:avLst/>
-          </a:prstGeom>
-          <a:noFill/>
-          <a:ln/>
-        </p:spPr>
-        <p:txBody>
-          <a:bodyPr wrap="square" lIns="0" tIns="0" rIns="0" bIns="0" rtlCol="0" anchor="ctr"/>
-          <a:lstStyle/>
-          <a:p>
-            <a:pPr indent="0" marL="0">
-              <a:buNone/>
-            </a:pPr>
-            <a:r>
-              <a:rPr lang="en-US" sz="750" dirty="0">
-                <a:solidFill>
-                  <a:srgbClr val="8B95A5"/>
-                </a:solidFill>
-                <a:latin typeface="Courier New" pitchFamily="34" charset="0"/>
-                <a:ea typeface="Courier New" pitchFamily="34" charset="-122"/>
-                <a:cs typeface="Courier New" pitchFamily="34" charset="-120"/>
-              </a:rPr>
-              <a:t>after</a:t>
-            </a:r>
-            <a:endParaRPr lang="en-US" sz="750" dirty="0"/>
-          </a:p>
-        </p:txBody>
-      </p:sp>
-      <p:sp>
-        <p:nvSpPr>
-          <p:cNvPr id="32" name="Text 30"/>
-          <p:cNvSpPr/>
-          <p:nvPr/>
-        </p:nvSpPr>
-        <p:spPr>
-          <a:xfrm>
-            <a:off x="3399282" y="4553712"/>
-            <a:ext cx="2448306" cy="1307592"/>
-          </a:xfrm>
-          <a:prstGeom prst="rect">
-            <a:avLst/>
-          </a:prstGeom>
-          <a:noFill/>
-          <a:ln/>
-        </p:spPr>
-        <p:txBody>
-          <a:bodyPr wrap="square" lIns="0" tIns="0" rIns="0" bIns="0" rtlCol="0" anchor="t"/>
-          <a:lstStyle/>
-          <a:p>
-            <a:pPr indent="0" marL="0">
-              <a:buNone/>
-            </a:pPr>
-            <a:r>
-              <a:rPr lang="en-US" sz="800" dirty="0">
-                <a:solidFill>
-                  <a:srgbClr val="E6EDF3"/>
-                </a:solidFill>
-                <a:latin typeface="Courier New" pitchFamily="34" charset="0"/>
-                <a:ea typeface="Courier New" pitchFamily="34" charset="-122"/>
-                <a:cs typeface="Courier New" pitchFamily="34" charset="-120"/>
-              </a:rPr>
-              <a:t>// all three definitions: deleted</a:t>
-            </a:r>
-            <a:endParaRPr lang="en-US" sz="800" dirty="0"/>
-          </a:p>
-          <a:p>
-            <a:pPr indent="0" marL="0">
-              <a:buNone/>
-            </a:pPr>
-            <a:endParaRPr lang="en-US" sz="800" dirty="0"/>
-          </a:p>
-          <a:p>
-            <a:pPr indent="0" marL="0">
-              <a:buNone/>
-            </a:pPr>
-            <a:r>
-              <a:rPr lang="en-US" sz="800" dirty="0">
-                <a:solidFill>
-                  <a:srgbClr val="E6EDF3"/>
-                </a:solidFill>
-                <a:latin typeface="Courier New" pitchFamily="34" charset="0"/>
-                <a:ea typeface="Courier New" pitchFamily="34" charset="-122"/>
-                <a:cs typeface="Courier New" pitchFamily="34" charset="-120"/>
-              </a:rPr>
-              <a:t>// the live verdict comes from a line</a:t>
-            </a:r>
-            <a:endParaRPr lang="en-US" sz="800" dirty="0"/>
-          </a:p>
-          <a:p>
-            <a:pPr indent="0" marL="0">
-              <a:buNone/>
-            </a:pPr>
-            <a:r>
-              <a:rPr lang="en-US" sz="800" dirty="0">
-                <a:solidFill>
-                  <a:srgbClr val="E6EDF3"/>
-                </a:solidFill>
-                <a:latin typeface="Courier New" pitchFamily="34" charset="0"/>
-                <a:ea typeface="Courier New" pitchFamily="34" charset="-122"/>
-                <a:cs typeface="Courier New" pitchFamily="34" charset="-120"/>
-              </a:rPr>
-              <a:t>// that was already there, unchanged:</a:t>
-            </a:r>
-            <a:endParaRPr lang="en-US" sz="800" dirty="0"/>
-          </a:p>
-          <a:p>
-            <a:pPr indent="0" marL="0">
-              <a:buNone/>
-            </a:pPr>
-            <a:r>
-              <a:rPr lang="en-US" sz="800" dirty="0">
-                <a:solidFill>
-                  <a:srgbClr val="E6EDF3"/>
-                </a:solidFill>
-                <a:latin typeface="Courier New" pitchFamily="34" charset="0"/>
-                <a:ea typeface="Courier New" pitchFamily="34" charset="-122"/>
-                <a:cs typeface="Courier New" pitchFamily="34" charset="-120"/>
-              </a:rPr>
-              <a:t>const std::uint32_t mentionFilesTotal =</a:t>
-            </a:r>
-            <a:endParaRPr lang="en-US" sz="800" dirty="0"/>
-          </a:p>
-          <a:p>
-            <a:pPr indent="0" marL="0">
-              <a:buNone/>
-            </a:pPr>
-            <a:r>
-              <a:rPr lang="en-US" sz="800" dirty="0">
-                <a:solidFill>
-                  <a:srgbClr val="E6EDF3"/>
-                </a:solidFill>
-                <a:latin typeface="Courier New" pitchFamily="34" charset="0"/>
-                <a:ea typeface="Courier New" pitchFamily="34" charset="-122"/>
-                <a:cs typeface="Courier New" pitchFamily="34" charset="-120"/>
-              </a:rPr>
-              <a:t>    mentionFilesNamedTotal(</a:t>
-            </a:r>
-            <a:endParaRPr lang="en-US" sz="800" dirty="0"/>
-          </a:p>
-          <a:p>
-            <a:pPr indent="0" marL="0">
-              <a:buNone/>
-            </a:pPr>
-            <a:r>
-              <a:rPr lang="en-US" sz="800" dirty="0">
-                <a:solidFill>
-                  <a:srgbClr val="E6EDF3"/>
-                </a:solidFill>
-                <a:latin typeface="Courier New" pitchFamily="34" charset="0"/>
-                <a:ea typeface="Courier New" pitchFamily="34" charset="-122"/>
-                <a:cs typeface="Courier New" pitchFamily="34" charset="-120"/>
-              </a:rPr>
-              <a:t>        ing, raw, mentionedFiles );</a:t>
-            </a:r>
-            <a:endParaRPr lang="en-US" sz="800" dirty="0"/>
-          </a:p>
-        </p:txBody>
-      </p:sp>
-      <p:sp>
-        <p:nvSpPr>
-          <p:cNvPr id="33" name="Text 31"/>
-          <p:cNvSpPr/>
-          <p:nvPr/>
-        </p:nvSpPr>
-        <p:spPr>
-          <a:xfrm>
-            <a:off x="694944" y="5916168"/>
-            <a:ext cx="5207508" cy="274320"/>
-          </a:xfrm>
-          <a:prstGeom prst="rect">
-            <a:avLst/>
-          </a:prstGeom>
-          <a:noFill/>
-          <a:ln/>
-        </p:spPr>
-        <p:txBody>
-          <a:bodyPr wrap="square" lIns="0" tIns="0" rIns="0" bIns="0" rtlCol="0" anchor="ctr"/>
-          <a:lstStyle/>
-          <a:p>
-            <a:pPr indent="0" marL="0">
-              <a:buNone/>
-            </a:pPr>
-            <a:r>
-              <a:rPr lang="en-US" sz="950" i="1" dirty="0">
-                <a:solidFill>
-                  <a:srgbClr val="8B95A5"/>
-                </a:solidFill>
-                <a:latin typeface="Arial" pitchFamily="34" charset="0"/>
-                <a:ea typeface="Arial" pitchFamily="34" charset="-122"/>
-                <a:cs typeface="Arial" pitchFamily="34" charset="-120"/>
-              </a:rPr>
-              <a:t>Deleted, not acked. namesFileNotKept had no row: its only caller was dead too.</a:t>
-            </a:r>
-            <a:endParaRPr lang="en-US" sz="950" dirty="0"/>
-          </a:p>
-        </p:txBody>
-      </p:sp>
-      <p:sp>
-        <p:nvSpPr>
-          <p:cNvPr id="34" name="Shape 32"/>
-          <p:cNvSpPr/>
-          <p:nvPr/>
-        </p:nvSpPr>
-        <p:spPr>
-          <a:xfrm>
-            <a:off x="6158484" y="3977640"/>
-            <a:ext cx="5463540" cy="2258568"/>
+                <a:latin typeface="Arial" pitchFamily="34" charset="0"/>
+                <a:ea typeface="Arial" pitchFamily="34" charset="-122"/>
+                <a:cs typeface="Arial" pitchFamily="34" charset="-120"/>
+              </a:rPr>
+              <a:t>moment-matched workflows (orient, navigate, change-check, quality-bar …) — wrap prints the recipe, skills/install.sh installs them</a:t>
+            </a:r>
+            <a:endParaRPr lang="en-US" sz="1150" dirty="0"/>
+          </a:p>
+        </p:txBody>
+      </p:sp>
+      <p:sp>
+        <p:nvSpPr>
+          <p:cNvPr id="16" name="Shape 14"/>
+          <p:cNvSpPr/>
+          <p:nvPr/>
+        </p:nvSpPr>
+        <p:spPr>
+          <a:xfrm>
+            <a:off x="6181344" y="4187952"/>
+            <a:ext cx="5440680" cy="1481328"/>
           </a:xfrm>
           <a:prstGeom prst="roundRect">
             <a:avLst>
-              <a:gd name="adj" fmla="val 3644"/>
+              <a:gd name="adj" fmla="val 5556"/>
             </a:avLst>
           </a:prstGeom>
           <a:solidFill>
@@ -29004,100 +27407,102 @@
       </p:sp>
       <p:sp>
         <p:nvSpPr>
-          <p:cNvPr id="35" name="Text 33"/>
-          <p:cNvSpPr/>
-          <p:nvPr/>
-        </p:nvSpPr>
-        <p:spPr>
-          <a:xfrm>
-            <a:off x="6286500" y="4032504"/>
-            <a:ext cx="1031748" cy="274320"/>
-          </a:xfrm>
-          <a:prstGeom prst="rect">
-            <a:avLst/>
-          </a:prstGeom>
-          <a:noFill/>
-          <a:ln/>
-        </p:spPr>
-        <p:txBody>
-          <a:bodyPr wrap="square" lIns="0" tIns="0" rIns="0" bIns="0" rtlCol="0" anchor="ctr"/>
-          <a:lstStyle/>
-          <a:p>
-            <a:pPr indent="0" marL="0">
-              <a:buNone/>
-            </a:pPr>
-            <a:r>
-              <a:rPr lang="en-US" sz="1100" b="1" dirty="0">
-                <a:solidFill>
-                  <a:srgbClr val="F2B84B"/>
+          <p:cNvPr id="17" name="Text 15"/>
+          <p:cNvSpPr/>
+          <p:nvPr/>
+        </p:nvSpPr>
+        <p:spPr>
+          <a:xfrm>
+            <a:off x="6364224" y="4297680"/>
+            <a:ext cx="5074920" cy="365760"/>
+          </a:xfrm>
+          <a:prstGeom prst="rect">
+            <a:avLst/>
+          </a:prstGeom>
+          <a:noFill/>
+          <a:ln/>
+        </p:spPr>
+        <p:txBody>
+          <a:bodyPr wrap="square" lIns="0" tIns="0" rIns="0" bIns="0" rtlCol="0" anchor="ctr"/>
+          <a:lstStyle/>
+          <a:p>
+            <a:pPr indent="0" marL="0">
+              <a:buNone/>
+            </a:pPr>
+            <a:r>
+              <a:rPr lang="en-US" sz="1400" b="1" dirty="0">
+                <a:solidFill>
+                  <a:srgbClr val="56D6E8"/>
                 </a:solidFill>
                 <a:latin typeface="Courier New" pitchFamily="34" charset="0"/>
                 <a:ea typeface="Courier New" pitchFamily="34" charset="-122"/>
                 <a:cs typeface="Courier New" pitchFamily="34" charset="-120"/>
               </a:rPr>
-              <a:t>duplication</a:t>
-            </a:r>
-            <a:endParaRPr lang="en-US" sz="1100" dirty="0"/>
-          </a:p>
-        </p:txBody>
-      </p:sp>
-      <p:sp>
-        <p:nvSpPr>
-          <p:cNvPr id="36" name="Text 34"/>
-          <p:cNvSpPr/>
-          <p:nvPr/>
-        </p:nvSpPr>
-        <p:spPr>
-          <a:xfrm>
-            <a:off x="7409688" y="4032504"/>
-            <a:ext cx="4084320" cy="274320"/>
-          </a:xfrm>
-          <a:prstGeom prst="rect">
-            <a:avLst/>
-          </a:prstGeom>
-          <a:noFill/>
-          <a:ln/>
-        </p:spPr>
-        <p:txBody>
-          <a:bodyPr wrap="square" lIns="0" tIns="0" rIns="0" bIns="0" rtlCol="0" anchor="ctr"/>
-          <a:lstStyle/>
-          <a:p>
-            <a:pPr indent="0" marL="0">
-              <a:buNone/>
-            </a:pPr>
-            <a:r>
-              <a:rPr lang="en-US" sz="1000" dirty="0">
-                <a:solidFill>
-                  <a:srgbClr val="E6EDF3"/>
-                </a:solidFill>
-                <a:latin typeface="Arial" pitchFamily="34" charset="0"/>
-                <a:ea typeface="Arial" pitchFamily="34" charset="-122"/>
-                <a:cs typeface="Arial" pitchFamily="34" charset="-120"/>
-              </a:rPr>
-              <a:t>withHeaderAttrAfter | withHeaderField  tokens="122"</a:t>
-            </a:r>
-            <a:endParaRPr lang="en-US" sz="1000" dirty="0"/>
-          </a:p>
-        </p:txBody>
-      </p:sp>
-      <p:sp>
-        <p:nvSpPr>
-          <p:cNvPr id="37" name="Shape 35"/>
-          <p:cNvSpPr/>
-          <p:nvPr/>
-        </p:nvSpPr>
-        <p:spPr>
-          <a:xfrm>
-            <a:off x="6286500" y="4361688"/>
-            <a:ext cx="2558034" cy="1527048"/>
-          </a:xfrm>
-          <a:prstGeom prst="rect">
-            <a:avLst/>
+              <a:t>12 orchestrator loops</a:t>
+            </a:r>
+            <a:endParaRPr lang="en-US" sz="1400" dirty="0"/>
+          </a:p>
+        </p:txBody>
+      </p:sp>
+      <p:sp>
+        <p:nvSpPr>
+          <p:cNvPr id="18" name="Text 16"/>
+          <p:cNvSpPr/>
+          <p:nvPr/>
+        </p:nvSpPr>
+        <p:spPr>
+          <a:xfrm>
+            <a:off x="6364224" y="4690872"/>
+            <a:ext cx="5074920" cy="1005840"/>
+          </a:xfrm>
+          <a:prstGeom prst="rect">
+            <a:avLst/>
+          </a:prstGeom>
+          <a:noFill/>
+          <a:ln/>
+        </p:spPr>
+        <p:txBody>
+          <a:bodyPr wrap="square" lIns="0" tIns="0" rIns="0" bIns="0" rtlCol="0" anchor="ctr"/>
+          <a:lstStyle/>
+          <a:p>
+            <a:pPr indent="0" marL="0">
+              <a:buNone/>
+            </a:pPr>
+            <a:r>
+              <a:rPr lang="en-US" sz="1150" dirty="0">
+                <a:solidFill>
+                  <a:srgbClr val="8B95A5"/>
+                </a:solidFill>
+                <a:latin typeface="Arial" pitchFamily="34" charset="0"/>
+                <a:ea typeface="Arial" pitchFamily="34" charset="-122"/>
+                <a:cs typeface="Arial" pitchFamily="34" charset="-120"/>
+              </a:rPr>
+              <a:t>copy-paste prompts in prompts/: run the same audit, eval and head-to-head machinery that built this tool, on your own repository</a:t>
+            </a:r>
+            <a:endParaRPr lang="en-US" sz="1150" dirty="0"/>
+          </a:p>
+        </p:txBody>
+      </p:sp>
+      <p:sp>
+        <p:nvSpPr>
+          <p:cNvPr id="19" name="Shape 17"/>
+          <p:cNvSpPr/>
+          <p:nvPr/>
+        </p:nvSpPr>
+        <p:spPr>
+          <a:xfrm>
+            <a:off x="566928" y="5760720"/>
+            <a:ext cx="11055096" cy="566928"/>
+          </a:xfrm>
+          <a:prstGeom prst="roundRect">
+            <a:avLst>
+              <a:gd name="adj" fmla="val 14516"/>
+            </a:avLst>
           </a:prstGeom>
           <a:solidFill>
-            <a:srgbClr val="0D1117"/>
+            <a:srgbClr val="1B2432"/>
           </a:solidFill>
-          <a:ln w="6350">
+          <a:ln w="9525">
             <a:solidFill>
               <a:srgbClr val="232D3D"/>
             </a:solidFill>
@@ -29107,30 +27512,83 @@
       </p:sp>
       <p:sp>
         <p:nvSpPr>
-          <p:cNvPr id="38" name="Text 36"/>
-          <p:cNvSpPr/>
-          <p:nvPr/>
-        </p:nvSpPr>
-        <p:spPr>
-          <a:xfrm>
-            <a:off x="6341364" y="4389120"/>
-            <a:ext cx="2448306" cy="155448"/>
-          </a:xfrm>
-          <a:prstGeom prst="rect">
-            <a:avLst/>
-          </a:prstGeom>
-          <a:noFill/>
-          <a:ln/>
-        </p:spPr>
-        <p:txBody>
-          <a:bodyPr wrap="square" lIns="0" tIns="0" rIns="0" bIns="0" rtlCol="0" anchor="ctr"/>
-          <a:lstStyle/>
-          <a:p>
-            <a:pPr indent="0" marL="0">
-              <a:buNone/>
-            </a:pPr>
-            <a:r>
-              <a:rPr lang="en-US" sz="750" dirty="0">
+          <p:cNvPr id="20" name="Text 18"/>
+          <p:cNvSpPr/>
+          <p:nvPr/>
+        </p:nvSpPr>
+        <p:spPr>
+          <a:xfrm>
+            <a:off x="795528" y="5843016"/>
+            <a:ext cx="10607040" cy="420624"/>
+          </a:xfrm>
+          <a:prstGeom prst="rect">
+            <a:avLst/>
+          </a:prstGeom>
+          <a:noFill/>
+          <a:ln/>
+        </p:spPr>
+        <p:txBody>
+          <a:bodyPr wrap="square" lIns="0" tIns="0" rIns="0" bIns="0" rtlCol="0" anchor="ctr"/>
+          <a:lstStyle/>
+          <a:p>
+            <a:pPr indent="0" marL="0">
+              <a:buNone/>
+            </a:pPr>
+            <a:r>
+              <a:rPr lang="en-US" sz="1100" b="1" dirty="0">
+                <a:solidFill>
+                  <a:srgbClr val="E6EDF3"/>
+                </a:solidFill>
+                <a:latin typeface="Arial" pitchFamily="34" charset="0"/>
+                <a:ea typeface="Arial" pitchFamily="34" charset="-122"/>
+                <a:cs typeface="Arial" pitchFamily="34" charset="-120"/>
+              </a:rPr>
+              <a:t>wrap does not just print JSON: </a:t>
+            </a:r>
+            <a:pPr indent="0" marL="0">
+              <a:buNone/>
+            </a:pPr>
+            <a:r>
+              <a:rPr lang="en-US" sz="1100" dirty="0">
+                <a:solidFill>
+                  <a:srgbClr val="8B95A5"/>
+                </a:solidFill>
+                <a:latin typeface="Arial" pitchFamily="34" charset="0"/>
+                <a:ea typeface="Arial" pitchFamily="34" charset="-122"/>
+                <a:cs typeface="Arial" pitchFamily="34" charset="-120"/>
+              </a:rPr>
+              <a:t>it probes what that agent already has, emits the config in that agent's own shape, and includes a use-when blurb so the agent knows which verb fires at which moment — not just that a server exists.</a:t>
+            </a:r>
+            <a:endParaRPr lang="en-US" sz="1100" dirty="0"/>
+          </a:p>
+        </p:txBody>
+      </p:sp>
+      <p:sp>
+        <p:nvSpPr>
+          <p:cNvPr id="21" name="Text 19"/>
+          <p:cNvSpPr/>
+          <p:nvPr/>
+        </p:nvSpPr>
+        <p:spPr>
+          <a:xfrm>
+            <a:off x="566928" y="6419088"/>
+            <a:ext cx="11055096" cy="274320"/>
+          </a:xfrm>
+          <a:prstGeom prst="rect">
+            <a:avLst/>
+          </a:prstGeom>
+          <a:noFill/>
+          <a:ln/>
+        </p:spPr>
+        <p:txBody>
+          <a:bodyPr wrap="square" lIns="0" tIns="0" rIns="0" bIns="0" rtlCol="0" anchor="ctr"/>
+          <a:lstStyle/>
+          <a:p>
+            <a:pPr indent="0" marL="0">
+              <a:buNone/>
+            </a:pPr>
+            <a:r>
+              <a:rPr lang="en-US" sz="1050" dirty="0">
                 <a:solidFill>
                   <a:srgbClr val="8B95A5"/>
                 </a:solidFill>
@@ -29138,533 +27596,7 @@
                 <a:ea typeface="Courier New" pitchFamily="34" charset="-122"/>
                 <a:cs typeface="Courier New" pitchFamily="34" charset="-120"/>
               </a:rPr>
-              <a:t>before</a:t>
-            </a:r>
-            <a:endParaRPr lang="en-US" sz="750" dirty="0"/>
-          </a:p>
-        </p:txBody>
-      </p:sp>
-      <p:sp>
-        <p:nvSpPr>
-          <p:cNvPr id="39" name="Text 37"/>
-          <p:cNvSpPr/>
-          <p:nvPr/>
-        </p:nvSpPr>
-        <p:spPr>
-          <a:xfrm>
-            <a:off x="6341364" y="4553712"/>
-            <a:ext cx="2448306" cy="1307592"/>
-          </a:xfrm>
-          <a:prstGeom prst="rect">
-            <a:avLst/>
-          </a:prstGeom>
-          <a:noFill/>
-          <a:ln/>
-        </p:spPr>
-        <p:txBody>
-          <a:bodyPr wrap="square" lIns="0" tIns="0" rIns="0" bIns="0" rtlCol="0" anchor="t"/>
-          <a:lstStyle/>
-          <a:p>
-            <a:pPr indent="0" marL="0">
-              <a:buNone/>
-            </a:pPr>
-            <a:r>
-              <a:rPr lang="en-US" sz="800" dirty="0">
-                <a:solidFill>
-                  <a:srgbClr val="E6EDF3"/>
-                </a:solidFill>
-                <a:latin typeface="Courier New" pitchFamily="34" charset="0"/>
-                <a:ea typeface="Courier New" pitchFamily="34" charset="-122"/>
-                <a:cs typeface="Courier New" pitchFamily="34" charset="-120"/>
-              </a:rPr>
-              <a:t>const std::size_t pos =</a:t>
-            </a:r>
-            <a:endParaRPr lang="en-US" sz="800" dirty="0"/>
-          </a:p>
-          <a:p>
-            <a:pPr indent="0" marL="0">
-              <a:buNone/>
-            </a:pPr>
-            <a:r>
-              <a:rPr lang="en-US" sz="800" dirty="0">
-                <a:solidFill>
-                  <a:srgbClr val="E6EDF3"/>
-                </a:solidFill>
-                <a:latin typeface="Courier New" pitchFamily="34" charset="0"/>
-                <a:ea typeface="Courier New" pitchFamily="34" charset="-122"/>
-                <a:cs typeface="Courier New" pitchFamily="34" charset="-120"/>
-              </a:rPr>
-              <a:t>    line.find( afterField );</a:t>
-            </a:r>
-            <a:endParaRPr lang="en-US" sz="800" dirty="0"/>
-          </a:p>
-          <a:p>
-            <a:pPr indent="0" marL="0">
-              <a:buNone/>
-            </a:pPr>
-            <a:r>
-              <a:rPr lang="en-US" sz="800" dirty="0">
-                <a:solidFill>
-                  <a:srgbClr val="E6EDF3"/>
-                </a:solidFill>
-                <a:latin typeface="Courier New" pitchFamily="34" charset="0"/>
-                <a:ea typeface="Courier New" pitchFamily="34" charset="-122"/>
-                <a:cs typeface="Courier New" pitchFamily="34" charset="-120"/>
-              </a:rPr>
-              <a:t>// …</a:t>
-            </a:r>
-            <a:endParaRPr lang="en-US" sz="800" dirty="0"/>
-          </a:p>
-          <a:p>
-            <a:pPr indent="0" marL="0">
-              <a:buNone/>
-            </a:pPr>
-            <a:r>
-              <a:rPr lang="en-US" sz="800" dirty="0">
-                <a:solidFill>
-                  <a:srgbClr val="E6EDF3"/>
-                </a:solidFill>
-                <a:latin typeface="Courier New" pitchFamily="34" charset="0"/>
-                <a:ea typeface="Courier New" pitchFamily="34" charset="-122"/>
-                <a:cs typeface="Courier New" pitchFamily="34" charset="-120"/>
-              </a:rPr>
-              <a:t>std::size_t at =</a:t>
-            </a:r>
-            <a:endParaRPr lang="en-US" sz="800" dirty="0"/>
-          </a:p>
-          <a:p>
-            <a:pPr indent="0" marL="0">
-              <a:buNone/>
-            </a:pPr>
-            <a:r>
-              <a:rPr lang="en-US" sz="800" dirty="0">
-                <a:solidFill>
-                  <a:srgbClr val="E6EDF3"/>
-                </a:solidFill>
-                <a:latin typeface="Courier New" pitchFamily="34" charset="0"/>
-                <a:ea typeface="Courier New" pitchFamily="34" charset="-122"/>
-                <a:cs typeface="Courier New" pitchFamily="34" charset="-120"/>
-              </a:rPr>
-              <a:t>    pos + afterField.size();</a:t>
-            </a:r>
-            <a:endParaRPr lang="en-US" sz="800" dirty="0"/>
-          </a:p>
-          <a:p>
-            <a:pPr indent="0" marL="0">
-              <a:buNone/>
-            </a:pPr>
-            <a:r>
-              <a:rPr lang="en-US" sz="800" dirty="0">
-                <a:solidFill>
-                  <a:srgbClr val="E6EDF3"/>
-                </a:solidFill>
-                <a:latin typeface="Courier New" pitchFamily="34" charset="0"/>
-                <a:ea typeface="Courier New" pitchFamily="34" charset="-122"/>
-                <a:cs typeface="Courier New" pitchFamily="34" charset="-120"/>
-              </a:rPr>
-              <a:t>while( at &lt; line.size()</a:t>
-            </a:r>
-            <a:endParaRPr lang="en-US" sz="800" dirty="0"/>
-          </a:p>
-          <a:p>
-            <a:pPr indent="0" marL="0">
-              <a:buNone/>
-            </a:pPr>
-            <a:r>
-              <a:rPr lang="en-US" sz="800" dirty="0">
-                <a:solidFill>
-                  <a:srgbClr val="E6EDF3"/>
-                </a:solidFill>
-                <a:latin typeface="Courier New" pitchFamily="34" charset="0"/>
-                <a:ea typeface="Courier New" pitchFamily="34" charset="-122"/>
-                <a:cs typeface="Courier New" pitchFamily="34" charset="-120"/>
-              </a:rPr>
-              <a:t>       &amp;&amp; line[ at ] &gt;= '0'</a:t>
-            </a:r>
-            <a:endParaRPr lang="en-US" sz="800" dirty="0"/>
-          </a:p>
-          <a:p>
-            <a:pPr indent="0" marL="0">
-              <a:buNone/>
-            </a:pPr>
-            <a:r>
-              <a:rPr lang="en-US" sz="800" dirty="0">
-                <a:solidFill>
-                  <a:srgbClr val="E6EDF3"/>
-                </a:solidFill>
-                <a:latin typeface="Courier New" pitchFamily="34" charset="0"/>
-                <a:ea typeface="Courier New" pitchFamily="34" charset="-122"/>
-                <a:cs typeface="Courier New" pitchFamily="34" charset="-120"/>
-              </a:rPr>
-              <a:t>       &amp;&amp; line[ at ] &lt;= '9' )</a:t>
-            </a:r>
-            <a:endParaRPr lang="en-US" sz="800" dirty="0"/>
-          </a:p>
-          <a:p>
-            <a:pPr indent="0" marL="0">
-              <a:buNone/>
-            </a:pPr>
-            <a:r>
-              <a:rPr lang="en-US" sz="800" dirty="0">
-                <a:solidFill>
-                  <a:srgbClr val="E6EDF3"/>
-                </a:solidFill>
-                <a:latin typeface="Courier New" pitchFamily="34" charset="0"/>
-                <a:ea typeface="Courier New" pitchFamily="34" charset="-122"/>
-                <a:cs typeface="Courier New" pitchFamily="34" charset="-120"/>
-              </a:rPr>
-              <a:t>{ ++at; }</a:t>
-            </a:r>
-            <a:endParaRPr lang="en-US" sz="800" dirty="0"/>
-          </a:p>
-          <a:p>
-            <a:pPr indent="0" marL="0">
-              <a:buNone/>
-            </a:pPr>
-            <a:r>
-              <a:rPr lang="en-US" sz="800" dirty="0">
-                <a:solidFill>
-                  <a:srgbClr val="E6EDF3"/>
-                </a:solidFill>
-                <a:latin typeface="Courier New" pitchFamily="34" charset="0"/>
-                <a:ea typeface="Courier New" pitchFamily="34" charset="-122"/>
-                <a:cs typeface="Courier New" pitchFamily="34" charset="-120"/>
-              </a:rPr>
-              <a:t>line.insert( at, attr );</a:t>
-            </a:r>
-            <a:endParaRPr lang="en-US" sz="800" dirty="0"/>
-          </a:p>
-        </p:txBody>
-      </p:sp>
-      <p:sp>
-        <p:nvSpPr>
-          <p:cNvPr id="40" name="Shape 38"/>
-          <p:cNvSpPr/>
-          <p:nvPr/>
-        </p:nvSpPr>
-        <p:spPr>
-          <a:xfrm>
-            <a:off x="8935974" y="4361688"/>
-            <a:ext cx="2558034" cy="1527048"/>
-          </a:xfrm>
-          <a:prstGeom prst="rect">
-            <a:avLst/>
-          </a:prstGeom>
-          <a:solidFill>
-            <a:srgbClr val="0D1117"/>
-          </a:solidFill>
-          <a:ln w="6350">
-            <a:solidFill>
-              <a:srgbClr val="232D3D"/>
-            </a:solidFill>
-            <a:prstDash val="solid"/>
-          </a:ln>
-        </p:spPr>
-      </p:sp>
-      <p:sp>
-        <p:nvSpPr>
-          <p:cNvPr id="41" name="Text 39"/>
-          <p:cNvSpPr/>
-          <p:nvPr/>
-        </p:nvSpPr>
-        <p:spPr>
-          <a:xfrm>
-            <a:off x="8990838" y="4389120"/>
-            <a:ext cx="2448306" cy="155448"/>
-          </a:xfrm>
-          <a:prstGeom prst="rect">
-            <a:avLst/>
-          </a:prstGeom>
-          <a:noFill/>
-          <a:ln/>
-        </p:spPr>
-        <p:txBody>
-          <a:bodyPr wrap="square" lIns="0" tIns="0" rIns="0" bIns="0" rtlCol="0" anchor="ctr"/>
-          <a:lstStyle/>
-          <a:p>
-            <a:pPr indent="0" marL="0">
-              <a:buNone/>
-            </a:pPr>
-            <a:r>
-              <a:rPr lang="en-US" sz="750" dirty="0">
-                <a:solidFill>
-                  <a:srgbClr val="8B95A5"/>
-                </a:solidFill>
-                <a:latin typeface="Courier New" pitchFamily="34" charset="0"/>
-                <a:ea typeface="Courier New" pitchFamily="34" charset="-122"/>
-                <a:cs typeface="Courier New" pitchFamily="34" charset="-120"/>
-              </a:rPr>
-              <a:t>after</a:t>
-            </a:r>
-            <a:endParaRPr lang="en-US" sz="750" dirty="0"/>
-          </a:p>
-        </p:txBody>
-      </p:sp>
-      <p:sp>
-        <p:nvSpPr>
-          <p:cNvPr id="42" name="Text 40"/>
-          <p:cNvSpPr/>
-          <p:nvPr/>
-        </p:nvSpPr>
-        <p:spPr>
-          <a:xfrm>
-            <a:off x="8990838" y="4553712"/>
-            <a:ext cx="2448306" cy="1307592"/>
-          </a:xfrm>
-          <a:prstGeom prst="rect">
-            <a:avLst/>
-          </a:prstGeom>
-          <a:noFill/>
-          <a:ln/>
-        </p:spPr>
-        <p:txBody>
-          <a:bodyPr wrap="square" lIns="0" tIns="0" rIns="0" bIns="0" rtlCol="0" anchor="t"/>
-          <a:lstStyle/>
-          <a:p>
-            <a:pPr indent="0" marL="0">
-              <a:buNone/>
-            </a:pPr>
-            <a:r>
-              <a:rPr lang="en-US" sz="800" dirty="0">
-                <a:solidFill>
-                  <a:srgbClr val="E6EDF3"/>
-                </a:solidFill>
-                <a:latin typeface="Courier New" pitchFamily="34" charset="0"/>
-                <a:ea typeface="Courier New" pitchFamily="34" charset="-122"/>
-                <a:cs typeface="Courier New" pitchFamily="34" charset="-120"/>
-              </a:rPr>
-              <a:t>std::pair&lt;std::size_t, std::size_t&gt;</a:t>
-            </a:r>
-            <a:endParaRPr lang="en-US" sz="800" dirty="0"/>
-          </a:p>
-          <a:p>
-            <a:pPr indent="0" marL="0">
-              <a:buNone/>
-            </a:pPr>
-            <a:r>
-              <a:rPr lang="en-US" sz="800" dirty="0">
-                <a:solidFill>
-                  <a:srgbClr val="E6EDF3"/>
-                </a:solidFill>
-                <a:latin typeface="Courier New" pitchFamily="34" charset="0"/>
-                <a:ea typeface="Courier New" pitchFamily="34" charset="-122"/>
-                <a:cs typeface="Courier New" pitchFamily="34" charset="-120"/>
-              </a:rPr>
-              <a:t>headerFieldDigits( … line, … field )</a:t>
-            </a:r>
-            <a:endParaRPr lang="en-US" sz="800" dirty="0"/>
-          </a:p>
-          <a:p>
-            <a:pPr indent="0" marL="0">
-              <a:buNone/>
-            </a:pPr>
-            <a:r>
-              <a:rPr lang="en-US" sz="800" dirty="0">
-                <a:solidFill>
-                  <a:srgbClr val="E6EDF3"/>
-                </a:solidFill>
-                <a:latin typeface="Courier New" pitchFamily="34" charset="0"/>
-                <a:ea typeface="Courier New" pitchFamily="34" charset="-122"/>
-                <a:cs typeface="Courier New" pitchFamily="34" charset="-120"/>
-              </a:rPr>
-              <a:t>// … find it, walk its digit run</a:t>
-            </a:r>
-            <a:endParaRPr lang="en-US" sz="800" dirty="0"/>
-          </a:p>
-          <a:p>
-            <a:pPr indent="0" marL="0">
-              <a:buNone/>
-            </a:pPr>
-            <a:r>
-              <a:rPr lang="en-US" sz="800" dirty="0">
-                <a:solidFill>
-                  <a:srgbClr val="E6EDF3"/>
-                </a:solidFill>
-                <a:latin typeface="Courier New" pitchFamily="34" charset="0"/>
-                <a:ea typeface="Courier New" pitchFamily="34" charset="-122"/>
-                <a:cs typeface="Courier New" pitchFamily="34" charset="-120"/>
-              </a:rPr>
-              <a:t>// withHeaderAttrAfter( … ):</a:t>
-            </a:r>
-            <a:endParaRPr lang="en-US" sz="800" dirty="0"/>
-          </a:p>
-          <a:p>
-            <a:pPr indent="0" marL="0">
-              <a:buNone/>
-            </a:pPr>
-            <a:r>
-              <a:rPr lang="en-US" sz="800" dirty="0">
-                <a:solidFill>
-                  <a:srgbClr val="E6EDF3"/>
-                </a:solidFill>
-                <a:latin typeface="Courier New" pitchFamily="34" charset="0"/>
-                <a:ea typeface="Courier New" pitchFamily="34" charset="-122"/>
-                <a:cs typeface="Courier New" pitchFamily="34" charset="-120"/>
-              </a:rPr>
-              <a:t>const auto [ start, end ] =</a:t>
-            </a:r>
-            <a:endParaRPr lang="en-US" sz="800" dirty="0"/>
-          </a:p>
-          <a:p>
-            <a:pPr indent="0" marL="0">
-              <a:buNone/>
-            </a:pPr>
-            <a:r>
-              <a:rPr lang="en-US" sz="800" dirty="0">
-                <a:solidFill>
-                  <a:srgbClr val="E6EDF3"/>
-                </a:solidFill>
-                <a:latin typeface="Courier New" pitchFamily="34" charset="0"/>
-                <a:ea typeface="Courier New" pitchFamily="34" charset="-122"/>
-                <a:cs typeface="Courier New" pitchFamily="34" charset="-120"/>
-              </a:rPr>
-              <a:t>    headerFieldDigits(</a:t>
-            </a:r>
-            <a:endParaRPr lang="en-US" sz="800" dirty="0"/>
-          </a:p>
-          <a:p>
-            <a:pPr indent="0" marL="0">
-              <a:buNone/>
-            </a:pPr>
-            <a:r>
-              <a:rPr lang="en-US" sz="800" dirty="0">
-                <a:solidFill>
-                  <a:srgbClr val="E6EDF3"/>
-                </a:solidFill>
-                <a:latin typeface="Courier New" pitchFamily="34" charset="0"/>
-                <a:ea typeface="Courier New" pitchFamily="34" charset="-122"/>
-                <a:cs typeface="Courier New" pitchFamily="34" charset="-120"/>
-              </a:rPr>
-              <a:t>        line, afterField );</a:t>
-            </a:r>
-            <a:endParaRPr lang="en-US" sz="800" dirty="0"/>
-          </a:p>
-          <a:p>
-            <a:pPr indent="0" marL="0">
-              <a:buNone/>
-            </a:pPr>
-            <a:r>
-              <a:rPr lang="en-US" sz="800" dirty="0">
-                <a:solidFill>
-                  <a:srgbClr val="E6EDF3"/>
-                </a:solidFill>
-                <a:latin typeface="Courier New" pitchFamily="34" charset="0"/>
-                <a:ea typeface="Courier New" pitchFamily="34" charset="-122"/>
-                <a:cs typeface="Courier New" pitchFamily="34" charset="-120"/>
-              </a:rPr>
-              <a:t>if( start != std::string::npos )</a:t>
-            </a:r>
-            <a:endParaRPr lang="en-US" sz="800" dirty="0"/>
-          </a:p>
-          <a:p>
-            <a:pPr indent="0" marL="0">
-              <a:buNone/>
-            </a:pPr>
-            <a:r>
-              <a:rPr lang="en-US" sz="800" dirty="0">
-                <a:solidFill>
-                  <a:srgbClr val="E6EDF3"/>
-                </a:solidFill>
-                <a:latin typeface="Courier New" pitchFamily="34" charset="0"/>
-                <a:ea typeface="Courier New" pitchFamily="34" charset="-122"/>
-                <a:cs typeface="Courier New" pitchFamily="34" charset="-120"/>
-              </a:rPr>
-              <a:t>{</a:t>
-            </a:r>
-            <a:endParaRPr lang="en-US" sz="800" dirty="0"/>
-          </a:p>
-          <a:p>
-            <a:pPr indent="0" marL="0">
-              <a:buNone/>
-            </a:pPr>
-            <a:r>
-              <a:rPr lang="en-US" sz="800" dirty="0">
-                <a:solidFill>
-                  <a:srgbClr val="E6EDF3"/>
-                </a:solidFill>
-                <a:latin typeface="Courier New" pitchFamily="34" charset="0"/>
-                <a:ea typeface="Courier New" pitchFamily="34" charset="-122"/>
-                <a:cs typeface="Courier New" pitchFamily="34" charset="-120"/>
-              </a:rPr>
-              <a:t>    line.insert( end, attr );</a:t>
-            </a:r>
-            <a:endParaRPr lang="en-US" sz="800" dirty="0"/>
-          </a:p>
-        </p:txBody>
-      </p:sp>
-      <p:sp>
-        <p:nvSpPr>
-          <p:cNvPr id="43" name="Text 41"/>
-          <p:cNvSpPr/>
-          <p:nvPr/>
-        </p:nvSpPr>
-        <p:spPr>
-          <a:xfrm>
-            <a:off x="6286500" y="5916168"/>
-            <a:ext cx="5207508" cy="274320"/>
-          </a:xfrm>
-          <a:prstGeom prst="rect">
-            <a:avLst/>
-          </a:prstGeom>
-          <a:noFill/>
-          <a:ln/>
-        </p:spPr>
-        <p:txBody>
-          <a:bodyPr wrap="square" lIns="0" tIns="0" rIns="0" bIns="0" rtlCol="0" anchor="ctr"/>
-          <a:lstStyle/>
-          <a:p>
-            <a:pPr indent="0" marL="0">
-              <a:buNone/>
-            </a:pPr>
-            <a:r>
-              <a:rPr lang="en-US" sz="950" i="1" dirty="0">
-                <a:solidFill>
-                  <a:srgbClr val="8B95A5"/>
-                </a:solidFill>
-                <a:latin typeface="Arial" pitchFamily="34" charset="0"/>
-                <a:ea typeface="Arial" pitchFamily="34" charset="-122"/>
-                <a:cs typeface="Arial" pitchFamily="34" charset="-120"/>
-              </a:rPr>
-              <a:t>The locator is shared now, yet a 63-token residue still gates: a false positive.</a:t>
-            </a:r>
-            <a:endParaRPr lang="en-US" sz="950" dirty="0"/>
-          </a:p>
-        </p:txBody>
-      </p:sp>
-      <p:sp>
-        <p:nvSpPr>
-          <p:cNvPr id="44" name="Text 42"/>
-          <p:cNvSpPr/>
-          <p:nvPr/>
-        </p:nvSpPr>
-        <p:spPr>
-          <a:xfrm>
-            <a:off x="566928" y="6419088"/>
-            <a:ext cx="11055096" cy="274320"/>
-          </a:xfrm>
-          <a:prstGeom prst="rect">
-            <a:avLst/>
-          </a:prstGeom>
-          <a:noFill/>
-          <a:ln/>
-        </p:spPr>
-        <p:txBody>
-          <a:bodyPr wrap="square" lIns="0" tIns="0" rIns="0" bIns="0" rtlCol="0" anchor="ctr"/>
-          <a:lstStyle/>
-          <a:p>
-            <a:pPr indent="0" marL="0">
-              <a:buNone/>
-            </a:pPr>
-            <a:r>
-              <a:rPr lang="en-US" sz="1050" dirty="0">
-                <a:solidFill>
-                  <a:srgbClr val="8B95A5"/>
-                </a:solidFill>
-                <a:latin typeface="Courier New" pitchFamily="34" charset="0"/>
-                <a:ea typeface="Courier New" pitchFamily="34" charset="-122"/>
-                <a:cs typeface="Courier New" pitchFamily="34" charset="-120"/>
-              </a:rPr>
-              <a:t>each pair is copied from docs/QUALITY_DELTA_CATALOG.md, where the command that reproduces it is recorded</a:t>
+              <a:t>the MCP server exposes the same deterministic engine — one index, shared with the CLI, staleness-checked</a:t>
             </a:r>
             <a:endParaRPr lang="en-US" sz="1050" dirty="0"/>
           </a:p>
@@ -30946,7 +28878,7 @@
                 <a:ea typeface="Courier New" pitchFamily="34" charset="-122"/>
                 <a:cs typeface="Courier New" pitchFamily="34" charset="-120"/>
               </a:rPr>
-              <a:t>// built for the agent's seat</a:t>
+              <a:t>// it does not only read</a:t>
             </a:r>
             <a:endParaRPr lang="en-US" sz="1300" dirty="0"/>
           </a:p>
@@ -30985,7 +28917,7 @@
                 <a:ea typeface="Arial" pitchFamily="34" charset="-122"/>
                 <a:cs typeface="Arial" pitchFamily="34" charset="-120"/>
               </a:rPr>
-              <a:t>One command wires it into your agent</a:t>
+              <a:t>Span-addressed edits: the map writes back</a:t>
             </a:r>
             <a:endParaRPr lang="en-US" sz="3200" dirty="0"/>
           </a:p>
@@ -30999,117 +28931,12 @@
         </p:nvSpPr>
         <p:spPr>
           <a:xfrm>
-            <a:off x="566928" y="1783080"/>
-            <a:ext cx="3977640" cy="502920"/>
+            <a:off x="566928" y="1536192"/>
+            <a:ext cx="5577840" cy="2212848"/>
           </a:xfrm>
           <a:prstGeom prst="roundRect">
             <a:avLst>
-              <a:gd name="adj" fmla="val 10909"/>
-            </a:avLst>
-          </a:prstGeom>
-          <a:solidFill>
-            <a:srgbClr val="1B2432"/>
-          </a:solidFill>
-          <a:ln w="9525">
-            <a:solidFill>
-              <a:srgbClr val="2A3547"/>
-            </a:solidFill>
-            <a:prstDash val="solid"/>
-          </a:ln>
-        </p:spPr>
-      </p:sp>
-      <p:sp>
-        <p:nvSpPr>
-          <p:cNvPr id="5" name="Text 3"/>
-          <p:cNvSpPr/>
-          <p:nvPr/>
-        </p:nvSpPr>
-        <p:spPr>
-          <a:xfrm>
-            <a:off x="621792" y="1783080"/>
-            <a:ext cx="3867912" cy="502920"/>
-          </a:xfrm>
-          <a:prstGeom prst="rect">
-            <a:avLst/>
-          </a:prstGeom>
-          <a:noFill/>
-          <a:ln/>
-        </p:spPr>
-        <p:txBody>
-          <a:bodyPr wrap="square" lIns="508" tIns="508" rIns="508" bIns="508" rtlCol="0" anchor="ctr"/>
-          <a:lstStyle/>
-          <a:p>
-            <a:pPr indent="0" marL="0">
-              <a:buNone/>
-            </a:pPr>
-            <a:r>
-              <a:rPr lang="en-US" sz="1400" dirty="0">
-                <a:solidFill>
-                  <a:srgbClr val="4AC26B"/>
-                </a:solidFill>
-                <a:latin typeface="Courier New" pitchFamily="34" charset="0"/>
-                <a:ea typeface="Courier New" pitchFamily="34" charset="-122"/>
-                <a:cs typeface="Courier New" pitchFamily="34" charset="-120"/>
-              </a:rPr>
-              <a:t>$ ripwire wrap claude</a:t>
-            </a:r>
-            <a:endParaRPr lang="en-US" sz="1400" dirty="0"/>
-          </a:p>
-        </p:txBody>
-      </p:sp>
-      <p:sp>
-        <p:nvSpPr>
-          <p:cNvPr id="6" name="Text 4"/>
-          <p:cNvSpPr/>
-          <p:nvPr/>
-        </p:nvSpPr>
-        <p:spPr>
-          <a:xfrm>
-            <a:off x="4754880" y="1783080"/>
-            <a:ext cx="6766560" cy="502920"/>
-          </a:xfrm>
-          <a:prstGeom prst="rect">
-            <a:avLst/>
-          </a:prstGeom>
-          <a:noFill/>
-          <a:ln/>
-        </p:spPr>
-        <p:txBody>
-          <a:bodyPr wrap="square" lIns="0" tIns="0" rIns="0" bIns="0" rtlCol="0" anchor="ctr"/>
-          <a:lstStyle/>
-          <a:p>
-            <a:pPr indent="0" marL="0">
-              <a:buNone/>
-            </a:pPr>
-            <a:r>
-              <a:rPr lang="en-US" sz="1200" dirty="0">
-                <a:solidFill>
-                  <a:srgbClr val="8B95A5"/>
-                </a:solidFill>
-                <a:latin typeface="Arial" pitchFamily="34" charset="0"/>
-                <a:ea typeface="Arial" pitchFamily="34" charset="-122"/>
-                <a:cs typeface="Arial" pitchFamily="34" charset="-120"/>
-              </a:rPr>
-              <a:t>claude · cursor · codex · windsurf · gemini · aider — or --all to detect every one you have installed</a:t>
-            </a:r>
-            <a:endParaRPr lang="en-US" sz="1200" dirty="0"/>
-          </a:p>
-        </p:txBody>
-      </p:sp>
-      <p:sp>
-        <p:nvSpPr>
-          <p:cNvPr id="7" name="Shape 5"/>
-          <p:cNvSpPr/>
-          <p:nvPr/>
-        </p:nvSpPr>
-        <p:spPr>
-          <a:xfrm>
-            <a:off x="566928" y="2542032"/>
-            <a:ext cx="5440680" cy="1481328"/>
-          </a:xfrm>
-          <a:prstGeom prst="roundRect">
-            <a:avLst>
-              <a:gd name="adj" fmla="val 5556"/>
+              <a:gd name="adj" fmla="val 3719"/>
             </a:avLst>
           </a:prstGeom>
           <a:solidFill>
@@ -31125,14 +28952,14 @@
       </p:sp>
       <p:sp>
         <p:nvSpPr>
-          <p:cNvPr id="8" name="Text 6"/>
-          <p:cNvSpPr/>
-          <p:nvPr/>
-        </p:nvSpPr>
-        <p:spPr>
-          <a:xfrm>
-            <a:off x="749808" y="2651760"/>
-            <a:ext cx="5074920" cy="365760"/>
+          <p:cNvPr id="5" name="Text 3"/>
+          <p:cNvSpPr/>
+          <p:nvPr/>
+        </p:nvSpPr>
+        <p:spPr>
+          <a:xfrm>
+            <a:off x="749808" y="1645920"/>
+            <a:ext cx="5212080" cy="310896"/>
           </a:xfrm>
           <a:prstGeom prst="rect">
             <a:avLst/>
@@ -31151,38 +28978,55 @@
               <a:rPr lang="en-US" sz="1400" b="1" dirty="0">
                 <a:solidFill>
                   <a:srgbClr val="56D6E8"/>
+                </a:solidFill>
+                <a:latin typeface="Arial" pitchFamily="34" charset="0"/>
+                <a:ea typeface="Arial" pitchFamily="34" charset="-122"/>
+                <a:cs typeface="Arial" pitchFamily="34" charset="-120"/>
+              </a:rPr>
+              <a:t>Three verbs, one resolved span</a:t>
+            </a:r>
+            <a:endParaRPr lang="en-US" sz="1400" dirty="0"/>
+          </a:p>
+        </p:txBody>
+      </p:sp>
+      <p:sp>
+        <p:nvSpPr>
+          <p:cNvPr id="6" name="Text 4"/>
+          <p:cNvSpPr/>
+          <p:nvPr/>
+        </p:nvSpPr>
+        <p:spPr>
+          <a:xfrm>
+            <a:off x="749808" y="1993392"/>
+            <a:ext cx="5212080" cy="1005840"/>
+          </a:xfrm>
+          <a:prstGeom prst="rect">
+            <a:avLst/>
+          </a:prstGeom>
+          <a:noFill/>
+          <a:ln/>
+        </p:spPr>
+        <p:txBody>
+          <a:bodyPr wrap="square" lIns="0" tIns="0" rIns="0" bIns="0" rtlCol="0" anchor="ctr"/>
+          <a:lstStyle/>
+          <a:p>
+            <a:pPr indent="0" marL="0">
+              <a:buNone/>
+            </a:pPr>
+            <a:r>
+              <a:rPr lang="en-US" sz="1150" dirty="0">
+                <a:solidFill>
+                  <a:srgbClr val="E6EDF3"/>
                 </a:solidFill>
                 <a:latin typeface="Courier New" pitchFamily="34" charset="0"/>
                 <a:ea typeface="Courier New" pitchFamily="34" charset="-122"/>
                 <a:cs typeface="Courier New" pitchFamily="34" charset="-120"/>
               </a:rPr>
-              <a:t>31 MCP verbs</a:t>
-            </a:r>
-            <a:endParaRPr lang="en-US" sz="1400" dirty="0"/>
-          </a:p>
-        </p:txBody>
-      </p:sp>
-      <p:sp>
-        <p:nvSpPr>
-          <p:cNvPr id="9" name="Text 7"/>
-          <p:cNvSpPr/>
-          <p:nvPr/>
-        </p:nvSpPr>
-        <p:spPr>
-          <a:xfrm>
-            <a:off x="749808" y="3044952"/>
-            <a:ext cx="5074920" cy="1005840"/>
-          </a:xfrm>
-          <a:prstGeom prst="rect">
-            <a:avLst/>
-          </a:prstGeom>
-          <a:noFill/>
-          <a:ln/>
-        </p:spPr>
-        <p:txBody>
-          <a:bodyPr wrap="square" lIns="0" tIns="0" rIns="0" bIns="0" rtlCol="0" anchor="ctr"/>
-          <a:lstStyle/>
-          <a:p>
+              <a:t>--replace-symbol-body=TARGET
+--insert-before-symbol=TARGET
+--insert-after-symbol=TARGET
+</a:t>
+            </a:r>
             <a:pPr indent="0" marL="0">
               <a:buNone/>
             </a:pPr>
@@ -31191,11 +29035,11 @@
                 <a:solidFill>
                   <a:srgbClr val="8B95A5"/>
                 </a:solidFill>
-                <a:latin typeface="Arial" pitchFamily="34" charset="0"/>
-                <a:ea typeface="Arial" pitchFamily="34" charset="-122"/>
-                <a:cs typeface="Arial" pitchFamily="34" charset="-120"/>
-              </a:rPr>
-              <a:t>16 read verbs mirroring the CLI, 12 flagship reflexes (impact, uses, edit_check, from_trace, connect …), 3 span-addressed edit verbs with a safety contract</a:t>
+                <a:latin typeface="Courier New" pitchFamily="34" charset="0"/>
+                <a:ea typeface="Courier New" pitchFamily="34" charset="-122"/>
+                <a:cs typeface="Courier New" pitchFamily="34" charset="-120"/>
+              </a:rPr>
+              <a:t>  --edit-payload=FILE|-</a:t>
             </a:r>
             <a:endParaRPr lang="en-US" sz="1150" dirty="0"/>
           </a:p>
@@ -31203,18 +29047,162 @@
       </p:sp>
       <p:sp>
         <p:nvSpPr>
-          <p:cNvPr id="10" name="Shape 8"/>
-          <p:cNvSpPr/>
-          <p:nvPr/>
-        </p:nvSpPr>
-        <p:spPr>
-          <a:xfrm>
-            <a:off x="6181344" y="2542032"/>
-            <a:ext cx="5440680" cy="1481328"/>
+          <p:cNvPr id="7" name="Text 5"/>
+          <p:cNvSpPr/>
+          <p:nvPr/>
+        </p:nvSpPr>
+        <p:spPr>
+          <a:xfrm>
+            <a:off x="749808" y="2962656"/>
+            <a:ext cx="5212080" cy="713232"/>
+          </a:xfrm>
+          <a:prstGeom prst="rect">
+            <a:avLst/>
+          </a:prstGeom>
+          <a:noFill/>
+          <a:ln/>
+        </p:spPr>
+        <p:txBody>
+          <a:bodyPr wrap="square" lIns="0" tIns="0" rIns="0" bIns="0" rtlCol="0" anchor="ctr"/>
+          <a:lstStyle/>
+          <a:p>
+            <a:pPr indent="0" marL="0">
+              <a:buNone/>
+            </a:pPr>
+            <a:r>
+              <a:rPr lang="en-US" sz="1050" dirty="0">
+                <a:solidFill>
+                  <a:srgbClr val="8B95A5"/>
+                </a:solidFill>
+                <a:latin typeface="Arial" pitchFamily="34" charset="0"/>
+                <a:ea typeface="Arial" pitchFamily="34" charset="-122"/>
+                <a:cs typeface="Arial" pitchFamily="34" charset="-120"/>
+              </a:rPr>
+              <a:t>TARGET is a name, an @FILE:LINE seed — paste the location out of a diff hunk or a compiler error and it binds the innermost enclosing definition — or a freshness-pinned handle from --grep --handles. No line numbers to keep in your head, and no whole-file rewrite.</a:t>
+            </a:r>
+            <a:endParaRPr lang="en-US" sz="1050" dirty="0"/>
+          </a:p>
+        </p:txBody>
+      </p:sp>
+      <p:sp>
+        <p:nvSpPr>
+          <p:cNvPr id="8" name="Shape 6"/>
+          <p:cNvSpPr/>
+          <p:nvPr/>
+        </p:nvSpPr>
+        <p:spPr>
+          <a:xfrm>
+            <a:off x="6400800" y="1536192"/>
+            <a:ext cx="5138928" cy="2212848"/>
           </a:xfrm>
           <a:prstGeom prst="roundRect">
             <a:avLst>
-              <a:gd name="adj" fmla="val 5556"/>
+              <a:gd name="adj" fmla="val 3719"/>
+            </a:avLst>
+          </a:prstGeom>
+          <a:solidFill>
+            <a:srgbClr val="1B2432"/>
+          </a:solidFill>
+          <a:ln w="9525">
+            <a:solidFill>
+              <a:srgbClr val="232D3D"/>
+            </a:solidFill>
+            <a:prstDash val="solid"/>
+          </a:ln>
+        </p:spPr>
+      </p:sp>
+      <p:sp>
+        <p:nvSpPr>
+          <p:cNvPr id="9" name="Text 7"/>
+          <p:cNvSpPr/>
+          <p:nvPr/>
+        </p:nvSpPr>
+        <p:spPr>
+          <a:xfrm>
+            <a:off x="6583680" y="1645920"/>
+            <a:ext cx="4773168" cy="310896"/>
+          </a:xfrm>
+          <a:prstGeom prst="rect">
+            <a:avLst/>
+          </a:prstGeom>
+          <a:noFill/>
+          <a:ln/>
+        </p:spPr>
+        <p:txBody>
+          <a:bodyPr wrap="square" lIns="0" tIns="0" rIns="0" bIns="0" rtlCol="0" anchor="ctr"/>
+          <a:lstStyle/>
+          <a:p>
+            <a:pPr indent="0" marL="0">
+              <a:buNone/>
+            </a:pPr>
+            <a:r>
+              <a:rPr lang="en-US" sz="1400" b="1" dirty="0">
+                <a:solidFill>
+                  <a:srgbClr val="F2B84B"/>
+                </a:solidFill>
+                <a:latin typeface="Arial" pitchFamily="34" charset="0"/>
+                <a:ea typeface="Arial" pitchFamily="34" charset="-122"/>
+                <a:cs typeface="Arial" pitchFamily="34" charset="-120"/>
+              </a:rPr>
+              <a:t>The refusals are the feature</a:t>
+            </a:r>
+            <a:endParaRPr lang="en-US" sz="1400" dirty="0"/>
+          </a:p>
+        </p:txBody>
+      </p:sp>
+      <p:sp>
+        <p:nvSpPr>
+          <p:cNvPr id="10" name="Text 8"/>
+          <p:cNvSpPr/>
+          <p:nvPr/>
+        </p:nvSpPr>
+        <p:spPr>
+          <a:xfrm>
+            <a:off x="6583680" y="1993392"/>
+            <a:ext cx="4773168" cy="1682496"/>
+          </a:xfrm>
+          <a:prstGeom prst="rect">
+            <a:avLst/>
+          </a:prstGeom>
+          <a:noFill/>
+          <a:ln/>
+        </p:spPr>
+        <p:txBody>
+          <a:bodyPr wrap="square" lIns="0" tIns="0" rIns="0" bIns="0" rtlCol="0" anchor="ctr"/>
+          <a:lstStyle/>
+          <a:p>
+            <a:pPr indent="0" marL="0">
+              <a:buNone/>
+            </a:pPr>
+            <a:r>
+              <a:rPr lang="en-US" sz="1050" dirty="0">
+                <a:solidFill>
+                  <a:srgbClr val="8B95A5"/>
+                </a:solidFill>
+                <a:latin typeface="Arial" pitchFamily="34" charset="0"/>
+                <a:ea typeface="Arial" pitchFamily="34" charset="-122"/>
+                <a:cs typeface="Arial" pitchFamily="34" charset="-120"/>
+              </a:rPr>
+              <a:t>Freshness hash, lock, a re-check immediately before the rename, fsync, mode preserved, atomic rename. A target that resolves to more than one definition refuses. An empty payload refuses rather than being read as a deletion. Every refusal leaves the file byte-identical, and every success prints a JSON receipt whose span is the POST-EDIT byte range — where the payload now sits, not where it was aimed.</a:t>
+            </a:r>
+            <a:endParaRPr lang="en-US" sz="1050" dirty="0"/>
+          </a:p>
+        </p:txBody>
+      </p:sp>
+      <p:sp>
+        <p:nvSpPr>
+          <p:cNvPr id="11" name="Shape 9"/>
+          <p:cNvSpPr/>
+          <p:nvPr/>
+        </p:nvSpPr>
+        <p:spPr>
+          <a:xfrm>
+            <a:off x="566928" y="3895344"/>
+            <a:ext cx="5577840" cy="1755648"/>
+          </a:xfrm>
+          <a:prstGeom prst="roundRect">
+            <a:avLst>
+              <a:gd name="adj" fmla="val 4688"/>
             </a:avLst>
           </a:prstGeom>
           <a:solidFill>
@@ -31230,14 +29218,14 @@
       </p:sp>
       <p:sp>
         <p:nvSpPr>
-          <p:cNvPr id="11" name="Text 9"/>
-          <p:cNvSpPr/>
-          <p:nvPr/>
-        </p:nvSpPr>
-        <p:spPr>
-          <a:xfrm>
-            <a:off x="6364224" y="2651760"/>
-            <a:ext cx="5074920" cy="365760"/>
+          <p:cNvPr id="12" name="Text 10"/>
+          <p:cNvSpPr/>
+          <p:nvPr/>
+        </p:nvSpPr>
+        <p:spPr>
+          <a:xfrm>
+            <a:off x="749808" y="4005072"/>
+            <a:ext cx="5212080" cy="310896"/>
           </a:xfrm>
           <a:prstGeom prst="rect">
             <a:avLst/>
@@ -31255,13 +29243,13 @@
             <a:r>
               <a:rPr lang="en-US" sz="1400" b="1" dirty="0">
                 <a:solidFill>
-                  <a:srgbClr val="56D6E8"/>
-                </a:solidFill>
-                <a:latin typeface="Courier New" pitchFamily="34" charset="0"/>
-                <a:ea typeface="Courier New" pitchFamily="34" charset="-122"/>
-                <a:cs typeface="Courier New" pitchFamily="34" charset="-120"/>
-              </a:rPr>
-              <a:t>lazy-body handles</a:t>
+                  <a:srgbClr val="4AC26B"/>
+                </a:solidFill>
+                <a:latin typeface="Arial" pitchFamily="34" charset="0"/>
+                <a:ea typeface="Arial" pitchFamily="34" charset="-122"/>
+                <a:cs typeface="Arial" pitchFamily="34" charset="-120"/>
+              </a:rPr>
+              <a:t>Preview the bytes before they exist</a:t>
             </a:r>
             <a:endParaRPr lang="en-US" sz="1400" dirty="0"/>
           </a:p>
@@ -31269,30 +29257,30 @@
       </p:sp>
       <p:sp>
         <p:nvSpPr>
-          <p:cNvPr id="12" name="Text 10"/>
-          <p:cNvSpPr/>
-          <p:nvPr/>
-        </p:nvSpPr>
-        <p:spPr>
-          <a:xfrm>
-            <a:off x="6364224" y="3044952"/>
-            <a:ext cx="5074920" cy="1005840"/>
-          </a:xfrm>
-          <a:prstGeom prst="rect">
-            <a:avLst/>
-          </a:prstGeom>
-          <a:noFill/>
-          <a:ln/>
-        </p:spPr>
-        <p:txBody>
-          <a:bodyPr wrap="square" lIns="0" tIns="0" rIns="0" bIns="0" rtlCol="0" anchor="ctr"/>
-          <a:lstStyle/>
-          <a:p>
-            <a:pPr indent="0" marL="0">
-              <a:buNone/>
-            </a:pPr>
-            <a:r>
-              <a:rPr lang="en-US" sz="1150" dirty="0">
+          <p:cNvPr id="13" name="Text 11"/>
+          <p:cNvSpPr/>
+          <p:nvPr/>
+        </p:nvSpPr>
+        <p:spPr>
+          <a:xfrm>
+            <a:off x="749808" y="4352544"/>
+            <a:ext cx="5212080" cy="1188720"/>
+          </a:xfrm>
+          <a:prstGeom prst="rect">
+            <a:avLst/>
+          </a:prstGeom>
+          <a:noFill/>
+          <a:ln/>
+        </p:spPr>
+        <p:txBody>
+          <a:bodyPr wrap="square" lIns="0" tIns="0" rIns="0" bIns="0" rtlCol="0" anchor="ctr"/>
+          <a:lstStyle/>
+          <a:p>
+            <a:pPr indent="0" marL="0">
+              <a:buNone/>
+            </a:pPr>
+            <a:r>
+              <a:rPr lang="en-US" sz="1050" dirty="0">
                 <a:solidFill>
                   <a:srgbClr val="8B95A5"/>
                 </a:solidFill>
@@ -31300,26 +29288,26 @@
                 <a:ea typeface="Arial" pitchFamily="34" charset="-122"/>
                 <a:cs typeface="Arial" pitchFamily="34" charset="-120"/>
               </a:rPr>
-              <a:t>read verbs return signatures and a stable handle; the agent fetches a body only when it decides it needs one — names by default, bytes on request</a:t>
-            </a:r>
-            <a:endParaRPr lang="en-US" sz="1150" dirty="0"/>
-          </a:p>
-        </p:txBody>
-      </p:sp>
-      <p:sp>
-        <p:nvSpPr>
-          <p:cNvPr id="13" name="Shape 11"/>
-          <p:cNvSpPr/>
-          <p:nvPr/>
-        </p:nvSpPr>
-        <p:spPr>
-          <a:xfrm>
-            <a:off x="566928" y="4187952"/>
-            <a:ext cx="5440680" cy="1481328"/>
+              <a:t>--edit-check=SYM --edit-payload=- --dry-run splices the payload over the span IN MEMORY, re-parses that one file, rebuilds the call graph over the re-derived tree, and answers the contract question about bytes nobody has written: did the signature change, and which callers does it break? Preview, then apply — no Read of the file in between.</a:t>
+            </a:r>
+            <a:endParaRPr lang="en-US" sz="1050" dirty="0"/>
+          </a:p>
+        </p:txBody>
+      </p:sp>
+      <p:sp>
+        <p:nvSpPr>
+          <p:cNvPr id="14" name="Shape 12"/>
+          <p:cNvSpPr/>
+          <p:nvPr/>
+        </p:nvSpPr>
+        <p:spPr>
+          <a:xfrm>
+            <a:off x="6400800" y="3895344"/>
+            <a:ext cx="5138928" cy="1755648"/>
           </a:xfrm>
           <a:prstGeom prst="roundRect">
             <a:avLst>
-              <a:gd name="adj" fmla="val 5556"/>
+              <a:gd name="adj" fmla="val 4688"/>
             </a:avLst>
           </a:prstGeom>
           <a:solidFill>
@@ -31335,14 +29323,14 @@
       </p:sp>
       <p:sp>
         <p:nvSpPr>
-          <p:cNvPr id="14" name="Text 12"/>
-          <p:cNvSpPr/>
-          <p:nvPr/>
-        </p:nvSpPr>
-        <p:spPr>
-          <a:xfrm>
-            <a:off x="749808" y="4297680"/>
-            <a:ext cx="5074920" cy="365760"/>
+          <p:cNvPr id="15" name="Text 13"/>
+          <p:cNvSpPr/>
+          <p:nvPr/>
+        </p:nvSpPr>
+        <p:spPr>
+          <a:xfrm>
+            <a:off x="6583680" y="4005072"/>
+            <a:ext cx="4773168" cy="310896"/>
           </a:xfrm>
           <a:prstGeom prst="rect">
             <a:avLst/>
@@ -31362,11 +29350,11 @@
                 <a:solidFill>
                   <a:srgbClr val="56D6E8"/>
                 </a:solidFill>
-                <a:latin typeface="Courier New" pitchFamily="34" charset="0"/>
-                <a:ea typeface="Courier New" pitchFamily="34" charset="-122"/>
-                <a:cs typeface="Courier New" pitchFamily="34" charset="-120"/>
-              </a:rPr>
-              <a:t>18 agent skills</a:t>
+                <a:latin typeface="Arial" pitchFamily="34" charset="0"/>
+                <a:ea typeface="Arial" pitchFamily="34" charset="-122"/>
+                <a:cs typeface="Arial" pitchFamily="34" charset="-120"/>
+              </a:rPr>
+              <a:t>Several edits, one transaction</a:t>
             </a:r>
             <a:endParaRPr lang="en-US" sz="1400" dirty="0"/>
           </a:p>
@@ -31374,30 +29362,30 @@
       </p:sp>
       <p:sp>
         <p:nvSpPr>
-          <p:cNvPr id="15" name="Text 13"/>
-          <p:cNvSpPr/>
-          <p:nvPr/>
-        </p:nvSpPr>
-        <p:spPr>
-          <a:xfrm>
-            <a:off x="749808" y="4690872"/>
-            <a:ext cx="5074920" cy="1005840"/>
-          </a:xfrm>
-          <a:prstGeom prst="rect">
-            <a:avLst/>
-          </a:prstGeom>
-          <a:noFill/>
-          <a:ln/>
-        </p:spPr>
-        <p:txBody>
-          <a:bodyPr wrap="square" lIns="0" tIns="0" rIns="0" bIns="0" rtlCol="0" anchor="ctr"/>
-          <a:lstStyle/>
-          <a:p>
-            <a:pPr indent="0" marL="0">
-              <a:buNone/>
-            </a:pPr>
-            <a:r>
-              <a:rPr lang="en-US" sz="1150" dirty="0">
+          <p:cNvPr id="16" name="Text 14"/>
+          <p:cNvSpPr/>
+          <p:nvPr/>
+        </p:nvSpPr>
+        <p:spPr>
+          <a:xfrm>
+            <a:off x="6583680" y="4352544"/>
+            <a:ext cx="4773168" cy="1188720"/>
+          </a:xfrm>
+          <a:prstGeom prst="rect">
+            <a:avLst/>
+          </a:prstGeom>
+          <a:noFill/>
+          <a:ln/>
+        </p:spPr>
+        <p:txBody>
+          <a:bodyPr wrap="square" lIns="0" tIns="0" rIns="0" bIns="0" rtlCol="0" anchor="ctr"/>
+          <a:lstStyle/>
+          <a:p>
+            <a:pPr indent="0" marL="0">
+              <a:buNone/>
+            </a:pPr>
+            <a:r>
+              <a:rPr lang="en-US" sz="1050" dirty="0">
                 <a:solidFill>
                   <a:srgbClr val="8B95A5"/>
                 </a:solidFill>
@@ -31405,126 +29393,21 @@
                 <a:ea typeface="Arial" pitchFamily="34" charset="-122"/>
                 <a:cs typeface="Arial" pitchFamily="34" charset="-120"/>
               </a:rPr>
-              <a:t>moment-matched workflows (orient, navigate, change-check, quality-bar …) — wrap prints the recipe, skills/install.sh installs them</a:t>
-            </a:r>
-            <a:endParaRPr lang="en-US" sz="1150" dirty="0"/>
-          </a:p>
-        </p:txBody>
-      </p:sp>
-      <p:sp>
-        <p:nvSpPr>
-          <p:cNvPr id="16" name="Shape 14"/>
-          <p:cNvSpPr/>
-          <p:nvPr/>
-        </p:nvSpPr>
-        <p:spPr>
-          <a:xfrm>
-            <a:off x="6181344" y="4187952"/>
-            <a:ext cx="5440680" cy="1481328"/>
-          </a:xfrm>
-          <a:prstGeom prst="roundRect">
-            <a:avLst>
-              <a:gd name="adj" fmla="val 5556"/>
-            </a:avLst>
-          </a:prstGeom>
-          <a:solidFill>
-            <a:srgbClr val="161D28"/>
-          </a:solidFill>
-          <a:ln w="9525">
-            <a:solidFill>
-              <a:srgbClr val="232D3D"/>
-            </a:solidFill>
-            <a:prstDash val="solid"/>
-          </a:ln>
-        </p:spPr>
-      </p:sp>
-      <p:sp>
-        <p:nvSpPr>
-          <p:cNvPr id="17" name="Text 15"/>
-          <p:cNvSpPr/>
-          <p:nvPr/>
-        </p:nvSpPr>
-        <p:spPr>
-          <a:xfrm>
-            <a:off x="6364224" y="4297680"/>
-            <a:ext cx="5074920" cy="365760"/>
-          </a:xfrm>
-          <a:prstGeom prst="rect">
-            <a:avLst/>
-          </a:prstGeom>
-          <a:noFill/>
-          <a:ln/>
-        </p:spPr>
-        <p:txBody>
-          <a:bodyPr wrap="square" lIns="0" tIns="0" rIns="0" bIns="0" rtlCol="0" anchor="ctr"/>
-          <a:lstStyle/>
-          <a:p>
-            <a:pPr indent="0" marL="0">
-              <a:buNone/>
-            </a:pPr>
-            <a:r>
-              <a:rPr lang="en-US" sz="1400" b="1" dirty="0">
-                <a:solidFill>
-                  <a:srgbClr val="56D6E8"/>
-                </a:solidFill>
-                <a:latin typeface="Courier New" pitchFamily="34" charset="0"/>
-                <a:ea typeface="Courier New" pitchFamily="34" charset="-122"/>
-                <a:cs typeface="Courier New" pitchFamily="34" charset="-120"/>
-              </a:rPr>
-              <a:t>12 orchestrator loops</a:t>
-            </a:r>
-            <a:endParaRPr lang="en-US" sz="1400" dirty="0"/>
-          </a:p>
-        </p:txBody>
-      </p:sp>
-      <p:sp>
-        <p:nvSpPr>
-          <p:cNvPr id="18" name="Text 16"/>
-          <p:cNvSpPr/>
-          <p:nvPr/>
-        </p:nvSpPr>
-        <p:spPr>
-          <a:xfrm>
-            <a:off x="6364224" y="4690872"/>
-            <a:ext cx="5074920" cy="1005840"/>
-          </a:xfrm>
-          <a:prstGeom prst="rect">
-            <a:avLst/>
-          </a:prstGeom>
-          <a:noFill/>
-          <a:ln/>
-        </p:spPr>
-        <p:txBody>
-          <a:bodyPr wrap="square" lIns="0" tIns="0" rIns="0" bIns="0" rtlCol="0" anchor="ctr"/>
-          <a:lstStyle/>
-          <a:p>
-            <a:pPr indent="0" marL="0">
-              <a:buNone/>
-            </a:pPr>
-            <a:r>
-              <a:rPr lang="en-US" sz="1150" dirty="0">
-                <a:solidFill>
-                  <a:srgbClr val="8B95A5"/>
-                </a:solidFill>
-                <a:latin typeface="Arial" pitchFamily="34" charset="0"/>
-                <a:ea typeface="Arial" pitchFamily="34" charset="-122"/>
-                <a:cs typeface="Arial" pitchFamily="34" charset="-120"/>
-              </a:rPr>
-              <a:t>copy-paste prompts in prompts/: run the same audit, eval and head-to-head machinery that built this tool, on your own repository</a:t>
-            </a:r>
-            <a:endParaRPr lang="en-US" sz="1150" dirty="0"/>
-          </a:p>
-        </p:txBody>
-      </p:sp>
-      <p:sp>
-        <p:nvSpPr>
-          <p:cNvPr id="19" name="Shape 17"/>
-          <p:cNvSpPr/>
-          <p:nvPr/>
-        </p:nvSpPr>
-        <p:spPr>
-          <a:xfrm>
-            <a:off x="566928" y="5760720"/>
+              <a:t>--edit-plan=FILE is a versioned JSON multi-edit plan and its mode is EXPLICIT: exactly one of --dry-run or --apply, and neither is not a default. Every target, payload and span is preflighted before any write; overlapping edits refuse; payload paths are confined to the plan's own directory, so an absolute path or a '..' escape refuses and names what it resolved to.</a:t>
+            </a:r>
+            <a:endParaRPr lang="en-US" sz="1050" dirty="0"/>
+          </a:p>
+        </p:txBody>
+      </p:sp>
+      <p:sp>
+        <p:nvSpPr>
+          <p:cNvPr id="17" name="Shape 15"/>
+          <p:cNvSpPr/>
+          <p:nvPr/>
+        </p:nvSpPr>
+        <p:spPr>
+          <a:xfrm>
+            <a:off x="566928" y="5779008"/>
             <a:ext cx="11055096" cy="566928"/>
           </a:xfrm>
           <a:prstGeom prst="roundRect">
@@ -31545,13 +29428,13 @@
       </p:sp>
       <p:sp>
         <p:nvSpPr>
-          <p:cNvPr id="20" name="Text 18"/>
-          <p:cNvSpPr/>
-          <p:nvPr/>
-        </p:nvSpPr>
-        <p:spPr>
-          <a:xfrm>
-            <a:off x="795528" y="5843016"/>
+          <p:cNvPr id="18" name="Text 16"/>
+          <p:cNvSpPr/>
+          <p:nvPr/>
+        </p:nvSpPr>
+        <p:spPr>
+          <a:xfrm>
+            <a:off x="795528" y="5861304"/>
             <a:ext cx="10607040" cy="420624"/>
           </a:xfrm>
           <a:prstGeom prst="rect">
@@ -31576,7 +29459,7 @@
                 <a:ea typeface="Arial" pitchFamily="34" charset="-122"/>
                 <a:cs typeface="Arial" pitchFamily="34" charset="-120"/>
               </a:rPr>
-              <a:t>wrap does not just print JSON: </a:t>
+              <a:t>Same engine on both seats: </a:t>
             </a:r>
             <a:pPr indent="0" marL="0">
               <a:buNone/>
@@ -31590,7 +29473,7 @@
                 <a:ea typeface="Arial" pitchFamily="34" charset="-122"/>
                 <a:cs typeface="Arial" pitchFamily="34" charset="-120"/>
               </a:rPr>
-              <a:t>it probes what that agent already has, emits the config in that agent's own shape, and includes a use-when blurb so the agent knows which verb fires at which moment — not just that a server exists.</a:t>
+              <a:t>the three MCP edit verbs are these three flags, and the navigation the deck has no room for is the same story — --graph-query, --whereis, --stray-content, --at, --arch, --owners, --export, --help-task all sit in docs/COMMANDS.md with a recorded invocation and its output.</a:t>
             </a:r>
             <a:endParaRPr lang="en-US" sz="1100" dirty="0"/>
           </a:p>
@@ -31598,7 +29481,7 @@
       </p:sp>
       <p:sp>
         <p:nvSpPr>
-          <p:cNvPr id="21" name="Text 19"/>
+          <p:cNvPr id="19" name="Text 17"/>
           <p:cNvSpPr/>
           <p:nvPr/>
         </p:nvSpPr>
@@ -31629,7 +29512,7 @@
                 <a:ea typeface="Courier New" pitchFamily="34" charset="-122"/>
                 <a:cs typeface="Courier New" pitchFamily="34" charset="-120"/>
               </a:rPr>
-              <a:t>the MCP server exposes the same deterministic engine — one index, shared with the CLI, staleness-checked</a:t>
+              <a:t>every claim on this slide is stated by `ripwire --help` and captured in docs/COMMANDS.md — test/deckcheck.sh proves each flag named here exists in the shipped binary</a:t>
             </a:r>
             <a:endParaRPr lang="en-US" sz="1050" dirty="0"/>
           </a:p>
@@ -31694,13 +29577,13 @@
             <a:r>
               <a:rPr lang="en-US" sz="1300" dirty="0">
                 <a:solidFill>
-                  <a:srgbClr val="56D6E8"/>
+                  <a:srgbClr val="F2B84B"/>
                 </a:solidFill>
                 <a:latin typeface="Courier New" pitchFamily="34" charset="0"/>
                 <a:ea typeface="Courier New" pitchFamily="34" charset="-122"/>
                 <a:cs typeface="Courier New" pitchFamily="34" charset="-120"/>
               </a:rPr>
-              <a:t>// it does not only read</a:t>
+              <a:t>// standing on giants</a:t>
             </a:r>
             <a:endParaRPr lang="en-US" sz="1300" dirty="0"/>
           </a:p>
@@ -31731,7 +29614,7 @@
               <a:buNone/>
             </a:pPr>
             <a:r>
-              <a:rPr lang="en-US" sz="3200" b="1" dirty="0">
+              <a:rPr lang="en-US" sz="3400" b="1" dirty="0">
                 <a:solidFill>
                   <a:srgbClr val="E6EDF3"/>
                 </a:solidFill>
@@ -31739,26 +29622,79 @@
                 <a:ea typeface="Arial" pitchFamily="34" charset="-122"/>
                 <a:cs typeface="Arial" pitchFamily="34" charset="-120"/>
               </a:rPr>
-              <a:t>Span-addressed edits: the map writes back</a:t>
-            </a:r>
-            <a:endParaRPr lang="en-US" sz="3200" dirty="0"/>
-          </a:p>
-        </p:txBody>
-      </p:sp>
-      <p:sp>
-        <p:nvSpPr>
-          <p:cNvPr id="4" name="Shape 2"/>
-          <p:cNvSpPr/>
-          <p:nvPr/>
-        </p:nvSpPr>
-        <p:spPr>
-          <a:xfrm>
-            <a:off x="566928" y="1536192"/>
-            <a:ext cx="5577840" cy="2212848"/>
+              <a:t>The research inside — classic and current</a:t>
+            </a:r>
+            <a:endParaRPr lang="en-US" sz="3400" dirty="0"/>
+          </a:p>
+        </p:txBody>
+      </p:sp>
+      <p:sp>
+        <p:nvSpPr>
+          <p:cNvPr id="4" name="Text 2"/>
+          <p:cNvSpPr/>
+          <p:nvPr/>
+        </p:nvSpPr>
+        <p:spPr>
+          <a:xfrm>
+            <a:off x="566928" y="1444752"/>
+            <a:ext cx="10972800" cy="310896"/>
+          </a:xfrm>
+          <a:prstGeom prst="rect">
+            <a:avLst/>
+          </a:prstGeom>
+          <a:noFill/>
+          <a:ln/>
+        </p:spPr>
+        <p:txBody>
+          <a:bodyPr wrap="square" lIns="0" tIns="0" rIns="0" bIns="0" rtlCol="0" anchor="ctr"/>
+          <a:lstStyle/>
+          <a:p>
+            <a:pPr indent="0" marL="0">
+              <a:buNone/>
+            </a:pPr>
+            <a:r>
+              <a:rPr lang="en-US" sz="1300" b="1" dirty="0">
+                <a:solidFill>
+                  <a:srgbClr val="E6EDF3"/>
+                </a:solidFill>
+                <a:latin typeface="Arial" pitchFamily="34" charset="0"/>
+                <a:ea typeface="Arial" pitchFamily="34" charset="-122"/>
+                <a:cs typeface="Arial" pitchFamily="34" charset="-120"/>
+              </a:rPr>
+              <a:t>49 repositories + 70 papers folded</a:t>
+            </a:r>
+            <a:pPr indent="0" marL="0">
+              <a:buNone/>
+            </a:pPr>
+            <a:r>
+              <a:rPr lang="en-US" sz="1300" dirty="0">
+                <a:solidFill>
+                  <a:srgbClr val="8B95A5"/>
+                </a:solidFill>
+                <a:latin typeface="Arial" pitchFamily="34" charset="0"/>
+                <a:ea typeface="Arial" pitchFamily="34" charset="-122"/>
+                <a:cs typeface="Arial" pitchFamily="34" charset="-120"/>
+              </a:rPr>
+              <a:t>  ·  and a labelled survey of 237 tools that contributed nothing, which says so — every row with the lesson taken and where it lives: docs/LINEAGE.md</a:t>
+            </a:r>
+            <a:endParaRPr lang="en-US" sz="1300" dirty="0"/>
+          </a:p>
+        </p:txBody>
+      </p:sp>
+      <p:sp>
+        <p:nvSpPr>
+          <p:cNvPr id="5" name="Shape 3"/>
+          <p:cNvSpPr/>
+          <p:nvPr/>
+        </p:nvSpPr>
+        <p:spPr>
+          <a:xfrm>
+            <a:off x="566928" y="1874520"/>
+            <a:ext cx="5577840" cy="566928"/>
           </a:xfrm>
           <a:prstGeom prst="roundRect">
             <a:avLst>
-              <a:gd name="adj" fmla="val 3719"/>
+              <a:gd name="adj" fmla="val 14516"/>
             </a:avLst>
           </a:prstGeom>
           <a:solidFill>
@@ -31774,125 +29710,204 @@
       </p:sp>
       <p:sp>
         <p:nvSpPr>
-          <p:cNvPr id="5" name="Text 3"/>
-          <p:cNvSpPr/>
-          <p:nvPr/>
-        </p:nvSpPr>
-        <p:spPr>
-          <a:xfrm>
-            <a:off x="749808" y="1645920"/>
-            <a:ext cx="5212080" cy="310896"/>
-          </a:xfrm>
-          <a:prstGeom prst="rect">
-            <a:avLst/>
-          </a:prstGeom>
-          <a:noFill/>
-          <a:ln/>
-        </p:spPr>
-        <p:txBody>
-          <a:bodyPr wrap="square" lIns="0" tIns="0" rIns="0" bIns="0" rtlCol="0" anchor="ctr"/>
-          <a:lstStyle/>
-          <a:p>
-            <a:pPr indent="0" marL="0">
-              <a:buNone/>
-            </a:pPr>
-            <a:r>
-              <a:rPr lang="en-US" sz="1400" b="1" dirty="0">
-                <a:solidFill>
-                  <a:srgbClr val="56D6E8"/>
-                </a:solidFill>
-                <a:latin typeface="Arial" pitchFamily="34" charset="0"/>
-                <a:ea typeface="Arial" pitchFamily="34" charset="-122"/>
-                <a:cs typeface="Arial" pitchFamily="34" charset="-120"/>
-              </a:rPr>
-              <a:t>Three verbs, one resolved span</a:t>
-            </a:r>
-            <a:endParaRPr lang="en-US" sz="1400" dirty="0"/>
-          </a:p>
-        </p:txBody>
-      </p:sp>
-      <p:sp>
-        <p:nvSpPr>
           <p:cNvPr id="6" name="Text 4"/>
           <p:cNvSpPr/>
           <p:nvPr/>
         </p:nvSpPr>
         <p:spPr>
           <a:xfrm>
-            <a:off x="749808" y="1993392"/>
-            <a:ext cx="5212080" cy="1005840"/>
-          </a:xfrm>
-          <a:prstGeom prst="rect">
-            <a:avLst/>
-          </a:prstGeom>
-          <a:noFill/>
-          <a:ln/>
-        </p:spPr>
-        <p:txBody>
-          <a:bodyPr wrap="square" lIns="0" tIns="0" rIns="0" bIns="0" rtlCol="0" anchor="ctr"/>
-          <a:lstStyle/>
-          <a:p>
-            <a:pPr indent="0" marL="0">
-              <a:buNone/>
-            </a:pPr>
-            <a:r>
-              <a:rPr lang="en-US" sz="1150" dirty="0">
-                <a:solidFill>
-                  <a:srgbClr val="E6EDF3"/>
+            <a:off x="713232" y="1911096"/>
+            <a:ext cx="685800" cy="493776"/>
+          </a:xfrm>
+          <a:prstGeom prst="rect">
+            <a:avLst/>
+          </a:prstGeom>
+          <a:noFill/>
+          <a:ln/>
+        </p:spPr>
+        <p:txBody>
+          <a:bodyPr wrap="square" lIns="0" tIns="0" rIns="0" bIns="0" rtlCol="0" anchor="ctr"/>
+          <a:lstStyle/>
+          <a:p>
+            <a:pPr indent="0" marL="0">
+              <a:buNone/>
+            </a:pPr>
+            <a:r>
+              <a:rPr lang="en-US" sz="1200" b="1" dirty="0">
+                <a:solidFill>
+                  <a:srgbClr val="F2B84B"/>
                 </a:solidFill>
                 <a:latin typeface="Courier New" pitchFamily="34" charset="0"/>
                 <a:ea typeface="Courier New" pitchFamily="34" charset="-122"/>
                 <a:cs typeface="Courier New" pitchFamily="34" charset="-120"/>
               </a:rPr>
-              <a:t>--replace-symbol-body=TARGET
---insert-before-symbol=TARGET
---insert-after-symbol=TARGET
+              <a:t>1976</a:t>
+            </a:r>
+            <a:endParaRPr lang="en-US" sz="1200" dirty="0"/>
+          </a:p>
+        </p:txBody>
+      </p:sp>
+      <p:sp>
+        <p:nvSpPr>
+          <p:cNvPr id="7" name="Text 5"/>
+          <p:cNvSpPr/>
+          <p:nvPr/>
+        </p:nvSpPr>
+        <p:spPr>
+          <a:xfrm>
+            <a:off x="1481328" y="1911096"/>
+            <a:ext cx="4572000" cy="493776"/>
+          </a:xfrm>
+          <a:prstGeom prst="rect">
+            <a:avLst/>
+          </a:prstGeom>
+          <a:noFill/>
+          <a:ln/>
+        </p:spPr>
+        <p:txBody>
+          <a:bodyPr wrap="square" lIns="0" tIns="0" rIns="0" bIns="0" rtlCol="0" anchor="ctr"/>
+          <a:lstStyle/>
+          <a:p>
+            <a:pPr indent="0" marL="0">
+              <a:buNone/>
+            </a:pPr>
+            <a:r>
+              <a:rPr lang="en-US" sz="1100" b="1" dirty="0">
+                <a:solidFill>
+                  <a:srgbClr val="E6EDF3"/>
+                </a:solidFill>
+                <a:latin typeface="Arial" pitchFamily="34" charset="0"/>
+                <a:ea typeface="Arial" pitchFamily="34" charset="-122"/>
+                <a:cs typeface="Arial" pitchFamily="34" charset="-120"/>
+              </a:rPr>
+              <a:t>Cyclomatic complexity — McCabe
 </a:t>
             </a:r>
             <a:pPr indent="0" marL="0">
               <a:buNone/>
             </a:pPr>
             <a:r>
-              <a:rPr lang="en-US" sz="1150" dirty="0">
+              <a:rPr lang="en-US" sz="950" dirty="0">
                 <a:solidFill>
                   <a:srgbClr val="8B95A5"/>
+                </a:solidFill>
+                <a:latin typeface="Arial" pitchFamily="34" charset="0"/>
+                <a:ea typeface="Arial" pitchFamily="34" charset="-122"/>
+                <a:cs typeface="Arial" pitchFamily="34" charset="-120"/>
+              </a:rPr>
+              <a:t>the metric behind --hotspots</a:t>
+            </a:r>
+            <a:endParaRPr lang="en-US" sz="1100" dirty="0"/>
+          </a:p>
+        </p:txBody>
+      </p:sp>
+      <p:sp>
+        <p:nvSpPr>
+          <p:cNvPr id="8" name="Shape 6"/>
+          <p:cNvSpPr/>
+          <p:nvPr/>
+        </p:nvSpPr>
+        <p:spPr>
+          <a:xfrm>
+            <a:off x="566928" y="2514600"/>
+            <a:ext cx="5577840" cy="566928"/>
+          </a:xfrm>
+          <a:prstGeom prst="roundRect">
+            <a:avLst>
+              <a:gd name="adj" fmla="val 14516"/>
+            </a:avLst>
+          </a:prstGeom>
+          <a:solidFill>
+            <a:srgbClr val="161D28"/>
+          </a:solidFill>
+          <a:ln w="9525">
+            <a:solidFill>
+              <a:srgbClr val="232D3D"/>
+            </a:solidFill>
+            <a:prstDash val="solid"/>
+          </a:ln>
+        </p:spPr>
+      </p:sp>
+      <p:sp>
+        <p:nvSpPr>
+          <p:cNvPr id="9" name="Text 7"/>
+          <p:cNvSpPr/>
+          <p:nvPr/>
+        </p:nvSpPr>
+        <p:spPr>
+          <a:xfrm>
+            <a:off x="713232" y="2551176"/>
+            <a:ext cx="685800" cy="493776"/>
+          </a:xfrm>
+          <a:prstGeom prst="rect">
+            <a:avLst/>
+          </a:prstGeom>
+          <a:noFill/>
+          <a:ln/>
+        </p:spPr>
+        <p:txBody>
+          <a:bodyPr wrap="square" lIns="0" tIns="0" rIns="0" bIns="0" rtlCol="0" anchor="ctr"/>
+          <a:lstStyle/>
+          <a:p>
+            <a:pPr indent="0" marL="0">
+              <a:buNone/>
+            </a:pPr>
+            <a:r>
+              <a:rPr lang="en-US" sz="1200" b="1" dirty="0">
+                <a:solidFill>
+                  <a:srgbClr val="F2B84B"/>
                 </a:solidFill>
                 <a:latin typeface="Courier New" pitchFamily="34" charset="0"/>
                 <a:ea typeface="Courier New" pitchFamily="34" charset="-122"/>
                 <a:cs typeface="Courier New" pitchFamily="34" charset="-120"/>
               </a:rPr>
-              <a:t>  --edit-payload=FILE|-</a:t>
-            </a:r>
-            <a:endParaRPr lang="en-US" sz="1150" dirty="0"/>
-          </a:p>
-        </p:txBody>
-      </p:sp>
-      <p:sp>
-        <p:nvSpPr>
-          <p:cNvPr id="7" name="Text 5"/>
-          <p:cNvSpPr/>
-          <p:nvPr/>
-        </p:nvSpPr>
-        <p:spPr>
-          <a:xfrm>
-            <a:off x="749808" y="2962656"/>
-            <a:ext cx="5212080" cy="713232"/>
-          </a:xfrm>
-          <a:prstGeom prst="rect">
-            <a:avLst/>
-          </a:prstGeom>
-          <a:noFill/>
-          <a:ln/>
-        </p:spPr>
-        <p:txBody>
-          <a:bodyPr wrap="square" lIns="0" tIns="0" rIns="0" bIns="0" rtlCol="0" anchor="ctr"/>
-          <a:lstStyle/>
-          <a:p>
-            <a:pPr indent="0" marL="0">
-              <a:buNone/>
-            </a:pPr>
-            <a:r>
-              <a:rPr lang="en-US" sz="1050" dirty="0">
+              <a:t>1994</a:t>
+            </a:r>
+            <a:endParaRPr lang="en-US" sz="1200" dirty="0"/>
+          </a:p>
+        </p:txBody>
+      </p:sp>
+      <p:sp>
+        <p:nvSpPr>
+          <p:cNvPr id="10" name="Text 8"/>
+          <p:cNvSpPr/>
+          <p:nvPr/>
+        </p:nvSpPr>
+        <p:spPr>
+          <a:xfrm>
+            <a:off x="1481328" y="2551176"/>
+            <a:ext cx="4572000" cy="493776"/>
+          </a:xfrm>
+          <a:prstGeom prst="rect">
+            <a:avLst/>
+          </a:prstGeom>
+          <a:noFill/>
+          <a:ln/>
+        </p:spPr>
+        <p:txBody>
+          <a:bodyPr wrap="square" lIns="0" tIns="0" rIns="0" bIns="0" rtlCol="0" anchor="ctr"/>
+          <a:lstStyle/>
+          <a:p>
+            <a:pPr indent="0" marL="0">
+              <a:buNone/>
+            </a:pPr>
+            <a:r>
+              <a:rPr lang="en-US" sz="1100" b="1" dirty="0">
+                <a:solidFill>
+                  <a:srgbClr val="E6EDF3"/>
+                </a:solidFill>
+                <a:latin typeface="Arial" pitchFamily="34" charset="0"/>
+                <a:ea typeface="Arial" pitchFamily="34" charset="-122"/>
+                <a:cs typeface="Arial" pitchFamily="34" charset="-120"/>
+              </a:rPr>
+              <a:t>Okapi BM25 — Robertson · Spärck Jones
+</a:t>
+            </a:r>
+            <a:pPr indent="0" marL="0">
+              <a:buNone/>
+            </a:pPr>
+            <a:r>
+              <a:rPr lang="en-US" sz="950" dirty="0">
                 <a:solidFill>
                   <a:srgbClr val="8B95A5"/>
                 </a:solidFill>
@@ -31900,26 +29915,626 @@
                 <a:ea typeface="Arial" pitchFamily="34" charset="-122"/>
                 <a:cs typeface="Arial" pitchFamily="34" charset="-120"/>
               </a:rPr>
-              <a:t>TARGET is a name, an @FILE:LINE seed — paste the location out of a diff hunk or a compiler error and it binds the innermost enclosing definition — or a freshness-pinned handle from --grep --handles. No line numbers to keep in your head, and no whole-file rewrite.</a:t>
-            </a:r>
-            <a:endParaRPr lang="en-US" sz="1050" dirty="0"/>
-          </a:p>
-        </p:txBody>
-      </p:sp>
-      <p:sp>
-        <p:nvSpPr>
-          <p:cNvPr id="8" name="Shape 6"/>
-          <p:cNvSpPr/>
-          <p:nvPr/>
-        </p:nvSpPr>
-        <p:spPr>
-          <a:xfrm>
-            <a:off x="6400800" y="1536192"/>
-            <a:ext cx="5138928" cy="2212848"/>
+              <a:t>the lexical ranker (twice: subtoken+body, whole-name)</a:t>
+            </a:r>
+            <a:endParaRPr lang="en-US" sz="1100" dirty="0"/>
+          </a:p>
+        </p:txBody>
+      </p:sp>
+      <p:sp>
+        <p:nvSpPr>
+          <p:cNvPr id="11" name="Shape 9"/>
+          <p:cNvSpPr/>
+          <p:nvPr/>
+        </p:nvSpPr>
+        <p:spPr>
+          <a:xfrm>
+            <a:off x="566928" y="3154680"/>
+            <a:ext cx="5577840" cy="566928"/>
           </a:xfrm>
           <a:prstGeom prst="roundRect">
             <a:avLst>
-              <a:gd name="adj" fmla="val 3719"/>
+              <a:gd name="adj" fmla="val 14516"/>
+            </a:avLst>
+          </a:prstGeom>
+          <a:solidFill>
+            <a:srgbClr val="161D28"/>
+          </a:solidFill>
+          <a:ln w="9525">
+            <a:solidFill>
+              <a:srgbClr val="232D3D"/>
+            </a:solidFill>
+            <a:prstDash val="solid"/>
+          </a:ln>
+        </p:spPr>
+      </p:sp>
+      <p:sp>
+        <p:nvSpPr>
+          <p:cNvPr id="12" name="Text 10"/>
+          <p:cNvSpPr/>
+          <p:nvPr/>
+        </p:nvSpPr>
+        <p:spPr>
+          <a:xfrm>
+            <a:off x="713232" y="3191256"/>
+            <a:ext cx="685800" cy="493776"/>
+          </a:xfrm>
+          <a:prstGeom prst="rect">
+            <a:avLst/>
+          </a:prstGeom>
+          <a:noFill/>
+          <a:ln/>
+        </p:spPr>
+        <p:txBody>
+          <a:bodyPr wrap="square" lIns="0" tIns="0" rIns="0" bIns="0" rtlCol="0" anchor="ctr"/>
+          <a:lstStyle/>
+          <a:p>
+            <a:pPr indent="0" marL="0">
+              <a:buNone/>
+            </a:pPr>
+            <a:r>
+              <a:rPr lang="en-US" sz="1200" b="1" dirty="0">
+                <a:solidFill>
+                  <a:srgbClr val="F2B84B"/>
+                </a:solidFill>
+                <a:latin typeface="Courier New" pitchFamily="34" charset="0"/>
+                <a:ea typeface="Courier New" pitchFamily="34" charset="-122"/>
+                <a:cs typeface="Courier New" pitchFamily="34" charset="-120"/>
+              </a:rPr>
+              <a:t>1998</a:t>
+            </a:r>
+            <a:endParaRPr lang="en-US" sz="1200" dirty="0"/>
+          </a:p>
+        </p:txBody>
+      </p:sp>
+      <p:sp>
+        <p:nvSpPr>
+          <p:cNvPr id="13" name="Text 11"/>
+          <p:cNvSpPr/>
+          <p:nvPr/>
+        </p:nvSpPr>
+        <p:spPr>
+          <a:xfrm>
+            <a:off x="1481328" y="3191256"/>
+            <a:ext cx="4572000" cy="493776"/>
+          </a:xfrm>
+          <a:prstGeom prst="rect">
+            <a:avLst/>
+          </a:prstGeom>
+          <a:noFill/>
+          <a:ln/>
+        </p:spPr>
+        <p:txBody>
+          <a:bodyPr wrap="square" lIns="0" tIns="0" rIns="0" bIns="0" rtlCol="0" anchor="ctr"/>
+          <a:lstStyle/>
+          <a:p>
+            <a:pPr indent="0" marL="0">
+              <a:buNone/>
+            </a:pPr>
+            <a:r>
+              <a:rPr lang="en-US" sz="1100" b="1" dirty="0">
+                <a:solidFill>
+                  <a:srgbClr val="E6EDF3"/>
+                </a:solidFill>
+                <a:latin typeface="Arial" pitchFamily="34" charset="0"/>
+                <a:ea typeface="Arial" pitchFamily="34" charset="-122"/>
+                <a:cs typeface="Arial" pitchFamily="34" charset="-120"/>
+              </a:rPr>
+              <a:t>Personalized PageRank — Page · Brin
+</a:t>
+            </a:r>
+            <a:pPr indent="0" marL="0">
+              <a:buNone/>
+            </a:pPr>
+            <a:r>
+              <a:rPr lang="en-US" sz="950" dirty="0">
+                <a:solidFill>
+                  <a:srgbClr val="8B95A5"/>
+                </a:solidFill>
+                <a:latin typeface="Arial" pitchFamily="34" charset="0"/>
+                <a:ea typeface="Arial" pitchFamily="34" charset="-122"/>
+                <a:cs typeface="Arial" pitchFamily="34" charset="-120"/>
+              </a:rPr>
+              <a:t>the headline importance signal</a:t>
+            </a:r>
+            <a:endParaRPr lang="en-US" sz="1100" dirty="0"/>
+          </a:p>
+        </p:txBody>
+      </p:sp>
+      <p:sp>
+        <p:nvSpPr>
+          <p:cNvPr id="14" name="Shape 12"/>
+          <p:cNvSpPr/>
+          <p:nvPr/>
+        </p:nvSpPr>
+        <p:spPr>
+          <a:xfrm>
+            <a:off x="566928" y="3794760"/>
+            <a:ext cx="5577840" cy="566928"/>
+          </a:xfrm>
+          <a:prstGeom prst="roundRect">
+            <a:avLst>
+              <a:gd name="adj" fmla="val 14516"/>
+            </a:avLst>
+          </a:prstGeom>
+          <a:solidFill>
+            <a:srgbClr val="161D28"/>
+          </a:solidFill>
+          <a:ln w="9525">
+            <a:solidFill>
+              <a:srgbClr val="232D3D"/>
+            </a:solidFill>
+            <a:prstDash val="solid"/>
+          </a:ln>
+        </p:spPr>
+      </p:sp>
+      <p:sp>
+        <p:nvSpPr>
+          <p:cNvPr id="15" name="Text 13"/>
+          <p:cNvSpPr/>
+          <p:nvPr/>
+        </p:nvSpPr>
+        <p:spPr>
+          <a:xfrm>
+            <a:off x="713232" y="3831336"/>
+            <a:ext cx="685800" cy="493776"/>
+          </a:xfrm>
+          <a:prstGeom prst="rect">
+            <a:avLst/>
+          </a:prstGeom>
+          <a:noFill/>
+          <a:ln/>
+        </p:spPr>
+        <p:txBody>
+          <a:bodyPr wrap="square" lIns="0" tIns="0" rIns="0" bIns="0" rtlCol="0" anchor="ctr"/>
+          <a:lstStyle/>
+          <a:p>
+            <a:pPr indent="0" marL="0">
+              <a:buNone/>
+            </a:pPr>
+            <a:r>
+              <a:rPr lang="en-US" sz="1200" b="1" dirty="0">
+                <a:solidFill>
+                  <a:srgbClr val="F2B84B"/>
+                </a:solidFill>
+                <a:latin typeface="Courier New" pitchFamily="34" charset="0"/>
+                <a:ea typeface="Courier New" pitchFamily="34" charset="-122"/>
+                <a:cs typeface="Courier New" pitchFamily="34" charset="-120"/>
+              </a:rPr>
+              <a:t>2008</a:t>
+            </a:r>
+            <a:endParaRPr lang="en-US" sz="1200" dirty="0"/>
+          </a:p>
+        </p:txBody>
+      </p:sp>
+      <p:sp>
+        <p:nvSpPr>
+          <p:cNvPr id="16" name="Text 14"/>
+          <p:cNvSpPr/>
+          <p:nvPr/>
+        </p:nvSpPr>
+        <p:spPr>
+          <a:xfrm>
+            <a:off x="1481328" y="3831336"/>
+            <a:ext cx="4572000" cy="493776"/>
+          </a:xfrm>
+          <a:prstGeom prst="rect">
+            <a:avLst/>
+          </a:prstGeom>
+          <a:noFill/>
+          <a:ln/>
+        </p:spPr>
+        <p:txBody>
+          <a:bodyPr wrap="square" lIns="0" tIns="0" rIns="0" bIns="0" rtlCol="0" anchor="ctr"/>
+          <a:lstStyle/>
+          <a:p>
+            <a:pPr indent="0" marL="0">
+              <a:buNone/>
+            </a:pPr>
+            <a:r>
+              <a:rPr lang="en-US" sz="1100" b="1" dirty="0">
+                <a:solidFill>
+                  <a:srgbClr val="E6EDF3"/>
+                </a:solidFill>
+                <a:latin typeface="Arial" pitchFamily="34" charset="0"/>
+                <a:ea typeface="Arial" pitchFamily="34" charset="-122"/>
+                <a:cs typeface="Arial" pitchFamily="34" charset="-120"/>
+              </a:rPr>
+              <a:t>Louvain modularity — Blondel et al.
+</a:t>
+            </a:r>
+            <a:pPr indent="0" marL="0">
+              <a:buNone/>
+            </a:pPr>
+            <a:r>
+              <a:rPr lang="en-US" sz="950" dirty="0">
+                <a:solidFill>
+                  <a:srgbClr val="8B95A5"/>
+                </a:solidFill>
+                <a:latin typeface="Arial" pitchFamily="34" charset="0"/>
+                <a:ea typeface="Arial" pitchFamily="34" charset="-122"/>
+                <a:cs typeface="Arial" pitchFamily="34" charset="-120"/>
+              </a:rPr>
+              <a:t>the module / community map</a:t>
+            </a:r>
+            <a:endParaRPr lang="en-US" sz="1100" dirty="0"/>
+          </a:p>
+        </p:txBody>
+      </p:sp>
+      <p:sp>
+        <p:nvSpPr>
+          <p:cNvPr id="17" name="Shape 15"/>
+          <p:cNvSpPr/>
+          <p:nvPr/>
+        </p:nvSpPr>
+        <p:spPr>
+          <a:xfrm>
+            <a:off x="566928" y="4434840"/>
+            <a:ext cx="5577840" cy="566928"/>
+          </a:xfrm>
+          <a:prstGeom prst="roundRect">
+            <a:avLst>
+              <a:gd name="adj" fmla="val 14516"/>
+            </a:avLst>
+          </a:prstGeom>
+          <a:solidFill>
+            <a:srgbClr val="161D28"/>
+          </a:solidFill>
+          <a:ln w="9525">
+            <a:solidFill>
+              <a:srgbClr val="232D3D"/>
+            </a:solidFill>
+            <a:prstDash val="solid"/>
+          </a:ln>
+        </p:spPr>
+      </p:sp>
+      <p:sp>
+        <p:nvSpPr>
+          <p:cNvPr id="18" name="Text 16"/>
+          <p:cNvSpPr/>
+          <p:nvPr/>
+        </p:nvSpPr>
+        <p:spPr>
+          <a:xfrm>
+            <a:off x="713232" y="4471416"/>
+            <a:ext cx="685800" cy="493776"/>
+          </a:xfrm>
+          <a:prstGeom prst="rect">
+            <a:avLst/>
+          </a:prstGeom>
+          <a:noFill/>
+          <a:ln/>
+        </p:spPr>
+        <p:txBody>
+          <a:bodyPr wrap="square" lIns="0" tIns="0" rIns="0" bIns="0" rtlCol="0" anchor="ctr"/>
+          <a:lstStyle/>
+          <a:p>
+            <a:pPr indent="0" marL="0">
+              <a:buNone/>
+            </a:pPr>
+            <a:r>
+              <a:rPr lang="en-US" sz="1200" b="1" dirty="0">
+                <a:solidFill>
+                  <a:srgbClr val="F2B84B"/>
+                </a:solidFill>
+                <a:latin typeface="Courier New" pitchFamily="34" charset="0"/>
+                <a:ea typeface="Courier New" pitchFamily="34" charset="-122"/>
+                <a:cs typeface="Courier New" pitchFamily="34" charset="-120"/>
+              </a:rPr>
+              <a:t>2009</a:t>
+            </a:r>
+            <a:endParaRPr lang="en-US" sz="1200" dirty="0"/>
+          </a:p>
+        </p:txBody>
+      </p:sp>
+      <p:sp>
+        <p:nvSpPr>
+          <p:cNvPr id="19" name="Text 17"/>
+          <p:cNvSpPr/>
+          <p:nvPr/>
+        </p:nvSpPr>
+        <p:spPr>
+          <a:xfrm>
+            <a:off x="1481328" y="4471416"/>
+            <a:ext cx="4572000" cy="493776"/>
+          </a:xfrm>
+          <a:prstGeom prst="rect">
+            <a:avLst/>
+          </a:prstGeom>
+          <a:noFill/>
+          <a:ln/>
+        </p:spPr>
+        <p:txBody>
+          <a:bodyPr wrap="square" lIns="0" tIns="0" rIns="0" bIns="0" rtlCol="0" anchor="ctr"/>
+          <a:lstStyle/>
+          <a:p>
+            <a:pPr indent="0" marL="0">
+              <a:buNone/>
+            </a:pPr>
+            <a:r>
+              <a:rPr lang="en-US" sz="1100" b="1" dirty="0">
+                <a:solidFill>
+                  <a:srgbClr val="E6EDF3"/>
+                </a:solidFill>
+                <a:latin typeface="Arial" pitchFamily="34" charset="0"/>
+                <a:ea typeface="Arial" pitchFamily="34" charset="-122"/>
+                <a:cs typeface="Arial" pitchFamily="34" charset="-120"/>
+              </a:rPr>
+              <a:t>Reciprocal Rank Fusion — Cormack et al.
+</a:t>
+            </a:r>
+            <a:pPr indent="0" marL="0">
+              <a:buNone/>
+            </a:pPr>
+            <a:r>
+              <a:rPr lang="en-US" sz="950" dirty="0">
+                <a:solidFill>
+                  <a:srgbClr val="8B95A5"/>
+                </a:solidFill>
+                <a:latin typeface="Arial" pitchFamily="34" charset="0"/>
+                <a:ea typeface="Arial" pitchFamily="34" charset="-122"/>
+                <a:cs typeface="Arial" pitchFamily="34" charset="-120"/>
+              </a:rPr>
+              <a:t>deterministic signal fusion (--rank-by=rrf)</a:t>
+            </a:r>
+            <a:endParaRPr lang="en-US" sz="1100" dirty="0"/>
+          </a:p>
+        </p:txBody>
+      </p:sp>
+      <p:sp>
+        <p:nvSpPr>
+          <p:cNvPr id="20" name="Shape 18"/>
+          <p:cNvSpPr/>
+          <p:nvPr/>
+        </p:nvSpPr>
+        <p:spPr>
+          <a:xfrm>
+            <a:off x="566928" y="5074920"/>
+            <a:ext cx="5577840" cy="566928"/>
+          </a:xfrm>
+          <a:prstGeom prst="roundRect">
+            <a:avLst>
+              <a:gd name="adj" fmla="val 14516"/>
+            </a:avLst>
+          </a:prstGeom>
+          <a:solidFill>
+            <a:srgbClr val="161D28"/>
+          </a:solidFill>
+          <a:ln w="9525">
+            <a:solidFill>
+              <a:srgbClr val="232D3D"/>
+            </a:solidFill>
+            <a:prstDash val="solid"/>
+          </a:ln>
+        </p:spPr>
+      </p:sp>
+      <p:sp>
+        <p:nvSpPr>
+          <p:cNvPr id="21" name="Text 19"/>
+          <p:cNvSpPr/>
+          <p:nvPr/>
+        </p:nvSpPr>
+        <p:spPr>
+          <a:xfrm>
+            <a:off x="713232" y="5111496"/>
+            <a:ext cx="685800" cy="493776"/>
+          </a:xfrm>
+          <a:prstGeom prst="rect">
+            <a:avLst/>
+          </a:prstGeom>
+          <a:noFill/>
+          <a:ln/>
+        </p:spPr>
+        <p:txBody>
+          <a:bodyPr wrap="square" lIns="0" tIns="0" rIns="0" bIns="0" rtlCol="0" anchor="ctr"/>
+          <a:lstStyle/>
+          <a:p>
+            <a:pPr indent="0" marL="0">
+              <a:buNone/>
+            </a:pPr>
+            <a:r>
+              <a:rPr lang="en-US" sz="1200" b="1" dirty="0">
+                <a:solidFill>
+                  <a:srgbClr val="F2B84B"/>
+                </a:solidFill>
+                <a:latin typeface="Courier New" pitchFamily="34" charset="0"/>
+                <a:ea typeface="Courier New" pitchFamily="34" charset="-122"/>
+                <a:cs typeface="Courier New" pitchFamily="34" charset="-120"/>
+              </a:rPr>
+              <a:t>2011</a:t>
+            </a:r>
+            <a:endParaRPr lang="en-US" sz="1200" dirty="0"/>
+          </a:p>
+        </p:txBody>
+      </p:sp>
+      <p:sp>
+        <p:nvSpPr>
+          <p:cNvPr id="22" name="Text 20"/>
+          <p:cNvSpPr/>
+          <p:nvPr/>
+        </p:nvSpPr>
+        <p:spPr>
+          <a:xfrm>
+            <a:off x="1481328" y="5111496"/>
+            <a:ext cx="4572000" cy="493776"/>
+          </a:xfrm>
+          <a:prstGeom prst="rect">
+            <a:avLst/>
+          </a:prstGeom>
+          <a:noFill/>
+          <a:ln/>
+        </p:spPr>
+        <p:txBody>
+          <a:bodyPr wrap="square" lIns="0" tIns="0" rIns="0" bIns="0" rtlCol="0" anchor="ctr"/>
+          <a:lstStyle/>
+          <a:p>
+            <a:pPr indent="0" marL="0">
+              <a:buNone/>
+            </a:pPr>
+            <a:r>
+              <a:rPr lang="en-US" sz="1100" b="1" dirty="0">
+                <a:solidFill>
+                  <a:srgbClr val="E6EDF3"/>
+                </a:solidFill>
+                <a:latin typeface="Arial" pitchFamily="34" charset="0"/>
+                <a:ea typeface="Arial" pitchFamily="34" charset="-122"/>
+                <a:cs typeface="Arial" pitchFamily="34" charset="-120"/>
+              </a:rPr>
+              <a:t>Readability model — Posnett · Hindle · Devanbu
+</a:t>
+            </a:r>
+            <a:pPr indent="0" marL="0">
+              <a:buNone/>
+            </a:pPr>
+            <a:r>
+              <a:rPr lang="en-US" sz="950" dirty="0">
+                <a:solidFill>
+                  <a:srgbClr val="8B95A5"/>
+                </a:solidFill>
+                <a:latin typeface="Arial" pitchFamily="34" charset="0"/>
+                <a:ea typeface="Arial" pitchFamily="34" charset="-122"/>
+                <a:cs typeface="Arial" pitchFamily="34" charset="-120"/>
+              </a:rPr>
+              <a:t>the lexical family of the quality panel</a:t>
+            </a:r>
+            <a:endParaRPr lang="en-US" sz="1100" dirty="0"/>
+          </a:p>
+        </p:txBody>
+      </p:sp>
+      <p:sp>
+        <p:nvSpPr>
+          <p:cNvPr id="23" name="Shape 21"/>
+          <p:cNvSpPr/>
+          <p:nvPr/>
+        </p:nvSpPr>
+        <p:spPr>
+          <a:xfrm>
+            <a:off x="566928" y="5715000"/>
+            <a:ext cx="5577840" cy="566928"/>
+          </a:xfrm>
+          <a:prstGeom prst="roundRect">
+            <a:avLst>
+              <a:gd name="adj" fmla="val 14516"/>
+            </a:avLst>
+          </a:prstGeom>
+          <a:solidFill>
+            <a:srgbClr val="161D28"/>
+          </a:solidFill>
+          <a:ln w="9525">
+            <a:solidFill>
+              <a:srgbClr val="232D3D"/>
+            </a:solidFill>
+            <a:prstDash val="solid"/>
+          </a:ln>
+        </p:spPr>
+      </p:sp>
+      <p:sp>
+        <p:nvSpPr>
+          <p:cNvPr id="24" name="Text 22"/>
+          <p:cNvSpPr/>
+          <p:nvPr/>
+        </p:nvSpPr>
+        <p:spPr>
+          <a:xfrm>
+            <a:off x="713232" y="5751576"/>
+            <a:ext cx="685800" cy="493776"/>
+          </a:xfrm>
+          <a:prstGeom prst="rect">
+            <a:avLst/>
+          </a:prstGeom>
+          <a:noFill/>
+          <a:ln/>
+        </p:spPr>
+        <p:txBody>
+          <a:bodyPr wrap="square" lIns="0" tIns="0" rIns="0" bIns="0" rtlCol="0" anchor="ctr"/>
+          <a:lstStyle/>
+          <a:p>
+            <a:pPr indent="0" marL="0">
+              <a:buNone/>
+            </a:pPr>
+            <a:r>
+              <a:rPr lang="en-US" sz="1200" b="1" dirty="0">
+                <a:solidFill>
+                  <a:srgbClr val="F2B84B"/>
+                </a:solidFill>
+                <a:latin typeface="Courier New" pitchFamily="34" charset="0"/>
+                <a:ea typeface="Courier New" pitchFamily="34" charset="-122"/>
+                <a:cs typeface="Courier New" pitchFamily="34" charset="-120"/>
+              </a:rPr>
+              <a:t>2019</a:t>
+            </a:r>
+            <a:endParaRPr lang="en-US" sz="1200" dirty="0"/>
+          </a:p>
+        </p:txBody>
+      </p:sp>
+      <p:sp>
+        <p:nvSpPr>
+          <p:cNvPr id="25" name="Text 23"/>
+          <p:cNvSpPr/>
+          <p:nvPr/>
+        </p:nvSpPr>
+        <p:spPr>
+          <a:xfrm>
+            <a:off x="1481328" y="5751576"/>
+            <a:ext cx="4572000" cy="493776"/>
+          </a:xfrm>
+          <a:prstGeom prst="rect">
+            <a:avLst/>
+          </a:prstGeom>
+          <a:noFill/>
+          <a:ln/>
+        </p:spPr>
+        <p:txBody>
+          <a:bodyPr wrap="square" lIns="0" tIns="0" rIns="0" bIns="0" rtlCol="0" anchor="ctr"/>
+          <a:lstStyle/>
+          <a:p>
+            <a:pPr indent="0" marL="0">
+              <a:buNone/>
+            </a:pPr>
+            <a:r>
+              <a:rPr lang="en-US" sz="1100" b="1" dirty="0">
+                <a:solidFill>
+                  <a:srgbClr val="E6EDF3"/>
+                </a:solidFill>
+                <a:latin typeface="Arial" pitchFamily="34" charset="0"/>
+                <a:ea typeface="Arial" pitchFamily="34" charset="-122"/>
+                <a:cs typeface="Arial" pitchFamily="34" charset="-120"/>
+              </a:rPr>
+              <a:t>Delta Maintainability Model — di Biase et al.
+</a:t>
+            </a:r>
+            <a:pPr indent="0" marL="0">
+              <a:buNone/>
+            </a:pPr>
+            <a:r>
+              <a:rPr lang="en-US" sz="950" dirty="0">
+                <a:solidFill>
+                  <a:srgbClr val="8B95A5"/>
+                </a:solidFill>
+                <a:latin typeface="Arial" pitchFamily="34" charset="0"/>
+                <a:ea typeface="Arial" pitchFamily="34" charset="-122"/>
+                <a:cs typeface="Arial" pitchFamily="34" charset="-120"/>
+              </a:rPr>
+              <a:t>--dmm: one comparable number per change</a:t>
+            </a:r>
+            <a:endParaRPr lang="en-US" sz="1100" dirty="0"/>
+          </a:p>
+        </p:txBody>
+      </p:sp>
+      <p:sp>
+        <p:nvSpPr>
+          <p:cNvPr id="27" name="Shape 24"/>
+          <p:cNvSpPr/>
+          <p:nvPr/>
+        </p:nvSpPr>
+        <p:spPr>
+          <a:xfrm>
+            <a:off x="6400800" y="1874520"/>
+            <a:ext cx="5120640" cy="822960"/>
+          </a:xfrm>
+          <a:prstGeom prst="roundRect">
+            <a:avLst>
+              <a:gd name="adj" fmla="val 10000"/>
             </a:avLst>
           </a:prstGeom>
           <a:solidFill>
@@ -31935,69 +30550,69 @@
       </p:sp>
       <p:sp>
         <p:nvSpPr>
-          <p:cNvPr id="9" name="Text 7"/>
-          <p:cNvSpPr/>
-          <p:nvPr/>
-        </p:nvSpPr>
-        <p:spPr>
-          <a:xfrm>
-            <a:off x="6583680" y="1645920"/>
-            <a:ext cx="4773168" cy="310896"/>
-          </a:xfrm>
-          <a:prstGeom prst="rect">
-            <a:avLst/>
-          </a:prstGeom>
-          <a:noFill/>
-          <a:ln/>
-        </p:spPr>
-        <p:txBody>
-          <a:bodyPr wrap="square" lIns="0" tIns="0" rIns="0" bIns="0" rtlCol="0" anchor="ctr"/>
-          <a:lstStyle/>
-          <a:p>
-            <a:pPr indent="0" marL="0">
-              <a:buNone/>
-            </a:pPr>
-            <a:r>
-              <a:rPr lang="en-US" sz="1400" b="1" dirty="0">
-                <a:solidFill>
-                  <a:srgbClr val="F2B84B"/>
-                </a:solidFill>
-                <a:latin typeface="Arial" pitchFamily="34" charset="0"/>
-                <a:ea typeface="Arial" pitchFamily="34" charset="-122"/>
-                <a:cs typeface="Arial" pitchFamily="34" charset="-120"/>
-              </a:rPr>
-              <a:t>The refusals are the feature</a:t>
-            </a:r>
-            <a:endParaRPr lang="en-US" sz="1400" dirty="0"/>
-          </a:p>
-        </p:txBody>
-      </p:sp>
-      <p:sp>
-        <p:nvSpPr>
-          <p:cNvPr id="10" name="Text 8"/>
-          <p:cNvSpPr/>
-          <p:nvPr/>
-        </p:nvSpPr>
-        <p:spPr>
-          <a:xfrm>
-            <a:off x="6583680" y="1993392"/>
-            <a:ext cx="4773168" cy="1682496"/>
-          </a:xfrm>
-          <a:prstGeom prst="rect">
-            <a:avLst/>
-          </a:prstGeom>
-          <a:noFill/>
-          <a:ln/>
-        </p:spPr>
-        <p:txBody>
-          <a:bodyPr wrap="square" lIns="0" tIns="0" rIns="0" bIns="0" rtlCol="0" anchor="ctr"/>
-          <a:lstStyle/>
-          <a:p>
-            <a:pPr indent="0" marL="0">
-              <a:buNone/>
-            </a:pPr>
-            <a:r>
-              <a:rPr lang="en-US" sz="1050" dirty="0">
+          <p:cNvPr id="28" name="Text 25"/>
+          <p:cNvSpPr/>
+          <p:nvPr/>
+        </p:nvSpPr>
+        <p:spPr>
+          <a:xfrm>
+            <a:off x="6583680" y="1929384"/>
+            <a:ext cx="4754880" cy="274320"/>
+          </a:xfrm>
+          <a:prstGeom prst="rect">
+            <a:avLst/>
+          </a:prstGeom>
+          <a:noFill/>
+          <a:ln/>
+        </p:spPr>
+        <p:txBody>
+          <a:bodyPr wrap="square" lIns="0" tIns="0" rIns="0" bIns="0" rtlCol="0" anchor="ctr"/>
+          <a:lstStyle/>
+          <a:p>
+            <a:pPr indent="0" marL="0">
+              <a:buNone/>
+            </a:pPr>
+            <a:r>
+              <a:rPr lang="en-US" sz="1100" b="1" dirty="0">
+                <a:solidFill>
+                  <a:srgbClr val="56D6E8"/>
+                </a:solidFill>
+                <a:latin typeface="Courier New" pitchFamily="34" charset="0"/>
+                <a:ea typeface="Courier New" pitchFamily="34" charset="-122"/>
+                <a:cs typeface="Courier New" pitchFamily="34" charset="-120"/>
+              </a:rPr>
+              <a:t>TDAD · arXiv 2603.17973</a:t>
+            </a:r>
+            <a:endParaRPr lang="en-US" sz="1100" dirty="0"/>
+          </a:p>
+        </p:txBody>
+      </p:sp>
+      <p:sp>
+        <p:nvSpPr>
+          <p:cNvPr id="29" name="Text 26"/>
+          <p:cNvSpPr/>
+          <p:nvPr/>
+        </p:nvSpPr>
+        <p:spPr>
+          <a:xfrm>
+            <a:off x="6583680" y="2203704"/>
+            <a:ext cx="4754880" cy="457200"/>
+          </a:xfrm>
+          <a:prstGeom prst="rect">
+            <a:avLst/>
+          </a:prstGeom>
+          <a:noFill/>
+          <a:ln/>
+        </p:spPr>
+        <p:txBody>
+          <a:bodyPr wrap="square" lIns="0" tIns="0" rIns="0" bIns="0" rtlCol="0" anchor="ctr"/>
+          <a:lstStyle/>
+          <a:p>
+            <a:pPr indent="0" marL="0">
+              <a:buNone/>
+            </a:pPr>
+            <a:r>
+              <a:rPr lang="en-US" sz="950" dirty="0">
                 <a:solidFill>
                   <a:srgbClr val="8B95A5"/>
                 </a:solidFill>
@@ -32005,236 +30620,26 @@
                 <a:ea typeface="Arial" pitchFamily="34" charset="-122"/>
                 <a:cs typeface="Arial" pitchFamily="34" charset="-120"/>
               </a:rPr>
-              <a:t>Freshness hash, lock, a re-check immediately before the rename, fsync, mode preserved, atomic rename. A target that resolves to more than one definition refuses. An empty payload refuses rather than being read as a deletion. Every refusal leaves the file byte-identical, and every success prints a JSON receipt whose span is the POST-EDIT byte range — where the payload now sits, not where it was aimed.</a:t>
-            </a:r>
-            <a:endParaRPr lang="en-US" sz="1050" dirty="0"/>
-          </a:p>
-        </p:txBody>
-      </p:sp>
-      <p:sp>
-        <p:nvSpPr>
-          <p:cNvPr id="11" name="Shape 9"/>
-          <p:cNvSpPr/>
-          <p:nvPr/>
-        </p:nvSpPr>
-        <p:spPr>
-          <a:xfrm>
-            <a:off x="566928" y="3895344"/>
-            <a:ext cx="5577840" cy="1755648"/>
+              <a:t>a static test-map cut agent-caused regressions 6.08% → 1.82%; prose TDD instructions alone made agents WORSE → the shape of --test-gate</a:t>
+            </a:r>
+            <a:endParaRPr lang="en-US" sz="950" dirty="0"/>
+          </a:p>
+        </p:txBody>
+      </p:sp>
+      <p:sp>
+        <p:nvSpPr>
+          <p:cNvPr id="30" name="Shape 27"/>
+          <p:cNvSpPr/>
+          <p:nvPr/>
+        </p:nvSpPr>
+        <p:spPr>
+          <a:xfrm>
+            <a:off x="6400800" y="2761488"/>
+            <a:ext cx="5120640" cy="822960"/>
           </a:xfrm>
           <a:prstGeom prst="roundRect">
             <a:avLst>
-              <a:gd name="adj" fmla="val 4688"/>
-            </a:avLst>
-          </a:prstGeom>
-          <a:solidFill>
-            <a:srgbClr val="161D28"/>
-          </a:solidFill>
-          <a:ln w="9525">
-            <a:solidFill>
-              <a:srgbClr val="232D3D"/>
-            </a:solidFill>
-            <a:prstDash val="solid"/>
-          </a:ln>
-        </p:spPr>
-      </p:sp>
-      <p:sp>
-        <p:nvSpPr>
-          <p:cNvPr id="12" name="Text 10"/>
-          <p:cNvSpPr/>
-          <p:nvPr/>
-        </p:nvSpPr>
-        <p:spPr>
-          <a:xfrm>
-            <a:off x="749808" y="4005072"/>
-            <a:ext cx="5212080" cy="310896"/>
-          </a:xfrm>
-          <a:prstGeom prst="rect">
-            <a:avLst/>
-          </a:prstGeom>
-          <a:noFill/>
-          <a:ln/>
-        </p:spPr>
-        <p:txBody>
-          <a:bodyPr wrap="square" lIns="0" tIns="0" rIns="0" bIns="0" rtlCol="0" anchor="ctr"/>
-          <a:lstStyle/>
-          <a:p>
-            <a:pPr indent="0" marL="0">
-              <a:buNone/>
-            </a:pPr>
-            <a:r>
-              <a:rPr lang="en-US" sz="1400" b="1" dirty="0">
-                <a:solidFill>
-                  <a:srgbClr val="4AC26B"/>
-                </a:solidFill>
-                <a:latin typeface="Arial" pitchFamily="34" charset="0"/>
-                <a:ea typeface="Arial" pitchFamily="34" charset="-122"/>
-                <a:cs typeface="Arial" pitchFamily="34" charset="-120"/>
-              </a:rPr>
-              <a:t>Preview the bytes before they exist</a:t>
-            </a:r>
-            <a:endParaRPr lang="en-US" sz="1400" dirty="0"/>
-          </a:p>
-        </p:txBody>
-      </p:sp>
-      <p:sp>
-        <p:nvSpPr>
-          <p:cNvPr id="13" name="Text 11"/>
-          <p:cNvSpPr/>
-          <p:nvPr/>
-        </p:nvSpPr>
-        <p:spPr>
-          <a:xfrm>
-            <a:off x="749808" y="4352544"/>
-            <a:ext cx="5212080" cy="1188720"/>
-          </a:xfrm>
-          <a:prstGeom prst="rect">
-            <a:avLst/>
-          </a:prstGeom>
-          <a:noFill/>
-          <a:ln/>
-        </p:spPr>
-        <p:txBody>
-          <a:bodyPr wrap="square" lIns="0" tIns="0" rIns="0" bIns="0" rtlCol="0" anchor="ctr"/>
-          <a:lstStyle/>
-          <a:p>
-            <a:pPr indent="0" marL="0">
-              <a:buNone/>
-            </a:pPr>
-            <a:r>
-              <a:rPr lang="en-US" sz="1050" dirty="0">
-                <a:solidFill>
-                  <a:srgbClr val="8B95A5"/>
-                </a:solidFill>
-                <a:latin typeface="Arial" pitchFamily="34" charset="0"/>
-                <a:ea typeface="Arial" pitchFamily="34" charset="-122"/>
-                <a:cs typeface="Arial" pitchFamily="34" charset="-120"/>
-              </a:rPr>
-              <a:t>--edit-check=SYM --edit-payload=- --dry-run splices the payload over the span IN MEMORY, re-parses that one file, rebuilds the call graph over the re-derived tree, and answers the contract question about bytes nobody has written: did the signature change, and which callers does it break? Preview, then apply — no Read of the file in between.</a:t>
-            </a:r>
-            <a:endParaRPr lang="en-US" sz="1050" dirty="0"/>
-          </a:p>
-        </p:txBody>
-      </p:sp>
-      <p:sp>
-        <p:nvSpPr>
-          <p:cNvPr id="14" name="Shape 12"/>
-          <p:cNvSpPr/>
-          <p:nvPr/>
-        </p:nvSpPr>
-        <p:spPr>
-          <a:xfrm>
-            <a:off x="6400800" y="3895344"/>
-            <a:ext cx="5138928" cy="1755648"/>
-          </a:xfrm>
-          <a:prstGeom prst="roundRect">
-            <a:avLst>
-              <a:gd name="adj" fmla="val 4688"/>
-            </a:avLst>
-          </a:prstGeom>
-          <a:solidFill>
-            <a:srgbClr val="161D28"/>
-          </a:solidFill>
-          <a:ln w="9525">
-            <a:solidFill>
-              <a:srgbClr val="232D3D"/>
-            </a:solidFill>
-            <a:prstDash val="solid"/>
-          </a:ln>
-        </p:spPr>
-      </p:sp>
-      <p:sp>
-        <p:nvSpPr>
-          <p:cNvPr id="15" name="Text 13"/>
-          <p:cNvSpPr/>
-          <p:nvPr/>
-        </p:nvSpPr>
-        <p:spPr>
-          <a:xfrm>
-            <a:off x="6583680" y="4005072"/>
-            <a:ext cx="4773168" cy="310896"/>
-          </a:xfrm>
-          <a:prstGeom prst="rect">
-            <a:avLst/>
-          </a:prstGeom>
-          <a:noFill/>
-          <a:ln/>
-        </p:spPr>
-        <p:txBody>
-          <a:bodyPr wrap="square" lIns="0" tIns="0" rIns="0" bIns="0" rtlCol="0" anchor="ctr"/>
-          <a:lstStyle/>
-          <a:p>
-            <a:pPr indent="0" marL="0">
-              <a:buNone/>
-            </a:pPr>
-            <a:r>
-              <a:rPr lang="en-US" sz="1400" b="1" dirty="0">
-                <a:solidFill>
-                  <a:srgbClr val="56D6E8"/>
-                </a:solidFill>
-                <a:latin typeface="Arial" pitchFamily="34" charset="0"/>
-                <a:ea typeface="Arial" pitchFamily="34" charset="-122"/>
-                <a:cs typeface="Arial" pitchFamily="34" charset="-120"/>
-              </a:rPr>
-              <a:t>Several edits, one transaction</a:t>
-            </a:r>
-            <a:endParaRPr lang="en-US" sz="1400" dirty="0"/>
-          </a:p>
-        </p:txBody>
-      </p:sp>
-      <p:sp>
-        <p:nvSpPr>
-          <p:cNvPr id="16" name="Text 14"/>
-          <p:cNvSpPr/>
-          <p:nvPr/>
-        </p:nvSpPr>
-        <p:spPr>
-          <a:xfrm>
-            <a:off x="6583680" y="4352544"/>
-            <a:ext cx="4773168" cy="1188720"/>
-          </a:xfrm>
-          <a:prstGeom prst="rect">
-            <a:avLst/>
-          </a:prstGeom>
-          <a:noFill/>
-          <a:ln/>
-        </p:spPr>
-        <p:txBody>
-          <a:bodyPr wrap="square" lIns="0" tIns="0" rIns="0" bIns="0" rtlCol="0" anchor="ctr"/>
-          <a:lstStyle/>
-          <a:p>
-            <a:pPr indent="0" marL="0">
-              <a:buNone/>
-            </a:pPr>
-            <a:r>
-              <a:rPr lang="en-US" sz="1050" dirty="0">
-                <a:solidFill>
-                  <a:srgbClr val="8B95A5"/>
-                </a:solidFill>
-                <a:latin typeface="Arial" pitchFamily="34" charset="0"/>
-                <a:ea typeface="Arial" pitchFamily="34" charset="-122"/>
-                <a:cs typeface="Arial" pitchFamily="34" charset="-120"/>
-              </a:rPr>
-              <a:t>--edit-plan=FILE is a versioned JSON multi-edit plan and its mode is EXPLICIT: exactly one of --dry-run or --apply, and neither is not a default. Every target, payload and span is preflighted before any write; overlapping edits refuse; payload paths are confined to the plan's own directory, so an absolute path or a '..' escape refuses and names what it resolved to.</a:t>
-            </a:r>
-            <a:endParaRPr lang="en-US" sz="1050" dirty="0"/>
-          </a:p>
-        </p:txBody>
-      </p:sp>
-      <p:sp>
-        <p:nvSpPr>
-          <p:cNvPr id="17" name="Shape 15"/>
-          <p:cNvSpPr/>
-          <p:nvPr/>
-        </p:nvSpPr>
-        <p:spPr>
-          <a:xfrm>
-            <a:off x="566928" y="5779008"/>
-            <a:ext cx="11055096" cy="566928"/>
-          </a:xfrm>
-          <a:prstGeom prst="roundRect">
-            <a:avLst>
-              <a:gd name="adj" fmla="val 14516"/>
+              <a:gd name="adj" fmla="val 10000"/>
             </a:avLst>
           </a:prstGeom>
           <a:solidFill>
@@ -32250,14 +30655,14 @@
       </p:sp>
       <p:sp>
         <p:nvSpPr>
-          <p:cNvPr id="18" name="Text 16"/>
-          <p:cNvSpPr/>
-          <p:nvPr/>
-        </p:nvSpPr>
-        <p:spPr>
-          <a:xfrm>
-            <a:off x="795528" y="5861304"/>
-            <a:ext cx="10607040" cy="420624"/>
+          <p:cNvPr id="31" name="Text 28"/>
+          <p:cNvSpPr/>
+          <p:nvPr/>
+        </p:nvSpPr>
+        <p:spPr>
+          <a:xfrm>
+            <a:off x="6583680" y="2816352"/>
+            <a:ext cx="4754880" cy="274320"/>
           </a:xfrm>
           <a:prstGeom prst="rect">
             <a:avLst/>
@@ -32275,66 +30680,406 @@
             <a:r>
               <a:rPr lang="en-US" sz="1100" b="1" dirty="0">
                 <a:solidFill>
-                  <a:srgbClr val="E6EDF3"/>
-                </a:solidFill>
-                <a:latin typeface="Arial" pitchFamily="34" charset="0"/>
-                <a:ea typeface="Arial" pitchFamily="34" charset="-122"/>
-                <a:cs typeface="Arial" pitchFamily="34" charset="-120"/>
-              </a:rPr>
-              <a:t>Same engine on both seats: </a:t>
-            </a:r>
-            <a:pPr indent="0" marL="0">
-              <a:buNone/>
-            </a:pPr>
-            <a:r>
-              <a:rPr lang="en-US" sz="1100" dirty="0">
-                <a:solidFill>
-                  <a:srgbClr val="8B95A5"/>
-                </a:solidFill>
-                <a:latin typeface="Arial" pitchFamily="34" charset="0"/>
-                <a:ea typeface="Arial" pitchFamily="34" charset="-122"/>
-                <a:cs typeface="Arial" pitchFamily="34" charset="-120"/>
-              </a:rPr>
-              <a:t>the three MCP edit verbs are these three flags, and the navigation the deck has no room for is the same story — --graph-query, --whereis, --stray-content, --at, --arch, --owners, --export, --help-task all sit in docs/COMMANDS.md with a recorded invocation and its output.</a:t>
-            </a:r>
-            <a:endParaRPr lang="en-US" sz="1100" dirty="0"/>
-          </a:p>
-        </p:txBody>
-      </p:sp>
-      <p:sp>
-        <p:nvSpPr>
-          <p:cNvPr id="19" name="Text 17"/>
-          <p:cNvSpPr/>
-          <p:nvPr/>
-        </p:nvSpPr>
-        <p:spPr>
-          <a:xfrm>
-            <a:off x="566928" y="6419088"/>
-            <a:ext cx="11055096" cy="274320"/>
-          </a:xfrm>
-          <a:prstGeom prst="rect">
-            <a:avLst/>
-          </a:prstGeom>
-          <a:noFill/>
-          <a:ln/>
-        </p:spPr>
-        <p:txBody>
-          <a:bodyPr wrap="square" lIns="0" tIns="0" rIns="0" bIns="0" rtlCol="0" anchor="ctr"/>
-          <a:lstStyle/>
-          <a:p>
-            <a:pPr indent="0" marL="0">
-              <a:buNone/>
-            </a:pPr>
-            <a:r>
-              <a:rPr lang="en-US" sz="1050" dirty="0">
-                <a:solidFill>
-                  <a:srgbClr val="8B95A5"/>
+                  <a:srgbClr val="56D6E8"/>
                 </a:solidFill>
                 <a:latin typeface="Courier New" pitchFamily="34" charset="0"/>
                 <a:ea typeface="Courier New" pitchFamily="34" charset="-122"/>
                 <a:cs typeface="Courier New" pitchFamily="34" charset="-120"/>
               </a:rPr>
-              <a:t>every claim on this slide is stated by `ripwire --help` and captured in docs/COMMANDS.md — test/deckcheck.sh proves each flag named here exists in the shipped binary</a:t>
+              <a:t>What-to-Retrieve · arXiv 2503.20589</a:t>
+            </a:r>
+            <a:endParaRPr lang="en-US" sz="1100" dirty="0"/>
+          </a:p>
+        </p:txBody>
+      </p:sp>
+      <p:sp>
+        <p:nvSpPr>
+          <p:cNvPr id="32" name="Text 29"/>
+          <p:cNvSpPr/>
+          <p:nvPr/>
+        </p:nvSpPr>
+        <p:spPr>
+          <a:xfrm>
+            <a:off x="6583680" y="3090672"/>
+            <a:ext cx="4754880" cy="457200"/>
+          </a:xfrm>
+          <a:prstGeom prst="rect">
+            <a:avLst/>
+          </a:prstGeom>
+          <a:noFill/>
+          <a:ln/>
+        </p:spPr>
+        <p:txBody>
+          <a:bodyPr wrap="square" lIns="0" tIns="0" rIns="0" bIns="0" rtlCol="0" anchor="ctr"/>
+          <a:lstStyle/>
+          <a:p>
+            <a:pPr indent="0" marL="0">
+              <a:buNone/>
+            </a:pPr>
+            <a:r>
+              <a:rPr lang="en-US" sz="950" dirty="0">
+                <a:solidFill>
+                  <a:srgbClr val="8B95A5"/>
+                </a:solidFill>
+                <a:latin typeface="Arial" pitchFamily="34" charset="0"/>
+                <a:ea typeface="Arial" pitchFamily="34" charset="-122"/>
+                <a:cs typeface="Arial" pitchFamily="34" charset="-120"/>
+              </a:rPr>
+              <a:t>retrieval selection beats retrieval volume for coding agents → the selection-over-dumping thesis</a:t>
+            </a:r>
+            <a:endParaRPr lang="en-US" sz="950" dirty="0"/>
+          </a:p>
+        </p:txBody>
+      </p:sp>
+      <p:sp>
+        <p:nvSpPr>
+          <p:cNvPr id="33" name="Shape 30"/>
+          <p:cNvSpPr/>
+          <p:nvPr/>
+        </p:nvSpPr>
+        <p:spPr>
+          <a:xfrm>
+            <a:off x="6400800" y="3648456"/>
+            <a:ext cx="5120640" cy="822960"/>
+          </a:xfrm>
+          <a:prstGeom prst="roundRect">
+            <a:avLst>
+              <a:gd name="adj" fmla="val 10000"/>
+            </a:avLst>
+          </a:prstGeom>
+          <a:solidFill>
+            <a:srgbClr val="1B2432"/>
+          </a:solidFill>
+          <a:ln w="9525">
+            <a:solidFill>
+              <a:srgbClr val="232D3D"/>
+            </a:solidFill>
+            <a:prstDash val="solid"/>
+          </a:ln>
+        </p:spPr>
+      </p:sp>
+      <p:sp>
+        <p:nvSpPr>
+          <p:cNvPr id="34" name="Text 31"/>
+          <p:cNvSpPr/>
+          <p:nvPr/>
+        </p:nvSpPr>
+        <p:spPr>
+          <a:xfrm>
+            <a:off x="6583680" y="3703320"/>
+            <a:ext cx="4754880" cy="274320"/>
+          </a:xfrm>
+          <a:prstGeom prst="rect">
+            <a:avLst/>
+          </a:prstGeom>
+          <a:noFill/>
+          <a:ln/>
+        </p:spPr>
+        <p:txBody>
+          <a:bodyPr wrap="square" lIns="0" tIns="0" rIns="0" bIns="0" rtlCol="0" anchor="ctr"/>
+          <a:lstStyle/>
+          <a:p>
+            <a:pPr indent="0" marL="0">
+              <a:buNone/>
+            </a:pPr>
+            <a:r>
+              <a:rPr lang="en-US" sz="1100" b="1" dirty="0">
+                <a:solidFill>
+                  <a:srgbClr val="56D6E8"/>
+                </a:solidFill>
+                <a:latin typeface="Courier New" pitchFamily="34" charset="0"/>
+                <a:ea typeface="Courier New" pitchFamily="34" charset="-122"/>
+                <a:cs typeface="Courier New" pitchFamily="34" charset="-120"/>
+              </a:rPr>
+              <a:t>LocAgent / Loc-Bench (2025)</a:t>
+            </a:r>
+            <a:endParaRPr lang="en-US" sz="1100" dirty="0"/>
+          </a:p>
+        </p:txBody>
+      </p:sp>
+      <p:sp>
+        <p:nvSpPr>
+          <p:cNvPr id="35" name="Text 32"/>
+          <p:cNvSpPr/>
+          <p:nvPr/>
+        </p:nvSpPr>
+        <p:spPr>
+          <a:xfrm>
+            <a:off x="6583680" y="3977640"/>
+            <a:ext cx="4754880" cy="457200"/>
+          </a:xfrm>
+          <a:prstGeom prst="rect">
+            <a:avLst/>
+          </a:prstGeom>
+          <a:noFill/>
+          <a:ln/>
+        </p:spPr>
+        <p:txBody>
+          <a:bodyPr wrap="square" lIns="0" tIns="0" rIns="0" bIns="0" rtlCol="0" anchor="ctr"/>
+          <a:lstStyle/>
+          <a:p>
+            <a:pPr indent="0" marL="0">
+              <a:buNone/>
+            </a:pPr>
+            <a:r>
+              <a:rPr lang="en-US" sz="950" dirty="0">
+                <a:solidFill>
+                  <a:srgbClr val="8B95A5"/>
+                </a:solidFill>
+                <a:latin typeface="Arial" pitchFamily="34" charset="0"/>
+                <a:ea typeface="Arial" pitchFamily="34" charset="-122"/>
+                <a:cs typeface="Arial" pitchFamily="34" charset="-120"/>
+              </a:rPr>
+              <a:t>the localization metric (strict Acc@k) and the frozen 560-instance dataset every accuracy number here is scored on</a:t>
+            </a:r>
+            <a:endParaRPr lang="en-US" sz="950" dirty="0"/>
+          </a:p>
+        </p:txBody>
+      </p:sp>
+      <p:sp>
+        <p:nvSpPr>
+          <p:cNvPr id="36" name="Shape 33"/>
+          <p:cNvSpPr/>
+          <p:nvPr/>
+        </p:nvSpPr>
+        <p:spPr>
+          <a:xfrm>
+            <a:off x="6400800" y="4535424"/>
+            <a:ext cx="5120640" cy="822960"/>
+          </a:xfrm>
+          <a:prstGeom prst="roundRect">
+            <a:avLst>
+              <a:gd name="adj" fmla="val 10000"/>
+            </a:avLst>
+          </a:prstGeom>
+          <a:solidFill>
+            <a:srgbClr val="1B2432"/>
+          </a:solidFill>
+          <a:ln w="9525">
+            <a:solidFill>
+              <a:srgbClr val="232D3D"/>
+            </a:solidFill>
+            <a:prstDash val="solid"/>
+          </a:ln>
+        </p:spPr>
+      </p:sp>
+      <p:sp>
+        <p:nvSpPr>
+          <p:cNvPr id="37" name="Text 34"/>
+          <p:cNvSpPr/>
+          <p:nvPr/>
+        </p:nvSpPr>
+        <p:spPr>
+          <a:xfrm>
+            <a:off x="6583680" y="4590288"/>
+            <a:ext cx="4754880" cy="274320"/>
+          </a:xfrm>
+          <a:prstGeom prst="rect">
+            <a:avLst/>
+          </a:prstGeom>
+          <a:noFill/>
+          <a:ln/>
+        </p:spPr>
+        <p:txBody>
+          <a:bodyPr wrap="square" lIns="0" tIns="0" rIns="0" bIns="0" rtlCol="0" anchor="ctr"/>
+          <a:lstStyle/>
+          <a:p>
+            <a:pPr indent="0" marL="0">
+              <a:buNone/>
+            </a:pPr>
+            <a:r>
+              <a:rPr lang="en-US" sz="1100" b="1" dirty="0">
+                <a:solidFill>
+                  <a:srgbClr val="56D6E8"/>
+                </a:solidFill>
+                <a:latin typeface="Courier New" pitchFamily="34" charset="0"/>
+                <a:ea typeface="Courier New" pitchFamily="34" charset="-122"/>
+                <a:cs typeface="Courier New" pitchFamily="34" charset="-120"/>
+              </a:rPr>
+              <a:t>scip-clang · Serena / clangd</a:t>
+            </a:r>
+            <a:endParaRPr lang="en-US" sz="1100" dirty="0"/>
+          </a:p>
+        </p:txBody>
+      </p:sp>
+      <p:sp>
+        <p:nvSpPr>
+          <p:cNvPr id="38" name="Text 35"/>
+          <p:cNvSpPr/>
+          <p:nvPr/>
+        </p:nvSpPr>
+        <p:spPr>
+          <a:xfrm>
+            <a:off x="6583680" y="4864608"/>
+            <a:ext cx="4754880" cy="457200"/>
+          </a:xfrm>
+          <a:prstGeom prst="rect">
+            <a:avLst/>
+          </a:prstGeom>
+          <a:noFill/>
+          <a:ln/>
+        </p:spPr>
+        <p:txBody>
+          <a:bodyPr wrap="square" lIns="0" tIns="0" rIns="0" bIns="0" rtlCol="0" anchor="ctr"/>
+          <a:lstStyle/>
+          <a:p>
+            <a:pPr indent="0" marL="0">
+              <a:buNone/>
+            </a:pPr>
+            <a:r>
+              <a:rPr lang="en-US" sz="950" dirty="0">
+                <a:solidFill>
+                  <a:srgbClr val="8B95A5"/>
+                </a:solidFill>
+                <a:latin typeface="Arial" pitchFamily="34" charset="0"/>
+                <a:ea typeface="Arial" pitchFamily="34" charset="-122"/>
+                <a:cs typeface="Arial" pitchFamily="34" charset="-120"/>
+              </a:rPr>
+              <a:t>the compiler-grade oracle round 9 graded both tools against — an outside referee, not a rival</a:t>
+            </a:r>
+            <a:endParaRPr lang="en-US" sz="950" dirty="0"/>
+          </a:p>
+        </p:txBody>
+      </p:sp>
+      <p:sp>
+        <p:nvSpPr>
+          <p:cNvPr id="39" name="Shape 36"/>
+          <p:cNvSpPr/>
+          <p:nvPr/>
+        </p:nvSpPr>
+        <p:spPr>
+          <a:xfrm>
+            <a:off x="6400800" y="5422392"/>
+            <a:ext cx="5120640" cy="822960"/>
+          </a:xfrm>
+          <a:prstGeom prst="roundRect">
+            <a:avLst>
+              <a:gd name="adj" fmla="val 10000"/>
+            </a:avLst>
+          </a:prstGeom>
+          <a:solidFill>
+            <a:srgbClr val="1B2432"/>
+          </a:solidFill>
+          <a:ln w="9525">
+            <a:solidFill>
+              <a:srgbClr val="232D3D"/>
+            </a:solidFill>
+            <a:prstDash val="solid"/>
+          </a:ln>
+        </p:spPr>
+      </p:sp>
+      <p:sp>
+        <p:nvSpPr>
+          <p:cNvPr id="40" name="Text 37"/>
+          <p:cNvSpPr/>
+          <p:nvPr/>
+        </p:nvSpPr>
+        <p:spPr>
+          <a:xfrm>
+            <a:off x="6583680" y="5477256"/>
+            <a:ext cx="4754880" cy="274320"/>
+          </a:xfrm>
+          <a:prstGeom prst="rect">
+            <a:avLst/>
+          </a:prstGeom>
+          <a:noFill/>
+          <a:ln/>
+        </p:spPr>
+        <p:txBody>
+          <a:bodyPr wrap="square" lIns="0" tIns="0" rIns="0" bIns="0" rtlCol="0" anchor="ctr"/>
+          <a:lstStyle/>
+          <a:p>
+            <a:pPr indent="0" marL="0">
+              <a:buNone/>
+            </a:pPr>
+            <a:r>
+              <a:rPr lang="en-US" sz="1100" b="1" dirty="0">
+                <a:solidFill>
+                  <a:srgbClr val="56D6E8"/>
+                </a:solidFill>
+                <a:latin typeface="Courier New" pitchFamily="34" charset="0"/>
+                <a:ea typeface="Courier New" pitchFamily="34" charset="-122"/>
+                <a:cs typeface="Courier New" pitchFamily="34" charset="-120"/>
+              </a:rPr>
+              <a:t>tree-sitter</a:t>
+            </a:r>
+            <a:endParaRPr lang="en-US" sz="1100" dirty="0"/>
+          </a:p>
+        </p:txBody>
+      </p:sp>
+      <p:sp>
+        <p:nvSpPr>
+          <p:cNvPr id="41" name="Text 38"/>
+          <p:cNvSpPr/>
+          <p:nvPr/>
+        </p:nvSpPr>
+        <p:spPr>
+          <a:xfrm>
+            <a:off x="6583680" y="5751576"/>
+            <a:ext cx="4754880" cy="457200"/>
+          </a:xfrm>
+          <a:prstGeom prst="rect">
+            <a:avLst/>
+          </a:prstGeom>
+          <a:noFill/>
+          <a:ln/>
+        </p:spPr>
+        <p:txBody>
+          <a:bodyPr wrap="square" lIns="0" tIns="0" rIns="0" bIns="0" rtlCol="0" anchor="ctr"/>
+          <a:lstStyle/>
+          <a:p>
+            <a:pPr indent="0" marL="0">
+              <a:buNone/>
+            </a:pPr>
+            <a:r>
+              <a:rPr lang="en-US" sz="950" dirty="0">
+                <a:solidFill>
+                  <a:srgbClr val="8B95A5"/>
+                </a:solidFill>
+                <a:latin typeface="Arial" pitchFamily="34" charset="0"/>
+                <a:ea typeface="Arial" pitchFamily="34" charset="-122"/>
+                <a:cs typeface="Arial" pitchFamily="34" charset="-120"/>
+              </a:rPr>
+              <a:t>the incremental GLR parsing substrate — 24 grammars vendored, one parser per thread</a:t>
+            </a:r>
+            <a:endParaRPr lang="en-US" sz="950" dirty="0"/>
+          </a:p>
+        </p:txBody>
+      </p:sp>
+      <p:sp>
+        <p:nvSpPr>
+          <p:cNvPr id="42" name="Text 39"/>
+          <p:cNvSpPr/>
+          <p:nvPr/>
+        </p:nvSpPr>
+        <p:spPr>
+          <a:xfrm>
+            <a:off x="566928" y="6419088"/>
+            <a:ext cx="11055096" cy="274320"/>
+          </a:xfrm>
+          <a:prstGeom prst="rect">
+            <a:avLst/>
+          </a:prstGeom>
+          <a:noFill/>
+          <a:ln/>
+        </p:spPr>
+        <p:txBody>
+          <a:bodyPr wrap="square" lIns="0" tIns="0" rIns="0" bIns="0" rtlCol="0" anchor="ctr"/>
+          <a:lstStyle/>
+          <a:p>
+            <a:pPr indent="0" marL="0">
+              <a:buNone/>
+            </a:pPr>
+            <a:r>
+              <a:rPr lang="en-US" sz="1050" dirty="0">
+                <a:solidFill>
+                  <a:srgbClr val="8B95A5"/>
+                </a:solidFill>
+                <a:latin typeface="Courier New" pitchFamily="34" charset="0"/>
+                <a:ea typeface="Courier New" pitchFamily="34" charset="-122"/>
+                <a:cs typeface="Courier New" pitchFamily="34" charset="-120"/>
+              </a:rPr>
+              <a:t>counts gated in-repo: readmedriftcheck arm E derives them from LINEAGE.md's own tables — the lineage is the design rationale</a:t>
             </a:r>
             <a:endParaRPr lang="en-US" sz="1050" dirty="0"/>
           </a:p>
@@ -32405,7 +31150,7 @@
                 <a:ea typeface="Courier New" pitchFamily="34" charset="-122"/>
                 <a:cs typeface="Courier New" pitchFamily="34" charset="-120"/>
               </a:rPr>
-              <a:t>// standing on giants</a:t>
+              <a:t>// do not take any of it on trust</a:t>
             </a:r>
             <a:endParaRPr lang="en-US" sz="1300" dirty="0"/>
           </a:p>
@@ -32444,7 +31189,7 @@
                 <a:ea typeface="Arial" pitchFamily="34" charset="-122"/>
                 <a:cs typeface="Arial" pitchFamily="34" charset="-120"/>
               </a:rPr>
-              <a:t>The research inside — classic and current</a:t>
+              <a:t>Every claim, and the command that re-derives it</a:t>
             </a:r>
             <a:endParaRPr lang="en-US" sz="3400" dirty="0"/>
           </a:p>
@@ -32452,71 +31197,18 @@
       </p:sp>
       <p:sp>
         <p:nvSpPr>
-          <p:cNvPr id="4" name="Text 2"/>
-          <p:cNvSpPr/>
-          <p:nvPr/>
-        </p:nvSpPr>
-        <p:spPr>
-          <a:xfrm>
-            <a:off x="566928" y="1444752"/>
-            <a:ext cx="10972800" cy="310896"/>
-          </a:xfrm>
-          <a:prstGeom prst="rect">
-            <a:avLst/>
-          </a:prstGeom>
-          <a:noFill/>
-          <a:ln/>
-        </p:spPr>
-        <p:txBody>
-          <a:bodyPr wrap="square" lIns="0" tIns="0" rIns="0" bIns="0" rtlCol="0" anchor="ctr"/>
-          <a:lstStyle/>
-          <a:p>
-            <a:pPr indent="0" marL="0">
-              <a:buNone/>
-            </a:pPr>
-            <a:r>
-              <a:rPr lang="en-US" sz="1300" b="1" dirty="0">
-                <a:solidFill>
-                  <a:srgbClr val="E6EDF3"/>
-                </a:solidFill>
-                <a:latin typeface="Arial" pitchFamily="34" charset="0"/>
-                <a:ea typeface="Arial" pitchFamily="34" charset="-122"/>
-                <a:cs typeface="Arial" pitchFamily="34" charset="-120"/>
-              </a:rPr>
-              <a:t>49 repositories + 70 papers folded</a:t>
-            </a:r>
-            <a:pPr indent="0" marL="0">
-              <a:buNone/>
-            </a:pPr>
-            <a:r>
-              <a:rPr lang="en-US" sz="1300" dirty="0">
-                <a:solidFill>
-                  <a:srgbClr val="8B95A5"/>
-                </a:solidFill>
-                <a:latin typeface="Arial" pitchFamily="34" charset="0"/>
-                <a:ea typeface="Arial" pitchFamily="34" charset="-122"/>
-                <a:cs typeface="Arial" pitchFamily="34" charset="-120"/>
-              </a:rPr>
-              <a:t>  ·  and a labelled survey of 237 tools that contributed nothing, which says so — every row with the lesson taken and where it lives: docs/LINEAGE.md</a:t>
-            </a:r>
-            <a:endParaRPr lang="en-US" sz="1300" dirty="0"/>
-          </a:p>
-        </p:txBody>
-      </p:sp>
-      <p:sp>
-        <p:nvSpPr>
-          <p:cNvPr id="5" name="Shape 3"/>
-          <p:cNvSpPr/>
-          <p:nvPr/>
-        </p:nvSpPr>
-        <p:spPr>
-          <a:xfrm>
-            <a:off x="566928" y="1874520"/>
-            <a:ext cx="5577840" cy="566928"/>
+          <p:cNvPr id="4" name="Shape 2"/>
+          <p:cNvSpPr/>
+          <p:nvPr/>
+        </p:nvSpPr>
+        <p:spPr>
+          <a:xfrm>
+            <a:off x="566928" y="1554480"/>
+            <a:ext cx="11055096" cy="457200"/>
           </a:xfrm>
           <a:prstGeom prst="roundRect">
             <a:avLst>
-              <a:gd name="adj" fmla="val 14516"/>
+              <a:gd name="adj" fmla="val 18000"/>
             </a:avLst>
           </a:prstGeom>
           <a:solidFill>
@@ -32532,111 +31224,96 @@
       </p:sp>
       <p:sp>
         <p:nvSpPr>
+          <p:cNvPr id="5" name="Text 3"/>
+          <p:cNvSpPr/>
+          <p:nvPr/>
+        </p:nvSpPr>
+        <p:spPr>
+          <a:xfrm>
+            <a:off x="731520" y="1581912"/>
+            <a:ext cx="4846320" cy="402336"/>
+          </a:xfrm>
+          <a:prstGeom prst="rect">
+            <a:avLst/>
+          </a:prstGeom>
+          <a:noFill/>
+          <a:ln/>
+        </p:spPr>
+        <p:txBody>
+          <a:bodyPr wrap="square" lIns="0" tIns="0" rIns="0" bIns="0" rtlCol="0" anchor="ctr"/>
+          <a:lstStyle/>
+          <a:p>
+            <a:pPr algn="l" indent="0" marL="0">
+              <a:buNone/>
+            </a:pPr>
+            <a:r>
+              <a:rPr lang="en-US" sz="1200" dirty="0">
+                <a:solidFill>
+                  <a:srgbClr val="E6EDF3"/>
+                </a:solidFill>
+                <a:latin typeface="Arial" pitchFamily="34" charset="0"/>
+                <a:ea typeface="Arial" pitchFamily="34" charset="-122"/>
+                <a:cs typeface="Arial" pitchFamily="34" charset="-120"/>
+              </a:rPr>
+              <a:t>179 long flags · 33 slides</a:t>
+            </a:r>
+            <a:endParaRPr lang="en-US" sz="1200" dirty="0"/>
+          </a:p>
+        </p:txBody>
+      </p:sp>
+      <p:sp>
+        <p:nvSpPr>
           <p:cNvPr id="6" name="Text 4"/>
           <p:cNvSpPr/>
           <p:nvPr/>
         </p:nvSpPr>
         <p:spPr>
           <a:xfrm>
-            <a:off x="713232" y="1911096"/>
-            <a:ext cx="685800" cy="493776"/>
-          </a:xfrm>
-          <a:prstGeom prst="rect">
-            <a:avLst/>
-          </a:prstGeom>
-          <a:noFill/>
-          <a:ln/>
-        </p:spPr>
-        <p:txBody>
-          <a:bodyPr wrap="square" lIns="0" tIns="0" rIns="0" bIns="0" rtlCol="0" anchor="ctr"/>
-          <a:lstStyle/>
-          <a:p>
-            <a:pPr indent="0" marL="0">
-              <a:buNone/>
-            </a:pPr>
-            <a:r>
-              <a:rPr lang="en-US" sz="1200" b="1" dirty="0">
-                <a:solidFill>
-                  <a:srgbClr val="F2B84B"/>
+            <a:off x="5687568" y="1581912"/>
+            <a:ext cx="5669280" cy="402336"/>
+          </a:xfrm>
+          <a:prstGeom prst="rect">
+            <a:avLst/>
+          </a:prstGeom>
+          <a:noFill/>
+          <a:ln/>
+        </p:spPr>
+        <p:txBody>
+          <a:bodyPr wrap="square" lIns="0" tIns="0" rIns="0" bIns="0" rtlCol="0" anchor="ctr"/>
+          <a:lstStyle/>
+          <a:p>
+            <a:pPr algn="l" indent="0" marL="0">
+              <a:buNone/>
+            </a:pPr>
+            <a:r>
+              <a:rPr lang="en-US" sz="1150" dirty="0">
+                <a:solidFill>
+                  <a:srgbClr val="56D6E8"/>
                 </a:solidFill>
                 <a:latin typeface="Courier New" pitchFamily="34" charset="0"/>
                 <a:ea typeface="Courier New" pitchFamily="34" charset="-122"/>
                 <a:cs typeface="Courier New" pitchFamily="34" charset="-120"/>
               </a:rPr>
-              <a:t>1976</a:t>
-            </a:r>
-            <a:endParaRPr lang="en-US" sz="1200" dirty="0"/>
-          </a:p>
-        </p:txBody>
-      </p:sp>
-      <p:sp>
-        <p:nvSpPr>
-          <p:cNvPr id="7" name="Text 5"/>
-          <p:cNvSpPr/>
-          <p:nvPr/>
-        </p:nvSpPr>
-        <p:spPr>
-          <a:xfrm>
-            <a:off x="1481328" y="1911096"/>
-            <a:ext cx="4572000" cy="493776"/>
-          </a:xfrm>
-          <a:prstGeom prst="rect">
-            <a:avLst/>
-          </a:prstGeom>
-          <a:noFill/>
-          <a:ln/>
-        </p:spPr>
-        <p:txBody>
-          <a:bodyPr wrap="square" lIns="0" tIns="0" rIns="0" bIns="0" rtlCol="0" anchor="ctr"/>
-          <a:lstStyle/>
-          <a:p>
-            <a:pPr indent="0" marL="0">
-              <a:buNone/>
-            </a:pPr>
-            <a:r>
-              <a:rPr lang="en-US" sz="1100" b="1" dirty="0">
-                <a:solidFill>
-                  <a:srgbClr val="E6EDF3"/>
-                </a:solidFill>
-                <a:latin typeface="Arial" pitchFamily="34" charset="0"/>
-                <a:ea typeface="Arial" pitchFamily="34" charset="-122"/>
-                <a:cs typeface="Arial" pitchFamily="34" charset="-120"/>
-              </a:rPr>
-              <a:t>Cyclomatic complexity — McCabe
-</a:t>
-            </a:r>
-            <a:pPr indent="0" marL="0">
-              <a:buNone/>
-            </a:pPr>
-            <a:r>
-              <a:rPr lang="en-US" sz="950" dirty="0">
-                <a:solidFill>
-                  <a:srgbClr val="8B95A5"/>
-                </a:solidFill>
-                <a:latin typeface="Arial" pitchFamily="34" charset="0"/>
-                <a:ea typeface="Arial" pitchFamily="34" charset="-122"/>
-                <a:cs typeface="Arial" pitchFamily="34" charset="-120"/>
-              </a:rPr>
-              <a:t>the metric behind --hotspots</a:t>
-            </a:r>
-            <a:endParaRPr lang="en-US" sz="1100" dirty="0"/>
-          </a:p>
-        </p:txBody>
-      </p:sp>
-      <p:sp>
-        <p:nvSpPr>
-          <p:cNvPr id="8" name="Shape 6"/>
-          <p:cNvSpPr/>
-          <p:nvPr/>
-        </p:nvSpPr>
-        <p:spPr>
-          <a:xfrm>
-            <a:off x="566928" y="2514600"/>
-            <a:ext cx="5577840" cy="566928"/>
+              <a:t>bash test/deckclaimcheck.sh</a:t>
+            </a:r>
+            <a:endParaRPr lang="en-US" sz="1150" dirty="0"/>
+          </a:p>
+        </p:txBody>
+      </p:sp>
+      <p:sp>
+        <p:nvSpPr>
+          <p:cNvPr id="7" name="Shape 5"/>
+          <p:cNvSpPr/>
+          <p:nvPr/>
+        </p:nvSpPr>
+        <p:spPr>
+          <a:xfrm>
+            <a:off x="566928" y="2080260"/>
+            <a:ext cx="11055096" cy="457200"/>
           </a:xfrm>
           <a:prstGeom prst="roundRect">
             <a:avLst>
-              <a:gd name="adj" fmla="val 14516"/>
+              <a:gd name="adj" fmla="val 18000"/>
             </a:avLst>
           </a:prstGeom>
           <a:solidFill>
@@ -32652,111 +31329,96 @@
       </p:sp>
       <p:sp>
         <p:nvSpPr>
+          <p:cNvPr id="8" name="Text 6"/>
+          <p:cNvSpPr/>
+          <p:nvPr/>
+        </p:nvSpPr>
+        <p:spPr>
+          <a:xfrm>
+            <a:off x="731520" y="2107692"/>
+            <a:ext cx="4846320" cy="402336"/>
+          </a:xfrm>
+          <a:prstGeom prst="rect">
+            <a:avLst/>
+          </a:prstGeom>
+          <a:noFill/>
+          <a:ln/>
+        </p:spPr>
+        <p:txBody>
+          <a:bodyPr wrap="square" lIns="0" tIns="0" rIns="0" bIns="0" rtlCol="0" anchor="ctr"/>
+          <a:lstStyle/>
+          <a:p>
+            <a:pPr algn="l" indent="0" marL="0">
+              <a:buNone/>
+            </a:pPr>
+            <a:r>
+              <a:rPr lang="en-US" sz="1200" dirty="0">
+                <a:solidFill>
+                  <a:srgbClr val="E6EDF3"/>
+                </a:solidFill>
+                <a:latin typeface="Arial" pitchFamily="34" charset="0"/>
+                <a:ea typeface="Arial" pitchFamily="34" charset="-122"/>
+                <a:cs typeface="Arial" pitchFamily="34" charset="-120"/>
+              </a:rPr>
+              <a:t>every --flag named here exists</a:t>
+            </a:r>
+            <a:endParaRPr lang="en-US" sz="1200" dirty="0"/>
+          </a:p>
+        </p:txBody>
+      </p:sp>
+      <p:sp>
+        <p:nvSpPr>
           <p:cNvPr id="9" name="Text 7"/>
           <p:cNvSpPr/>
           <p:nvPr/>
         </p:nvSpPr>
         <p:spPr>
           <a:xfrm>
-            <a:off x="713232" y="2551176"/>
-            <a:ext cx="685800" cy="493776"/>
-          </a:xfrm>
-          <a:prstGeom prst="rect">
-            <a:avLst/>
-          </a:prstGeom>
-          <a:noFill/>
-          <a:ln/>
-        </p:spPr>
-        <p:txBody>
-          <a:bodyPr wrap="square" lIns="0" tIns="0" rIns="0" bIns="0" rtlCol="0" anchor="ctr"/>
-          <a:lstStyle/>
-          <a:p>
-            <a:pPr indent="0" marL="0">
-              <a:buNone/>
-            </a:pPr>
-            <a:r>
-              <a:rPr lang="en-US" sz="1200" b="1" dirty="0">
-                <a:solidFill>
-                  <a:srgbClr val="F2B84B"/>
+            <a:off x="5687568" y="2107692"/>
+            <a:ext cx="5669280" cy="402336"/>
+          </a:xfrm>
+          <a:prstGeom prst="rect">
+            <a:avLst/>
+          </a:prstGeom>
+          <a:noFill/>
+          <a:ln/>
+        </p:spPr>
+        <p:txBody>
+          <a:bodyPr wrap="square" lIns="0" tIns="0" rIns="0" bIns="0" rtlCol="0" anchor="ctr"/>
+          <a:lstStyle/>
+          <a:p>
+            <a:pPr algn="l" indent="0" marL="0">
+              <a:buNone/>
+            </a:pPr>
+            <a:r>
+              <a:rPr lang="en-US" sz="1150" dirty="0">
+                <a:solidFill>
+                  <a:srgbClr val="56D6E8"/>
                 </a:solidFill>
                 <a:latin typeface="Courier New" pitchFamily="34" charset="0"/>
                 <a:ea typeface="Courier New" pitchFamily="34" charset="-122"/>
                 <a:cs typeface="Courier New" pitchFamily="34" charset="-120"/>
               </a:rPr>
-              <a:t>1994</a:t>
-            </a:r>
-            <a:endParaRPr lang="en-US" sz="1200" dirty="0"/>
-          </a:p>
-        </p:txBody>
-      </p:sp>
-      <p:sp>
-        <p:nvSpPr>
-          <p:cNvPr id="10" name="Text 8"/>
-          <p:cNvSpPr/>
-          <p:nvPr/>
-        </p:nvSpPr>
-        <p:spPr>
-          <a:xfrm>
-            <a:off x="1481328" y="2551176"/>
-            <a:ext cx="4572000" cy="493776"/>
-          </a:xfrm>
-          <a:prstGeom prst="rect">
-            <a:avLst/>
-          </a:prstGeom>
-          <a:noFill/>
-          <a:ln/>
-        </p:spPr>
-        <p:txBody>
-          <a:bodyPr wrap="square" lIns="0" tIns="0" rIns="0" bIns="0" rtlCol="0" anchor="ctr"/>
-          <a:lstStyle/>
-          <a:p>
-            <a:pPr indent="0" marL="0">
-              <a:buNone/>
-            </a:pPr>
-            <a:r>
-              <a:rPr lang="en-US" sz="1100" b="1" dirty="0">
-                <a:solidFill>
-                  <a:srgbClr val="E6EDF3"/>
-                </a:solidFill>
-                <a:latin typeface="Arial" pitchFamily="34" charset="0"/>
-                <a:ea typeface="Arial" pitchFamily="34" charset="-122"/>
-                <a:cs typeface="Arial" pitchFamily="34" charset="-120"/>
-              </a:rPr>
-              <a:t>Okapi BM25 — Robertson · Spärck Jones
-</a:t>
-            </a:r>
-            <a:pPr indent="0" marL="0">
-              <a:buNone/>
-            </a:pPr>
-            <a:r>
-              <a:rPr lang="en-US" sz="950" dirty="0">
-                <a:solidFill>
-                  <a:srgbClr val="8B95A5"/>
-                </a:solidFill>
-                <a:latin typeface="Arial" pitchFamily="34" charset="0"/>
-                <a:ea typeface="Arial" pitchFamily="34" charset="-122"/>
-                <a:cs typeface="Arial" pitchFamily="34" charset="-120"/>
-              </a:rPr>
-              <a:t>the lexical ranker (twice: subtoken+body, whole-name)</a:t>
-            </a:r>
-            <a:endParaRPr lang="en-US" sz="1100" dirty="0"/>
-          </a:p>
-        </p:txBody>
-      </p:sp>
-      <p:sp>
-        <p:nvSpPr>
-          <p:cNvPr id="11" name="Shape 9"/>
-          <p:cNvSpPr/>
-          <p:nvPr/>
-        </p:nvSpPr>
-        <p:spPr>
-          <a:xfrm>
-            <a:off x="566928" y="3154680"/>
-            <a:ext cx="5577840" cy="566928"/>
+              <a:t>bash test/deckcheck.sh</a:t>
+            </a:r>
+            <a:endParaRPr lang="en-US" sz="1150" dirty="0"/>
+          </a:p>
+        </p:txBody>
+      </p:sp>
+      <p:sp>
+        <p:nvSpPr>
+          <p:cNvPr id="10" name="Shape 8"/>
+          <p:cNvSpPr/>
+          <p:nvPr/>
+        </p:nvSpPr>
+        <p:spPr>
+          <a:xfrm>
+            <a:off x="566928" y="2606040"/>
+            <a:ext cx="11055096" cy="457200"/>
           </a:xfrm>
           <a:prstGeom prst="roundRect">
             <a:avLst>
-              <a:gd name="adj" fmla="val 14516"/>
+              <a:gd name="adj" fmla="val 18000"/>
             </a:avLst>
           </a:prstGeom>
           <a:solidFill>
@@ -32772,111 +31434,96 @@
       </p:sp>
       <p:sp>
         <p:nvSpPr>
+          <p:cNvPr id="11" name="Text 9"/>
+          <p:cNvSpPr/>
+          <p:nvPr/>
+        </p:nvSpPr>
+        <p:spPr>
+          <a:xfrm>
+            <a:off x="731520" y="2633472"/>
+            <a:ext cx="4846320" cy="402336"/>
+          </a:xfrm>
+          <a:prstGeom prst="rect">
+            <a:avLst/>
+          </a:prstGeom>
+          <a:noFill/>
+          <a:ln/>
+        </p:spPr>
+        <p:txBody>
+          <a:bodyPr wrap="square" lIns="0" tIns="0" rIns="0" bIns="0" rtlCol="0" anchor="ctr"/>
+          <a:lstStyle/>
+          <a:p>
+            <a:pPr algn="l" indent="0" marL="0">
+              <a:buNone/>
+            </a:pPr>
+            <a:r>
+              <a:rPr lang="en-US" sz="1200" dirty="0">
+                <a:solidFill>
+                  <a:srgbClr val="E6EDF3"/>
+                </a:solidFill>
+                <a:latin typeface="Arial" pitchFamily="34" charset="0"/>
+                <a:ea typeface="Arial" pitchFamily="34" charset="-122"/>
+                <a:cs typeface="Arial" pitchFamily="34" charset="-120"/>
+              </a:rPr>
+              <a:t>74.7% fewer element bytes</a:t>
+            </a:r>
+            <a:endParaRPr lang="en-US" sz="1200" dirty="0"/>
+          </a:p>
+        </p:txBody>
+      </p:sp>
+      <p:sp>
+        <p:nvSpPr>
           <p:cNvPr id="12" name="Text 10"/>
           <p:cNvSpPr/>
           <p:nvPr/>
         </p:nvSpPr>
         <p:spPr>
           <a:xfrm>
-            <a:off x="713232" y="3191256"/>
-            <a:ext cx="685800" cy="493776"/>
-          </a:xfrm>
-          <a:prstGeom prst="rect">
-            <a:avLst/>
-          </a:prstGeom>
-          <a:noFill/>
-          <a:ln/>
-        </p:spPr>
-        <p:txBody>
-          <a:bodyPr wrap="square" lIns="0" tIns="0" rIns="0" bIns="0" rtlCol="0" anchor="ctr"/>
-          <a:lstStyle/>
-          <a:p>
-            <a:pPr indent="0" marL="0">
-              <a:buNone/>
-            </a:pPr>
-            <a:r>
-              <a:rPr lang="en-US" sz="1200" b="1" dirty="0">
-                <a:solidFill>
-                  <a:srgbClr val="F2B84B"/>
+            <a:off x="5687568" y="2633472"/>
+            <a:ext cx="5669280" cy="402336"/>
+          </a:xfrm>
+          <a:prstGeom prst="rect">
+            <a:avLst/>
+          </a:prstGeom>
+          <a:noFill/>
+          <a:ln/>
+        </p:spPr>
+        <p:txBody>
+          <a:bodyPr wrap="square" lIns="0" tIns="0" rIns="0" bIns="0" rtlCol="0" anchor="ctr"/>
+          <a:lstStyle/>
+          <a:p>
+            <a:pPr algn="l" indent="0" marL="0">
+              <a:buNone/>
+            </a:pPr>
+            <a:r>
+              <a:rPr lang="en-US" sz="1150" dirty="0">
+                <a:solidFill>
+                  <a:srgbClr val="56D6E8"/>
                 </a:solidFill>
                 <a:latin typeface="Courier New" pitchFamily="34" charset="0"/>
                 <a:ea typeface="Courier New" pitchFamily="34" charset="-122"/>
                 <a:cs typeface="Courier New" pitchFamily="34" charset="-120"/>
               </a:rPr>
-              <a:t>1998</a:t>
-            </a:r>
-            <a:endParaRPr lang="en-US" sz="1200" dirty="0"/>
-          </a:p>
-        </p:txBody>
-      </p:sp>
-      <p:sp>
-        <p:nvSpPr>
-          <p:cNvPr id="13" name="Text 11"/>
-          <p:cNvSpPr/>
-          <p:nvPr/>
-        </p:nvSpPr>
-        <p:spPr>
-          <a:xfrm>
-            <a:off x="1481328" y="3191256"/>
-            <a:ext cx="4572000" cy="493776"/>
-          </a:xfrm>
-          <a:prstGeom prst="rect">
-            <a:avLst/>
-          </a:prstGeom>
-          <a:noFill/>
-          <a:ln/>
-        </p:spPr>
-        <p:txBody>
-          <a:bodyPr wrap="square" lIns="0" tIns="0" rIns="0" bIns="0" rtlCol="0" anchor="ctr"/>
-          <a:lstStyle/>
-          <a:p>
-            <a:pPr indent="0" marL="0">
-              <a:buNone/>
-            </a:pPr>
-            <a:r>
-              <a:rPr lang="en-US" sz="1100" b="1" dirty="0">
-                <a:solidFill>
-                  <a:srgbClr val="E6EDF3"/>
-                </a:solidFill>
-                <a:latin typeface="Arial" pitchFamily="34" charset="0"/>
-                <a:ea typeface="Arial" pitchFamily="34" charset="-122"/>
-                <a:cs typeface="Arial" pitchFamily="34" charset="-120"/>
-              </a:rPr>
-              <a:t>Personalized PageRank — Page · Brin
-</a:t>
-            </a:r>
-            <a:pPr indent="0" marL="0">
-              <a:buNone/>
-            </a:pPr>
-            <a:r>
-              <a:rPr lang="en-US" sz="950" dirty="0">
-                <a:solidFill>
-                  <a:srgbClr val="8B95A5"/>
-                </a:solidFill>
-                <a:latin typeface="Arial" pitchFamily="34" charset="0"/>
-                <a:ea typeface="Arial" pitchFamily="34" charset="-122"/>
-                <a:cs typeface="Arial" pitchFamily="34" charset="-120"/>
-              </a:rPr>
-              <a:t>the headline importance signal</a:t>
-            </a:r>
-            <a:endParaRPr lang="en-US" sz="1100" dirty="0"/>
-          </a:p>
-        </p:txBody>
-      </p:sp>
-      <p:sp>
-        <p:nvSpPr>
-          <p:cNvPr id="14" name="Shape 12"/>
-          <p:cNvSpPr/>
-          <p:nvPr/>
-        </p:nvSpPr>
-        <p:spPr>
-          <a:xfrm>
-            <a:off x="566928" y="3794760"/>
-            <a:ext cx="5577840" cy="566928"/>
+              <a:t>bash test/showcasecapturecheck.sh</a:t>
+            </a:r>
+            <a:endParaRPr lang="en-US" sz="1150" dirty="0"/>
+          </a:p>
+        </p:txBody>
+      </p:sp>
+      <p:sp>
+        <p:nvSpPr>
+          <p:cNvPr id="13" name="Shape 11"/>
+          <p:cNvSpPr/>
+          <p:nvPr/>
+        </p:nvSpPr>
+        <p:spPr>
+          <a:xfrm>
+            <a:off x="566928" y="3131820"/>
+            <a:ext cx="11055096" cy="457200"/>
           </a:xfrm>
           <a:prstGeom prst="roundRect">
             <a:avLst>
-              <a:gd name="adj" fmla="val 14516"/>
+              <a:gd name="adj" fmla="val 18000"/>
             </a:avLst>
           </a:prstGeom>
           <a:solidFill>
@@ -32892,111 +31539,96 @@
       </p:sp>
       <p:sp>
         <p:nvSpPr>
+          <p:cNvPr id="14" name="Text 12"/>
+          <p:cNvSpPr/>
+          <p:nvPr/>
+        </p:nvSpPr>
+        <p:spPr>
+          <a:xfrm>
+            <a:off x="731520" y="3159252"/>
+            <a:ext cx="4846320" cy="402336"/>
+          </a:xfrm>
+          <a:prstGeom prst="rect">
+            <a:avLst/>
+          </a:prstGeom>
+          <a:noFill/>
+          <a:ln/>
+        </p:spPr>
+        <p:txBody>
+          <a:bodyPr wrap="square" lIns="0" tIns="0" rIns="0" bIns="0" rtlCol="0" anchor="ctr"/>
+          <a:lstStyle/>
+          <a:p>
+            <a:pPr algn="l" indent="0" marL="0">
+              <a:buNone/>
+            </a:pPr>
+            <a:r>
+              <a:rPr lang="en-US" sz="1200" dirty="0">
+                <a:solidFill>
+                  <a:srgbClr val="E6EDF3"/>
+                </a:solidFill>
+                <a:latin typeface="Arial" pitchFamily="34" charset="0"/>
+                <a:ea typeface="Arial" pitchFamily="34" charset="-122"/>
+                <a:cs typeface="Arial" pitchFamily="34" charset="-120"/>
+              </a:rPr>
+              <a:t>606 gate scripts</a:t>
+            </a:r>
+            <a:endParaRPr lang="en-US" sz="1200" dirty="0"/>
+          </a:p>
+        </p:txBody>
+      </p:sp>
+      <p:sp>
+        <p:nvSpPr>
           <p:cNvPr id="15" name="Text 13"/>
           <p:cNvSpPr/>
           <p:nvPr/>
         </p:nvSpPr>
         <p:spPr>
           <a:xfrm>
-            <a:off x="713232" y="3831336"/>
-            <a:ext cx="685800" cy="493776"/>
-          </a:xfrm>
-          <a:prstGeom prst="rect">
-            <a:avLst/>
-          </a:prstGeom>
-          <a:noFill/>
-          <a:ln/>
-        </p:spPr>
-        <p:txBody>
-          <a:bodyPr wrap="square" lIns="0" tIns="0" rIns="0" bIns="0" rtlCol="0" anchor="ctr"/>
-          <a:lstStyle/>
-          <a:p>
-            <a:pPr indent="0" marL="0">
-              <a:buNone/>
-            </a:pPr>
-            <a:r>
-              <a:rPr lang="en-US" sz="1200" b="1" dirty="0">
-                <a:solidFill>
-                  <a:srgbClr val="F2B84B"/>
+            <a:off x="5687568" y="3159252"/>
+            <a:ext cx="5669280" cy="402336"/>
+          </a:xfrm>
+          <a:prstGeom prst="rect">
+            <a:avLst/>
+          </a:prstGeom>
+          <a:noFill/>
+          <a:ln/>
+        </p:spPr>
+        <p:txBody>
+          <a:bodyPr wrap="square" lIns="0" tIns="0" rIns="0" bIns="0" rtlCol="0" anchor="ctr"/>
+          <a:lstStyle/>
+          <a:p>
+            <a:pPr algn="l" indent="0" marL="0">
+              <a:buNone/>
+            </a:pPr>
+            <a:r>
+              <a:rPr lang="en-US" sz="1150" dirty="0">
+                <a:solidFill>
+                  <a:srgbClr val="56D6E8"/>
                 </a:solidFill>
                 <a:latin typeface="Courier New" pitchFamily="34" charset="0"/>
                 <a:ea typeface="Courier New" pitchFamily="34" charset="-122"/>
                 <a:cs typeface="Courier New" pitchFamily="34" charset="-120"/>
               </a:rPr>
-              <a:t>2008</a:t>
-            </a:r>
-            <a:endParaRPr lang="en-US" sz="1200" dirty="0"/>
-          </a:p>
-        </p:txBody>
-      </p:sp>
-      <p:sp>
-        <p:nvSpPr>
-          <p:cNvPr id="16" name="Text 14"/>
-          <p:cNvSpPr/>
-          <p:nvPr/>
-        </p:nvSpPr>
-        <p:spPr>
-          <a:xfrm>
-            <a:off x="1481328" y="3831336"/>
-            <a:ext cx="4572000" cy="493776"/>
-          </a:xfrm>
-          <a:prstGeom prst="rect">
-            <a:avLst/>
-          </a:prstGeom>
-          <a:noFill/>
-          <a:ln/>
-        </p:spPr>
-        <p:txBody>
-          <a:bodyPr wrap="square" lIns="0" tIns="0" rIns="0" bIns="0" rtlCol="0" anchor="ctr"/>
-          <a:lstStyle/>
-          <a:p>
-            <a:pPr indent="0" marL="0">
-              <a:buNone/>
-            </a:pPr>
-            <a:r>
-              <a:rPr lang="en-US" sz="1100" b="1" dirty="0">
-                <a:solidFill>
-                  <a:srgbClr val="E6EDF3"/>
-                </a:solidFill>
-                <a:latin typeface="Arial" pitchFamily="34" charset="0"/>
-                <a:ea typeface="Arial" pitchFamily="34" charset="-122"/>
-                <a:cs typeface="Arial" pitchFamily="34" charset="-120"/>
-              </a:rPr>
-              <a:t>Louvain modularity — Blondel et al.
-</a:t>
-            </a:r>
-            <a:pPr indent="0" marL="0">
-              <a:buNone/>
-            </a:pPr>
-            <a:r>
-              <a:rPr lang="en-US" sz="950" dirty="0">
-                <a:solidFill>
-                  <a:srgbClr val="8B95A5"/>
-                </a:solidFill>
-                <a:latin typeface="Arial" pitchFamily="34" charset="0"/>
-                <a:ea typeface="Arial" pitchFamily="34" charset="-122"/>
-                <a:cs typeface="Arial" pitchFamily="34" charset="-120"/>
-              </a:rPr>
-              <a:t>the module / community map</a:t>
-            </a:r>
-            <a:endParaRPr lang="en-US" sz="1100" dirty="0"/>
-          </a:p>
-        </p:txBody>
-      </p:sp>
-      <p:sp>
-        <p:nvSpPr>
-          <p:cNvPr id="17" name="Shape 15"/>
-          <p:cNvSpPr/>
-          <p:nvPr/>
-        </p:nvSpPr>
-        <p:spPr>
-          <a:xfrm>
-            <a:off x="566928" y="4434840"/>
-            <a:ext cx="5577840" cy="566928"/>
+              <a:t>bash test/manifestcheck.sh</a:t>
+            </a:r>
+            <a:endParaRPr lang="en-US" sz="1150" dirty="0"/>
+          </a:p>
+        </p:txBody>
+      </p:sp>
+      <p:sp>
+        <p:nvSpPr>
+          <p:cNvPr id="16" name="Shape 14"/>
+          <p:cNvSpPr/>
+          <p:nvPr/>
+        </p:nvSpPr>
+        <p:spPr>
+          <a:xfrm>
+            <a:off x="566928" y="3657600"/>
+            <a:ext cx="11055096" cy="457200"/>
           </a:xfrm>
           <a:prstGeom prst="roundRect">
             <a:avLst>
-              <a:gd name="adj" fmla="val 14516"/>
+              <a:gd name="adj" fmla="val 18000"/>
             </a:avLst>
           </a:prstGeom>
           <a:solidFill>
@@ -33012,111 +31644,96 @@
       </p:sp>
       <p:sp>
         <p:nvSpPr>
+          <p:cNvPr id="17" name="Text 15"/>
+          <p:cNvSpPr/>
+          <p:nvPr/>
+        </p:nvSpPr>
+        <p:spPr>
+          <a:xfrm>
+            <a:off x="731520" y="3685032"/>
+            <a:ext cx="4846320" cy="402336"/>
+          </a:xfrm>
+          <a:prstGeom prst="rect">
+            <a:avLst/>
+          </a:prstGeom>
+          <a:noFill/>
+          <a:ln/>
+        </p:spPr>
+        <p:txBody>
+          <a:bodyPr wrap="square" lIns="0" tIns="0" rIns="0" bIns="0" rtlCol="0" anchor="ctr"/>
+          <a:lstStyle/>
+          <a:p>
+            <a:pPr algn="l" indent="0" marL="0">
+              <a:buNone/>
+            </a:pPr>
+            <a:r>
+              <a:rPr lang="en-US" sz="1200" dirty="0">
+                <a:solidFill>
+                  <a:srgbClr val="E6EDF3"/>
+                </a:solidFill>
+                <a:latin typeface="Arial" pitchFamily="34" charset="0"/>
+                <a:ea typeface="Arial" pitchFamily="34" charset="-122"/>
+                <a:cs typeface="Arial" pitchFamily="34" charset="-120"/>
+              </a:rPr>
+              <a:t>49 repos · 70 papers · 237 surveyed</a:t>
+            </a:r>
+            <a:endParaRPr lang="en-US" sz="1200" dirty="0"/>
+          </a:p>
+        </p:txBody>
+      </p:sp>
+      <p:sp>
+        <p:nvSpPr>
           <p:cNvPr id="18" name="Text 16"/>
           <p:cNvSpPr/>
           <p:nvPr/>
         </p:nvSpPr>
         <p:spPr>
           <a:xfrm>
-            <a:off x="713232" y="4471416"/>
-            <a:ext cx="685800" cy="493776"/>
-          </a:xfrm>
-          <a:prstGeom prst="rect">
-            <a:avLst/>
-          </a:prstGeom>
-          <a:noFill/>
-          <a:ln/>
-        </p:spPr>
-        <p:txBody>
-          <a:bodyPr wrap="square" lIns="0" tIns="0" rIns="0" bIns="0" rtlCol="0" anchor="ctr"/>
-          <a:lstStyle/>
-          <a:p>
-            <a:pPr indent="0" marL="0">
-              <a:buNone/>
-            </a:pPr>
-            <a:r>
-              <a:rPr lang="en-US" sz="1200" b="1" dirty="0">
-                <a:solidFill>
-                  <a:srgbClr val="F2B84B"/>
+            <a:off x="5687568" y="3685032"/>
+            <a:ext cx="5669280" cy="402336"/>
+          </a:xfrm>
+          <a:prstGeom prst="rect">
+            <a:avLst/>
+          </a:prstGeom>
+          <a:noFill/>
+          <a:ln/>
+        </p:spPr>
+        <p:txBody>
+          <a:bodyPr wrap="square" lIns="0" tIns="0" rIns="0" bIns="0" rtlCol="0" anchor="ctr"/>
+          <a:lstStyle/>
+          <a:p>
+            <a:pPr algn="l" indent="0" marL="0">
+              <a:buNone/>
+            </a:pPr>
+            <a:r>
+              <a:rPr lang="en-US" sz="1150" dirty="0">
+                <a:solidFill>
+                  <a:srgbClr val="56D6E8"/>
                 </a:solidFill>
                 <a:latin typeface="Courier New" pitchFamily="34" charset="0"/>
                 <a:ea typeface="Courier New" pitchFamily="34" charset="-122"/>
                 <a:cs typeface="Courier New" pitchFamily="34" charset="-120"/>
               </a:rPr>
-              <a:t>2009</a:t>
-            </a:r>
-            <a:endParaRPr lang="en-US" sz="1200" dirty="0"/>
-          </a:p>
-        </p:txBody>
-      </p:sp>
-      <p:sp>
-        <p:nvSpPr>
-          <p:cNvPr id="19" name="Text 17"/>
-          <p:cNvSpPr/>
-          <p:nvPr/>
-        </p:nvSpPr>
-        <p:spPr>
-          <a:xfrm>
-            <a:off x="1481328" y="4471416"/>
-            <a:ext cx="4572000" cy="493776"/>
-          </a:xfrm>
-          <a:prstGeom prst="rect">
-            <a:avLst/>
-          </a:prstGeom>
-          <a:noFill/>
-          <a:ln/>
-        </p:spPr>
-        <p:txBody>
-          <a:bodyPr wrap="square" lIns="0" tIns="0" rIns="0" bIns="0" rtlCol="0" anchor="ctr"/>
-          <a:lstStyle/>
-          <a:p>
-            <a:pPr indent="0" marL="0">
-              <a:buNone/>
-            </a:pPr>
-            <a:r>
-              <a:rPr lang="en-US" sz="1100" b="1" dirty="0">
-                <a:solidFill>
-                  <a:srgbClr val="E6EDF3"/>
-                </a:solidFill>
-                <a:latin typeface="Arial" pitchFamily="34" charset="0"/>
-                <a:ea typeface="Arial" pitchFamily="34" charset="-122"/>
-                <a:cs typeface="Arial" pitchFamily="34" charset="-120"/>
-              </a:rPr>
-              <a:t>Reciprocal Rank Fusion — Cormack et al.
-</a:t>
-            </a:r>
-            <a:pPr indent="0" marL="0">
-              <a:buNone/>
-            </a:pPr>
-            <a:r>
-              <a:rPr lang="en-US" sz="950" dirty="0">
-                <a:solidFill>
-                  <a:srgbClr val="8B95A5"/>
-                </a:solidFill>
-                <a:latin typeface="Arial" pitchFamily="34" charset="0"/>
-                <a:ea typeface="Arial" pitchFamily="34" charset="-122"/>
-                <a:cs typeface="Arial" pitchFamily="34" charset="-120"/>
-              </a:rPr>
-              <a:t>deterministic signal fusion (--rank-by=rrf)</a:t>
-            </a:r>
-            <a:endParaRPr lang="en-US" sz="1100" dirty="0"/>
-          </a:p>
-        </p:txBody>
-      </p:sp>
-      <p:sp>
-        <p:nvSpPr>
-          <p:cNvPr id="20" name="Shape 18"/>
-          <p:cNvSpPr/>
-          <p:nvPr/>
-        </p:nvSpPr>
-        <p:spPr>
-          <a:xfrm>
-            <a:off x="566928" y="5074920"/>
-            <a:ext cx="5577840" cy="566928"/>
+              <a:t>bash test/readmedriftcheck.sh</a:t>
+            </a:r>
+            <a:endParaRPr lang="en-US" sz="1150" dirty="0"/>
+          </a:p>
+        </p:txBody>
+      </p:sp>
+      <p:sp>
+        <p:nvSpPr>
+          <p:cNvPr id="19" name="Shape 17"/>
+          <p:cNvSpPr/>
+          <p:nvPr/>
+        </p:nvSpPr>
+        <p:spPr>
+          <a:xfrm>
+            <a:off x="566928" y="4183380"/>
+            <a:ext cx="11055096" cy="457200"/>
           </a:xfrm>
           <a:prstGeom prst="roundRect">
             <a:avLst>
-              <a:gd name="adj" fmla="val 14516"/>
+              <a:gd name="adj" fmla="val 18000"/>
             </a:avLst>
           </a:prstGeom>
           <a:solidFill>
@@ -33132,111 +31749,96 @@
       </p:sp>
       <p:sp>
         <p:nvSpPr>
+          <p:cNvPr id="20" name="Text 18"/>
+          <p:cNvSpPr/>
+          <p:nvPr/>
+        </p:nvSpPr>
+        <p:spPr>
+          <a:xfrm>
+            <a:off x="731520" y="4210812"/>
+            <a:ext cx="4846320" cy="402336"/>
+          </a:xfrm>
+          <a:prstGeom prst="rect">
+            <a:avLst/>
+          </a:prstGeom>
+          <a:noFill/>
+          <a:ln/>
+        </p:spPr>
+        <p:txBody>
+          <a:bodyPr wrap="square" lIns="0" tIns="0" rIns="0" bIns="0" rtlCol="0" anchor="ctr"/>
+          <a:lstStyle/>
+          <a:p>
+            <a:pPr algn="l" indent="0" marL="0">
+              <a:buNone/>
+            </a:pPr>
+            <a:r>
+              <a:rPr lang="en-US" sz="1200" dirty="0">
+                <a:solidFill>
+                  <a:srgbClr val="E6EDF3"/>
+                </a:solidFill>
+                <a:latin typeface="Arial" pitchFamily="34" charset="0"/>
+                <a:ea typeface="Arial" pitchFamily="34" charset="-122"/>
+                <a:cs typeface="Arial" pitchFamily="34" charset="-120"/>
+              </a:rPr>
+              <a:t>the ten moments, any row</a:t>
+            </a:r>
+            <a:endParaRPr lang="en-US" sz="1200" dirty="0"/>
+          </a:p>
+        </p:txBody>
+      </p:sp>
+      <p:sp>
+        <p:nvSpPr>
           <p:cNvPr id="21" name="Text 19"/>
           <p:cNvSpPr/>
           <p:nvPr/>
         </p:nvSpPr>
         <p:spPr>
           <a:xfrm>
-            <a:off x="713232" y="5111496"/>
-            <a:ext cx="685800" cy="493776"/>
-          </a:xfrm>
-          <a:prstGeom prst="rect">
-            <a:avLst/>
-          </a:prstGeom>
-          <a:noFill/>
-          <a:ln/>
-        </p:spPr>
-        <p:txBody>
-          <a:bodyPr wrap="square" lIns="0" tIns="0" rIns="0" bIns="0" rtlCol="0" anchor="ctr"/>
-          <a:lstStyle/>
-          <a:p>
-            <a:pPr indent="0" marL="0">
-              <a:buNone/>
-            </a:pPr>
-            <a:r>
-              <a:rPr lang="en-US" sz="1200" b="1" dirty="0">
-                <a:solidFill>
-                  <a:srgbClr val="F2B84B"/>
+            <a:off x="5687568" y="4210812"/>
+            <a:ext cx="5669280" cy="402336"/>
+          </a:xfrm>
+          <a:prstGeom prst="rect">
+            <a:avLst/>
+          </a:prstGeom>
+          <a:noFill/>
+          <a:ln/>
+        </p:spPr>
+        <p:txBody>
+          <a:bodyPr wrap="square" lIns="0" tIns="0" rIns="0" bIns="0" rtlCol="0" anchor="ctr"/>
+          <a:lstStyle/>
+          <a:p>
+            <a:pPr algn="l" indent="0" marL="0">
+              <a:buNone/>
+            </a:pPr>
+            <a:r>
+              <a:rPr lang="en-US" sz="1150" dirty="0">
+                <a:solidFill>
+                  <a:srgbClr val="56D6E8"/>
                 </a:solidFill>
                 <a:latin typeface="Courier New" pitchFamily="34" charset="0"/>
                 <a:ea typeface="Courier New" pitchFamily="34" charset="-122"/>
                 <a:cs typeface="Courier New" pitchFamily="34" charset="-120"/>
               </a:rPr>
-              <a:t>2011</a:t>
-            </a:r>
-            <a:endParaRPr lang="en-US" sz="1200" dirty="0"/>
-          </a:p>
-        </p:txBody>
-      </p:sp>
-      <p:sp>
-        <p:nvSpPr>
-          <p:cNvPr id="22" name="Text 20"/>
-          <p:cNvSpPr/>
-          <p:nvPr/>
-        </p:nvSpPr>
-        <p:spPr>
-          <a:xfrm>
-            <a:off x="1481328" y="5111496"/>
-            <a:ext cx="4572000" cy="493776"/>
-          </a:xfrm>
-          <a:prstGeom prst="rect">
-            <a:avLst/>
-          </a:prstGeom>
-          <a:noFill/>
-          <a:ln/>
-        </p:spPr>
-        <p:txBody>
-          <a:bodyPr wrap="square" lIns="0" tIns="0" rIns="0" bIns="0" rtlCol="0" anchor="ctr"/>
-          <a:lstStyle/>
-          <a:p>
-            <a:pPr indent="0" marL="0">
-              <a:buNone/>
-            </a:pPr>
-            <a:r>
-              <a:rPr lang="en-US" sz="1100" b="1" dirty="0">
-                <a:solidFill>
-                  <a:srgbClr val="E6EDF3"/>
-                </a:solidFill>
-                <a:latin typeface="Arial" pitchFamily="34" charset="0"/>
-                <a:ea typeface="Arial" pitchFamily="34" charset="-122"/>
-                <a:cs typeface="Arial" pitchFamily="34" charset="-120"/>
-              </a:rPr>
-              <a:t>Readability model — Posnett · Hindle · Devanbu
-</a:t>
-            </a:r>
-            <a:pPr indent="0" marL="0">
-              <a:buNone/>
-            </a:pPr>
-            <a:r>
-              <a:rPr lang="en-US" sz="950" dirty="0">
-                <a:solidFill>
-                  <a:srgbClr val="8B95A5"/>
-                </a:solidFill>
-                <a:latin typeface="Arial" pitchFamily="34" charset="0"/>
-                <a:ea typeface="Arial" pitchFamily="34" charset="-122"/>
-                <a:cs typeface="Arial" pitchFamily="34" charset="-120"/>
-              </a:rPr>
-              <a:t>the lexical family of the quality panel</a:t>
-            </a:r>
-            <a:endParaRPr lang="en-US" sz="1100" dirty="0"/>
-          </a:p>
-        </p:txBody>
-      </p:sp>
-      <p:sp>
-        <p:nvSpPr>
-          <p:cNvPr id="23" name="Shape 21"/>
-          <p:cNvSpPr/>
-          <p:nvPr/>
-        </p:nvSpPr>
-        <p:spPr>
-          <a:xfrm>
-            <a:off x="566928" y="5715000"/>
-            <a:ext cx="5577840" cy="566928"/>
+              <a:t>ripwire . --callers=SYM | wc -c</a:t>
+            </a:r>
+            <a:endParaRPr lang="en-US" sz="1150" dirty="0"/>
+          </a:p>
+        </p:txBody>
+      </p:sp>
+      <p:sp>
+        <p:nvSpPr>
+          <p:cNvPr id="22" name="Shape 20"/>
+          <p:cNvSpPr/>
+          <p:nvPr/>
+        </p:nvSpPr>
+        <p:spPr>
+          <a:xfrm>
+            <a:off x="566928" y="4709160"/>
+            <a:ext cx="11055096" cy="457200"/>
           </a:xfrm>
           <a:prstGeom prst="roundRect">
             <a:avLst>
-              <a:gd name="adj" fmla="val 14516"/>
+              <a:gd name="adj" fmla="val 18000"/>
             </a:avLst>
           </a:prstGeom>
           <a:solidFill>
@@ -33252,111 +31854,201 @@
       </p:sp>
       <p:sp>
         <p:nvSpPr>
+          <p:cNvPr id="23" name="Text 21"/>
+          <p:cNvSpPr/>
+          <p:nvPr/>
+        </p:nvSpPr>
+        <p:spPr>
+          <a:xfrm>
+            <a:off x="731520" y="4736592"/>
+            <a:ext cx="4846320" cy="402336"/>
+          </a:xfrm>
+          <a:prstGeom prst="rect">
+            <a:avLst/>
+          </a:prstGeom>
+          <a:noFill/>
+          <a:ln/>
+        </p:spPr>
+        <p:txBody>
+          <a:bodyPr wrap="square" lIns="0" tIns="0" rIns="0" bIns="0" rtlCol="0" anchor="ctr"/>
+          <a:lstStyle/>
+          <a:p>
+            <a:pPr algn="l" indent="0" marL="0">
+              <a:buNone/>
+            </a:pPr>
+            <a:r>
+              <a:rPr lang="en-US" sz="1200" dirty="0">
+                <a:solidFill>
+                  <a:srgbClr val="E6EDF3"/>
+                </a:solidFill>
+                <a:latin typeface="Arial" pitchFamily="34" charset="0"/>
+                <a:ea typeface="Arial" pitchFamily="34" charset="-122"/>
+                <a:cs typeface="Arial" pitchFamily="34" charset="-120"/>
+              </a:rPr>
+              <a:t>the head-to-head table</a:t>
+            </a:r>
+            <a:endParaRPr lang="en-US" sz="1200" dirty="0"/>
+          </a:p>
+        </p:txBody>
+      </p:sp>
+      <p:sp>
+        <p:nvSpPr>
           <p:cNvPr id="24" name="Text 22"/>
           <p:cNvSpPr/>
           <p:nvPr/>
         </p:nvSpPr>
         <p:spPr>
           <a:xfrm>
-            <a:off x="713232" y="5751576"/>
-            <a:ext cx="685800" cy="493776"/>
-          </a:xfrm>
-          <a:prstGeom prst="rect">
-            <a:avLst/>
-          </a:prstGeom>
-          <a:noFill/>
-          <a:ln/>
-        </p:spPr>
-        <p:txBody>
-          <a:bodyPr wrap="square" lIns="0" tIns="0" rIns="0" bIns="0" rtlCol="0" anchor="ctr"/>
-          <a:lstStyle/>
-          <a:p>
-            <a:pPr indent="0" marL="0">
-              <a:buNone/>
-            </a:pPr>
-            <a:r>
-              <a:rPr lang="en-US" sz="1200" b="1" dirty="0">
-                <a:solidFill>
-                  <a:srgbClr val="F2B84B"/>
+            <a:off x="5687568" y="4736592"/>
+            <a:ext cx="5669280" cy="402336"/>
+          </a:xfrm>
+          <a:prstGeom prst="rect">
+            <a:avLst/>
+          </a:prstGeom>
+          <a:noFill/>
+          <a:ln/>
+        </p:spPr>
+        <p:txBody>
+          <a:bodyPr wrap="square" lIns="0" tIns="0" rIns="0" bIns="0" rtlCol="0" anchor="ctr"/>
+          <a:lstStyle/>
+          <a:p>
+            <a:pPr algn="l" indent="0" marL="0">
+              <a:buNone/>
+            </a:pPr>
+            <a:r>
+              <a:rPr lang="en-US" sz="1150" dirty="0">
+                <a:solidFill>
+                  <a:srgbClr val="56D6E8"/>
                 </a:solidFill>
                 <a:latin typeface="Courier New" pitchFamily="34" charset="0"/>
                 <a:ea typeface="Courier New" pitchFamily="34" charset="-122"/>
                 <a:cs typeface="Courier New" pitchFamily="34" charset="-120"/>
               </a:rPr>
-              <a:t>2019</a:t>
-            </a:r>
-            <a:endParaRPr lang="en-US" sz="1200" dirty="0"/>
-          </a:p>
-        </p:txBody>
-      </p:sp>
-      <p:sp>
-        <p:nvSpPr>
-          <p:cNvPr id="25" name="Text 23"/>
-          <p:cNvSpPr/>
-          <p:nvPr/>
-        </p:nvSpPr>
-        <p:spPr>
-          <a:xfrm>
-            <a:off x="1481328" y="5751576"/>
-            <a:ext cx="4572000" cy="493776"/>
-          </a:xfrm>
-          <a:prstGeom prst="rect">
-            <a:avLst/>
-          </a:prstGeom>
-          <a:noFill/>
-          <a:ln/>
-        </p:spPr>
-        <p:txBody>
-          <a:bodyPr wrap="square" lIns="0" tIns="0" rIns="0" bIns="0" rtlCol="0" anchor="ctr"/>
-          <a:lstStyle/>
-          <a:p>
-            <a:pPr indent="0" marL="0">
-              <a:buNone/>
-            </a:pPr>
-            <a:r>
-              <a:rPr lang="en-US" sz="1100" b="1" dirty="0">
-                <a:solidFill>
-                  <a:srgbClr val="E6EDF3"/>
-                </a:solidFill>
-                <a:latin typeface="Arial" pitchFamily="34" charset="0"/>
-                <a:ea typeface="Arial" pitchFamily="34" charset="-122"/>
-                <a:cs typeface="Arial" pitchFamily="34" charset="-120"/>
-              </a:rPr>
-              <a:t>Delta Maintainability Model — di Biase et al.
-</a:t>
-            </a:r>
-            <a:pPr indent="0" marL="0">
-              <a:buNone/>
-            </a:pPr>
-            <a:r>
-              <a:rPr lang="en-US" sz="950" dirty="0">
-                <a:solidFill>
-                  <a:srgbClr val="8B95A5"/>
-                </a:solidFill>
-                <a:latin typeface="Arial" pitchFamily="34" charset="0"/>
-                <a:ea typeface="Arial" pitchFamily="34" charset="-122"/>
-                <a:cs typeface="Arial" pitchFamily="34" charset="-120"/>
-              </a:rPr>
-              <a:t>--dmm: one comparable number per change</a:t>
-            </a:r>
-            <a:endParaRPr lang="en-US" sz="1100" dirty="0"/>
-          </a:p>
-        </p:txBody>
-      </p:sp>
-      <p:sp>
-        <p:nvSpPr>
-          <p:cNvPr id="27" name="Shape 24"/>
-          <p:cNvSpPr/>
-          <p:nvPr/>
-        </p:nvSpPr>
-        <p:spPr>
-          <a:xfrm>
-            <a:off x="6400800" y="1874520"/>
-            <a:ext cx="5120640" cy="822960"/>
+              <a:t>bench/headtohead/r4-2026-08-06/</a:t>
+            </a:r>
+            <a:endParaRPr lang="en-US" sz="1150" dirty="0"/>
+          </a:p>
+        </p:txBody>
+      </p:sp>
+      <p:sp>
+        <p:nvSpPr>
+          <p:cNvPr id="25" name="Shape 23"/>
+          <p:cNvSpPr/>
+          <p:nvPr/>
+        </p:nvSpPr>
+        <p:spPr>
+          <a:xfrm>
+            <a:off x="566928" y="5234940"/>
+            <a:ext cx="11055096" cy="457200"/>
           </a:xfrm>
           <a:prstGeom prst="roundRect">
             <a:avLst>
-              <a:gd name="adj" fmla="val 10000"/>
+              <a:gd name="adj" fmla="val 18000"/>
+            </a:avLst>
+          </a:prstGeom>
+          <a:solidFill>
+            <a:srgbClr val="161D28"/>
+          </a:solidFill>
+          <a:ln w="9525">
+            <a:solidFill>
+              <a:srgbClr val="232D3D"/>
+            </a:solidFill>
+            <a:prstDash val="solid"/>
+          </a:ln>
+        </p:spPr>
+      </p:sp>
+      <p:sp>
+        <p:nvSpPr>
+          <p:cNvPr id="26" name="Text 24"/>
+          <p:cNvSpPr/>
+          <p:nvPr/>
+        </p:nvSpPr>
+        <p:spPr>
+          <a:xfrm>
+            <a:off x="731520" y="5262372"/>
+            <a:ext cx="4846320" cy="402336"/>
+          </a:xfrm>
+          <a:prstGeom prst="rect">
+            <a:avLst/>
+          </a:prstGeom>
+          <a:noFill/>
+          <a:ln/>
+        </p:spPr>
+        <p:txBody>
+          <a:bodyPr wrap="square" lIns="0" tIns="0" rIns="0" bIns="0" rtlCol="0" anchor="ctr"/>
+          <a:lstStyle/>
+          <a:p>
+            <a:pPr algn="l" indent="0" marL="0">
+              <a:buNone/>
+            </a:pPr>
+            <a:r>
+              <a:rPr lang="en-US" sz="1200" dirty="0">
+                <a:solidFill>
+                  <a:srgbClr val="E6EDF3"/>
+                </a:solidFill>
+                <a:latin typeface="Arial" pitchFamily="34" charset="0"/>
+                <a:ea typeface="Arial" pitchFamily="34" charset="-122"/>
+                <a:cs typeface="Arial" pitchFamily="34" charset="-120"/>
+              </a:rPr>
+              <a:t>the oracle round</a:t>
+            </a:r>
+            <a:endParaRPr lang="en-US" sz="1200" dirty="0"/>
+          </a:p>
+        </p:txBody>
+      </p:sp>
+      <p:sp>
+        <p:nvSpPr>
+          <p:cNvPr id="27" name="Text 25"/>
+          <p:cNvSpPr/>
+          <p:nvPr/>
+        </p:nvSpPr>
+        <p:spPr>
+          <a:xfrm>
+            <a:off x="5687568" y="5262372"/>
+            <a:ext cx="5669280" cy="402336"/>
+          </a:xfrm>
+          <a:prstGeom prst="rect">
+            <a:avLst/>
+          </a:prstGeom>
+          <a:noFill/>
+          <a:ln/>
+        </p:spPr>
+        <p:txBody>
+          <a:bodyPr wrap="square" lIns="0" tIns="0" rIns="0" bIns="0" rtlCol="0" anchor="ctr"/>
+          <a:lstStyle/>
+          <a:p>
+            <a:pPr algn="l" indent="0" marL="0">
+              <a:buNone/>
+            </a:pPr>
+            <a:r>
+              <a:rPr lang="en-US" sz="1150" dirty="0">
+                <a:solidFill>
+                  <a:srgbClr val="56D6E8"/>
+                </a:solidFill>
+                <a:latin typeface="Courier New" pitchFamily="34" charset="0"/>
+                <a:ea typeface="Courier New" pitchFamily="34" charset="-122"/>
+                <a:cs typeface="Courier New" pitchFamily="34" charset="-120"/>
+              </a:rPr>
+              <a:t>bench/headtohead/r9-2026-08-09/RESULTS.md</a:t>
+            </a:r>
+            <a:endParaRPr lang="en-US" sz="1150" dirty="0"/>
+          </a:p>
+        </p:txBody>
+      </p:sp>
+      <p:sp>
+        <p:nvSpPr>
+          <p:cNvPr id="28" name="Shape 26"/>
+          <p:cNvSpPr/>
+          <p:nvPr/>
+        </p:nvSpPr>
+        <p:spPr>
+          <a:xfrm>
+            <a:off x="566928" y="5779008"/>
+            <a:ext cx="11055096" cy="566928"/>
+          </a:xfrm>
+          <a:prstGeom prst="roundRect">
+            <a:avLst>
+              <a:gd name="adj" fmla="val 14516"/>
             </a:avLst>
           </a:prstGeom>
           <a:solidFill>
@@ -33372,14 +32064,14 @@
       </p:sp>
       <p:sp>
         <p:nvSpPr>
-          <p:cNvPr id="28" name="Text 25"/>
-          <p:cNvSpPr/>
-          <p:nvPr/>
-        </p:nvSpPr>
-        <p:spPr>
-          <a:xfrm>
-            <a:off x="6583680" y="1929384"/>
-            <a:ext cx="4754880" cy="274320"/>
+          <p:cNvPr id="29" name="Text 27"/>
+          <p:cNvSpPr/>
+          <p:nvPr/>
+        </p:nvSpPr>
+        <p:spPr>
+          <a:xfrm>
+            <a:off x="795528" y="5861304"/>
+            <a:ext cx="10607040" cy="420624"/>
           </a:xfrm>
           <a:prstGeom prst="rect">
             <a:avLst/>
@@ -33397,511 +32089,66 @@
             <a:r>
               <a:rPr lang="en-US" sz="1100" b="1" dirty="0">
                 <a:solidFill>
-                  <a:srgbClr val="56D6E8"/>
+                  <a:srgbClr val="E6EDF3"/>
+                </a:solidFill>
+                <a:latin typeface="Arial" pitchFamily="34" charset="0"/>
+                <a:ea typeface="Arial" pitchFamily="34" charset="-122"/>
+                <a:cs typeface="Arial" pitchFamily="34" charset="-120"/>
+              </a:rPr>
+              <a:t>The deck is generated, and the generator is gated. </a:t>
+            </a:r>
+            <a:pPr indent="0" marL="0">
+              <a:buNone/>
+            </a:pPr>
+            <a:r>
+              <a:rPr lang="en-US" sz="1100" dirty="0">
+                <a:solidFill>
+                  <a:srgbClr val="8B95A5"/>
+                </a:solidFill>
+                <a:latin typeface="Arial" pitchFamily="34" charset="0"/>
+                <a:ea typeface="Arial" pitchFamily="34" charset="-122"/>
+                <a:cs typeface="Arial" pitchFamily="34" charset="-120"/>
+              </a:rPr>
+              <a:t>present/deck5_ripwire_build.js is scanned for fabricated flags and its slide count is derived from its own addSlide() calls — a deck that drifts from the binary fails the suite.</a:t>
+            </a:r>
+            <a:endParaRPr lang="en-US" sz="1100" dirty="0"/>
+          </a:p>
+        </p:txBody>
+      </p:sp>
+      <p:sp>
+        <p:nvSpPr>
+          <p:cNvPr id="30" name="Text 28"/>
+          <p:cNvSpPr/>
+          <p:nvPr/>
+        </p:nvSpPr>
+        <p:spPr>
+          <a:xfrm>
+            <a:off x="566928" y="6419088"/>
+            <a:ext cx="11055096" cy="274320"/>
+          </a:xfrm>
+          <a:prstGeom prst="rect">
+            <a:avLst/>
+          </a:prstGeom>
+          <a:noFill/>
+          <a:ln/>
+        </p:spPr>
+        <p:txBody>
+          <a:bodyPr wrap="square" lIns="0" tIns="0" rIns="0" bIns="0" rtlCol="0" anchor="ctr"/>
+          <a:lstStyle/>
+          <a:p>
+            <a:pPr indent="0" marL="0">
+              <a:buNone/>
+            </a:pPr>
+            <a:r>
+              <a:rPr lang="en-US" sz="1050" dirty="0">
+                <a:solidFill>
+                  <a:srgbClr val="8B95A5"/>
                 </a:solidFill>
                 <a:latin typeface="Courier New" pitchFamily="34" charset="0"/>
                 <a:ea typeface="Courier New" pitchFamily="34" charset="-122"/>
                 <a:cs typeface="Courier New" pitchFamily="34" charset="-120"/>
               </a:rPr>
-              <a:t>TDAD · arXiv 2603.17973</a:t>
-            </a:r>
-            <a:endParaRPr lang="en-US" sz="1100" dirty="0"/>
-          </a:p>
-        </p:txBody>
-      </p:sp>
-      <p:sp>
-        <p:nvSpPr>
-          <p:cNvPr id="29" name="Text 26"/>
-          <p:cNvSpPr/>
-          <p:nvPr/>
-        </p:nvSpPr>
-        <p:spPr>
-          <a:xfrm>
-            <a:off x="6583680" y="2203704"/>
-            <a:ext cx="4754880" cy="457200"/>
-          </a:xfrm>
-          <a:prstGeom prst="rect">
-            <a:avLst/>
-          </a:prstGeom>
-          <a:noFill/>
-          <a:ln/>
-        </p:spPr>
-        <p:txBody>
-          <a:bodyPr wrap="square" lIns="0" tIns="0" rIns="0" bIns="0" rtlCol="0" anchor="ctr"/>
-          <a:lstStyle/>
-          <a:p>
-            <a:pPr indent="0" marL="0">
-              <a:buNone/>
-            </a:pPr>
-            <a:r>
-              <a:rPr lang="en-US" sz="950" dirty="0">
-                <a:solidFill>
-                  <a:srgbClr val="8B95A5"/>
-                </a:solidFill>
-                <a:latin typeface="Arial" pitchFamily="34" charset="0"/>
-                <a:ea typeface="Arial" pitchFamily="34" charset="-122"/>
-                <a:cs typeface="Arial" pitchFamily="34" charset="-120"/>
-              </a:rPr>
-              <a:t>a static test-map cut agent-caused regressions 6.08% → 1.82%; prose TDD instructions alone made agents WORSE → the shape of --test-gate</a:t>
-            </a:r>
-            <a:endParaRPr lang="en-US" sz="950" dirty="0"/>
-          </a:p>
-        </p:txBody>
-      </p:sp>
-      <p:sp>
-        <p:nvSpPr>
-          <p:cNvPr id="30" name="Shape 27"/>
-          <p:cNvSpPr/>
-          <p:nvPr/>
-        </p:nvSpPr>
-        <p:spPr>
-          <a:xfrm>
-            <a:off x="6400800" y="2761488"/>
-            <a:ext cx="5120640" cy="822960"/>
-          </a:xfrm>
-          <a:prstGeom prst="roundRect">
-            <a:avLst>
-              <a:gd name="adj" fmla="val 10000"/>
-            </a:avLst>
-          </a:prstGeom>
-          <a:solidFill>
-            <a:srgbClr val="1B2432"/>
-          </a:solidFill>
-          <a:ln w="9525">
-            <a:solidFill>
-              <a:srgbClr val="232D3D"/>
-            </a:solidFill>
-            <a:prstDash val="solid"/>
-          </a:ln>
-        </p:spPr>
-      </p:sp>
-      <p:sp>
-        <p:nvSpPr>
-          <p:cNvPr id="31" name="Text 28"/>
-          <p:cNvSpPr/>
-          <p:nvPr/>
-        </p:nvSpPr>
-        <p:spPr>
-          <a:xfrm>
-            <a:off x="6583680" y="2816352"/>
-            <a:ext cx="4754880" cy="274320"/>
-          </a:xfrm>
-          <a:prstGeom prst="rect">
-            <a:avLst/>
-          </a:prstGeom>
-          <a:noFill/>
-          <a:ln/>
-        </p:spPr>
-        <p:txBody>
-          <a:bodyPr wrap="square" lIns="0" tIns="0" rIns="0" bIns="0" rtlCol="0" anchor="ctr"/>
-          <a:lstStyle/>
-          <a:p>
-            <a:pPr indent="0" marL="0">
-              <a:buNone/>
-            </a:pPr>
-            <a:r>
-              <a:rPr lang="en-US" sz="1100" b="1" dirty="0">
-                <a:solidFill>
-                  <a:srgbClr val="56D6E8"/>
-                </a:solidFill>
-                <a:latin typeface="Courier New" pitchFamily="34" charset="0"/>
-                <a:ea typeface="Courier New" pitchFamily="34" charset="-122"/>
-                <a:cs typeface="Courier New" pitchFamily="34" charset="-120"/>
-              </a:rPr>
-              <a:t>What-to-Retrieve · arXiv 2503.20589</a:t>
-            </a:r>
-            <a:endParaRPr lang="en-US" sz="1100" dirty="0"/>
-          </a:p>
-        </p:txBody>
-      </p:sp>
-      <p:sp>
-        <p:nvSpPr>
-          <p:cNvPr id="32" name="Text 29"/>
-          <p:cNvSpPr/>
-          <p:nvPr/>
-        </p:nvSpPr>
-        <p:spPr>
-          <a:xfrm>
-            <a:off x="6583680" y="3090672"/>
-            <a:ext cx="4754880" cy="457200"/>
-          </a:xfrm>
-          <a:prstGeom prst="rect">
-            <a:avLst/>
-          </a:prstGeom>
-          <a:noFill/>
-          <a:ln/>
-        </p:spPr>
-        <p:txBody>
-          <a:bodyPr wrap="square" lIns="0" tIns="0" rIns="0" bIns="0" rtlCol="0" anchor="ctr"/>
-          <a:lstStyle/>
-          <a:p>
-            <a:pPr indent="0" marL="0">
-              <a:buNone/>
-            </a:pPr>
-            <a:r>
-              <a:rPr lang="en-US" sz="950" dirty="0">
-                <a:solidFill>
-                  <a:srgbClr val="8B95A5"/>
-                </a:solidFill>
-                <a:latin typeface="Arial" pitchFamily="34" charset="0"/>
-                <a:ea typeface="Arial" pitchFamily="34" charset="-122"/>
-                <a:cs typeface="Arial" pitchFamily="34" charset="-120"/>
-              </a:rPr>
-              <a:t>retrieval selection beats retrieval volume for coding agents → the selection-over-dumping thesis</a:t>
-            </a:r>
-            <a:endParaRPr lang="en-US" sz="950" dirty="0"/>
-          </a:p>
-        </p:txBody>
-      </p:sp>
-      <p:sp>
-        <p:nvSpPr>
-          <p:cNvPr id="33" name="Shape 30"/>
-          <p:cNvSpPr/>
-          <p:nvPr/>
-        </p:nvSpPr>
-        <p:spPr>
-          <a:xfrm>
-            <a:off x="6400800" y="3648456"/>
-            <a:ext cx="5120640" cy="822960"/>
-          </a:xfrm>
-          <a:prstGeom prst="roundRect">
-            <a:avLst>
-              <a:gd name="adj" fmla="val 10000"/>
-            </a:avLst>
-          </a:prstGeom>
-          <a:solidFill>
-            <a:srgbClr val="1B2432"/>
-          </a:solidFill>
-          <a:ln w="9525">
-            <a:solidFill>
-              <a:srgbClr val="232D3D"/>
-            </a:solidFill>
-            <a:prstDash val="solid"/>
-          </a:ln>
-        </p:spPr>
-      </p:sp>
-      <p:sp>
-        <p:nvSpPr>
-          <p:cNvPr id="34" name="Text 31"/>
-          <p:cNvSpPr/>
-          <p:nvPr/>
-        </p:nvSpPr>
-        <p:spPr>
-          <a:xfrm>
-            <a:off x="6583680" y="3703320"/>
-            <a:ext cx="4754880" cy="274320"/>
-          </a:xfrm>
-          <a:prstGeom prst="rect">
-            <a:avLst/>
-          </a:prstGeom>
-          <a:noFill/>
-          <a:ln/>
-        </p:spPr>
-        <p:txBody>
-          <a:bodyPr wrap="square" lIns="0" tIns="0" rIns="0" bIns="0" rtlCol="0" anchor="ctr"/>
-          <a:lstStyle/>
-          <a:p>
-            <a:pPr indent="0" marL="0">
-              <a:buNone/>
-            </a:pPr>
-            <a:r>
-              <a:rPr lang="en-US" sz="1100" b="1" dirty="0">
-                <a:solidFill>
-                  <a:srgbClr val="56D6E8"/>
-                </a:solidFill>
-                <a:latin typeface="Courier New" pitchFamily="34" charset="0"/>
-                <a:ea typeface="Courier New" pitchFamily="34" charset="-122"/>
-                <a:cs typeface="Courier New" pitchFamily="34" charset="-120"/>
-              </a:rPr>
-              <a:t>LocAgent / Loc-Bench (2025)</a:t>
-            </a:r>
-            <a:endParaRPr lang="en-US" sz="1100" dirty="0"/>
-          </a:p>
-        </p:txBody>
-      </p:sp>
-      <p:sp>
-        <p:nvSpPr>
-          <p:cNvPr id="35" name="Text 32"/>
-          <p:cNvSpPr/>
-          <p:nvPr/>
-        </p:nvSpPr>
-        <p:spPr>
-          <a:xfrm>
-            <a:off x="6583680" y="3977640"/>
-            <a:ext cx="4754880" cy="457200"/>
-          </a:xfrm>
-          <a:prstGeom prst="rect">
-            <a:avLst/>
-          </a:prstGeom>
-          <a:noFill/>
-          <a:ln/>
-        </p:spPr>
-        <p:txBody>
-          <a:bodyPr wrap="square" lIns="0" tIns="0" rIns="0" bIns="0" rtlCol="0" anchor="ctr"/>
-          <a:lstStyle/>
-          <a:p>
-            <a:pPr indent="0" marL="0">
-              <a:buNone/>
-            </a:pPr>
-            <a:r>
-              <a:rPr lang="en-US" sz="950" dirty="0">
-                <a:solidFill>
-                  <a:srgbClr val="8B95A5"/>
-                </a:solidFill>
-                <a:latin typeface="Arial" pitchFamily="34" charset="0"/>
-                <a:ea typeface="Arial" pitchFamily="34" charset="-122"/>
-                <a:cs typeface="Arial" pitchFamily="34" charset="-120"/>
-              </a:rPr>
-              <a:t>the localization metric (strict Acc@k) and the frozen 560-instance dataset every accuracy number here is scored on</a:t>
-            </a:r>
-            <a:endParaRPr lang="en-US" sz="950" dirty="0"/>
-          </a:p>
-        </p:txBody>
-      </p:sp>
-      <p:sp>
-        <p:nvSpPr>
-          <p:cNvPr id="36" name="Shape 33"/>
-          <p:cNvSpPr/>
-          <p:nvPr/>
-        </p:nvSpPr>
-        <p:spPr>
-          <a:xfrm>
-            <a:off x="6400800" y="4535424"/>
-            <a:ext cx="5120640" cy="822960"/>
-          </a:xfrm>
-          <a:prstGeom prst="roundRect">
-            <a:avLst>
-              <a:gd name="adj" fmla="val 10000"/>
-            </a:avLst>
-          </a:prstGeom>
-          <a:solidFill>
-            <a:srgbClr val="1B2432"/>
-          </a:solidFill>
-          <a:ln w="9525">
-            <a:solidFill>
-              <a:srgbClr val="232D3D"/>
-            </a:solidFill>
-            <a:prstDash val="solid"/>
-          </a:ln>
-        </p:spPr>
-      </p:sp>
-      <p:sp>
-        <p:nvSpPr>
-          <p:cNvPr id="37" name="Text 34"/>
-          <p:cNvSpPr/>
-          <p:nvPr/>
-        </p:nvSpPr>
-        <p:spPr>
-          <a:xfrm>
-            <a:off x="6583680" y="4590288"/>
-            <a:ext cx="4754880" cy="274320"/>
-          </a:xfrm>
-          <a:prstGeom prst="rect">
-            <a:avLst/>
-          </a:prstGeom>
-          <a:noFill/>
-          <a:ln/>
-        </p:spPr>
-        <p:txBody>
-          <a:bodyPr wrap="square" lIns="0" tIns="0" rIns="0" bIns="0" rtlCol="0" anchor="ctr"/>
-          <a:lstStyle/>
-          <a:p>
-            <a:pPr indent="0" marL="0">
-              <a:buNone/>
-            </a:pPr>
-            <a:r>
-              <a:rPr lang="en-US" sz="1100" b="1" dirty="0">
-                <a:solidFill>
-                  <a:srgbClr val="56D6E8"/>
-                </a:solidFill>
-                <a:latin typeface="Courier New" pitchFamily="34" charset="0"/>
-                <a:ea typeface="Courier New" pitchFamily="34" charset="-122"/>
-                <a:cs typeface="Courier New" pitchFamily="34" charset="-120"/>
-              </a:rPr>
-              <a:t>scip-clang · Serena / clangd</a:t>
-            </a:r>
-            <a:endParaRPr lang="en-US" sz="1100" dirty="0"/>
-          </a:p>
-        </p:txBody>
-      </p:sp>
-      <p:sp>
-        <p:nvSpPr>
-          <p:cNvPr id="38" name="Text 35"/>
-          <p:cNvSpPr/>
-          <p:nvPr/>
-        </p:nvSpPr>
-        <p:spPr>
-          <a:xfrm>
-            <a:off x="6583680" y="4864608"/>
-            <a:ext cx="4754880" cy="457200"/>
-          </a:xfrm>
-          <a:prstGeom prst="rect">
-            <a:avLst/>
-          </a:prstGeom>
-          <a:noFill/>
-          <a:ln/>
-        </p:spPr>
-        <p:txBody>
-          <a:bodyPr wrap="square" lIns="0" tIns="0" rIns="0" bIns="0" rtlCol="0" anchor="ctr"/>
-          <a:lstStyle/>
-          <a:p>
-            <a:pPr indent="0" marL="0">
-              <a:buNone/>
-            </a:pPr>
-            <a:r>
-              <a:rPr lang="en-US" sz="950" dirty="0">
-                <a:solidFill>
-                  <a:srgbClr val="8B95A5"/>
-                </a:solidFill>
-                <a:latin typeface="Arial" pitchFamily="34" charset="0"/>
-                <a:ea typeface="Arial" pitchFamily="34" charset="-122"/>
-                <a:cs typeface="Arial" pitchFamily="34" charset="-120"/>
-              </a:rPr>
-              <a:t>the compiler-grade oracle round 9 graded both tools against — an outside referee, not a rival</a:t>
-            </a:r>
-            <a:endParaRPr lang="en-US" sz="950" dirty="0"/>
-          </a:p>
-        </p:txBody>
-      </p:sp>
-      <p:sp>
-        <p:nvSpPr>
-          <p:cNvPr id="39" name="Shape 36"/>
-          <p:cNvSpPr/>
-          <p:nvPr/>
-        </p:nvSpPr>
-        <p:spPr>
-          <a:xfrm>
-            <a:off x="6400800" y="5422392"/>
-            <a:ext cx="5120640" cy="822960"/>
-          </a:xfrm>
-          <a:prstGeom prst="roundRect">
-            <a:avLst>
-              <a:gd name="adj" fmla="val 10000"/>
-            </a:avLst>
-          </a:prstGeom>
-          <a:solidFill>
-            <a:srgbClr val="1B2432"/>
-          </a:solidFill>
-          <a:ln w="9525">
-            <a:solidFill>
-              <a:srgbClr val="232D3D"/>
-            </a:solidFill>
-            <a:prstDash val="solid"/>
-          </a:ln>
-        </p:spPr>
-      </p:sp>
-      <p:sp>
-        <p:nvSpPr>
-          <p:cNvPr id="40" name="Text 37"/>
-          <p:cNvSpPr/>
-          <p:nvPr/>
-        </p:nvSpPr>
-        <p:spPr>
-          <a:xfrm>
-            <a:off x="6583680" y="5477256"/>
-            <a:ext cx="4754880" cy="274320"/>
-          </a:xfrm>
-          <a:prstGeom prst="rect">
-            <a:avLst/>
-          </a:prstGeom>
-          <a:noFill/>
-          <a:ln/>
-        </p:spPr>
-        <p:txBody>
-          <a:bodyPr wrap="square" lIns="0" tIns="0" rIns="0" bIns="0" rtlCol="0" anchor="ctr"/>
-          <a:lstStyle/>
-          <a:p>
-            <a:pPr indent="0" marL="0">
-              <a:buNone/>
-            </a:pPr>
-            <a:r>
-              <a:rPr lang="en-US" sz="1100" b="1" dirty="0">
-                <a:solidFill>
-                  <a:srgbClr val="56D6E8"/>
-                </a:solidFill>
-                <a:latin typeface="Courier New" pitchFamily="34" charset="0"/>
-                <a:ea typeface="Courier New" pitchFamily="34" charset="-122"/>
-                <a:cs typeface="Courier New" pitchFamily="34" charset="-120"/>
-              </a:rPr>
-              <a:t>tree-sitter</a:t>
-            </a:r>
-            <a:endParaRPr lang="en-US" sz="1100" dirty="0"/>
-          </a:p>
-        </p:txBody>
-      </p:sp>
-      <p:sp>
-        <p:nvSpPr>
-          <p:cNvPr id="41" name="Text 38"/>
-          <p:cNvSpPr/>
-          <p:nvPr/>
-        </p:nvSpPr>
-        <p:spPr>
-          <a:xfrm>
-            <a:off x="6583680" y="5751576"/>
-            <a:ext cx="4754880" cy="457200"/>
-          </a:xfrm>
-          <a:prstGeom prst="rect">
-            <a:avLst/>
-          </a:prstGeom>
-          <a:noFill/>
-          <a:ln/>
-        </p:spPr>
-        <p:txBody>
-          <a:bodyPr wrap="square" lIns="0" tIns="0" rIns="0" bIns="0" rtlCol="0" anchor="ctr"/>
-          <a:lstStyle/>
-          <a:p>
-            <a:pPr indent="0" marL="0">
-              <a:buNone/>
-            </a:pPr>
-            <a:r>
-              <a:rPr lang="en-US" sz="950" dirty="0">
-                <a:solidFill>
-                  <a:srgbClr val="8B95A5"/>
-                </a:solidFill>
-                <a:latin typeface="Arial" pitchFamily="34" charset="0"/>
-                <a:ea typeface="Arial" pitchFamily="34" charset="-122"/>
-                <a:cs typeface="Arial" pitchFamily="34" charset="-120"/>
-              </a:rPr>
-              <a:t>the incremental GLR parsing substrate — 24 grammars vendored, one parser per thread</a:t>
-            </a:r>
-            <a:endParaRPr lang="en-US" sz="950" dirty="0"/>
-          </a:p>
-        </p:txBody>
-      </p:sp>
-      <p:sp>
-        <p:nvSpPr>
-          <p:cNvPr id="42" name="Text 39"/>
-          <p:cNvSpPr/>
-          <p:nvPr/>
-        </p:nvSpPr>
-        <p:spPr>
-          <a:xfrm>
-            <a:off x="566928" y="6419088"/>
-            <a:ext cx="11055096" cy="274320"/>
-          </a:xfrm>
-          <a:prstGeom prst="rect">
-            <a:avLst/>
-          </a:prstGeom>
-          <a:noFill/>
-          <a:ln/>
-        </p:spPr>
-        <p:txBody>
-          <a:bodyPr wrap="square" lIns="0" tIns="0" rIns="0" bIns="0" rtlCol="0" anchor="ctr"/>
-          <a:lstStyle/>
-          <a:p>
-            <a:pPr indent="0" marL="0">
-              <a:buNone/>
-            </a:pPr>
-            <a:r>
-              <a:rPr lang="en-US" sz="1050" dirty="0">
-                <a:solidFill>
-                  <a:srgbClr val="8B95A5"/>
-                </a:solidFill>
-                <a:latin typeface="Courier New" pitchFamily="34" charset="0"/>
-                <a:ea typeface="Courier New" pitchFamily="34" charset="-122"/>
-                <a:cs typeface="Courier New" pitchFamily="34" charset="-120"/>
-              </a:rPr>
-              <a:t>counts gated in-repo: readmedriftcheck arm E derives them from LINEAGE.md's own tables — the lineage is the design rationale</a:t>
+              <a:t>docs/EVALS.md is the source of truth; §7 is the counterexamples, §8 the claims this project refuses to make</a:t>
             </a:r>
             <a:endParaRPr lang="en-US" sz="1050" dirty="0"/>
           </a:p>
@@ -33918,1075 +32165,6 @@
 <file path=ppt/slides/slide33.xml><?xml version="1.0" encoding="utf-8"?>
 <p:sld xmlns:a="http://schemas.openxmlformats.org/drawingml/2006/main" xmlns:r="http://schemas.openxmlformats.org/officeDocument/2006/relationships" xmlns:p="http://schemas.openxmlformats.org/presentationml/2006/main">
   <p:cSld name="Slide 33">
-    <p:bg>
-      <p:bgPr>
-        <a:solidFill>
-          <a:srgbClr val="0D1117"/>
-        </a:solidFill>
-      </p:bgPr>
-    </p:bg>
-    <p:spTree>
-      <p:nvGrpSpPr>
-        <p:cNvPr id="1" name=""/>
-        <p:cNvGrpSpPr/>
-        <p:nvPr/>
-      </p:nvGrpSpPr>
-      <p:grpSpPr>
-        <a:xfrm>
-          <a:off x="0" y="0"/>
-          <a:ext cx="0" cy="0"/>
-          <a:chOff x="0" y="0"/>
-          <a:chExt cx="0" cy="0"/>
-        </a:xfrm>
-      </p:grpSpPr>
-      <p:sp>
-        <p:nvSpPr>
-          <p:cNvPr id="2" name="Text 0"/>
-          <p:cNvSpPr/>
-          <p:nvPr/>
-        </p:nvSpPr>
-        <p:spPr>
-          <a:xfrm>
-            <a:off x="566928" y="384048"/>
-            <a:ext cx="8229600" cy="292608"/>
-          </a:xfrm>
-          <a:prstGeom prst="rect">
-            <a:avLst/>
-          </a:prstGeom>
-          <a:noFill/>
-          <a:ln/>
-        </p:spPr>
-        <p:txBody>
-          <a:bodyPr wrap="square" lIns="0" tIns="0" rIns="0" bIns="0" rtlCol="0" anchor="ctr"/>
-          <a:lstStyle/>
-          <a:p>
-            <a:pPr indent="0" marL="0">
-              <a:buNone/>
-            </a:pPr>
-            <a:r>
-              <a:rPr lang="en-US" sz="1300" dirty="0">
-                <a:solidFill>
-                  <a:srgbClr val="F2B84B"/>
-                </a:solidFill>
-                <a:latin typeface="Courier New" pitchFamily="34" charset="0"/>
-                <a:ea typeface="Courier New" pitchFamily="34" charset="-122"/>
-                <a:cs typeface="Courier New" pitchFamily="34" charset="-120"/>
-              </a:rPr>
-              <a:t>// do not take any of it on trust</a:t>
-            </a:r>
-            <a:endParaRPr lang="en-US" sz="1300" dirty="0"/>
-          </a:p>
-        </p:txBody>
-      </p:sp>
-      <p:sp>
-        <p:nvSpPr>
-          <p:cNvPr id="3" name="Text 1"/>
-          <p:cNvSpPr/>
-          <p:nvPr/>
-        </p:nvSpPr>
-        <p:spPr>
-          <a:xfrm>
-            <a:off x="566928" y="658368"/>
-            <a:ext cx="11055096" cy="822960"/>
-          </a:xfrm>
-          <a:prstGeom prst="rect">
-            <a:avLst/>
-          </a:prstGeom>
-          <a:noFill/>
-          <a:ln/>
-        </p:spPr>
-        <p:txBody>
-          <a:bodyPr wrap="square" lIns="0" tIns="0" rIns="0" bIns="0" rtlCol="0" anchor="ctr"/>
-          <a:lstStyle/>
-          <a:p>
-            <a:pPr indent="0" marL="0">
-              <a:buNone/>
-            </a:pPr>
-            <a:r>
-              <a:rPr lang="en-US" sz="3400" b="1" dirty="0">
-                <a:solidFill>
-                  <a:srgbClr val="E6EDF3"/>
-                </a:solidFill>
-                <a:latin typeface="Arial" pitchFamily="34" charset="0"/>
-                <a:ea typeface="Arial" pitchFamily="34" charset="-122"/>
-                <a:cs typeface="Arial" pitchFamily="34" charset="-120"/>
-              </a:rPr>
-              <a:t>Every claim, and the command that re-derives it</a:t>
-            </a:r>
-            <a:endParaRPr lang="en-US" sz="3400" dirty="0"/>
-          </a:p>
-        </p:txBody>
-      </p:sp>
-      <p:sp>
-        <p:nvSpPr>
-          <p:cNvPr id="4" name="Shape 2"/>
-          <p:cNvSpPr/>
-          <p:nvPr/>
-        </p:nvSpPr>
-        <p:spPr>
-          <a:xfrm>
-            <a:off x="566928" y="1554480"/>
-            <a:ext cx="11055096" cy="457200"/>
-          </a:xfrm>
-          <a:prstGeom prst="roundRect">
-            <a:avLst>
-              <a:gd name="adj" fmla="val 18000"/>
-            </a:avLst>
-          </a:prstGeom>
-          <a:solidFill>
-            <a:srgbClr val="161D28"/>
-          </a:solidFill>
-          <a:ln w="9525">
-            <a:solidFill>
-              <a:srgbClr val="232D3D"/>
-            </a:solidFill>
-            <a:prstDash val="solid"/>
-          </a:ln>
-        </p:spPr>
-      </p:sp>
-      <p:sp>
-        <p:nvSpPr>
-          <p:cNvPr id="5" name="Text 3"/>
-          <p:cNvSpPr/>
-          <p:nvPr/>
-        </p:nvSpPr>
-        <p:spPr>
-          <a:xfrm>
-            <a:off x="731520" y="1581912"/>
-            <a:ext cx="4846320" cy="402336"/>
-          </a:xfrm>
-          <a:prstGeom prst="rect">
-            <a:avLst/>
-          </a:prstGeom>
-          <a:noFill/>
-          <a:ln/>
-        </p:spPr>
-        <p:txBody>
-          <a:bodyPr wrap="square" lIns="0" tIns="0" rIns="0" bIns="0" rtlCol="0" anchor="ctr"/>
-          <a:lstStyle/>
-          <a:p>
-            <a:pPr algn="l" indent="0" marL="0">
-              <a:buNone/>
-            </a:pPr>
-            <a:r>
-              <a:rPr lang="en-US" sz="1200" dirty="0">
-                <a:solidFill>
-                  <a:srgbClr val="E6EDF3"/>
-                </a:solidFill>
-                <a:latin typeface="Arial" pitchFamily="34" charset="0"/>
-                <a:ea typeface="Arial" pitchFamily="34" charset="-122"/>
-                <a:cs typeface="Arial" pitchFamily="34" charset="-120"/>
-              </a:rPr>
-              <a:t>179 long flags · 34 slides</a:t>
-            </a:r>
-            <a:endParaRPr lang="en-US" sz="1200" dirty="0"/>
-          </a:p>
-        </p:txBody>
-      </p:sp>
-      <p:sp>
-        <p:nvSpPr>
-          <p:cNvPr id="6" name="Text 4"/>
-          <p:cNvSpPr/>
-          <p:nvPr/>
-        </p:nvSpPr>
-        <p:spPr>
-          <a:xfrm>
-            <a:off x="5687568" y="1581912"/>
-            <a:ext cx="5669280" cy="402336"/>
-          </a:xfrm>
-          <a:prstGeom prst="rect">
-            <a:avLst/>
-          </a:prstGeom>
-          <a:noFill/>
-          <a:ln/>
-        </p:spPr>
-        <p:txBody>
-          <a:bodyPr wrap="square" lIns="0" tIns="0" rIns="0" bIns="0" rtlCol="0" anchor="ctr"/>
-          <a:lstStyle/>
-          <a:p>
-            <a:pPr algn="l" indent="0" marL="0">
-              <a:buNone/>
-            </a:pPr>
-            <a:r>
-              <a:rPr lang="en-US" sz="1150" dirty="0">
-                <a:solidFill>
-                  <a:srgbClr val="56D6E8"/>
-                </a:solidFill>
-                <a:latin typeface="Courier New" pitchFamily="34" charset="0"/>
-                <a:ea typeface="Courier New" pitchFamily="34" charset="-122"/>
-                <a:cs typeface="Courier New" pitchFamily="34" charset="-120"/>
-              </a:rPr>
-              <a:t>bash test/deckclaimcheck.sh</a:t>
-            </a:r>
-            <a:endParaRPr lang="en-US" sz="1150" dirty="0"/>
-          </a:p>
-        </p:txBody>
-      </p:sp>
-      <p:sp>
-        <p:nvSpPr>
-          <p:cNvPr id="7" name="Shape 5"/>
-          <p:cNvSpPr/>
-          <p:nvPr/>
-        </p:nvSpPr>
-        <p:spPr>
-          <a:xfrm>
-            <a:off x="566928" y="2080260"/>
-            <a:ext cx="11055096" cy="457200"/>
-          </a:xfrm>
-          <a:prstGeom prst="roundRect">
-            <a:avLst>
-              <a:gd name="adj" fmla="val 18000"/>
-            </a:avLst>
-          </a:prstGeom>
-          <a:solidFill>
-            <a:srgbClr val="161D28"/>
-          </a:solidFill>
-          <a:ln w="9525">
-            <a:solidFill>
-              <a:srgbClr val="232D3D"/>
-            </a:solidFill>
-            <a:prstDash val="solid"/>
-          </a:ln>
-        </p:spPr>
-      </p:sp>
-      <p:sp>
-        <p:nvSpPr>
-          <p:cNvPr id="8" name="Text 6"/>
-          <p:cNvSpPr/>
-          <p:nvPr/>
-        </p:nvSpPr>
-        <p:spPr>
-          <a:xfrm>
-            <a:off x="731520" y="2107692"/>
-            <a:ext cx="4846320" cy="402336"/>
-          </a:xfrm>
-          <a:prstGeom prst="rect">
-            <a:avLst/>
-          </a:prstGeom>
-          <a:noFill/>
-          <a:ln/>
-        </p:spPr>
-        <p:txBody>
-          <a:bodyPr wrap="square" lIns="0" tIns="0" rIns="0" bIns="0" rtlCol="0" anchor="ctr"/>
-          <a:lstStyle/>
-          <a:p>
-            <a:pPr algn="l" indent="0" marL="0">
-              <a:buNone/>
-            </a:pPr>
-            <a:r>
-              <a:rPr lang="en-US" sz="1200" dirty="0">
-                <a:solidFill>
-                  <a:srgbClr val="E6EDF3"/>
-                </a:solidFill>
-                <a:latin typeface="Arial" pitchFamily="34" charset="0"/>
-                <a:ea typeface="Arial" pitchFamily="34" charset="-122"/>
-                <a:cs typeface="Arial" pitchFamily="34" charset="-120"/>
-              </a:rPr>
-              <a:t>every --flag named here exists</a:t>
-            </a:r>
-            <a:endParaRPr lang="en-US" sz="1200" dirty="0"/>
-          </a:p>
-        </p:txBody>
-      </p:sp>
-      <p:sp>
-        <p:nvSpPr>
-          <p:cNvPr id="9" name="Text 7"/>
-          <p:cNvSpPr/>
-          <p:nvPr/>
-        </p:nvSpPr>
-        <p:spPr>
-          <a:xfrm>
-            <a:off x="5687568" y="2107692"/>
-            <a:ext cx="5669280" cy="402336"/>
-          </a:xfrm>
-          <a:prstGeom prst="rect">
-            <a:avLst/>
-          </a:prstGeom>
-          <a:noFill/>
-          <a:ln/>
-        </p:spPr>
-        <p:txBody>
-          <a:bodyPr wrap="square" lIns="0" tIns="0" rIns="0" bIns="0" rtlCol="0" anchor="ctr"/>
-          <a:lstStyle/>
-          <a:p>
-            <a:pPr algn="l" indent="0" marL="0">
-              <a:buNone/>
-            </a:pPr>
-            <a:r>
-              <a:rPr lang="en-US" sz="1150" dirty="0">
-                <a:solidFill>
-                  <a:srgbClr val="56D6E8"/>
-                </a:solidFill>
-                <a:latin typeface="Courier New" pitchFamily="34" charset="0"/>
-                <a:ea typeface="Courier New" pitchFamily="34" charset="-122"/>
-                <a:cs typeface="Courier New" pitchFamily="34" charset="-120"/>
-              </a:rPr>
-              <a:t>bash test/deckcheck.sh</a:t>
-            </a:r>
-            <a:endParaRPr lang="en-US" sz="1150" dirty="0"/>
-          </a:p>
-        </p:txBody>
-      </p:sp>
-      <p:sp>
-        <p:nvSpPr>
-          <p:cNvPr id="10" name="Shape 8"/>
-          <p:cNvSpPr/>
-          <p:nvPr/>
-        </p:nvSpPr>
-        <p:spPr>
-          <a:xfrm>
-            <a:off x="566928" y="2606040"/>
-            <a:ext cx="11055096" cy="457200"/>
-          </a:xfrm>
-          <a:prstGeom prst="roundRect">
-            <a:avLst>
-              <a:gd name="adj" fmla="val 18000"/>
-            </a:avLst>
-          </a:prstGeom>
-          <a:solidFill>
-            <a:srgbClr val="161D28"/>
-          </a:solidFill>
-          <a:ln w="9525">
-            <a:solidFill>
-              <a:srgbClr val="232D3D"/>
-            </a:solidFill>
-            <a:prstDash val="solid"/>
-          </a:ln>
-        </p:spPr>
-      </p:sp>
-      <p:sp>
-        <p:nvSpPr>
-          <p:cNvPr id="11" name="Text 9"/>
-          <p:cNvSpPr/>
-          <p:nvPr/>
-        </p:nvSpPr>
-        <p:spPr>
-          <a:xfrm>
-            <a:off x="731520" y="2633472"/>
-            <a:ext cx="4846320" cy="402336"/>
-          </a:xfrm>
-          <a:prstGeom prst="rect">
-            <a:avLst/>
-          </a:prstGeom>
-          <a:noFill/>
-          <a:ln/>
-        </p:spPr>
-        <p:txBody>
-          <a:bodyPr wrap="square" lIns="0" tIns="0" rIns="0" bIns="0" rtlCol="0" anchor="ctr"/>
-          <a:lstStyle/>
-          <a:p>
-            <a:pPr algn="l" indent="0" marL="0">
-              <a:buNone/>
-            </a:pPr>
-            <a:r>
-              <a:rPr lang="en-US" sz="1200" dirty="0">
-                <a:solidFill>
-                  <a:srgbClr val="E6EDF3"/>
-                </a:solidFill>
-                <a:latin typeface="Arial" pitchFamily="34" charset="0"/>
-                <a:ea typeface="Arial" pitchFamily="34" charset="-122"/>
-                <a:cs typeface="Arial" pitchFamily="34" charset="-120"/>
-              </a:rPr>
-              <a:t>74.7% fewer element bytes</a:t>
-            </a:r>
-            <a:endParaRPr lang="en-US" sz="1200" dirty="0"/>
-          </a:p>
-        </p:txBody>
-      </p:sp>
-      <p:sp>
-        <p:nvSpPr>
-          <p:cNvPr id="12" name="Text 10"/>
-          <p:cNvSpPr/>
-          <p:nvPr/>
-        </p:nvSpPr>
-        <p:spPr>
-          <a:xfrm>
-            <a:off x="5687568" y="2633472"/>
-            <a:ext cx="5669280" cy="402336"/>
-          </a:xfrm>
-          <a:prstGeom prst="rect">
-            <a:avLst/>
-          </a:prstGeom>
-          <a:noFill/>
-          <a:ln/>
-        </p:spPr>
-        <p:txBody>
-          <a:bodyPr wrap="square" lIns="0" tIns="0" rIns="0" bIns="0" rtlCol="0" anchor="ctr"/>
-          <a:lstStyle/>
-          <a:p>
-            <a:pPr algn="l" indent="0" marL="0">
-              <a:buNone/>
-            </a:pPr>
-            <a:r>
-              <a:rPr lang="en-US" sz="1150" dirty="0">
-                <a:solidFill>
-                  <a:srgbClr val="56D6E8"/>
-                </a:solidFill>
-                <a:latin typeface="Courier New" pitchFamily="34" charset="0"/>
-                <a:ea typeface="Courier New" pitchFamily="34" charset="-122"/>
-                <a:cs typeface="Courier New" pitchFamily="34" charset="-120"/>
-              </a:rPr>
-              <a:t>bash test/showcasecapturecheck.sh</a:t>
-            </a:r>
-            <a:endParaRPr lang="en-US" sz="1150" dirty="0"/>
-          </a:p>
-        </p:txBody>
-      </p:sp>
-      <p:sp>
-        <p:nvSpPr>
-          <p:cNvPr id="13" name="Shape 11"/>
-          <p:cNvSpPr/>
-          <p:nvPr/>
-        </p:nvSpPr>
-        <p:spPr>
-          <a:xfrm>
-            <a:off x="566928" y="3131820"/>
-            <a:ext cx="11055096" cy="457200"/>
-          </a:xfrm>
-          <a:prstGeom prst="roundRect">
-            <a:avLst>
-              <a:gd name="adj" fmla="val 18000"/>
-            </a:avLst>
-          </a:prstGeom>
-          <a:solidFill>
-            <a:srgbClr val="161D28"/>
-          </a:solidFill>
-          <a:ln w="9525">
-            <a:solidFill>
-              <a:srgbClr val="232D3D"/>
-            </a:solidFill>
-            <a:prstDash val="solid"/>
-          </a:ln>
-        </p:spPr>
-      </p:sp>
-      <p:sp>
-        <p:nvSpPr>
-          <p:cNvPr id="14" name="Text 12"/>
-          <p:cNvSpPr/>
-          <p:nvPr/>
-        </p:nvSpPr>
-        <p:spPr>
-          <a:xfrm>
-            <a:off x="731520" y="3159252"/>
-            <a:ext cx="4846320" cy="402336"/>
-          </a:xfrm>
-          <a:prstGeom prst="rect">
-            <a:avLst/>
-          </a:prstGeom>
-          <a:noFill/>
-          <a:ln/>
-        </p:spPr>
-        <p:txBody>
-          <a:bodyPr wrap="square" lIns="0" tIns="0" rIns="0" bIns="0" rtlCol="0" anchor="ctr"/>
-          <a:lstStyle/>
-          <a:p>
-            <a:pPr algn="l" indent="0" marL="0">
-              <a:buNone/>
-            </a:pPr>
-            <a:r>
-              <a:rPr lang="en-US" sz="1200" dirty="0">
-                <a:solidFill>
-                  <a:srgbClr val="E6EDF3"/>
-                </a:solidFill>
-                <a:latin typeface="Arial" pitchFamily="34" charset="0"/>
-                <a:ea typeface="Arial" pitchFamily="34" charset="-122"/>
-                <a:cs typeface="Arial" pitchFamily="34" charset="-120"/>
-              </a:rPr>
-              <a:t>602 gate scripts</a:t>
-            </a:r>
-            <a:endParaRPr lang="en-US" sz="1200" dirty="0"/>
-          </a:p>
-        </p:txBody>
-      </p:sp>
-      <p:sp>
-        <p:nvSpPr>
-          <p:cNvPr id="15" name="Text 13"/>
-          <p:cNvSpPr/>
-          <p:nvPr/>
-        </p:nvSpPr>
-        <p:spPr>
-          <a:xfrm>
-            <a:off x="5687568" y="3159252"/>
-            <a:ext cx="5669280" cy="402336"/>
-          </a:xfrm>
-          <a:prstGeom prst="rect">
-            <a:avLst/>
-          </a:prstGeom>
-          <a:noFill/>
-          <a:ln/>
-        </p:spPr>
-        <p:txBody>
-          <a:bodyPr wrap="square" lIns="0" tIns="0" rIns="0" bIns="0" rtlCol="0" anchor="ctr"/>
-          <a:lstStyle/>
-          <a:p>
-            <a:pPr algn="l" indent="0" marL="0">
-              <a:buNone/>
-            </a:pPr>
-            <a:r>
-              <a:rPr lang="en-US" sz="1150" dirty="0">
-                <a:solidFill>
-                  <a:srgbClr val="56D6E8"/>
-                </a:solidFill>
-                <a:latin typeface="Courier New" pitchFamily="34" charset="0"/>
-                <a:ea typeface="Courier New" pitchFamily="34" charset="-122"/>
-                <a:cs typeface="Courier New" pitchFamily="34" charset="-120"/>
-              </a:rPr>
-              <a:t>bash test/manifestcheck.sh</a:t>
-            </a:r>
-            <a:endParaRPr lang="en-US" sz="1150" dirty="0"/>
-          </a:p>
-        </p:txBody>
-      </p:sp>
-      <p:sp>
-        <p:nvSpPr>
-          <p:cNvPr id="16" name="Shape 14"/>
-          <p:cNvSpPr/>
-          <p:nvPr/>
-        </p:nvSpPr>
-        <p:spPr>
-          <a:xfrm>
-            <a:off x="566928" y="3657600"/>
-            <a:ext cx="11055096" cy="457200"/>
-          </a:xfrm>
-          <a:prstGeom prst="roundRect">
-            <a:avLst>
-              <a:gd name="adj" fmla="val 18000"/>
-            </a:avLst>
-          </a:prstGeom>
-          <a:solidFill>
-            <a:srgbClr val="161D28"/>
-          </a:solidFill>
-          <a:ln w="9525">
-            <a:solidFill>
-              <a:srgbClr val="232D3D"/>
-            </a:solidFill>
-            <a:prstDash val="solid"/>
-          </a:ln>
-        </p:spPr>
-      </p:sp>
-      <p:sp>
-        <p:nvSpPr>
-          <p:cNvPr id="17" name="Text 15"/>
-          <p:cNvSpPr/>
-          <p:nvPr/>
-        </p:nvSpPr>
-        <p:spPr>
-          <a:xfrm>
-            <a:off x="731520" y="3685032"/>
-            <a:ext cx="4846320" cy="402336"/>
-          </a:xfrm>
-          <a:prstGeom prst="rect">
-            <a:avLst/>
-          </a:prstGeom>
-          <a:noFill/>
-          <a:ln/>
-        </p:spPr>
-        <p:txBody>
-          <a:bodyPr wrap="square" lIns="0" tIns="0" rIns="0" bIns="0" rtlCol="0" anchor="ctr"/>
-          <a:lstStyle/>
-          <a:p>
-            <a:pPr algn="l" indent="0" marL="0">
-              <a:buNone/>
-            </a:pPr>
-            <a:r>
-              <a:rPr lang="en-US" sz="1200" dirty="0">
-                <a:solidFill>
-                  <a:srgbClr val="E6EDF3"/>
-                </a:solidFill>
-                <a:latin typeface="Arial" pitchFamily="34" charset="0"/>
-                <a:ea typeface="Arial" pitchFamily="34" charset="-122"/>
-                <a:cs typeface="Arial" pitchFamily="34" charset="-120"/>
-              </a:rPr>
-              <a:t>49 repos · 70 papers · 237 surveyed</a:t>
-            </a:r>
-            <a:endParaRPr lang="en-US" sz="1200" dirty="0"/>
-          </a:p>
-        </p:txBody>
-      </p:sp>
-      <p:sp>
-        <p:nvSpPr>
-          <p:cNvPr id="18" name="Text 16"/>
-          <p:cNvSpPr/>
-          <p:nvPr/>
-        </p:nvSpPr>
-        <p:spPr>
-          <a:xfrm>
-            <a:off x="5687568" y="3685032"/>
-            <a:ext cx="5669280" cy="402336"/>
-          </a:xfrm>
-          <a:prstGeom prst="rect">
-            <a:avLst/>
-          </a:prstGeom>
-          <a:noFill/>
-          <a:ln/>
-        </p:spPr>
-        <p:txBody>
-          <a:bodyPr wrap="square" lIns="0" tIns="0" rIns="0" bIns="0" rtlCol="0" anchor="ctr"/>
-          <a:lstStyle/>
-          <a:p>
-            <a:pPr algn="l" indent="0" marL="0">
-              <a:buNone/>
-            </a:pPr>
-            <a:r>
-              <a:rPr lang="en-US" sz="1150" dirty="0">
-                <a:solidFill>
-                  <a:srgbClr val="56D6E8"/>
-                </a:solidFill>
-                <a:latin typeface="Courier New" pitchFamily="34" charset="0"/>
-                <a:ea typeface="Courier New" pitchFamily="34" charset="-122"/>
-                <a:cs typeface="Courier New" pitchFamily="34" charset="-120"/>
-              </a:rPr>
-              <a:t>bash test/readmedriftcheck.sh</a:t>
-            </a:r>
-            <a:endParaRPr lang="en-US" sz="1150" dirty="0"/>
-          </a:p>
-        </p:txBody>
-      </p:sp>
-      <p:sp>
-        <p:nvSpPr>
-          <p:cNvPr id="19" name="Shape 17"/>
-          <p:cNvSpPr/>
-          <p:nvPr/>
-        </p:nvSpPr>
-        <p:spPr>
-          <a:xfrm>
-            <a:off x="566928" y="4183380"/>
-            <a:ext cx="11055096" cy="457200"/>
-          </a:xfrm>
-          <a:prstGeom prst="roundRect">
-            <a:avLst>
-              <a:gd name="adj" fmla="val 18000"/>
-            </a:avLst>
-          </a:prstGeom>
-          <a:solidFill>
-            <a:srgbClr val="161D28"/>
-          </a:solidFill>
-          <a:ln w="9525">
-            <a:solidFill>
-              <a:srgbClr val="232D3D"/>
-            </a:solidFill>
-            <a:prstDash val="solid"/>
-          </a:ln>
-        </p:spPr>
-      </p:sp>
-      <p:sp>
-        <p:nvSpPr>
-          <p:cNvPr id="20" name="Text 18"/>
-          <p:cNvSpPr/>
-          <p:nvPr/>
-        </p:nvSpPr>
-        <p:spPr>
-          <a:xfrm>
-            <a:off x="731520" y="4210812"/>
-            <a:ext cx="4846320" cy="402336"/>
-          </a:xfrm>
-          <a:prstGeom prst="rect">
-            <a:avLst/>
-          </a:prstGeom>
-          <a:noFill/>
-          <a:ln/>
-        </p:spPr>
-        <p:txBody>
-          <a:bodyPr wrap="square" lIns="0" tIns="0" rIns="0" bIns="0" rtlCol="0" anchor="ctr"/>
-          <a:lstStyle/>
-          <a:p>
-            <a:pPr algn="l" indent="0" marL="0">
-              <a:buNone/>
-            </a:pPr>
-            <a:r>
-              <a:rPr lang="en-US" sz="1200" dirty="0">
-                <a:solidFill>
-                  <a:srgbClr val="E6EDF3"/>
-                </a:solidFill>
-                <a:latin typeface="Arial" pitchFamily="34" charset="0"/>
-                <a:ea typeface="Arial" pitchFamily="34" charset="-122"/>
-                <a:cs typeface="Arial" pitchFamily="34" charset="-120"/>
-              </a:rPr>
-              <a:t>the ten moments, any row</a:t>
-            </a:r>
-            <a:endParaRPr lang="en-US" sz="1200" dirty="0"/>
-          </a:p>
-        </p:txBody>
-      </p:sp>
-      <p:sp>
-        <p:nvSpPr>
-          <p:cNvPr id="21" name="Text 19"/>
-          <p:cNvSpPr/>
-          <p:nvPr/>
-        </p:nvSpPr>
-        <p:spPr>
-          <a:xfrm>
-            <a:off x="5687568" y="4210812"/>
-            <a:ext cx="5669280" cy="402336"/>
-          </a:xfrm>
-          <a:prstGeom prst="rect">
-            <a:avLst/>
-          </a:prstGeom>
-          <a:noFill/>
-          <a:ln/>
-        </p:spPr>
-        <p:txBody>
-          <a:bodyPr wrap="square" lIns="0" tIns="0" rIns="0" bIns="0" rtlCol="0" anchor="ctr"/>
-          <a:lstStyle/>
-          <a:p>
-            <a:pPr algn="l" indent="0" marL="0">
-              <a:buNone/>
-            </a:pPr>
-            <a:r>
-              <a:rPr lang="en-US" sz="1150" dirty="0">
-                <a:solidFill>
-                  <a:srgbClr val="56D6E8"/>
-                </a:solidFill>
-                <a:latin typeface="Courier New" pitchFamily="34" charset="0"/>
-                <a:ea typeface="Courier New" pitchFamily="34" charset="-122"/>
-                <a:cs typeface="Courier New" pitchFamily="34" charset="-120"/>
-              </a:rPr>
-              <a:t>ripwire . --callers=SYM | wc -c</a:t>
-            </a:r>
-            <a:endParaRPr lang="en-US" sz="1150" dirty="0"/>
-          </a:p>
-        </p:txBody>
-      </p:sp>
-      <p:sp>
-        <p:nvSpPr>
-          <p:cNvPr id="22" name="Shape 20"/>
-          <p:cNvSpPr/>
-          <p:nvPr/>
-        </p:nvSpPr>
-        <p:spPr>
-          <a:xfrm>
-            <a:off x="566928" y="4709160"/>
-            <a:ext cx="11055096" cy="457200"/>
-          </a:xfrm>
-          <a:prstGeom prst="roundRect">
-            <a:avLst>
-              <a:gd name="adj" fmla="val 18000"/>
-            </a:avLst>
-          </a:prstGeom>
-          <a:solidFill>
-            <a:srgbClr val="161D28"/>
-          </a:solidFill>
-          <a:ln w="9525">
-            <a:solidFill>
-              <a:srgbClr val="232D3D"/>
-            </a:solidFill>
-            <a:prstDash val="solid"/>
-          </a:ln>
-        </p:spPr>
-      </p:sp>
-      <p:sp>
-        <p:nvSpPr>
-          <p:cNvPr id="23" name="Text 21"/>
-          <p:cNvSpPr/>
-          <p:nvPr/>
-        </p:nvSpPr>
-        <p:spPr>
-          <a:xfrm>
-            <a:off x="731520" y="4736592"/>
-            <a:ext cx="4846320" cy="402336"/>
-          </a:xfrm>
-          <a:prstGeom prst="rect">
-            <a:avLst/>
-          </a:prstGeom>
-          <a:noFill/>
-          <a:ln/>
-        </p:spPr>
-        <p:txBody>
-          <a:bodyPr wrap="square" lIns="0" tIns="0" rIns="0" bIns="0" rtlCol="0" anchor="ctr"/>
-          <a:lstStyle/>
-          <a:p>
-            <a:pPr algn="l" indent="0" marL="0">
-              <a:buNone/>
-            </a:pPr>
-            <a:r>
-              <a:rPr lang="en-US" sz="1200" dirty="0">
-                <a:solidFill>
-                  <a:srgbClr val="E6EDF3"/>
-                </a:solidFill>
-                <a:latin typeface="Arial" pitchFamily="34" charset="0"/>
-                <a:ea typeface="Arial" pitchFamily="34" charset="-122"/>
-                <a:cs typeface="Arial" pitchFamily="34" charset="-120"/>
-              </a:rPr>
-              <a:t>the head-to-head table</a:t>
-            </a:r>
-            <a:endParaRPr lang="en-US" sz="1200" dirty="0"/>
-          </a:p>
-        </p:txBody>
-      </p:sp>
-      <p:sp>
-        <p:nvSpPr>
-          <p:cNvPr id="24" name="Text 22"/>
-          <p:cNvSpPr/>
-          <p:nvPr/>
-        </p:nvSpPr>
-        <p:spPr>
-          <a:xfrm>
-            <a:off x="5687568" y="4736592"/>
-            <a:ext cx="5669280" cy="402336"/>
-          </a:xfrm>
-          <a:prstGeom prst="rect">
-            <a:avLst/>
-          </a:prstGeom>
-          <a:noFill/>
-          <a:ln/>
-        </p:spPr>
-        <p:txBody>
-          <a:bodyPr wrap="square" lIns="0" tIns="0" rIns="0" bIns="0" rtlCol="0" anchor="ctr"/>
-          <a:lstStyle/>
-          <a:p>
-            <a:pPr algn="l" indent="0" marL="0">
-              <a:buNone/>
-            </a:pPr>
-            <a:r>
-              <a:rPr lang="en-US" sz="1150" dirty="0">
-                <a:solidFill>
-                  <a:srgbClr val="56D6E8"/>
-                </a:solidFill>
-                <a:latin typeface="Courier New" pitchFamily="34" charset="0"/>
-                <a:ea typeface="Courier New" pitchFamily="34" charset="-122"/>
-                <a:cs typeface="Courier New" pitchFamily="34" charset="-120"/>
-              </a:rPr>
-              <a:t>bench/headtohead/r4-2026-08-06/</a:t>
-            </a:r>
-            <a:endParaRPr lang="en-US" sz="1150" dirty="0"/>
-          </a:p>
-        </p:txBody>
-      </p:sp>
-      <p:sp>
-        <p:nvSpPr>
-          <p:cNvPr id="25" name="Shape 23"/>
-          <p:cNvSpPr/>
-          <p:nvPr/>
-        </p:nvSpPr>
-        <p:spPr>
-          <a:xfrm>
-            <a:off x="566928" y="5234940"/>
-            <a:ext cx="11055096" cy="457200"/>
-          </a:xfrm>
-          <a:prstGeom prst="roundRect">
-            <a:avLst>
-              <a:gd name="adj" fmla="val 18000"/>
-            </a:avLst>
-          </a:prstGeom>
-          <a:solidFill>
-            <a:srgbClr val="161D28"/>
-          </a:solidFill>
-          <a:ln w="9525">
-            <a:solidFill>
-              <a:srgbClr val="232D3D"/>
-            </a:solidFill>
-            <a:prstDash val="solid"/>
-          </a:ln>
-        </p:spPr>
-      </p:sp>
-      <p:sp>
-        <p:nvSpPr>
-          <p:cNvPr id="26" name="Text 24"/>
-          <p:cNvSpPr/>
-          <p:nvPr/>
-        </p:nvSpPr>
-        <p:spPr>
-          <a:xfrm>
-            <a:off x="731520" y="5262372"/>
-            <a:ext cx="4846320" cy="402336"/>
-          </a:xfrm>
-          <a:prstGeom prst="rect">
-            <a:avLst/>
-          </a:prstGeom>
-          <a:noFill/>
-          <a:ln/>
-        </p:spPr>
-        <p:txBody>
-          <a:bodyPr wrap="square" lIns="0" tIns="0" rIns="0" bIns="0" rtlCol="0" anchor="ctr"/>
-          <a:lstStyle/>
-          <a:p>
-            <a:pPr algn="l" indent="0" marL="0">
-              <a:buNone/>
-            </a:pPr>
-            <a:r>
-              <a:rPr lang="en-US" sz="1200" dirty="0">
-                <a:solidFill>
-                  <a:srgbClr val="E6EDF3"/>
-                </a:solidFill>
-                <a:latin typeface="Arial" pitchFamily="34" charset="0"/>
-                <a:ea typeface="Arial" pitchFamily="34" charset="-122"/>
-                <a:cs typeface="Arial" pitchFamily="34" charset="-120"/>
-              </a:rPr>
-              <a:t>the oracle round</a:t>
-            </a:r>
-            <a:endParaRPr lang="en-US" sz="1200" dirty="0"/>
-          </a:p>
-        </p:txBody>
-      </p:sp>
-      <p:sp>
-        <p:nvSpPr>
-          <p:cNvPr id="27" name="Text 25"/>
-          <p:cNvSpPr/>
-          <p:nvPr/>
-        </p:nvSpPr>
-        <p:spPr>
-          <a:xfrm>
-            <a:off x="5687568" y="5262372"/>
-            <a:ext cx="5669280" cy="402336"/>
-          </a:xfrm>
-          <a:prstGeom prst="rect">
-            <a:avLst/>
-          </a:prstGeom>
-          <a:noFill/>
-          <a:ln/>
-        </p:spPr>
-        <p:txBody>
-          <a:bodyPr wrap="square" lIns="0" tIns="0" rIns="0" bIns="0" rtlCol="0" anchor="ctr"/>
-          <a:lstStyle/>
-          <a:p>
-            <a:pPr algn="l" indent="0" marL="0">
-              <a:buNone/>
-            </a:pPr>
-            <a:r>
-              <a:rPr lang="en-US" sz="1150" dirty="0">
-                <a:solidFill>
-                  <a:srgbClr val="56D6E8"/>
-                </a:solidFill>
-                <a:latin typeface="Courier New" pitchFamily="34" charset="0"/>
-                <a:ea typeface="Courier New" pitchFamily="34" charset="-122"/>
-                <a:cs typeface="Courier New" pitchFamily="34" charset="-120"/>
-              </a:rPr>
-              <a:t>bench/headtohead/r9-2026-08-09/RESULTS.md</a:t>
-            </a:r>
-            <a:endParaRPr lang="en-US" sz="1150" dirty="0"/>
-          </a:p>
-        </p:txBody>
-      </p:sp>
-      <p:sp>
-        <p:nvSpPr>
-          <p:cNvPr id="28" name="Shape 26"/>
-          <p:cNvSpPr/>
-          <p:nvPr/>
-        </p:nvSpPr>
-        <p:spPr>
-          <a:xfrm>
-            <a:off x="566928" y="5779008"/>
-            <a:ext cx="11055096" cy="566928"/>
-          </a:xfrm>
-          <a:prstGeom prst="roundRect">
-            <a:avLst>
-              <a:gd name="adj" fmla="val 14516"/>
-            </a:avLst>
-          </a:prstGeom>
-          <a:solidFill>
-            <a:srgbClr val="1B2432"/>
-          </a:solidFill>
-          <a:ln w="9525">
-            <a:solidFill>
-              <a:srgbClr val="232D3D"/>
-            </a:solidFill>
-            <a:prstDash val="solid"/>
-          </a:ln>
-        </p:spPr>
-      </p:sp>
-      <p:sp>
-        <p:nvSpPr>
-          <p:cNvPr id="29" name="Text 27"/>
-          <p:cNvSpPr/>
-          <p:nvPr/>
-        </p:nvSpPr>
-        <p:spPr>
-          <a:xfrm>
-            <a:off x="795528" y="5861304"/>
-            <a:ext cx="10607040" cy="420624"/>
-          </a:xfrm>
-          <a:prstGeom prst="rect">
-            <a:avLst/>
-          </a:prstGeom>
-          <a:noFill/>
-          <a:ln/>
-        </p:spPr>
-        <p:txBody>
-          <a:bodyPr wrap="square" lIns="0" tIns="0" rIns="0" bIns="0" rtlCol="0" anchor="ctr"/>
-          <a:lstStyle/>
-          <a:p>
-            <a:pPr indent="0" marL="0">
-              <a:buNone/>
-            </a:pPr>
-            <a:r>
-              <a:rPr lang="en-US" sz="1100" b="1" dirty="0">
-                <a:solidFill>
-                  <a:srgbClr val="E6EDF3"/>
-                </a:solidFill>
-                <a:latin typeface="Arial" pitchFamily="34" charset="0"/>
-                <a:ea typeface="Arial" pitchFamily="34" charset="-122"/>
-                <a:cs typeface="Arial" pitchFamily="34" charset="-120"/>
-              </a:rPr>
-              <a:t>The deck is generated, and the generator is gated. </a:t>
-            </a:r>
-            <a:pPr indent="0" marL="0">
-              <a:buNone/>
-            </a:pPr>
-            <a:r>
-              <a:rPr lang="en-US" sz="1100" dirty="0">
-                <a:solidFill>
-                  <a:srgbClr val="8B95A5"/>
-                </a:solidFill>
-                <a:latin typeface="Arial" pitchFamily="34" charset="0"/>
-                <a:ea typeface="Arial" pitchFamily="34" charset="-122"/>
-                <a:cs typeface="Arial" pitchFamily="34" charset="-120"/>
-              </a:rPr>
-              <a:t>present/deck5_ripwire_build.js is scanned for fabricated flags and its slide count is derived from its own addSlide() calls — a deck that drifts from the binary fails the suite.</a:t>
-            </a:r>
-            <a:endParaRPr lang="en-US" sz="1100" dirty="0"/>
-          </a:p>
-        </p:txBody>
-      </p:sp>
-      <p:sp>
-        <p:nvSpPr>
-          <p:cNvPr id="30" name="Text 28"/>
-          <p:cNvSpPr/>
-          <p:nvPr/>
-        </p:nvSpPr>
-        <p:spPr>
-          <a:xfrm>
-            <a:off x="566928" y="6419088"/>
-            <a:ext cx="11055096" cy="274320"/>
-          </a:xfrm>
-          <a:prstGeom prst="rect">
-            <a:avLst/>
-          </a:prstGeom>
-          <a:noFill/>
-          <a:ln/>
-        </p:spPr>
-        <p:txBody>
-          <a:bodyPr wrap="square" lIns="0" tIns="0" rIns="0" bIns="0" rtlCol="0" anchor="ctr"/>
-          <a:lstStyle/>
-          <a:p>
-            <a:pPr indent="0" marL="0">
-              <a:buNone/>
-            </a:pPr>
-            <a:r>
-              <a:rPr lang="en-US" sz="1050" dirty="0">
-                <a:solidFill>
-                  <a:srgbClr val="8B95A5"/>
-                </a:solidFill>
-                <a:latin typeface="Courier New" pitchFamily="34" charset="0"/>
-                <a:ea typeface="Courier New" pitchFamily="34" charset="-122"/>
-                <a:cs typeface="Courier New" pitchFamily="34" charset="-120"/>
-              </a:rPr>
-              <a:t>docs/EVALS.md is the source of truth; §7 is the counterexamples, §8 the claims this project refuses to make</a:t>
-            </a:r>
-            <a:endParaRPr lang="en-US" sz="1050" dirty="0"/>
-          </a:p>
-        </p:txBody>
-      </p:sp>
-    </p:spTree>
-  </p:cSld>
-  <p:clrMapOvr>
-    <a:masterClrMapping/>
-  </p:clrMapOvr>
-</p:sld>
-</file>
-
-<file path=ppt/slides/slide34.xml><?xml version="1.0" encoding="utf-8"?>
-<p:sld xmlns:a="http://schemas.openxmlformats.org/drawingml/2006/main" xmlns:r="http://schemas.openxmlformats.org/officeDocument/2006/relationships" xmlns:p="http://schemas.openxmlformats.org/presentationml/2006/main">
-  <p:cSld name="Slide 34">
     <p:bg>
       <p:bgPr>
         <a:solidFill>
